--- a/docs/UI一致性技术提升.pptx
+++ b/docs/UI一致性技术提升.pptx
@@ -7,6 +7,7 @@
   <p:sldIdLst>
     <p:sldId id="256" r:id="rId7"/>
     <p:sldId id="257" r:id="rId8"/>
+    <p:sldId id="258" r:id="rId9"/>
   </p:sldIdLst>
   <p:sldSz cx="12191695" cy="6858000" type="screen4x3"/>
   <p:notesSz cx="6858000" cy="9144000"/>
@@ -3105,8 +3106,8 @@
         </p:nvSpPr>
         <p:spPr>
           <a:xfrm>
-            <a:off x="548640" y="292608"/>
-            <a:ext cx="11091672" cy="640080"/>
+            <a:off x="548640" y="146304"/>
+            <a:ext cx="11091672" cy="457200"/>
           </a:xfrm>
           <a:prstGeom prst="rect">
             <a:avLst/>
@@ -3128,7 +3129,7 @@
               </a:spcAft>
             </a:pPr>
             <a:r>
-              <a:rPr sz="3000" b="1">
+              <a:rPr sz="2400" b="1">
                 <a:solidFill>
                   <a:srgbClr val="0067D1"/>
                 </a:solidFill>
@@ -3136,30 +3137,34 @@
                 <a:ea typeface="Microsoft YaHei"/>
                 <a:cs typeface="Microsoft YaHei"/>
               </a:rPr>
-              <a:t>UI 一致性检查技术提升</a:t>
-            </a:r>
-          </a:p>
-        </p:txBody>
-      </p:sp>
-      <p:sp>
-        <p:nvSpPr>
-          <p:cNvPr id="3" name="Rectangle 2"/>
+              <a:t>技术提升一：节点匹配算法</a:t>
+            </a:r>
+          </a:p>
+        </p:txBody>
+      </p:sp>
+      <p:sp>
+        <p:nvSpPr>
+          <p:cNvPr id="3" name="Rounded Rectangle 2"/>
           <p:cNvSpPr/>
           <p:nvPr/>
         </p:nvSpPr>
         <p:spPr>
           <a:xfrm>
-            <a:off x="548640" y="1197864"/>
-            <a:ext cx="82296" cy="292608"/>
-          </a:xfrm>
-          <a:prstGeom prst="rect">
-            <a:avLst/>
-          </a:prstGeom>
-          <a:solidFill>
-            <a:srgbClr val="0067D1"/>
-          </a:solidFill>
-          <a:ln>
-            <a:noFill/>
+            <a:off x="548640" y="658368"/>
+            <a:ext cx="5074920" cy="2377440"/>
+          </a:xfrm>
+          <a:prstGeom prst="roundRect">
+            <a:avLst>
+              <a:gd name="adj" fmla="val 6000"/>
+            </a:avLst>
+          </a:prstGeom>
+          <a:solidFill>
+            <a:srgbClr val="FFF1F0"/>
+          </a:solidFill>
+          <a:ln w="12700">
+            <a:solidFill>
+              <a:srgbClr val="FF4D4F"/>
+            </a:solidFill>
           </a:ln>
           <a:effectLst/>
         </p:spPr>
@@ -3193,8 +3198,8 @@
         </p:nvSpPr>
         <p:spPr>
           <a:xfrm>
-            <a:off x="749808" y="1143000"/>
-            <a:ext cx="8229600" cy="411480"/>
+            <a:off x="804672" y="758952"/>
+            <a:ext cx="4572000" cy="329184"/>
           </a:xfrm>
           <a:prstGeom prst="rect">
             <a:avLst/>
@@ -3216,7 +3221,51 @@
               </a:spcAft>
             </a:pPr>
             <a:r>
-              <a:rPr sz="1700" b="1">
+              <a:rPr sz="1400" b="1">
+                <a:solidFill>
+                  <a:srgbClr val="FF4D4F"/>
+                </a:solidFill>
+                <a:latin typeface="Microsoft YaHei"/>
+                <a:ea typeface="Microsoft YaHei"/>
+                <a:cs typeface="Microsoft YaHei"/>
+              </a:rPr>
+              <a:t>Before：分块匹配算法</a:t>
+            </a:r>
+          </a:p>
+        </p:txBody>
+      </p:sp>
+      <p:sp>
+        <p:nvSpPr>
+          <p:cNvPr id="5" name="TextBox 4"/>
+          <p:cNvSpPr txBox="1"/>
+          <p:nvPr/>
+        </p:nvSpPr>
+        <p:spPr>
+          <a:xfrm>
+            <a:off x="804672" y="1097280"/>
+            <a:ext cx="4572000" cy="329184"/>
+          </a:xfrm>
+          <a:prstGeom prst="rect">
+            <a:avLst/>
+          </a:prstGeom>
+          <a:noFill/>
+        </p:spPr>
+        <p:txBody>
+          <a:bodyPr wrap="square" anchor="t" lIns="25400" rIns="25400" tIns="12700" bIns="12700">
+            <a:spAutoFit/>
+          </a:bodyPr>
+          <a:lstStyle/>
+          <a:p>
+            <a:pPr algn="l">
+              <a:lnSpc>
+                <a:spcPct val="110000"/>
+              </a:lnSpc>
+              <a:spcAft>
+                <a:spcPts val="400"/>
+              </a:spcAft>
+            </a:pPr>
+            <a:r>
+              <a:rPr sz="1100" b="0">
                 <a:solidFill>
                   <a:srgbClr val="191919"/>
                 </a:solidFill>
@@ -3224,21 +3273,21 @@
                 <a:ea typeface="Microsoft YaHei"/>
                 <a:cs typeface="Microsoft YaHei"/>
               </a:rPr>
-              <a:t>提升一：节点匹配算法</a:t>
-            </a:r>
-          </a:p>
-        </p:txBody>
-      </p:sp>
-      <p:sp>
-        <p:nvSpPr>
-          <p:cNvPr id="5" name="Rounded Rectangle 4"/>
+              <a:t>按分块逐块对应，块一错则全错</a:t>
+            </a:r>
+          </a:p>
+        </p:txBody>
+      </p:sp>
+      <p:sp>
+        <p:nvSpPr>
+          <p:cNvPr id="6" name="Rounded Rectangle 5"/>
           <p:cNvSpPr/>
           <p:nvPr/>
         </p:nvSpPr>
         <p:spPr>
           <a:xfrm>
-            <a:off x="548640" y="1645920"/>
-            <a:ext cx="5074920" cy="1965960"/>
+            <a:off x="777240" y="1499616"/>
+            <a:ext cx="4617720" cy="1097280"/>
           </a:xfrm>
           <a:prstGeom prst="roundRect">
             <a:avLst>
@@ -3246,12 +3295,1695 @@
             </a:avLst>
           </a:prstGeom>
           <a:solidFill>
-            <a:srgbClr val="FFF1F0"/>
+            <a:srgbClr val="FFFFFF"/>
           </a:solidFill>
           <a:ln w="12700">
+            <a:solidFill>
+              <a:srgbClr val="D1D5DC"/>
+            </a:solidFill>
+          </a:ln>
+          <a:effectLst/>
+        </p:spPr>
+        <p:style>
+          <a:lnRef idx="1">
+            <a:schemeClr val="accent1"/>
+          </a:lnRef>
+          <a:fillRef idx="3">
+            <a:schemeClr val="accent1"/>
+          </a:fillRef>
+          <a:effectRef idx="2">
+            <a:schemeClr val="accent1"/>
+          </a:effectRef>
+          <a:fontRef idx="minor">
+            <a:schemeClr val="lt1"/>
+          </a:fontRef>
+        </p:style>
+        <p:txBody>
+          <a:bodyPr rtlCol="0" anchor="ctr"/>
+          <a:lstStyle/>
+          <a:p>
+            <a:pPr algn="ctr"/>
+          </a:p>
+        </p:txBody>
+      </p:sp>
+      <p:sp>
+        <p:nvSpPr>
+          <p:cNvPr id="7" name="Rounded Rectangle 6"/>
+          <p:cNvSpPr/>
+          <p:nvPr/>
+        </p:nvSpPr>
+        <p:spPr>
+          <a:xfrm>
+            <a:off x="859536" y="1540764"/>
+            <a:ext cx="923544" cy="996696"/>
+          </a:xfrm>
+          <a:prstGeom prst="roundRect">
+            <a:avLst>
+              <a:gd name="adj" fmla="val 5000"/>
+            </a:avLst>
+          </a:prstGeom>
+          <a:solidFill>
+            <a:srgbClr val="FFFFFF"/>
+          </a:solidFill>
+          <a:ln w="12700">
+            <a:solidFill>
+              <a:srgbClr val="D1D5DC"/>
+            </a:solidFill>
+          </a:ln>
+          <a:effectLst/>
+        </p:spPr>
+        <p:style>
+          <a:lnRef idx="1">
+            <a:schemeClr val="accent1"/>
+          </a:lnRef>
+          <a:fillRef idx="3">
+            <a:schemeClr val="accent1"/>
+          </a:fillRef>
+          <a:effectRef idx="2">
+            <a:schemeClr val="accent1"/>
+          </a:effectRef>
+          <a:fontRef idx="minor">
+            <a:schemeClr val="lt1"/>
+          </a:fontRef>
+        </p:style>
+        <p:txBody>
+          <a:bodyPr rtlCol="0" anchor="ctr"/>
+          <a:lstStyle/>
+          <a:p>
+            <a:pPr algn="ctr"/>
+          </a:p>
+        </p:txBody>
+      </p:sp>
+      <p:sp>
+        <p:nvSpPr>
+          <p:cNvPr id="8" name="Rectangle 7"/>
+          <p:cNvSpPr/>
+          <p:nvPr/>
+        </p:nvSpPr>
+        <p:spPr>
+          <a:xfrm>
+            <a:off x="941832" y="1604772"/>
+            <a:ext cx="502920" cy="45720"/>
+          </a:xfrm>
+          <a:prstGeom prst="rect">
+            <a:avLst/>
+          </a:prstGeom>
+          <a:solidFill>
+            <a:srgbClr val="E8E8E8"/>
+          </a:solidFill>
+          <a:ln>
+            <a:noFill/>
+          </a:ln>
+          <a:effectLst/>
+        </p:spPr>
+        <p:style>
+          <a:lnRef idx="1">
+            <a:schemeClr val="accent1"/>
+          </a:lnRef>
+          <a:fillRef idx="3">
+            <a:schemeClr val="accent1"/>
+          </a:fillRef>
+          <a:effectRef idx="2">
+            <a:schemeClr val="accent1"/>
+          </a:effectRef>
+          <a:fontRef idx="minor">
+            <a:schemeClr val="lt1"/>
+          </a:fontRef>
+        </p:style>
+        <p:txBody>
+          <a:bodyPr rtlCol="0" anchor="ctr"/>
+          <a:lstStyle/>
+          <a:p>
+            <a:pPr algn="ctr"/>
+          </a:p>
+        </p:txBody>
+      </p:sp>
+      <p:sp>
+        <p:nvSpPr>
+          <p:cNvPr id="9" name="Rounded Rectangle 8"/>
+          <p:cNvSpPr/>
+          <p:nvPr/>
+        </p:nvSpPr>
+        <p:spPr>
+          <a:xfrm>
+            <a:off x="941832" y="1696212"/>
+            <a:ext cx="457200" cy="82296"/>
+          </a:xfrm>
+          <a:prstGeom prst="roundRect">
+            <a:avLst>
+              <a:gd name="adj" fmla="val 50000"/>
+            </a:avLst>
+          </a:prstGeom>
+          <a:solidFill>
+            <a:srgbClr val="BFBFBF"/>
+          </a:solidFill>
+          <a:ln>
+            <a:noFill/>
+          </a:ln>
+          <a:effectLst/>
+        </p:spPr>
+        <p:style>
+          <a:lnRef idx="1">
+            <a:schemeClr val="accent1"/>
+          </a:lnRef>
+          <a:fillRef idx="3">
+            <a:schemeClr val="accent1"/>
+          </a:fillRef>
+          <a:effectRef idx="2">
+            <a:schemeClr val="accent1"/>
+          </a:effectRef>
+          <a:fontRef idx="minor">
+            <a:schemeClr val="lt1"/>
+          </a:fontRef>
+        </p:style>
+        <p:txBody>
+          <a:bodyPr rtlCol="0" anchor="ctr"/>
+          <a:lstStyle/>
+          <a:p>
+            <a:pPr algn="ctr"/>
+          </a:p>
+        </p:txBody>
+      </p:sp>
+      <p:sp>
+        <p:nvSpPr>
+          <p:cNvPr id="10" name="Rounded Rectangle 9"/>
+          <p:cNvSpPr/>
+          <p:nvPr/>
+        </p:nvSpPr>
+        <p:spPr>
+          <a:xfrm>
+            <a:off x="941832" y="1805940"/>
+            <a:ext cx="320040" cy="54864"/>
+          </a:xfrm>
+          <a:prstGeom prst="roundRect">
+            <a:avLst>
+              <a:gd name="adj" fmla="val 50000"/>
+            </a:avLst>
+          </a:prstGeom>
+          <a:solidFill>
+            <a:srgbClr val="D9D9D9"/>
+          </a:solidFill>
+          <a:ln>
+            <a:noFill/>
+          </a:ln>
+          <a:effectLst/>
+        </p:spPr>
+        <p:style>
+          <a:lnRef idx="1">
+            <a:schemeClr val="accent1"/>
+          </a:lnRef>
+          <a:fillRef idx="3">
+            <a:schemeClr val="accent1"/>
+          </a:fillRef>
+          <a:effectRef idx="2">
+            <a:schemeClr val="accent1"/>
+          </a:effectRef>
+          <a:fontRef idx="minor">
+            <a:schemeClr val="lt1"/>
+          </a:fontRef>
+        </p:style>
+        <p:txBody>
+          <a:bodyPr rtlCol="0" anchor="ctr"/>
+          <a:lstStyle/>
+          <a:p>
+            <a:pPr algn="ctr"/>
+          </a:p>
+        </p:txBody>
+      </p:sp>
+      <p:sp>
+        <p:nvSpPr>
+          <p:cNvPr id="11" name="Rounded Rectangle 10"/>
+          <p:cNvSpPr/>
+          <p:nvPr/>
+        </p:nvSpPr>
+        <p:spPr>
+          <a:xfrm>
+            <a:off x="941832" y="1915668"/>
+            <a:ext cx="758952" cy="274320"/>
+          </a:xfrm>
+          <a:prstGeom prst="roundRect">
+            <a:avLst>
+              <a:gd name="adj" fmla="val 8000"/>
+            </a:avLst>
+          </a:prstGeom>
+          <a:solidFill>
+            <a:srgbClr val="FFFFFF"/>
+          </a:solidFill>
+          <a:ln w="12700">
+            <a:solidFill>
+              <a:srgbClr val="D1D5DC"/>
+            </a:solidFill>
+          </a:ln>
+          <a:effectLst/>
+        </p:spPr>
+        <p:style>
+          <a:lnRef idx="1">
+            <a:schemeClr val="accent1"/>
+          </a:lnRef>
+          <a:fillRef idx="3">
+            <a:schemeClr val="accent1"/>
+          </a:fillRef>
+          <a:effectRef idx="2">
+            <a:schemeClr val="accent1"/>
+          </a:effectRef>
+          <a:fontRef idx="minor">
+            <a:schemeClr val="lt1"/>
+          </a:fontRef>
+        </p:style>
+        <p:txBody>
+          <a:bodyPr rtlCol="0" anchor="ctr"/>
+          <a:lstStyle/>
+          <a:p>
+            <a:pPr algn="ctr"/>
+          </a:p>
+        </p:txBody>
+      </p:sp>
+      <p:sp>
+        <p:nvSpPr>
+          <p:cNvPr id="12" name="Rounded Rectangle 11"/>
+          <p:cNvSpPr/>
+          <p:nvPr/>
+        </p:nvSpPr>
+        <p:spPr>
+          <a:xfrm>
+            <a:off x="996696" y="1970532"/>
+            <a:ext cx="365760" cy="50292"/>
+          </a:xfrm>
+          <a:prstGeom prst="roundRect">
+            <a:avLst>
+              <a:gd name="adj" fmla="val 50000"/>
+            </a:avLst>
+          </a:prstGeom>
+          <a:solidFill>
+            <a:srgbClr val="C8C8C8"/>
+          </a:solidFill>
+          <a:ln>
+            <a:noFill/>
+          </a:ln>
+          <a:effectLst/>
+        </p:spPr>
+        <p:style>
+          <a:lnRef idx="1">
+            <a:schemeClr val="accent1"/>
+          </a:lnRef>
+          <a:fillRef idx="3">
+            <a:schemeClr val="accent1"/>
+          </a:fillRef>
+          <a:effectRef idx="2">
+            <a:schemeClr val="accent1"/>
+          </a:effectRef>
+          <a:fontRef idx="minor">
+            <a:schemeClr val="lt1"/>
+          </a:fontRef>
+        </p:style>
+        <p:txBody>
+          <a:bodyPr rtlCol="0" anchor="ctr"/>
+          <a:lstStyle/>
+          <a:p>
+            <a:pPr algn="ctr"/>
+          </a:p>
+        </p:txBody>
+      </p:sp>
+      <p:sp>
+        <p:nvSpPr>
+          <p:cNvPr id="13" name="Rounded Rectangle 12"/>
+          <p:cNvSpPr/>
+          <p:nvPr/>
+        </p:nvSpPr>
+        <p:spPr>
+          <a:xfrm>
+            <a:off x="996696" y="2052828"/>
+            <a:ext cx="548640" cy="45720"/>
+          </a:xfrm>
+          <a:prstGeom prst="roundRect">
+            <a:avLst>
+              <a:gd name="adj" fmla="val 50000"/>
+            </a:avLst>
+          </a:prstGeom>
+          <a:solidFill>
+            <a:srgbClr val="E2E2E2"/>
+          </a:solidFill>
+          <a:ln>
+            <a:noFill/>
+          </a:ln>
+          <a:effectLst/>
+        </p:spPr>
+        <p:style>
+          <a:lnRef idx="1">
+            <a:schemeClr val="accent1"/>
+          </a:lnRef>
+          <a:fillRef idx="3">
+            <a:schemeClr val="accent1"/>
+          </a:fillRef>
+          <a:effectRef idx="2">
+            <a:schemeClr val="accent1"/>
+          </a:effectRef>
+          <a:fontRef idx="minor">
+            <a:schemeClr val="lt1"/>
+          </a:fontRef>
+        </p:style>
+        <p:txBody>
+          <a:bodyPr rtlCol="0" anchor="ctr"/>
+          <a:lstStyle/>
+          <a:p>
+            <a:pPr algn="ctr"/>
+          </a:p>
+        </p:txBody>
+      </p:sp>
+      <p:sp>
+        <p:nvSpPr>
+          <p:cNvPr id="14" name="Rounded Rectangle 13"/>
+          <p:cNvSpPr/>
+          <p:nvPr/>
+        </p:nvSpPr>
+        <p:spPr>
+          <a:xfrm>
+            <a:off x="996696" y="2125980"/>
+            <a:ext cx="502920" cy="45720"/>
+          </a:xfrm>
+          <a:prstGeom prst="roundRect">
+            <a:avLst>
+              <a:gd name="adj" fmla="val 50000"/>
+            </a:avLst>
+          </a:prstGeom>
+          <a:solidFill>
+            <a:srgbClr val="E2E2E2"/>
+          </a:solidFill>
+          <a:ln>
+            <a:noFill/>
+          </a:ln>
+          <a:effectLst/>
+        </p:spPr>
+        <p:style>
+          <a:lnRef idx="1">
+            <a:schemeClr val="accent1"/>
+          </a:lnRef>
+          <a:fillRef idx="3">
+            <a:schemeClr val="accent1"/>
+          </a:fillRef>
+          <a:effectRef idx="2">
+            <a:schemeClr val="accent1"/>
+          </a:effectRef>
+          <a:fontRef idx="minor">
+            <a:schemeClr val="lt1"/>
+          </a:fontRef>
+        </p:style>
+        <p:txBody>
+          <a:bodyPr rtlCol="0" anchor="ctr"/>
+          <a:lstStyle/>
+          <a:p>
+            <a:pPr algn="ctr"/>
+          </a:p>
+        </p:txBody>
+      </p:sp>
+      <p:sp>
+        <p:nvSpPr>
+          <p:cNvPr id="15" name="Oval 14"/>
+          <p:cNvSpPr/>
+          <p:nvPr/>
+        </p:nvSpPr>
+        <p:spPr>
+          <a:xfrm>
+            <a:off x="941832" y="2226564"/>
+            <a:ext cx="82296" cy="82296"/>
+          </a:xfrm>
+          <a:prstGeom prst="ellipse">
+            <a:avLst/>
+          </a:prstGeom>
+          <a:solidFill>
+            <a:srgbClr val="D5DCE4"/>
+          </a:solidFill>
+          <a:ln>
+            <a:noFill/>
+          </a:ln>
+          <a:effectLst/>
+        </p:spPr>
+        <p:style>
+          <a:lnRef idx="1">
+            <a:schemeClr val="accent1"/>
+          </a:lnRef>
+          <a:fillRef idx="3">
+            <a:schemeClr val="accent1"/>
+          </a:fillRef>
+          <a:effectRef idx="2">
+            <a:schemeClr val="accent1"/>
+          </a:effectRef>
+          <a:fontRef idx="minor">
+            <a:schemeClr val="lt1"/>
+          </a:fontRef>
+        </p:style>
+        <p:txBody>
+          <a:bodyPr rtlCol="0" anchor="ctr"/>
+          <a:lstStyle/>
+          <a:p>
+            <a:pPr algn="ctr"/>
+          </a:p>
+        </p:txBody>
+      </p:sp>
+      <p:sp>
+        <p:nvSpPr>
+          <p:cNvPr id="16" name="Rounded Rectangle 15"/>
+          <p:cNvSpPr/>
+          <p:nvPr/>
+        </p:nvSpPr>
+        <p:spPr>
+          <a:xfrm>
+            <a:off x="1060704" y="2240280"/>
+            <a:ext cx="411480" cy="54864"/>
+          </a:xfrm>
+          <a:prstGeom prst="roundRect">
+            <a:avLst>
+              <a:gd name="adj" fmla="val 50000"/>
+            </a:avLst>
+          </a:prstGeom>
+          <a:solidFill>
+            <a:srgbClr val="DDDDDD"/>
+          </a:solidFill>
+          <a:ln>
+            <a:noFill/>
+          </a:ln>
+          <a:effectLst/>
+        </p:spPr>
+        <p:style>
+          <a:lnRef idx="1">
+            <a:schemeClr val="accent1"/>
+          </a:lnRef>
+          <a:fillRef idx="3">
+            <a:schemeClr val="accent1"/>
+          </a:fillRef>
+          <a:effectRef idx="2">
+            <a:schemeClr val="accent1"/>
+          </a:effectRef>
+          <a:fontRef idx="minor">
+            <a:schemeClr val="lt1"/>
+          </a:fontRef>
+        </p:style>
+        <p:txBody>
+          <a:bodyPr rtlCol="0" anchor="ctr"/>
+          <a:lstStyle/>
+          <a:p>
+            <a:pPr algn="ctr"/>
+          </a:p>
+        </p:txBody>
+      </p:sp>
+      <p:sp>
+        <p:nvSpPr>
+          <p:cNvPr id="17" name="Oval 16"/>
+          <p:cNvSpPr/>
+          <p:nvPr/>
+        </p:nvSpPr>
+        <p:spPr>
+          <a:xfrm>
+            <a:off x="941832" y="2336292"/>
+            <a:ext cx="82296" cy="82296"/>
+          </a:xfrm>
+          <a:prstGeom prst="ellipse">
+            <a:avLst/>
+          </a:prstGeom>
+          <a:solidFill>
+            <a:srgbClr val="D5DCE4"/>
+          </a:solidFill>
+          <a:ln>
+            <a:noFill/>
+          </a:ln>
+          <a:effectLst/>
+        </p:spPr>
+        <p:style>
+          <a:lnRef idx="1">
+            <a:schemeClr val="accent1"/>
+          </a:lnRef>
+          <a:fillRef idx="3">
+            <a:schemeClr val="accent1"/>
+          </a:fillRef>
+          <a:effectRef idx="2">
+            <a:schemeClr val="accent1"/>
+          </a:effectRef>
+          <a:fontRef idx="minor">
+            <a:schemeClr val="lt1"/>
+          </a:fontRef>
+        </p:style>
+        <p:txBody>
+          <a:bodyPr rtlCol="0" anchor="ctr"/>
+          <a:lstStyle/>
+          <a:p>
+            <a:pPr algn="ctr"/>
+          </a:p>
+        </p:txBody>
+      </p:sp>
+      <p:sp>
+        <p:nvSpPr>
+          <p:cNvPr id="18" name="Rounded Rectangle 17"/>
+          <p:cNvSpPr/>
+          <p:nvPr/>
+        </p:nvSpPr>
+        <p:spPr>
+          <a:xfrm>
+            <a:off x="1060704" y="2350008"/>
+            <a:ext cx="411480" cy="54864"/>
+          </a:xfrm>
+          <a:prstGeom prst="roundRect">
+            <a:avLst>
+              <a:gd name="adj" fmla="val 50000"/>
+            </a:avLst>
+          </a:prstGeom>
+          <a:solidFill>
+            <a:srgbClr val="DDDDDD"/>
+          </a:solidFill>
+          <a:ln>
+            <a:noFill/>
+          </a:ln>
+          <a:effectLst/>
+        </p:spPr>
+        <p:style>
+          <a:lnRef idx="1">
+            <a:schemeClr val="accent1"/>
+          </a:lnRef>
+          <a:fillRef idx="3">
+            <a:schemeClr val="accent1"/>
+          </a:fillRef>
+          <a:effectRef idx="2">
+            <a:schemeClr val="accent1"/>
+          </a:effectRef>
+          <a:fontRef idx="minor">
+            <a:schemeClr val="lt1"/>
+          </a:fontRef>
+        </p:style>
+        <p:txBody>
+          <a:bodyPr rtlCol="0" anchor="ctr"/>
+          <a:lstStyle/>
+          <a:p>
+            <a:pPr algn="ctr"/>
+          </a:p>
+        </p:txBody>
+      </p:sp>
+      <p:sp>
+        <p:nvSpPr>
+          <p:cNvPr id="19" name="Rounded Rectangle 18"/>
+          <p:cNvSpPr/>
+          <p:nvPr/>
+        </p:nvSpPr>
+        <p:spPr>
+          <a:xfrm>
+            <a:off x="1069848" y="2436876"/>
+            <a:ext cx="457200" cy="73152"/>
+          </a:xfrm>
+          <a:prstGeom prst="roundRect">
+            <a:avLst>
+              <a:gd name="adj" fmla="val 35000"/>
+            </a:avLst>
+          </a:prstGeom>
+          <a:solidFill>
+            <a:srgbClr val="E6F1FB"/>
+          </a:solidFill>
+          <a:ln w="9525">
+            <a:solidFill>
+              <a:srgbClr val="0067D1"/>
+            </a:solidFill>
+          </a:ln>
+          <a:effectLst/>
+        </p:spPr>
+        <p:style>
+          <a:lnRef idx="1">
+            <a:schemeClr val="accent1"/>
+          </a:lnRef>
+          <a:fillRef idx="3">
+            <a:schemeClr val="accent1"/>
+          </a:fillRef>
+          <a:effectRef idx="2">
+            <a:schemeClr val="accent1"/>
+          </a:effectRef>
+          <a:fontRef idx="minor">
+            <a:schemeClr val="lt1"/>
+          </a:fontRef>
+        </p:style>
+        <p:txBody>
+          <a:bodyPr rtlCol="0" anchor="ctr"/>
+          <a:lstStyle/>
+          <a:p>
+            <a:pPr algn="ctr"/>
+          </a:p>
+        </p:txBody>
+      </p:sp>
+      <p:sp>
+        <p:nvSpPr>
+          <p:cNvPr id="20" name="Rounded Rectangle 19"/>
+          <p:cNvSpPr/>
+          <p:nvPr/>
+        </p:nvSpPr>
+        <p:spPr>
+          <a:xfrm>
+            <a:off x="4315968" y="1540764"/>
+            <a:ext cx="923544" cy="996696"/>
+          </a:xfrm>
+          <a:prstGeom prst="roundRect">
+            <a:avLst>
+              <a:gd name="adj" fmla="val 5000"/>
+            </a:avLst>
+          </a:prstGeom>
+          <a:solidFill>
+            <a:srgbClr val="FFFFFF"/>
+          </a:solidFill>
+          <a:ln w="12700">
+            <a:solidFill>
+              <a:srgbClr val="D1D5DC"/>
+            </a:solidFill>
+          </a:ln>
+          <a:effectLst/>
+        </p:spPr>
+        <p:style>
+          <a:lnRef idx="1">
+            <a:schemeClr val="accent1"/>
+          </a:lnRef>
+          <a:fillRef idx="3">
+            <a:schemeClr val="accent1"/>
+          </a:fillRef>
+          <a:effectRef idx="2">
+            <a:schemeClr val="accent1"/>
+          </a:effectRef>
+          <a:fontRef idx="minor">
+            <a:schemeClr val="lt1"/>
+          </a:fontRef>
+        </p:style>
+        <p:txBody>
+          <a:bodyPr rtlCol="0" anchor="ctr"/>
+          <a:lstStyle/>
+          <a:p>
+            <a:pPr algn="ctr"/>
+          </a:p>
+        </p:txBody>
+      </p:sp>
+      <p:sp>
+        <p:nvSpPr>
+          <p:cNvPr id="21" name="Rectangle 20"/>
+          <p:cNvSpPr/>
+          <p:nvPr/>
+        </p:nvSpPr>
+        <p:spPr>
+          <a:xfrm>
+            <a:off x="4425696" y="1604772"/>
+            <a:ext cx="502920" cy="45720"/>
+          </a:xfrm>
+          <a:prstGeom prst="rect">
+            <a:avLst/>
+          </a:prstGeom>
+          <a:solidFill>
+            <a:srgbClr val="E8E8E8"/>
+          </a:solidFill>
+          <a:ln>
+            <a:noFill/>
+          </a:ln>
+          <a:effectLst/>
+        </p:spPr>
+        <p:style>
+          <a:lnRef idx="1">
+            <a:schemeClr val="accent1"/>
+          </a:lnRef>
+          <a:fillRef idx="3">
+            <a:schemeClr val="accent1"/>
+          </a:fillRef>
+          <a:effectRef idx="2">
+            <a:schemeClr val="accent1"/>
+          </a:effectRef>
+          <a:fontRef idx="minor">
+            <a:schemeClr val="lt1"/>
+          </a:fontRef>
+        </p:style>
+        <p:txBody>
+          <a:bodyPr rtlCol="0" anchor="ctr"/>
+          <a:lstStyle/>
+          <a:p>
+            <a:pPr algn="ctr"/>
+          </a:p>
+        </p:txBody>
+      </p:sp>
+      <p:sp>
+        <p:nvSpPr>
+          <p:cNvPr id="22" name="Rounded Rectangle 21"/>
+          <p:cNvSpPr/>
+          <p:nvPr/>
+        </p:nvSpPr>
+        <p:spPr>
+          <a:xfrm>
+            <a:off x="4425696" y="1696212"/>
+            <a:ext cx="457200" cy="82296"/>
+          </a:xfrm>
+          <a:prstGeom prst="roundRect">
+            <a:avLst>
+              <a:gd name="adj" fmla="val 50000"/>
+            </a:avLst>
+          </a:prstGeom>
+          <a:solidFill>
+            <a:srgbClr val="BFBFBF"/>
+          </a:solidFill>
+          <a:ln>
+            <a:noFill/>
+          </a:ln>
+          <a:effectLst/>
+        </p:spPr>
+        <p:style>
+          <a:lnRef idx="1">
+            <a:schemeClr val="accent1"/>
+          </a:lnRef>
+          <a:fillRef idx="3">
+            <a:schemeClr val="accent1"/>
+          </a:fillRef>
+          <a:effectRef idx="2">
+            <a:schemeClr val="accent1"/>
+          </a:effectRef>
+          <a:fontRef idx="minor">
+            <a:schemeClr val="lt1"/>
+          </a:fontRef>
+        </p:style>
+        <p:txBody>
+          <a:bodyPr rtlCol="0" anchor="ctr"/>
+          <a:lstStyle/>
+          <a:p>
+            <a:pPr algn="ctr"/>
+          </a:p>
+        </p:txBody>
+      </p:sp>
+      <p:sp>
+        <p:nvSpPr>
+          <p:cNvPr id="23" name="Rounded Rectangle 22"/>
+          <p:cNvSpPr/>
+          <p:nvPr/>
+        </p:nvSpPr>
+        <p:spPr>
+          <a:xfrm>
+            <a:off x="4425696" y="1805940"/>
+            <a:ext cx="320040" cy="54864"/>
+          </a:xfrm>
+          <a:prstGeom prst="roundRect">
+            <a:avLst>
+              <a:gd name="adj" fmla="val 50000"/>
+            </a:avLst>
+          </a:prstGeom>
+          <a:solidFill>
+            <a:srgbClr val="D9D9D9"/>
+          </a:solidFill>
+          <a:ln>
+            <a:noFill/>
+          </a:ln>
+          <a:effectLst/>
+        </p:spPr>
+        <p:style>
+          <a:lnRef idx="1">
+            <a:schemeClr val="accent1"/>
+          </a:lnRef>
+          <a:fillRef idx="3">
+            <a:schemeClr val="accent1"/>
+          </a:fillRef>
+          <a:effectRef idx="2">
+            <a:schemeClr val="accent1"/>
+          </a:effectRef>
+          <a:fontRef idx="minor">
+            <a:schemeClr val="lt1"/>
+          </a:fontRef>
+        </p:style>
+        <p:txBody>
+          <a:bodyPr rtlCol="0" anchor="ctr"/>
+          <a:lstStyle/>
+          <a:p>
+            <a:pPr algn="ctr"/>
+          </a:p>
+        </p:txBody>
+      </p:sp>
+      <p:sp>
+        <p:nvSpPr>
+          <p:cNvPr id="24" name="Rounded Rectangle 23"/>
+          <p:cNvSpPr/>
+          <p:nvPr/>
+        </p:nvSpPr>
+        <p:spPr>
+          <a:xfrm>
+            <a:off x="4425696" y="1915668"/>
+            <a:ext cx="758952" cy="274320"/>
+          </a:xfrm>
+          <a:prstGeom prst="roundRect">
+            <a:avLst>
+              <a:gd name="adj" fmla="val 8000"/>
+            </a:avLst>
+          </a:prstGeom>
+          <a:solidFill>
+            <a:srgbClr val="FFFFFF"/>
+          </a:solidFill>
+          <a:ln w="12700">
+            <a:solidFill>
+              <a:srgbClr val="D1D5DC"/>
+            </a:solidFill>
+          </a:ln>
+          <a:effectLst/>
+        </p:spPr>
+        <p:style>
+          <a:lnRef idx="1">
+            <a:schemeClr val="accent1"/>
+          </a:lnRef>
+          <a:fillRef idx="3">
+            <a:schemeClr val="accent1"/>
+          </a:fillRef>
+          <a:effectRef idx="2">
+            <a:schemeClr val="accent1"/>
+          </a:effectRef>
+          <a:fontRef idx="minor">
+            <a:schemeClr val="lt1"/>
+          </a:fontRef>
+        </p:style>
+        <p:txBody>
+          <a:bodyPr rtlCol="0" anchor="ctr"/>
+          <a:lstStyle/>
+          <a:p>
+            <a:pPr algn="ctr"/>
+          </a:p>
+        </p:txBody>
+      </p:sp>
+      <p:sp>
+        <p:nvSpPr>
+          <p:cNvPr id="25" name="Rounded Rectangle 24"/>
+          <p:cNvSpPr/>
+          <p:nvPr/>
+        </p:nvSpPr>
+        <p:spPr>
+          <a:xfrm>
+            <a:off x="4480560" y="1970532"/>
+            <a:ext cx="365760" cy="50292"/>
+          </a:xfrm>
+          <a:prstGeom prst="roundRect">
+            <a:avLst>
+              <a:gd name="adj" fmla="val 50000"/>
+            </a:avLst>
+          </a:prstGeom>
+          <a:solidFill>
+            <a:srgbClr val="C8C8C8"/>
+          </a:solidFill>
+          <a:ln>
+            <a:noFill/>
+          </a:ln>
+          <a:effectLst/>
+        </p:spPr>
+        <p:style>
+          <a:lnRef idx="1">
+            <a:schemeClr val="accent1"/>
+          </a:lnRef>
+          <a:fillRef idx="3">
+            <a:schemeClr val="accent1"/>
+          </a:fillRef>
+          <a:effectRef idx="2">
+            <a:schemeClr val="accent1"/>
+          </a:effectRef>
+          <a:fontRef idx="minor">
+            <a:schemeClr val="lt1"/>
+          </a:fontRef>
+        </p:style>
+        <p:txBody>
+          <a:bodyPr rtlCol="0" anchor="ctr"/>
+          <a:lstStyle/>
+          <a:p>
+            <a:pPr algn="ctr"/>
+          </a:p>
+        </p:txBody>
+      </p:sp>
+      <p:sp>
+        <p:nvSpPr>
+          <p:cNvPr id="26" name="Rounded Rectangle 25"/>
+          <p:cNvSpPr/>
+          <p:nvPr/>
+        </p:nvSpPr>
+        <p:spPr>
+          <a:xfrm>
+            <a:off x="4480560" y="2052828"/>
+            <a:ext cx="548640" cy="45720"/>
+          </a:xfrm>
+          <a:prstGeom prst="roundRect">
+            <a:avLst>
+              <a:gd name="adj" fmla="val 50000"/>
+            </a:avLst>
+          </a:prstGeom>
+          <a:solidFill>
+            <a:srgbClr val="E2E2E2"/>
+          </a:solidFill>
+          <a:ln>
+            <a:noFill/>
+          </a:ln>
+          <a:effectLst/>
+        </p:spPr>
+        <p:style>
+          <a:lnRef idx="1">
+            <a:schemeClr val="accent1"/>
+          </a:lnRef>
+          <a:fillRef idx="3">
+            <a:schemeClr val="accent1"/>
+          </a:fillRef>
+          <a:effectRef idx="2">
+            <a:schemeClr val="accent1"/>
+          </a:effectRef>
+          <a:fontRef idx="minor">
+            <a:schemeClr val="lt1"/>
+          </a:fontRef>
+        </p:style>
+        <p:txBody>
+          <a:bodyPr rtlCol="0" anchor="ctr"/>
+          <a:lstStyle/>
+          <a:p>
+            <a:pPr algn="ctr"/>
+          </a:p>
+        </p:txBody>
+      </p:sp>
+      <p:sp>
+        <p:nvSpPr>
+          <p:cNvPr id="27" name="Rounded Rectangle 26"/>
+          <p:cNvSpPr/>
+          <p:nvPr/>
+        </p:nvSpPr>
+        <p:spPr>
+          <a:xfrm>
+            <a:off x="4480560" y="2125980"/>
+            <a:ext cx="502920" cy="45720"/>
+          </a:xfrm>
+          <a:prstGeom prst="roundRect">
+            <a:avLst>
+              <a:gd name="adj" fmla="val 50000"/>
+            </a:avLst>
+          </a:prstGeom>
+          <a:solidFill>
+            <a:srgbClr val="E2E2E2"/>
+          </a:solidFill>
+          <a:ln>
+            <a:noFill/>
+          </a:ln>
+          <a:effectLst/>
+        </p:spPr>
+        <p:style>
+          <a:lnRef idx="1">
+            <a:schemeClr val="accent1"/>
+          </a:lnRef>
+          <a:fillRef idx="3">
+            <a:schemeClr val="accent1"/>
+          </a:fillRef>
+          <a:effectRef idx="2">
+            <a:schemeClr val="accent1"/>
+          </a:effectRef>
+          <a:fontRef idx="minor">
+            <a:schemeClr val="lt1"/>
+          </a:fontRef>
+        </p:style>
+        <p:txBody>
+          <a:bodyPr rtlCol="0" anchor="ctr"/>
+          <a:lstStyle/>
+          <a:p>
+            <a:pPr algn="ctr"/>
+          </a:p>
+        </p:txBody>
+      </p:sp>
+      <p:sp>
+        <p:nvSpPr>
+          <p:cNvPr id="28" name="Oval 27"/>
+          <p:cNvSpPr/>
+          <p:nvPr/>
+        </p:nvSpPr>
+        <p:spPr>
+          <a:xfrm>
+            <a:off x="4425696" y="2226564"/>
+            <a:ext cx="82296" cy="82296"/>
+          </a:xfrm>
+          <a:prstGeom prst="ellipse">
+            <a:avLst/>
+          </a:prstGeom>
+          <a:solidFill>
+            <a:srgbClr val="D5DCE4"/>
+          </a:solidFill>
+          <a:ln>
+            <a:noFill/>
+          </a:ln>
+          <a:effectLst/>
+        </p:spPr>
+        <p:style>
+          <a:lnRef idx="1">
+            <a:schemeClr val="accent1"/>
+          </a:lnRef>
+          <a:fillRef idx="3">
+            <a:schemeClr val="accent1"/>
+          </a:fillRef>
+          <a:effectRef idx="2">
+            <a:schemeClr val="accent1"/>
+          </a:effectRef>
+          <a:fontRef idx="minor">
+            <a:schemeClr val="lt1"/>
+          </a:fontRef>
+        </p:style>
+        <p:txBody>
+          <a:bodyPr rtlCol="0" anchor="ctr"/>
+          <a:lstStyle/>
+          <a:p>
+            <a:pPr algn="ctr"/>
+          </a:p>
+        </p:txBody>
+      </p:sp>
+      <p:sp>
+        <p:nvSpPr>
+          <p:cNvPr id="29" name="Rounded Rectangle 28"/>
+          <p:cNvSpPr/>
+          <p:nvPr/>
+        </p:nvSpPr>
+        <p:spPr>
+          <a:xfrm>
+            <a:off x="4544568" y="2240280"/>
+            <a:ext cx="411480" cy="54864"/>
+          </a:xfrm>
+          <a:prstGeom prst="roundRect">
+            <a:avLst>
+              <a:gd name="adj" fmla="val 50000"/>
+            </a:avLst>
+          </a:prstGeom>
+          <a:solidFill>
+            <a:srgbClr val="DDDDDD"/>
+          </a:solidFill>
+          <a:ln>
+            <a:noFill/>
+          </a:ln>
+          <a:effectLst/>
+        </p:spPr>
+        <p:style>
+          <a:lnRef idx="1">
+            <a:schemeClr val="accent1"/>
+          </a:lnRef>
+          <a:fillRef idx="3">
+            <a:schemeClr val="accent1"/>
+          </a:fillRef>
+          <a:effectRef idx="2">
+            <a:schemeClr val="accent1"/>
+          </a:effectRef>
+          <a:fontRef idx="minor">
+            <a:schemeClr val="lt1"/>
+          </a:fontRef>
+        </p:style>
+        <p:txBody>
+          <a:bodyPr rtlCol="0" anchor="ctr"/>
+          <a:lstStyle/>
+          <a:p>
+            <a:pPr algn="ctr"/>
+          </a:p>
+        </p:txBody>
+      </p:sp>
+      <p:sp>
+        <p:nvSpPr>
+          <p:cNvPr id="30" name="Oval 29"/>
+          <p:cNvSpPr/>
+          <p:nvPr/>
+        </p:nvSpPr>
+        <p:spPr>
+          <a:xfrm>
+            <a:off x="4425696" y="2336292"/>
+            <a:ext cx="82296" cy="82296"/>
+          </a:xfrm>
+          <a:prstGeom prst="ellipse">
+            <a:avLst/>
+          </a:prstGeom>
+          <a:solidFill>
+            <a:srgbClr val="D5DCE4"/>
+          </a:solidFill>
+          <a:ln>
+            <a:noFill/>
+          </a:ln>
+          <a:effectLst/>
+        </p:spPr>
+        <p:style>
+          <a:lnRef idx="1">
+            <a:schemeClr val="accent1"/>
+          </a:lnRef>
+          <a:fillRef idx="3">
+            <a:schemeClr val="accent1"/>
+          </a:fillRef>
+          <a:effectRef idx="2">
+            <a:schemeClr val="accent1"/>
+          </a:effectRef>
+          <a:fontRef idx="minor">
+            <a:schemeClr val="lt1"/>
+          </a:fontRef>
+        </p:style>
+        <p:txBody>
+          <a:bodyPr rtlCol="0" anchor="ctr"/>
+          <a:lstStyle/>
+          <a:p>
+            <a:pPr algn="ctr"/>
+          </a:p>
+        </p:txBody>
+      </p:sp>
+      <p:sp>
+        <p:nvSpPr>
+          <p:cNvPr id="31" name="Rounded Rectangle 30"/>
+          <p:cNvSpPr/>
+          <p:nvPr/>
+        </p:nvSpPr>
+        <p:spPr>
+          <a:xfrm>
+            <a:off x="4544568" y="2350008"/>
+            <a:ext cx="411480" cy="54864"/>
+          </a:xfrm>
+          <a:prstGeom prst="roundRect">
+            <a:avLst>
+              <a:gd name="adj" fmla="val 50000"/>
+            </a:avLst>
+          </a:prstGeom>
+          <a:solidFill>
+            <a:srgbClr val="DDDDDD"/>
+          </a:solidFill>
+          <a:ln>
+            <a:noFill/>
+          </a:ln>
+          <a:effectLst/>
+        </p:spPr>
+        <p:style>
+          <a:lnRef idx="1">
+            <a:schemeClr val="accent1"/>
+          </a:lnRef>
+          <a:fillRef idx="3">
+            <a:schemeClr val="accent1"/>
+          </a:fillRef>
+          <a:effectRef idx="2">
+            <a:schemeClr val="accent1"/>
+          </a:effectRef>
+          <a:fontRef idx="minor">
+            <a:schemeClr val="lt1"/>
+          </a:fontRef>
+        </p:style>
+        <p:txBody>
+          <a:bodyPr rtlCol="0" anchor="ctr"/>
+          <a:lstStyle/>
+          <a:p>
+            <a:pPr algn="ctr"/>
+          </a:p>
+        </p:txBody>
+      </p:sp>
+      <p:sp>
+        <p:nvSpPr>
+          <p:cNvPr id="32" name="Rounded Rectangle 31"/>
+          <p:cNvSpPr/>
+          <p:nvPr/>
+        </p:nvSpPr>
+        <p:spPr>
+          <a:xfrm>
+            <a:off x="4553712" y="2436876"/>
+            <a:ext cx="457200" cy="73152"/>
+          </a:xfrm>
+          <a:prstGeom prst="roundRect">
+            <a:avLst>
+              <a:gd name="adj" fmla="val 35000"/>
+            </a:avLst>
+          </a:prstGeom>
+          <a:solidFill>
+            <a:srgbClr val="E6F1FB"/>
+          </a:solidFill>
+          <a:ln w="9525">
+            <a:solidFill>
+              <a:srgbClr val="0067D1"/>
+            </a:solidFill>
+          </a:ln>
+          <a:effectLst/>
+        </p:spPr>
+        <p:style>
+          <a:lnRef idx="1">
+            <a:schemeClr val="accent1"/>
+          </a:lnRef>
+          <a:fillRef idx="3">
+            <a:schemeClr val="accent1"/>
+          </a:fillRef>
+          <a:effectRef idx="2">
+            <a:schemeClr val="accent1"/>
+          </a:effectRef>
+          <a:fontRef idx="minor">
+            <a:schemeClr val="lt1"/>
+          </a:fontRef>
+        </p:style>
+        <p:txBody>
+          <a:bodyPr rtlCol="0" anchor="ctr"/>
+          <a:lstStyle/>
+          <a:p>
+            <a:pPr algn="ctr"/>
+          </a:p>
+        </p:txBody>
+      </p:sp>
+      <p:cxnSp>
+        <p:nvCxnSpPr>
+          <p:cNvPr id="33" name="Connector 32"/>
+          <p:cNvCxnSpPr/>
+          <p:nvPr/>
+        </p:nvCxnSpPr>
+        <p:spPr>
+          <a:xfrm>
+            <a:off x="905256" y="1888236"/>
+            <a:ext cx="832104" cy="0"/>
+          </a:xfrm>
+          <a:prstGeom prst="line">
+            <a:avLst/>
+          </a:prstGeom>
+          <a:ln w="9525">
+            <a:solidFill>
+              <a:srgbClr val="777777"/>
+            </a:solidFill>
+            <a:prstDash val="dash"/>
+          </a:ln>
+        </p:spPr>
+        <p:style>
+          <a:lnRef idx="2">
+            <a:schemeClr val="accent1"/>
+          </a:lnRef>
+          <a:fillRef idx="0">
+            <a:schemeClr val="accent1"/>
+          </a:fillRef>
+          <a:effectRef idx="1">
+            <a:schemeClr val="accent1"/>
+          </a:effectRef>
+          <a:fontRef idx="minor">
+            <a:schemeClr val="tx1"/>
+          </a:fontRef>
+        </p:style>
+      </p:cxnSp>
+      <p:cxnSp>
+        <p:nvCxnSpPr>
+          <p:cNvPr id="34" name="Connector 33"/>
+          <p:cNvCxnSpPr/>
+          <p:nvPr/>
+        </p:nvCxnSpPr>
+        <p:spPr>
+          <a:xfrm>
+            <a:off x="905256" y="2208276"/>
+            <a:ext cx="832104" cy="0"/>
+          </a:xfrm>
+          <a:prstGeom prst="line">
+            <a:avLst/>
+          </a:prstGeom>
+          <a:ln w="9525">
+            <a:solidFill>
+              <a:srgbClr val="777777"/>
+            </a:solidFill>
+            <a:prstDash val="dash"/>
+          </a:ln>
+        </p:spPr>
+        <p:style>
+          <a:lnRef idx="2">
+            <a:schemeClr val="accent1"/>
+          </a:lnRef>
+          <a:fillRef idx="0">
+            <a:schemeClr val="accent1"/>
+          </a:fillRef>
+          <a:effectRef idx="1">
+            <a:schemeClr val="accent1"/>
+          </a:effectRef>
+          <a:fontRef idx="minor">
+            <a:schemeClr val="tx1"/>
+          </a:fontRef>
+        </p:style>
+      </p:cxnSp>
+      <p:cxnSp>
+        <p:nvCxnSpPr>
+          <p:cNvPr id="35" name="Connector 34"/>
+          <p:cNvCxnSpPr/>
+          <p:nvPr/>
+        </p:nvCxnSpPr>
+        <p:spPr>
+          <a:xfrm>
+            <a:off x="4361688" y="1888236"/>
+            <a:ext cx="832104" cy="0"/>
+          </a:xfrm>
+          <a:prstGeom prst="line">
+            <a:avLst/>
+          </a:prstGeom>
+          <a:ln w="9525">
+            <a:solidFill>
+              <a:srgbClr val="777777"/>
+            </a:solidFill>
+            <a:prstDash val="dash"/>
+          </a:ln>
+        </p:spPr>
+        <p:style>
+          <a:lnRef idx="2">
+            <a:schemeClr val="accent1"/>
+          </a:lnRef>
+          <a:fillRef idx="0">
+            <a:schemeClr val="accent1"/>
+          </a:fillRef>
+          <a:effectRef idx="1">
+            <a:schemeClr val="accent1"/>
+          </a:effectRef>
+          <a:fontRef idx="minor">
+            <a:schemeClr val="tx1"/>
+          </a:fontRef>
+        </p:style>
+      </p:cxnSp>
+      <p:cxnSp>
+        <p:nvCxnSpPr>
+          <p:cNvPr id="36" name="Connector 35"/>
+          <p:cNvCxnSpPr/>
+          <p:nvPr/>
+        </p:nvCxnSpPr>
+        <p:spPr>
+          <a:xfrm>
+            <a:off x="4361688" y="2208276"/>
+            <a:ext cx="832104" cy="0"/>
+          </a:xfrm>
+          <a:prstGeom prst="line">
+            <a:avLst/>
+          </a:prstGeom>
+          <a:ln w="9525">
+            <a:solidFill>
+              <a:srgbClr val="777777"/>
+            </a:solidFill>
+            <a:prstDash val="dash"/>
+          </a:ln>
+        </p:spPr>
+        <p:style>
+          <a:lnRef idx="2">
+            <a:schemeClr val="accent1"/>
+          </a:lnRef>
+          <a:fillRef idx="0">
+            <a:schemeClr val="accent1"/>
+          </a:fillRef>
+          <a:effectRef idx="1">
+            <a:schemeClr val="accent1"/>
+          </a:effectRef>
+          <a:fontRef idx="minor">
+            <a:schemeClr val="tx1"/>
+          </a:fontRef>
+        </p:style>
+      </p:cxnSp>
+      <p:cxnSp>
+        <p:nvCxnSpPr>
+          <p:cNvPr id="37" name="Connector 36"/>
+          <p:cNvCxnSpPr/>
+          <p:nvPr/>
+        </p:nvCxnSpPr>
+        <p:spPr>
+          <a:xfrm>
+            <a:off x="1399032" y="1737360"/>
+            <a:ext cx="3026664" cy="0"/>
+          </a:xfrm>
+          <a:prstGeom prst="line">
+            <a:avLst/>
+          </a:prstGeom>
+          <a:ln w="19050">
+            <a:solidFill>
+              <a:srgbClr val="52C41A"/>
+            </a:solidFill>
+            <a:tailEnd type="triangle" w="med" len="med"/>
+          </a:ln>
+        </p:spPr>
+        <p:style>
+          <a:lnRef idx="2">
+            <a:schemeClr val="accent1"/>
+          </a:lnRef>
+          <a:fillRef idx="0">
+            <a:schemeClr val="accent1"/>
+          </a:fillRef>
+          <a:effectRef idx="1">
+            <a:schemeClr val="accent1"/>
+          </a:effectRef>
+          <a:fontRef idx="minor">
+            <a:schemeClr val="tx1"/>
+          </a:fontRef>
+        </p:style>
+      </p:cxnSp>
+      <p:cxnSp>
+        <p:nvCxnSpPr>
+          <p:cNvPr id="38" name="Connector 37"/>
+          <p:cNvCxnSpPr/>
+          <p:nvPr/>
+        </p:nvCxnSpPr>
+        <p:spPr>
+          <a:xfrm>
+            <a:off x="1261872" y="1833372"/>
+            <a:ext cx="3163824" cy="0"/>
+          </a:xfrm>
+          <a:prstGeom prst="line">
+            <a:avLst/>
+          </a:prstGeom>
+          <a:ln w="19050">
+            <a:solidFill>
+              <a:srgbClr val="52C41A"/>
+            </a:solidFill>
+            <a:tailEnd type="triangle" w="med" len="med"/>
+          </a:ln>
+        </p:spPr>
+        <p:style>
+          <a:lnRef idx="2">
+            <a:schemeClr val="accent1"/>
+          </a:lnRef>
+          <a:fillRef idx="0">
+            <a:schemeClr val="accent1"/>
+          </a:fillRef>
+          <a:effectRef idx="1">
+            <a:schemeClr val="accent1"/>
+          </a:effectRef>
+          <a:fontRef idx="minor">
+            <a:schemeClr val="tx1"/>
+          </a:fontRef>
+        </p:style>
+      </p:cxnSp>
+      <p:cxnSp>
+        <p:nvCxnSpPr>
+          <p:cNvPr id="39" name="Connector 38"/>
+          <p:cNvCxnSpPr/>
+          <p:nvPr/>
+        </p:nvCxnSpPr>
+        <p:spPr>
+          <a:xfrm>
+            <a:off x="1700783" y="2052828"/>
+            <a:ext cx="2843785" cy="214884"/>
+          </a:xfrm>
+          <a:prstGeom prst="line">
+            <a:avLst/>
+          </a:prstGeom>
+          <a:ln w="15240">
             <a:solidFill>
               <a:srgbClr val="FF4D4F"/>
             </a:solidFill>
+            <a:tailEnd type="triangle" w="med" len="med"/>
+          </a:ln>
+        </p:spPr>
+        <p:style>
+          <a:lnRef idx="2">
+            <a:schemeClr val="accent1"/>
+          </a:lnRef>
+          <a:fillRef idx="0">
+            <a:schemeClr val="accent1"/>
+          </a:fillRef>
+          <a:effectRef idx="1">
+            <a:schemeClr val="accent1"/>
+          </a:effectRef>
+          <a:fontRef idx="minor">
+            <a:schemeClr val="tx1"/>
+          </a:fontRef>
+        </p:style>
+      </p:cxnSp>
+      <p:cxnSp>
+        <p:nvCxnSpPr>
+          <p:cNvPr id="40" name="Connector 39"/>
+          <p:cNvCxnSpPr/>
+          <p:nvPr/>
+        </p:nvCxnSpPr>
+        <p:spPr>
+          <a:xfrm>
+            <a:off x="1362456" y="1995678"/>
+            <a:ext cx="3182112" cy="381762"/>
+          </a:xfrm>
+          <a:prstGeom prst="line">
+            <a:avLst/>
+          </a:prstGeom>
+          <a:ln w="15240">
+            <a:solidFill>
+              <a:srgbClr val="FF4D4F"/>
+            </a:solidFill>
+            <a:tailEnd type="triangle" w="med" len="med"/>
+          </a:ln>
+        </p:spPr>
+        <p:style>
+          <a:lnRef idx="2">
+            <a:schemeClr val="accent1"/>
+          </a:lnRef>
+          <a:fillRef idx="0">
+            <a:schemeClr val="accent1"/>
+          </a:fillRef>
+          <a:effectRef idx="1">
+            <a:schemeClr val="accent1"/>
+          </a:effectRef>
+          <a:fontRef idx="minor">
+            <a:schemeClr val="tx1"/>
+          </a:fontRef>
+        </p:style>
+      </p:cxnSp>
+      <p:cxnSp>
+        <p:nvCxnSpPr>
+          <p:cNvPr id="41" name="Connector 40"/>
+          <p:cNvCxnSpPr/>
+          <p:nvPr/>
+        </p:nvCxnSpPr>
+        <p:spPr>
+          <a:xfrm flipV="1">
+            <a:off x="1472184" y="2052828"/>
+            <a:ext cx="2953512" cy="214884"/>
+          </a:xfrm>
+          <a:prstGeom prst="line">
+            <a:avLst/>
+          </a:prstGeom>
+          <a:ln w="15240">
+            <a:solidFill>
+              <a:srgbClr val="FF4D4F"/>
+            </a:solidFill>
+            <a:tailEnd type="triangle" w="med" len="med"/>
+          </a:ln>
+        </p:spPr>
+        <p:style>
+          <a:lnRef idx="2">
+            <a:schemeClr val="accent1"/>
+          </a:lnRef>
+          <a:fillRef idx="0">
+            <a:schemeClr val="accent1"/>
+          </a:fillRef>
+          <a:effectRef idx="1">
+            <a:schemeClr val="accent1"/>
+          </a:effectRef>
+          <a:fontRef idx="minor">
+            <a:schemeClr val="tx1"/>
+          </a:fontRef>
+        </p:style>
+      </p:cxnSp>
+      <p:cxnSp>
+        <p:nvCxnSpPr>
+          <p:cNvPr id="42" name="Connector 41"/>
+          <p:cNvCxnSpPr/>
+          <p:nvPr/>
+        </p:nvCxnSpPr>
+        <p:spPr>
+          <a:xfrm flipV="1">
+            <a:off x="1472184" y="1995678"/>
+            <a:ext cx="3008376" cy="381762"/>
+          </a:xfrm>
+          <a:prstGeom prst="line">
+            <a:avLst/>
+          </a:prstGeom>
+          <a:ln w="15240">
+            <a:solidFill>
+              <a:srgbClr val="FF4D4F"/>
+            </a:solidFill>
+            <a:tailEnd type="triangle" w="med" len="med"/>
+          </a:ln>
+        </p:spPr>
+        <p:style>
+          <a:lnRef idx="2">
+            <a:schemeClr val="accent1"/>
+          </a:lnRef>
+          <a:fillRef idx="0">
+            <a:schemeClr val="accent1"/>
+          </a:fillRef>
+          <a:effectRef idx="1">
+            <a:schemeClr val="accent1"/>
+          </a:effectRef>
+          <a:fontRef idx="minor">
+            <a:schemeClr val="tx1"/>
+          </a:fontRef>
+        </p:style>
+      </p:cxnSp>
+      <p:cxnSp>
+        <p:nvCxnSpPr>
+          <p:cNvPr id="43" name="Connector 42"/>
+          <p:cNvCxnSpPr/>
+          <p:nvPr/>
+        </p:nvCxnSpPr>
+        <p:spPr>
+          <a:xfrm flipV="1">
+            <a:off x="1527048" y="2148840"/>
+            <a:ext cx="2953512" cy="324612"/>
+          </a:xfrm>
+          <a:prstGeom prst="line">
+            <a:avLst/>
+          </a:prstGeom>
+          <a:ln w="15240">
+            <a:solidFill>
+              <a:srgbClr val="FF4D4F"/>
+            </a:solidFill>
+            <a:tailEnd type="triangle" w="med" len="med"/>
+          </a:ln>
+        </p:spPr>
+        <p:style>
+          <a:lnRef idx="2">
+            <a:schemeClr val="accent1"/>
+          </a:lnRef>
+          <a:fillRef idx="0">
+            <a:schemeClr val="accent1"/>
+          </a:fillRef>
+          <a:effectRef idx="1">
+            <a:schemeClr val="accent1"/>
+          </a:effectRef>
+          <a:fontRef idx="minor">
+            <a:schemeClr val="tx1"/>
+          </a:fontRef>
+        </p:style>
+      </p:cxnSp>
+      <p:sp>
+        <p:nvSpPr>
+          <p:cNvPr id="44" name="TextBox 43"/>
+          <p:cNvSpPr txBox="1"/>
+          <p:nvPr/>
+        </p:nvSpPr>
+        <p:spPr>
+          <a:xfrm>
+            <a:off x="777240" y="2633472"/>
+            <a:ext cx="4617720" cy="292608"/>
+          </a:xfrm>
+          <a:prstGeom prst="rect">
+            <a:avLst/>
+          </a:prstGeom>
+          <a:noFill/>
+        </p:spPr>
+        <p:txBody>
+          <a:bodyPr wrap="square" anchor="t" lIns="25400" rIns="25400" tIns="12700" bIns="12700">
+            <a:spAutoFit/>
+          </a:bodyPr>
+          <a:lstStyle/>
+          <a:p>
+            <a:pPr algn="ctr">
+              <a:lnSpc>
+                <a:spcPct val="110000"/>
+              </a:lnSpc>
+              <a:spcAft>
+                <a:spcPts val="400"/>
+              </a:spcAft>
+            </a:pPr>
+            <a:r>
+              <a:rPr sz="950" b="0">
+                <a:solidFill>
+                  <a:srgbClr val="777777"/>
+                </a:solidFill>
+                <a:latin typeface="Microsoft YaHei"/>
+                <a:ea typeface="Microsoft YaHei"/>
+                <a:cs typeface="Microsoft YaHei"/>
+              </a:rPr>
+              <a:t>分块错位配对后，错配块内所有节点连线全部交叉——整体准确率断崖式下降</a:t>
+            </a:r>
+          </a:p>
+        </p:txBody>
+      </p:sp>
+      <p:sp>
+        <p:nvSpPr>
+          <p:cNvPr id="45" name="Right Arrow 44"/>
+          <p:cNvSpPr/>
+          <p:nvPr/>
+        </p:nvSpPr>
+        <p:spPr>
+          <a:xfrm>
+            <a:off x="5815584" y="1664208"/>
+            <a:ext cx="566928" cy="365760"/>
+          </a:xfrm>
+          <a:prstGeom prst="rightArrow">
+            <a:avLst>
+              <a:gd name="adj1" fmla="val 55000"/>
+              <a:gd name="adj2" fmla="val 55000"/>
+            </a:avLst>
+          </a:prstGeom>
+          <a:solidFill>
+            <a:srgbClr val="0067D1"/>
+          </a:solidFill>
+          <a:ln>
+            <a:noFill/>
           </a:ln>
           <a:effectLst/>
         </p:spPr>
@@ -3279,14 +5011,62 @@
       </p:sp>
       <p:sp>
         <p:nvSpPr>
-          <p:cNvPr id="6" name="TextBox 5"/>
+          <p:cNvPr id="46" name="Rounded Rectangle 45"/>
+          <p:cNvSpPr/>
+          <p:nvPr/>
+        </p:nvSpPr>
+        <p:spPr>
+          <a:xfrm>
+            <a:off x="6565392" y="658368"/>
+            <a:ext cx="5074920" cy="2377440"/>
+          </a:xfrm>
+          <a:prstGeom prst="roundRect">
+            <a:avLst>
+              <a:gd name="adj" fmla="val 6000"/>
+            </a:avLst>
+          </a:prstGeom>
+          <a:solidFill>
+            <a:srgbClr val="F6FFF6"/>
+          </a:solidFill>
+          <a:ln w="12700">
+            <a:solidFill>
+              <a:srgbClr val="52C41A"/>
+            </a:solidFill>
+          </a:ln>
+          <a:effectLst/>
+        </p:spPr>
+        <p:style>
+          <a:lnRef idx="1">
+            <a:schemeClr val="accent1"/>
+          </a:lnRef>
+          <a:fillRef idx="3">
+            <a:schemeClr val="accent1"/>
+          </a:fillRef>
+          <a:effectRef idx="2">
+            <a:schemeClr val="accent1"/>
+          </a:effectRef>
+          <a:fontRef idx="minor">
+            <a:schemeClr val="lt1"/>
+          </a:fontRef>
+        </p:style>
+        <p:txBody>
+          <a:bodyPr rtlCol="0" anchor="ctr"/>
+          <a:lstStyle/>
+          <a:p>
+            <a:pPr algn="ctr"/>
+          </a:p>
+        </p:txBody>
+      </p:sp>
+      <p:sp>
+        <p:nvSpPr>
+          <p:cNvPr id="47" name="TextBox 46"/>
           <p:cNvSpPr txBox="1"/>
           <p:nvPr/>
         </p:nvSpPr>
         <p:spPr>
           <a:xfrm>
-            <a:off x="868680" y="1847088"/>
-            <a:ext cx="4480560" cy="365760"/>
+            <a:off x="6821424" y="758952"/>
+            <a:ext cx="4572000" cy="329184"/>
           </a:xfrm>
           <a:prstGeom prst="rect">
             <a:avLst/>
@@ -3308,29 +5088,29 @@
               </a:spcAft>
             </a:pPr>
             <a:r>
-              <a:rPr sz="1500" b="1">
+              <a:rPr sz="1400" b="1">
                 <a:solidFill>
-                  <a:srgbClr val="FF4D4F"/>
+                  <a:srgbClr val="52C41A"/>
                 </a:solidFill>
                 <a:latin typeface="Microsoft YaHei"/>
                 <a:ea typeface="Microsoft YaHei"/>
                 <a:cs typeface="Microsoft YaHei"/>
               </a:rPr>
-              <a:t>Before：分块匹配算法</a:t>
-            </a:r>
-          </a:p>
-        </p:txBody>
-      </p:sp>
-      <p:sp>
-        <p:nvSpPr>
-          <p:cNvPr id="7" name="TextBox 6"/>
+              <a:t>After：可信文本锚点 + 兜底匹配（当前）</a:t>
+            </a:r>
+          </a:p>
+        </p:txBody>
+      </p:sp>
+      <p:sp>
+        <p:nvSpPr>
+          <p:cNvPr id="48" name="TextBox 47"/>
           <p:cNvSpPr txBox="1"/>
           <p:nvPr/>
         </p:nvSpPr>
         <p:spPr>
           <a:xfrm>
-            <a:off x="868680" y="2359152"/>
-            <a:ext cx="4480560" cy="1097280"/>
+            <a:off x="6821424" y="1097280"/>
+            <a:ext cx="4572000" cy="329184"/>
           </a:xfrm>
           <a:prstGeom prst="rect">
             <a:avLst/>
@@ -3345,14 +5125,14 @@
           <a:p>
             <a:pPr algn="l">
               <a:lnSpc>
-                <a:spcPct val="125000"/>
+                <a:spcPct val="110000"/>
               </a:lnSpc>
               <a:spcAft>
                 <a:spcPts val="400"/>
               </a:spcAft>
             </a:pPr>
             <a:r>
-              <a:rPr sz="1250" b="0">
+              <a:rPr sz="1100" b="0">
                 <a:solidFill>
                   <a:srgbClr val="191919"/>
                 </a:solidFill>
@@ -3360,48 +5140,1756 @@
                 <a:ea typeface="Microsoft YaHei"/>
                 <a:cs typeface="Microsoft YaHei"/>
               </a:rPr>
-              <a:t>依赖分块结果逐块对应，一旦分块匹配不对，</a:t>
-            </a:r>
-          </a:p>
-          <a:p>
-            <a:pPr algn="l">
+              <a:t>锚点驱动 + 相对位置 + 兜底，准确率大大提高</a:t>
+            </a:r>
+          </a:p>
+        </p:txBody>
+      </p:sp>
+      <p:sp>
+        <p:nvSpPr>
+          <p:cNvPr id="49" name="Rounded Rectangle 48"/>
+          <p:cNvSpPr/>
+          <p:nvPr/>
+        </p:nvSpPr>
+        <p:spPr>
+          <a:xfrm>
+            <a:off x="6793992" y="1499616"/>
+            <a:ext cx="4617720" cy="1097280"/>
+          </a:xfrm>
+          <a:prstGeom prst="roundRect">
+            <a:avLst>
+              <a:gd name="adj" fmla="val 6000"/>
+            </a:avLst>
+          </a:prstGeom>
+          <a:solidFill>
+            <a:srgbClr val="FFFFFF"/>
+          </a:solidFill>
+          <a:ln w="12700">
+            <a:solidFill>
+              <a:srgbClr val="D1D5DC"/>
+            </a:solidFill>
+          </a:ln>
+          <a:effectLst/>
+        </p:spPr>
+        <p:style>
+          <a:lnRef idx="1">
+            <a:schemeClr val="accent1"/>
+          </a:lnRef>
+          <a:fillRef idx="3">
+            <a:schemeClr val="accent1"/>
+          </a:fillRef>
+          <a:effectRef idx="2">
+            <a:schemeClr val="accent1"/>
+          </a:effectRef>
+          <a:fontRef idx="minor">
+            <a:schemeClr val="lt1"/>
+          </a:fontRef>
+        </p:style>
+        <p:txBody>
+          <a:bodyPr rtlCol="0" anchor="ctr"/>
+          <a:lstStyle/>
+          <a:p>
+            <a:pPr algn="ctr"/>
+          </a:p>
+        </p:txBody>
+      </p:sp>
+      <p:sp>
+        <p:nvSpPr>
+          <p:cNvPr id="50" name="Rounded Rectangle 49"/>
+          <p:cNvSpPr/>
+          <p:nvPr/>
+        </p:nvSpPr>
+        <p:spPr>
+          <a:xfrm>
+            <a:off x="6876288" y="1540764"/>
+            <a:ext cx="923544" cy="996696"/>
+          </a:xfrm>
+          <a:prstGeom prst="roundRect">
+            <a:avLst>
+              <a:gd name="adj" fmla="val 5000"/>
+            </a:avLst>
+          </a:prstGeom>
+          <a:solidFill>
+            <a:srgbClr val="FFFFFF"/>
+          </a:solidFill>
+          <a:ln w="12700">
+            <a:solidFill>
+              <a:srgbClr val="D1D5DC"/>
+            </a:solidFill>
+          </a:ln>
+          <a:effectLst/>
+        </p:spPr>
+        <p:style>
+          <a:lnRef idx="1">
+            <a:schemeClr val="accent1"/>
+          </a:lnRef>
+          <a:fillRef idx="3">
+            <a:schemeClr val="accent1"/>
+          </a:fillRef>
+          <a:effectRef idx="2">
+            <a:schemeClr val="accent1"/>
+          </a:effectRef>
+          <a:fontRef idx="minor">
+            <a:schemeClr val="lt1"/>
+          </a:fontRef>
+        </p:style>
+        <p:txBody>
+          <a:bodyPr rtlCol="0" anchor="ctr"/>
+          <a:lstStyle/>
+          <a:p>
+            <a:pPr algn="ctr"/>
+          </a:p>
+        </p:txBody>
+      </p:sp>
+      <p:sp>
+        <p:nvSpPr>
+          <p:cNvPr id="51" name="Rectangle 50"/>
+          <p:cNvSpPr/>
+          <p:nvPr/>
+        </p:nvSpPr>
+        <p:spPr>
+          <a:xfrm>
+            <a:off x="6958584" y="1604772"/>
+            <a:ext cx="502920" cy="45720"/>
+          </a:xfrm>
+          <a:prstGeom prst="rect">
+            <a:avLst/>
+          </a:prstGeom>
+          <a:solidFill>
+            <a:srgbClr val="E8E8E8"/>
+          </a:solidFill>
+          <a:ln>
+            <a:noFill/>
+          </a:ln>
+          <a:effectLst/>
+        </p:spPr>
+        <p:style>
+          <a:lnRef idx="1">
+            <a:schemeClr val="accent1"/>
+          </a:lnRef>
+          <a:fillRef idx="3">
+            <a:schemeClr val="accent1"/>
+          </a:fillRef>
+          <a:effectRef idx="2">
+            <a:schemeClr val="accent1"/>
+          </a:effectRef>
+          <a:fontRef idx="minor">
+            <a:schemeClr val="lt1"/>
+          </a:fontRef>
+        </p:style>
+        <p:txBody>
+          <a:bodyPr rtlCol="0" anchor="ctr"/>
+          <a:lstStyle/>
+          <a:p>
+            <a:pPr algn="ctr"/>
+          </a:p>
+        </p:txBody>
+      </p:sp>
+      <p:sp>
+        <p:nvSpPr>
+          <p:cNvPr id="52" name="Rounded Rectangle 51"/>
+          <p:cNvSpPr/>
+          <p:nvPr/>
+        </p:nvSpPr>
+        <p:spPr>
+          <a:xfrm>
+            <a:off x="6958584" y="1696212"/>
+            <a:ext cx="457200" cy="82296"/>
+          </a:xfrm>
+          <a:prstGeom prst="roundRect">
+            <a:avLst>
+              <a:gd name="adj" fmla="val 50000"/>
+            </a:avLst>
+          </a:prstGeom>
+          <a:solidFill>
+            <a:srgbClr val="F6FFF6"/>
+          </a:solidFill>
+          <a:ln w="9525">
+            <a:solidFill>
+              <a:srgbClr val="52C41A"/>
+            </a:solidFill>
+          </a:ln>
+          <a:effectLst/>
+        </p:spPr>
+        <p:style>
+          <a:lnRef idx="1">
+            <a:schemeClr val="accent1"/>
+          </a:lnRef>
+          <a:fillRef idx="3">
+            <a:schemeClr val="accent1"/>
+          </a:fillRef>
+          <a:effectRef idx="2">
+            <a:schemeClr val="accent1"/>
+          </a:effectRef>
+          <a:fontRef idx="minor">
+            <a:schemeClr val="lt1"/>
+          </a:fontRef>
+        </p:style>
+        <p:txBody>
+          <a:bodyPr rtlCol="0" anchor="ctr"/>
+          <a:lstStyle/>
+          <a:p>
+            <a:pPr algn="ctr"/>
+          </a:p>
+        </p:txBody>
+      </p:sp>
+      <p:sp>
+        <p:nvSpPr>
+          <p:cNvPr id="53" name="Rounded Rectangle 52"/>
+          <p:cNvSpPr/>
+          <p:nvPr/>
+        </p:nvSpPr>
+        <p:spPr>
+          <a:xfrm>
+            <a:off x="6958584" y="1805940"/>
+            <a:ext cx="320040" cy="54864"/>
+          </a:xfrm>
+          <a:prstGeom prst="roundRect">
+            <a:avLst>
+              <a:gd name="adj" fmla="val 50000"/>
+            </a:avLst>
+          </a:prstGeom>
+          <a:solidFill>
+            <a:srgbClr val="F6FFF6"/>
+          </a:solidFill>
+          <a:ln w="9525">
+            <a:solidFill>
+              <a:srgbClr val="52C41A"/>
+            </a:solidFill>
+          </a:ln>
+          <a:effectLst/>
+        </p:spPr>
+        <p:style>
+          <a:lnRef idx="1">
+            <a:schemeClr val="accent1"/>
+          </a:lnRef>
+          <a:fillRef idx="3">
+            <a:schemeClr val="accent1"/>
+          </a:fillRef>
+          <a:effectRef idx="2">
+            <a:schemeClr val="accent1"/>
+          </a:effectRef>
+          <a:fontRef idx="minor">
+            <a:schemeClr val="lt1"/>
+          </a:fontRef>
+        </p:style>
+        <p:txBody>
+          <a:bodyPr rtlCol="0" anchor="ctr"/>
+          <a:lstStyle/>
+          <a:p>
+            <a:pPr algn="ctr"/>
+          </a:p>
+        </p:txBody>
+      </p:sp>
+      <p:sp>
+        <p:nvSpPr>
+          <p:cNvPr id="54" name="Rounded Rectangle 53"/>
+          <p:cNvSpPr/>
+          <p:nvPr/>
+        </p:nvSpPr>
+        <p:spPr>
+          <a:xfrm>
+            <a:off x="6958584" y="1915668"/>
+            <a:ext cx="758952" cy="274320"/>
+          </a:xfrm>
+          <a:prstGeom prst="roundRect">
+            <a:avLst>
+              <a:gd name="adj" fmla="val 8000"/>
+            </a:avLst>
+          </a:prstGeom>
+          <a:solidFill>
+            <a:srgbClr val="FFFFFF"/>
+          </a:solidFill>
+          <a:ln w="12700">
+            <a:solidFill>
+              <a:srgbClr val="D1D5DC"/>
+            </a:solidFill>
+          </a:ln>
+          <a:effectLst/>
+        </p:spPr>
+        <p:style>
+          <a:lnRef idx="1">
+            <a:schemeClr val="accent1"/>
+          </a:lnRef>
+          <a:fillRef idx="3">
+            <a:schemeClr val="accent1"/>
+          </a:fillRef>
+          <a:effectRef idx="2">
+            <a:schemeClr val="accent1"/>
+          </a:effectRef>
+          <a:fontRef idx="minor">
+            <a:schemeClr val="lt1"/>
+          </a:fontRef>
+        </p:style>
+        <p:txBody>
+          <a:bodyPr rtlCol="0" anchor="ctr"/>
+          <a:lstStyle/>
+          <a:p>
+            <a:pPr algn="ctr"/>
+          </a:p>
+        </p:txBody>
+      </p:sp>
+      <p:sp>
+        <p:nvSpPr>
+          <p:cNvPr id="55" name="Rounded Rectangle 54"/>
+          <p:cNvSpPr/>
+          <p:nvPr/>
+        </p:nvSpPr>
+        <p:spPr>
+          <a:xfrm>
+            <a:off x="7013448" y="1970532"/>
+            <a:ext cx="365760" cy="50292"/>
+          </a:xfrm>
+          <a:prstGeom prst="roundRect">
+            <a:avLst>
+              <a:gd name="adj" fmla="val 50000"/>
+            </a:avLst>
+          </a:prstGeom>
+          <a:solidFill>
+            <a:srgbClr val="C8C8C8"/>
+          </a:solidFill>
+          <a:ln>
+            <a:noFill/>
+          </a:ln>
+          <a:effectLst/>
+        </p:spPr>
+        <p:style>
+          <a:lnRef idx="1">
+            <a:schemeClr val="accent1"/>
+          </a:lnRef>
+          <a:fillRef idx="3">
+            <a:schemeClr val="accent1"/>
+          </a:fillRef>
+          <a:effectRef idx="2">
+            <a:schemeClr val="accent1"/>
+          </a:effectRef>
+          <a:fontRef idx="minor">
+            <a:schemeClr val="lt1"/>
+          </a:fontRef>
+        </p:style>
+        <p:txBody>
+          <a:bodyPr rtlCol="0" anchor="ctr"/>
+          <a:lstStyle/>
+          <a:p>
+            <a:pPr algn="ctr"/>
+          </a:p>
+        </p:txBody>
+      </p:sp>
+      <p:sp>
+        <p:nvSpPr>
+          <p:cNvPr id="56" name="Rounded Rectangle 55"/>
+          <p:cNvSpPr/>
+          <p:nvPr/>
+        </p:nvSpPr>
+        <p:spPr>
+          <a:xfrm>
+            <a:off x="7013448" y="2052828"/>
+            <a:ext cx="548640" cy="45720"/>
+          </a:xfrm>
+          <a:prstGeom prst="roundRect">
+            <a:avLst>
+              <a:gd name="adj" fmla="val 50000"/>
+            </a:avLst>
+          </a:prstGeom>
+          <a:solidFill>
+            <a:srgbClr val="E2E2E2"/>
+          </a:solidFill>
+          <a:ln>
+            <a:noFill/>
+          </a:ln>
+          <a:effectLst/>
+        </p:spPr>
+        <p:style>
+          <a:lnRef idx="1">
+            <a:schemeClr val="accent1"/>
+          </a:lnRef>
+          <a:fillRef idx="3">
+            <a:schemeClr val="accent1"/>
+          </a:fillRef>
+          <a:effectRef idx="2">
+            <a:schemeClr val="accent1"/>
+          </a:effectRef>
+          <a:fontRef idx="minor">
+            <a:schemeClr val="lt1"/>
+          </a:fontRef>
+        </p:style>
+        <p:txBody>
+          <a:bodyPr rtlCol="0" anchor="ctr"/>
+          <a:lstStyle/>
+          <a:p>
+            <a:pPr algn="ctr"/>
+          </a:p>
+        </p:txBody>
+      </p:sp>
+      <p:sp>
+        <p:nvSpPr>
+          <p:cNvPr id="57" name="Rounded Rectangle 56"/>
+          <p:cNvSpPr/>
+          <p:nvPr/>
+        </p:nvSpPr>
+        <p:spPr>
+          <a:xfrm>
+            <a:off x="7013448" y="2125980"/>
+            <a:ext cx="502920" cy="45720"/>
+          </a:xfrm>
+          <a:prstGeom prst="roundRect">
+            <a:avLst>
+              <a:gd name="adj" fmla="val 50000"/>
+            </a:avLst>
+          </a:prstGeom>
+          <a:solidFill>
+            <a:srgbClr val="E2E2E2"/>
+          </a:solidFill>
+          <a:ln>
+            <a:noFill/>
+          </a:ln>
+          <a:effectLst/>
+        </p:spPr>
+        <p:style>
+          <a:lnRef idx="1">
+            <a:schemeClr val="accent1"/>
+          </a:lnRef>
+          <a:fillRef idx="3">
+            <a:schemeClr val="accent1"/>
+          </a:fillRef>
+          <a:effectRef idx="2">
+            <a:schemeClr val="accent1"/>
+          </a:effectRef>
+          <a:fontRef idx="minor">
+            <a:schemeClr val="lt1"/>
+          </a:fontRef>
+        </p:style>
+        <p:txBody>
+          <a:bodyPr rtlCol="0" anchor="ctr"/>
+          <a:lstStyle/>
+          <a:p>
+            <a:pPr algn="ctr"/>
+          </a:p>
+        </p:txBody>
+      </p:sp>
+      <p:sp>
+        <p:nvSpPr>
+          <p:cNvPr id="58" name="Oval 57"/>
+          <p:cNvSpPr/>
+          <p:nvPr/>
+        </p:nvSpPr>
+        <p:spPr>
+          <a:xfrm>
+            <a:off x="6958584" y="2226564"/>
+            <a:ext cx="82296" cy="82296"/>
+          </a:xfrm>
+          <a:prstGeom prst="ellipse">
+            <a:avLst/>
+          </a:prstGeom>
+          <a:solidFill>
+            <a:srgbClr val="D5DCE4"/>
+          </a:solidFill>
+          <a:ln>
+            <a:noFill/>
+          </a:ln>
+          <a:effectLst/>
+        </p:spPr>
+        <p:style>
+          <a:lnRef idx="1">
+            <a:schemeClr val="accent1"/>
+          </a:lnRef>
+          <a:fillRef idx="3">
+            <a:schemeClr val="accent1"/>
+          </a:fillRef>
+          <a:effectRef idx="2">
+            <a:schemeClr val="accent1"/>
+          </a:effectRef>
+          <a:fontRef idx="minor">
+            <a:schemeClr val="lt1"/>
+          </a:fontRef>
+        </p:style>
+        <p:txBody>
+          <a:bodyPr rtlCol="0" anchor="ctr"/>
+          <a:lstStyle/>
+          <a:p>
+            <a:pPr algn="ctr"/>
+          </a:p>
+        </p:txBody>
+      </p:sp>
+      <p:sp>
+        <p:nvSpPr>
+          <p:cNvPr id="59" name="Rounded Rectangle 58"/>
+          <p:cNvSpPr/>
+          <p:nvPr/>
+        </p:nvSpPr>
+        <p:spPr>
+          <a:xfrm>
+            <a:off x="7077456" y="2240280"/>
+            <a:ext cx="411480" cy="54864"/>
+          </a:xfrm>
+          <a:prstGeom prst="roundRect">
+            <a:avLst>
+              <a:gd name="adj" fmla="val 50000"/>
+            </a:avLst>
+          </a:prstGeom>
+          <a:solidFill>
+            <a:srgbClr val="DDDDDD"/>
+          </a:solidFill>
+          <a:ln>
+            <a:noFill/>
+          </a:ln>
+          <a:effectLst/>
+        </p:spPr>
+        <p:style>
+          <a:lnRef idx="1">
+            <a:schemeClr val="accent1"/>
+          </a:lnRef>
+          <a:fillRef idx="3">
+            <a:schemeClr val="accent1"/>
+          </a:fillRef>
+          <a:effectRef idx="2">
+            <a:schemeClr val="accent1"/>
+          </a:effectRef>
+          <a:fontRef idx="minor">
+            <a:schemeClr val="lt1"/>
+          </a:fontRef>
+        </p:style>
+        <p:txBody>
+          <a:bodyPr rtlCol="0" anchor="ctr"/>
+          <a:lstStyle/>
+          <a:p>
+            <a:pPr algn="ctr"/>
+          </a:p>
+        </p:txBody>
+      </p:sp>
+      <p:sp>
+        <p:nvSpPr>
+          <p:cNvPr id="60" name="Oval 59"/>
+          <p:cNvSpPr/>
+          <p:nvPr/>
+        </p:nvSpPr>
+        <p:spPr>
+          <a:xfrm>
+            <a:off x="6958584" y="2336292"/>
+            <a:ext cx="82296" cy="82296"/>
+          </a:xfrm>
+          <a:prstGeom prst="ellipse">
+            <a:avLst/>
+          </a:prstGeom>
+          <a:solidFill>
+            <a:srgbClr val="F5F5F5"/>
+          </a:solidFill>
+          <a:ln w="9525">
+            <a:solidFill>
+              <a:srgbClr val="777777"/>
+            </a:solidFill>
+          </a:ln>
+          <a:effectLst/>
+        </p:spPr>
+        <p:style>
+          <a:lnRef idx="1">
+            <a:schemeClr val="accent1"/>
+          </a:lnRef>
+          <a:fillRef idx="3">
+            <a:schemeClr val="accent1"/>
+          </a:fillRef>
+          <a:effectRef idx="2">
+            <a:schemeClr val="accent1"/>
+          </a:effectRef>
+          <a:fontRef idx="minor">
+            <a:schemeClr val="lt1"/>
+          </a:fontRef>
+        </p:style>
+        <p:txBody>
+          <a:bodyPr rtlCol="0" anchor="ctr"/>
+          <a:lstStyle/>
+          <a:p>
+            <a:pPr algn="ctr"/>
+          </a:p>
+        </p:txBody>
+      </p:sp>
+      <p:sp>
+        <p:nvSpPr>
+          <p:cNvPr id="61" name="Rounded Rectangle 60"/>
+          <p:cNvSpPr/>
+          <p:nvPr/>
+        </p:nvSpPr>
+        <p:spPr>
+          <a:xfrm>
+            <a:off x="7077456" y="2350008"/>
+            <a:ext cx="411480" cy="54864"/>
+          </a:xfrm>
+          <a:prstGeom prst="roundRect">
+            <a:avLst>
+              <a:gd name="adj" fmla="val 50000"/>
+            </a:avLst>
+          </a:prstGeom>
+          <a:solidFill>
+            <a:srgbClr val="F5F5F5"/>
+          </a:solidFill>
+          <a:ln w="9525">
+            <a:solidFill>
+              <a:srgbClr val="777777"/>
+            </a:solidFill>
+          </a:ln>
+          <a:effectLst/>
+        </p:spPr>
+        <p:style>
+          <a:lnRef idx="1">
+            <a:schemeClr val="accent1"/>
+          </a:lnRef>
+          <a:fillRef idx="3">
+            <a:schemeClr val="accent1"/>
+          </a:fillRef>
+          <a:effectRef idx="2">
+            <a:schemeClr val="accent1"/>
+          </a:effectRef>
+          <a:fontRef idx="minor">
+            <a:schemeClr val="lt1"/>
+          </a:fontRef>
+        </p:style>
+        <p:txBody>
+          <a:bodyPr rtlCol="0" anchor="ctr"/>
+          <a:lstStyle/>
+          <a:p>
+            <a:pPr algn="ctr"/>
+          </a:p>
+        </p:txBody>
+      </p:sp>
+      <p:sp>
+        <p:nvSpPr>
+          <p:cNvPr id="62" name="Rounded Rectangle 61"/>
+          <p:cNvSpPr/>
+          <p:nvPr/>
+        </p:nvSpPr>
+        <p:spPr>
+          <a:xfrm>
+            <a:off x="7086600" y="2436876"/>
+            <a:ext cx="457200" cy="73152"/>
+          </a:xfrm>
+          <a:prstGeom prst="roundRect">
+            <a:avLst>
+              <a:gd name="adj" fmla="val 35000"/>
+            </a:avLst>
+          </a:prstGeom>
+          <a:solidFill>
+            <a:srgbClr val="F6FFF6"/>
+          </a:solidFill>
+          <a:ln w="9525">
+            <a:solidFill>
+              <a:srgbClr val="52C41A"/>
+            </a:solidFill>
+          </a:ln>
+          <a:effectLst/>
+        </p:spPr>
+        <p:style>
+          <a:lnRef idx="1">
+            <a:schemeClr val="accent1"/>
+          </a:lnRef>
+          <a:fillRef idx="3">
+            <a:schemeClr val="accent1"/>
+          </a:fillRef>
+          <a:effectRef idx="2">
+            <a:schemeClr val="accent1"/>
+          </a:effectRef>
+          <a:fontRef idx="minor">
+            <a:schemeClr val="lt1"/>
+          </a:fontRef>
+        </p:style>
+        <p:txBody>
+          <a:bodyPr rtlCol="0" anchor="ctr"/>
+          <a:lstStyle/>
+          <a:p>
+            <a:pPr algn="ctr"/>
+          </a:p>
+        </p:txBody>
+      </p:sp>
+      <p:sp>
+        <p:nvSpPr>
+          <p:cNvPr id="63" name="Rounded Rectangle 62"/>
+          <p:cNvSpPr/>
+          <p:nvPr/>
+        </p:nvSpPr>
+        <p:spPr>
+          <a:xfrm>
+            <a:off x="10332720" y="1540764"/>
+            <a:ext cx="923544" cy="996696"/>
+          </a:xfrm>
+          <a:prstGeom prst="roundRect">
+            <a:avLst>
+              <a:gd name="adj" fmla="val 5000"/>
+            </a:avLst>
+          </a:prstGeom>
+          <a:solidFill>
+            <a:srgbClr val="FFFFFF"/>
+          </a:solidFill>
+          <a:ln w="12700">
+            <a:solidFill>
+              <a:srgbClr val="D1D5DC"/>
+            </a:solidFill>
+          </a:ln>
+          <a:effectLst/>
+        </p:spPr>
+        <p:style>
+          <a:lnRef idx="1">
+            <a:schemeClr val="accent1"/>
+          </a:lnRef>
+          <a:fillRef idx="3">
+            <a:schemeClr val="accent1"/>
+          </a:fillRef>
+          <a:effectRef idx="2">
+            <a:schemeClr val="accent1"/>
+          </a:effectRef>
+          <a:fontRef idx="minor">
+            <a:schemeClr val="lt1"/>
+          </a:fontRef>
+        </p:style>
+        <p:txBody>
+          <a:bodyPr rtlCol="0" anchor="ctr"/>
+          <a:lstStyle/>
+          <a:p>
+            <a:pPr algn="ctr"/>
+          </a:p>
+        </p:txBody>
+      </p:sp>
+      <p:sp>
+        <p:nvSpPr>
+          <p:cNvPr id="64" name="Rectangle 63"/>
+          <p:cNvSpPr/>
+          <p:nvPr/>
+        </p:nvSpPr>
+        <p:spPr>
+          <a:xfrm>
+            <a:off x="10442448" y="1604772"/>
+            <a:ext cx="502920" cy="45720"/>
+          </a:xfrm>
+          <a:prstGeom prst="rect">
+            <a:avLst/>
+          </a:prstGeom>
+          <a:solidFill>
+            <a:srgbClr val="E8E8E8"/>
+          </a:solidFill>
+          <a:ln>
+            <a:noFill/>
+          </a:ln>
+          <a:effectLst/>
+        </p:spPr>
+        <p:style>
+          <a:lnRef idx="1">
+            <a:schemeClr val="accent1"/>
+          </a:lnRef>
+          <a:fillRef idx="3">
+            <a:schemeClr val="accent1"/>
+          </a:fillRef>
+          <a:effectRef idx="2">
+            <a:schemeClr val="accent1"/>
+          </a:effectRef>
+          <a:fontRef idx="minor">
+            <a:schemeClr val="lt1"/>
+          </a:fontRef>
+        </p:style>
+        <p:txBody>
+          <a:bodyPr rtlCol="0" anchor="ctr"/>
+          <a:lstStyle/>
+          <a:p>
+            <a:pPr algn="ctr"/>
+          </a:p>
+        </p:txBody>
+      </p:sp>
+      <p:sp>
+        <p:nvSpPr>
+          <p:cNvPr id="65" name="Rounded Rectangle 64"/>
+          <p:cNvSpPr/>
+          <p:nvPr/>
+        </p:nvSpPr>
+        <p:spPr>
+          <a:xfrm>
+            <a:off x="10442448" y="1696212"/>
+            <a:ext cx="457200" cy="82296"/>
+          </a:xfrm>
+          <a:prstGeom prst="roundRect">
+            <a:avLst>
+              <a:gd name="adj" fmla="val 50000"/>
+            </a:avLst>
+          </a:prstGeom>
+          <a:solidFill>
+            <a:srgbClr val="F6FFF6"/>
+          </a:solidFill>
+          <a:ln w="9525">
+            <a:solidFill>
+              <a:srgbClr val="52C41A"/>
+            </a:solidFill>
+          </a:ln>
+          <a:effectLst/>
+        </p:spPr>
+        <p:style>
+          <a:lnRef idx="1">
+            <a:schemeClr val="accent1"/>
+          </a:lnRef>
+          <a:fillRef idx="3">
+            <a:schemeClr val="accent1"/>
+          </a:fillRef>
+          <a:effectRef idx="2">
+            <a:schemeClr val="accent1"/>
+          </a:effectRef>
+          <a:fontRef idx="minor">
+            <a:schemeClr val="lt1"/>
+          </a:fontRef>
+        </p:style>
+        <p:txBody>
+          <a:bodyPr rtlCol="0" anchor="ctr"/>
+          <a:lstStyle/>
+          <a:p>
+            <a:pPr algn="ctr"/>
+          </a:p>
+        </p:txBody>
+      </p:sp>
+      <p:sp>
+        <p:nvSpPr>
+          <p:cNvPr id="66" name="Rounded Rectangle 65"/>
+          <p:cNvSpPr/>
+          <p:nvPr/>
+        </p:nvSpPr>
+        <p:spPr>
+          <a:xfrm>
+            <a:off x="10442448" y="1805940"/>
+            <a:ext cx="320040" cy="54864"/>
+          </a:xfrm>
+          <a:prstGeom prst="roundRect">
+            <a:avLst>
+              <a:gd name="adj" fmla="val 50000"/>
+            </a:avLst>
+          </a:prstGeom>
+          <a:solidFill>
+            <a:srgbClr val="F6FFF6"/>
+          </a:solidFill>
+          <a:ln w="9525">
+            <a:solidFill>
+              <a:srgbClr val="52C41A"/>
+            </a:solidFill>
+          </a:ln>
+          <a:effectLst/>
+        </p:spPr>
+        <p:style>
+          <a:lnRef idx="1">
+            <a:schemeClr val="accent1"/>
+          </a:lnRef>
+          <a:fillRef idx="3">
+            <a:schemeClr val="accent1"/>
+          </a:fillRef>
+          <a:effectRef idx="2">
+            <a:schemeClr val="accent1"/>
+          </a:effectRef>
+          <a:fontRef idx="minor">
+            <a:schemeClr val="lt1"/>
+          </a:fontRef>
+        </p:style>
+        <p:txBody>
+          <a:bodyPr rtlCol="0" anchor="ctr"/>
+          <a:lstStyle/>
+          <a:p>
+            <a:pPr algn="ctr"/>
+          </a:p>
+        </p:txBody>
+      </p:sp>
+      <p:sp>
+        <p:nvSpPr>
+          <p:cNvPr id="67" name="Rounded Rectangle 66"/>
+          <p:cNvSpPr/>
+          <p:nvPr/>
+        </p:nvSpPr>
+        <p:spPr>
+          <a:xfrm>
+            <a:off x="10442448" y="1915668"/>
+            <a:ext cx="758952" cy="274320"/>
+          </a:xfrm>
+          <a:prstGeom prst="roundRect">
+            <a:avLst>
+              <a:gd name="adj" fmla="val 8000"/>
+            </a:avLst>
+          </a:prstGeom>
+          <a:solidFill>
+            <a:srgbClr val="FFFFFF"/>
+          </a:solidFill>
+          <a:ln w="12700">
+            <a:solidFill>
+              <a:srgbClr val="D1D5DC"/>
+            </a:solidFill>
+          </a:ln>
+          <a:effectLst/>
+        </p:spPr>
+        <p:style>
+          <a:lnRef idx="1">
+            <a:schemeClr val="accent1"/>
+          </a:lnRef>
+          <a:fillRef idx="3">
+            <a:schemeClr val="accent1"/>
+          </a:fillRef>
+          <a:effectRef idx="2">
+            <a:schemeClr val="accent1"/>
+          </a:effectRef>
+          <a:fontRef idx="minor">
+            <a:schemeClr val="lt1"/>
+          </a:fontRef>
+        </p:style>
+        <p:txBody>
+          <a:bodyPr rtlCol="0" anchor="ctr"/>
+          <a:lstStyle/>
+          <a:p>
+            <a:pPr algn="ctr"/>
+          </a:p>
+        </p:txBody>
+      </p:sp>
+      <p:sp>
+        <p:nvSpPr>
+          <p:cNvPr id="68" name="Rounded Rectangle 67"/>
+          <p:cNvSpPr/>
+          <p:nvPr/>
+        </p:nvSpPr>
+        <p:spPr>
+          <a:xfrm>
+            <a:off x="10497312" y="1970532"/>
+            <a:ext cx="365760" cy="50292"/>
+          </a:xfrm>
+          <a:prstGeom prst="roundRect">
+            <a:avLst>
+              <a:gd name="adj" fmla="val 50000"/>
+            </a:avLst>
+          </a:prstGeom>
+          <a:solidFill>
+            <a:srgbClr val="C8C8C8"/>
+          </a:solidFill>
+          <a:ln>
+            <a:noFill/>
+          </a:ln>
+          <a:effectLst/>
+        </p:spPr>
+        <p:style>
+          <a:lnRef idx="1">
+            <a:schemeClr val="accent1"/>
+          </a:lnRef>
+          <a:fillRef idx="3">
+            <a:schemeClr val="accent1"/>
+          </a:fillRef>
+          <a:effectRef idx="2">
+            <a:schemeClr val="accent1"/>
+          </a:effectRef>
+          <a:fontRef idx="minor">
+            <a:schemeClr val="lt1"/>
+          </a:fontRef>
+        </p:style>
+        <p:txBody>
+          <a:bodyPr rtlCol="0" anchor="ctr"/>
+          <a:lstStyle/>
+          <a:p>
+            <a:pPr algn="ctr"/>
+          </a:p>
+        </p:txBody>
+      </p:sp>
+      <p:sp>
+        <p:nvSpPr>
+          <p:cNvPr id="69" name="Rounded Rectangle 68"/>
+          <p:cNvSpPr/>
+          <p:nvPr/>
+        </p:nvSpPr>
+        <p:spPr>
+          <a:xfrm>
+            <a:off x="10497312" y="2052828"/>
+            <a:ext cx="548640" cy="45720"/>
+          </a:xfrm>
+          <a:prstGeom prst="roundRect">
+            <a:avLst>
+              <a:gd name="adj" fmla="val 50000"/>
+            </a:avLst>
+          </a:prstGeom>
+          <a:solidFill>
+            <a:srgbClr val="E2E2E2"/>
+          </a:solidFill>
+          <a:ln>
+            <a:noFill/>
+          </a:ln>
+          <a:effectLst/>
+        </p:spPr>
+        <p:style>
+          <a:lnRef idx="1">
+            <a:schemeClr val="accent1"/>
+          </a:lnRef>
+          <a:fillRef idx="3">
+            <a:schemeClr val="accent1"/>
+          </a:fillRef>
+          <a:effectRef idx="2">
+            <a:schemeClr val="accent1"/>
+          </a:effectRef>
+          <a:fontRef idx="minor">
+            <a:schemeClr val="lt1"/>
+          </a:fontRef>
+        </p:style>
+        <p:txBody>
+          <a:bodyPr rtlCol="0" anchor="ctr"/>
+          <a:lstStyle/>
+          <a:p>
+            <a:pPr algn="ctr"/>
+          </a:p>
+        </p:txBody>
+      </p:sp>
+      <p:sp>
+        <p:nvSpPr>
+          <p:cNvPr id="70" name="Rounded Rectangle 69"/>
+          <p:cNvSpPr/>
+          <p:nvPr/>
+        </p:nvSpPr>
+        <p:spPr>
+          <a:xfrm>
+            <a:off x="10497312" y="2125980"/>
+            <a:ext cx="502920" cy="45720"/>
+          </a:xfrm>
+          <a:prstGeom prst="roundRect">
+            <a:avLst>
+              <a:gd name="adj" fmla="val 50000"/>
+            </a:avLst>
+          </a:prstGeom>
+          <a:solidFill>
+            <a:srgbClr val="E2E2E2"/>
+          </a:solidFill>
+          <a:ln>
+            <a:noFill/>
+          </a:ln>
+          <a:effectLst/>
+        </p:spPr>
+        <p:style>
+          <a:lnRef idx="1">
+            <a:schemeClr val="accent1"/>
+          </a:lnRef>
+          <a:fillRef idx="3">
+            <a:schemeClr val="accent1"/>
+          </a:fillRef>
+          <a:effectRef idx="2">
+            <a:schemeClr val="accent1"/>
+          </a:effectRef>
+          <a:fontRef idx="minor">
+            <a:schemeClr val="lt1"/>
+          </a:fontRef>
+        </p:style>
+        <p:txBody>
+          <a:bodyPr rtlCol="0" anchor="ctr"/>
+          <a:lstStyle/>
+          <a:p>
+            <a:pPr algn="ctr"/>
+          </a:p>
+        </p:txBody>
+      </p:sp>
+      <p:sp>
+        <p:nvSpPr>
+          <p:cNvPr id="71" name="Oval 70"/>
+          <p:cNvSpPr/>
+          <p:nvPr/>
+        </p:nvSpPr>
+        <p:spPr>
+          <a:xfrm>
+            <a:off x="10442448" y="2226564"/>
+            <a:ext cx="82296" cy="82296"/>
+          </a:xfrm>
+          <a:prstGeom prst="ellipse">
+            <a:avLst/>
+          </a:prstGeom>
+          <a:solidFill>
+            <a:srgbClr val="D5DCE4"/>
+          </a:solidFill>
+          <a:ln>
+            <a:noFill/>
+          </a:ln>
+          <a:effectLst/>
+        </p:spPr>
+        <p:style>
+          <a:lnRef idx="1">
+            <a:schemeClr val="accent1"/>
+          </a:lnRef>
+          <a:fillRef idx="3">
+            <a:schemeClr val="accent1"/>
+          </a:fillRef>
+          <a:effectRef idx="2">
+            <a:schemeClr val="accent1"/>
+          </a:effectRef>
+          <a:fontRef idx="minor">
+            <a:schemeClr val="lt1"/>
+          </a:fontRef>
+        </p:style>
+        <p:txBody>
+          <a:bodyPr rtlCol="0" anchor="ctr"/>
+          <a:lstStyle/>
+          <a:p>
+            <a:pPr algn="ctr"/>
+          </a:p>
+        </p:txBody>
+      </p:sp>
+      <p:sp>
+        <p:nvSpPr>
+          <p:cNvPr id="72" name="Rounded Rectangle 71"/>
+          <p:cNvSpPr/>
+          <p:nvPr/>
+        </p:nvSpPr>
+        <p:spPr>
+          <a:xfrm>
+            <a:off x="10561320" y="2240280"/>
+            <a:ext cx="411480" cy="54864"/>
+          </a:xfrm>
+          <a:prstGeom prst="roundRect">
+            <a:avLst>
+              <a:gd name="adj" fmla="val 50000"/>
+            </a:avLst>
+          </a:prstGeom>
+          <a:solidFill>
+            <a:srgbClr val="DDDDDD"/>
+          </a:solidFill>
+          <a:ln>
+            <a:noFill/>
+          </a:ln>
+          <a:effectLst/>
+        </p:spPr>
+        <p:style>
+          <a:lnRef idx="1">
+            <a:schemeClr val="accent1"/>
+          </a:lnRef>
+          <a:fillRef idx="3">
+            <a:schemeClr val="accent1"/>
+          </a:fillRef>
+          <a:effectRef idx="2">
+            <a:schemeClr val="accent1"/>
+          </a:effectRef>
+          <a:fontRef idx="minor">
+            <a:schemeClr val="lt1"/>
+          </a:fontRef>
+        </p:style>
+        <p:txBody>
+          <a:bodyPr rtlCol="0" anchor="ctr"/>
+          <a:lstStyle/>
+          <a:p>
+            <a:pPr algn="ctr"/>
+          </a:p>
+        </p:txBody>
+      </p:sp>
+      <p:sp>
+        <p:nvSpPr>
+          <p:cNvPr id="73" name="Oval 72"/>
+          <p:cNvSpPr/>
+          <p:nvPr/>
+        </p:nvSpPr>
+        <p:spPr>
+          <a:xfrm>
+            <a:off x="10442448" y="2336292"/>
+            <a:ext cx="82296" cy="82296"/>
+          </a:xfrm>
+          <a:prstGeom prst="ellipse">
+            <a:avLst/>
+          </a:prstGeom>
+          <a:solidFill>
+            <a:srgbClr val="F5F5F5"/>
+          </a:solidFill>
+          <a:ln w="9525">
+            <a:solidFill>
+              <a:srgbClr val="777777"/>
+            </a:solidFill>
+          </a:ln>
+          <a:effectLst/>
+        </p:spPr>
+        <p:style>
+          <a:lnRef idx="1">
+            <a:schemeClr val="accent1"/>
+          </a:lnRef>
+          <a:fillRef idx="3">
+            <a:schemeClr val="accent1"/>
+          </a:fillRef>
+          <a:effectRef idx="2">
+            <a:schemeClr val="accent1"/>
+          </a:effectRef>
+          <a:fontRef idx="minor">
+            <a:schemeClr val="lt1"/>
+          </a:fontRef>
+        </p:style>
+        <p:txBody>
+          <a:bodyPr rtlCol="0" anchor="ctr"/>
+          <a:lstStyle/>
+          <a:p>
+            <a:pPr algn="ctr"/>
+          </a:p>
+        </p:txBody>
+      </p:sp>
+      <p:sp>
+        <p:nvSpPr>
+          <p:cNvPr id="74" name="Rounded Rectangle 73"/>
+          <p:cNvSpPr/>
+          <p:nvPr/>
+        </p:nvSpPr>
+        <p:spPr>
+          <a:xfrm>
+            <a:off x="10561320" y="2350008"/>
+            <a:ext cx="411480" cy="54864"/>
+          </a:xfrm>
+          <a:prstGeom prst="roundRect">
+            <a:avLst>
+              <a:gd name="adj" fmla="val 50000"/>
+            </a:avLst>
+          </a:prstGeom>
+          <a:solidFill>
+            <a:srgbClr val="F5F5F5"/>
+          </a:solidFill>
+          <a:ln w="9525">
+            <a:solidFill>
+              <a:srgbClr val="777777"/>
+            </a:solidFill>
+          </a:ln>
+          <a:effectLst/>
+        </p:spPr>
+        <p:style>
+          <a:lnRef idx="1">
+            <a:schemeClr val="accent1"/>
+          </a:lnRef>
+          <a:fillRef idx="3">
+            <a:schemeClr val="accent1"/>
+          </a:fillRef>
+          <a:effectRef idx="2">
+            <a:schemeClr val="accent1"/>
+          </a:effectRef>
+          <a:fontRef idx="minor">
+            <a:schemeClr val="lt1"/>
+          </a:fontRef>
+        </p:style>
+        <p:txBody>
+          <a:bodyPr rtlCol="0" anchor="ctr"/>
+          <a:lstStyle/>
+          <a:p>
+            <a:pPr algn="ctr"/>
+          </a:p>
+        </p:txBody>
+      </p:sp>
+      <p:sp>
+        <p:nvSpPr>
+          <p:cNvPr id="75" name="Rounded Rectangle 74"/>
+          <p:cNvSpPr/>
+          <p:nvPr/>
+        </p:nvSpPr>
+        <p:spPr>
+          <a:xfrm>
+            <a:off x="10570464" y="2436876"/>
+            <a:ext cx="457200" cy="73152"/>
+          </a:xfrm>
+          <a:prstGeom prst="roundRect">
+            <a:avLst>
+              <a:gd name="adj" fmla="val 35000"/>
+            </a:avLst>
+          </a:prstGeom>
+          <a:solidFill>
+            <a:srgbClr val="F6FFF6"/>
+          </a:solidFill>
+          <a:ln w="9525">
+            <a:solidFill>
+              <a:srgbClr val="52C41A"/>
+            </a:solidFill>
+          </a:ln>
+          <a:effectLst/>
+        </p:spPr>
+        <p:style>
+          <a:lnRef idx="1">
+            <a:schemeClr val="accent1"/>
+          </a:lnRef>
+          <a:fillRef idx="3">
+            <a:schemeClr val="accent1"/>
+          </a:fillRef>
+          <a:effectRef idx="2">
+            <a:schemeClr val="accent1"/>
+          </a:effectRef>
+          <a:fontRef idx="minor">
+            <a:schemeClr val="lt1"/>
+          </a:fontRef>
+        </p:style>
+        <p:txBody>
+          <a:bodyPr rtlCol="0" anchor="ctr"/>
+          <a:lstStyle/>
+          <a:p>
+            <a:pPr algn="ctr"/>
+          </a:p>
+        </p:txBody>
+      </p:sp>
+      <p:cxnSp>
+        <p:nvCxnSpPr>
+          <p:cNvPr id="76" name="Connector 75"/>
+          <p:cNvCxnSpPr/>
+          <p:nvPr/>
+        </p:nvCxnSpPr>
+        <p:spPr>
+          <a:xfrm>
+            <a:off x="7415784" y="1737360"/>
+            <a:ext cx="3026664" cy="0"/>
+          </a:xfrm>
+          <a:prstGeom prst="line">
+            <a:avLst/>
+          </a:prstGeom>
+          <a:ln w="19050">
+            <a:solidFill>
+              <a:srgbClr val="52C41A"/>
+            </a:solidFill>
+            <a:tailEnd type="triangle" w="med" len="med"/>
+          </a:ln>
+        </p:spPr>
+        <p:style>
+          <a:lnRef idx="2">
+            <a:schemeClr val="accent1"/>
+          </a:lnRef>
+          <a:fillRef idx="0">
+            <a:schemeClr val="accent1"/>
+          </a:fillRef>
+          <a:effectRef idx="1">
+            <a:schemeClr val="accent1"/>
+          </a:effectRef>
+          <a:fontRef idx="minor">
+            <a:schemeClr val="tx1"/>
+          </a:fontRef>
+        </p:style>
+      </p:cxnSp>
+      <p:sp>
+        <p:nvSpPr>
+          <p:cNvPr id="77" name="Oval 76"/>
+          <p:cNvSpPr/>
+          <p:nvPr/>
+        </p:nvSpPr>
+        <p:spPr>
+          <a:xfrm>
+            <a:off x="8869680" y="1677924"/>
+            <a:ext cx="118872" cy="118872"/>
+          </a:xfrm>
+          <a:prstGeom prst="ellipse">
+            <a:avLst/>
+          </a:prstGeom>
+          <a:solidFill>
+            <a:srgbClr val="52C41A"/>
+          </a:solidFill>
+          <a:ln>
+            <a:noFill/>
+          </a:ln>
+          <a:effectLst/>
+        </p:spPr>
+        <p:style>
+          <a:lnRef idx="1">
+            <a:schemeClr val="accent1"/>
+          </a:lnRef>
+          <a:fillRef idx="3">
+            <a:schemeClr val="accent1"/>
+          </a:fillRef>
+          <a:effectRef idx="2">
+            <a:schemeClr val="accent1"/>
+          </a:effectRef>
+          <a:fontRef idx="minor">
+            <a:schemeClr val="lt1"/>
+          </a:fontRef>
+        </p:style>
+        <p:txBody>
+          <a:bodyPr rtlCol="0" anchor="ctr"/>
+          <a:lstStyle/>
+          <a:p>
+            <a:pPr algn="ctr"/>
+          </a:p>
+        </p:txBody>
+      </p:sp>
+      <p:cxnSp>
+        <p:nvCxnSpPr>
+          <p:cNvPr id="78" name="Connector 77"/>
+          <p:cNvCxnSpPr/>
+          <p:nvPr/>
+        </p:nvCxnSpPr>
+        <p:spPr>
+          <a:xfrm>
+            <a:off x="7278624" y="1833372"/>
+            <a:ext cx="3163824" cy="0"/>
+          </a:xfrm>
+          <a:prstGeom prst="line">
+            <a:avLst/>
+          </a:prstGeom>
+          <a:ln w="19050">
+            <a:solidFill>
+              <a:srgbClr val="52C41A"/>
+            </a:solidFill>
+            <a:tailEnd type="triangle" w="med" len="med"/>
+          </a:ln>
+        </p:spPr>
+        <p:style>
+          <a:lnRef idx="2">
+            <a:schemeClr val="accent1"/>
+          </a:lnRef>
+          <a:fillRef idx="0">
+            <a:schemeClr val="accent1"/>
+          </a:fillRef>
+          <a:effectRef idx="1">
+            <a:schemeClr val="accent1"/>
+          </a:effectRef>
+          <a:fontRef idx="minor">
+            <a:schemeClr val="tx1"/>
+          </a:fontRef>
+        </p:style>
+      </p:cxnSp>
+      <p:sp>
+        <p:nvSpPr>
+          <p:cNvPr id="79" name="Oval 78"/>
+          <p:cNvSpPr/>
+          <p:nvPr/>
+        </p:nvSpPr>
+        <p:spPr>
+          <a:xfrm>
+            <a:off x="8801100" y="1773936"/>
+            <a:ext cx="118872" cy="118872"/>
+          </a:xfrm>
+          <a:prstGeom prst="ellipse">
+            <a:avLst/>
+          </a:prstGeom>
+          <a:solidFill>
+            <a:srgbClr val="52C41A"/>
+          </a:solidFill>
+          <a:ln>
+            <a:noFill/>
+          </a:ln>
+          <a:effectLst/>
+        </p:spPr>
+        <p:style>
+          <a:lnRef idx="1">
+            <a:schemeClr val="accent1"/>
+          </a:lnRef>
+          <a:fillRef idx="3">
+            <a:schemeClr val="accent1"/>
+          </a:fillRef>
+          <a:effectRef idx="2">
+            <a:schemeClr val="accent1"/>
+          </a:effectRef>
+          <a:fontRef idx="minor">
+            <a:schemeClr val="lt1"/>
+          </a:fontRef>
+        </p:style>
+        <p:txBody>
+          <a:bodyPr rtlCol="0" anchor="ctr"/>
+          <a:lstStyle/>
+          <a:p>
+            <a:pPr algn="ctr"/>
+          </a:p>
+        </p:txBody>
+      </p:sp>
+      <p:cxnSp>
+        <p:nvCxnSpPr>
+          <p:cNvPr id="80" name="Connector 79"/>
+          <p:cNvCxnSpPr/>
+          <p:nvPr/>
+        </p:nvCxnSpPr>
+        <p:spPr>
+          <a:xfrm>
+            <a:off x="7543800" y="2473452"/>
+            <a:ext cx="3026664" cy="0"/>
+          </a:xfrm>
+          <a:prstGeom prst="line">
+            <a:avLst/>
+          </a:prstGeom>
+          <a:ln w="19050">
+            <a:solidFill>
+              <a:srgbClr val="52C41A"/>
+            </a:solidFill>
+            <a:tailEnd type="triangle" w="med" len="med"/>
+          </a:ln>
+        </p:spPr>
+        <p:style>
+          <a:lnRef idx="2">
+            <a:schemeClr val="accent1"/>
+          </a:lnRef>
+          <a:fillRef idx="0">
+            <a:schemeClr val="accent1"/>
+          </a:fillRef>
+          <a:effectRef idx="1">
+            <a:schemeClr val="accent1"/>
+          </a:effectRef>
+          <a:fontRef idx="minor">
+            <a:schemeClr val="tx1"/>
+          </a:fontRef>
+        </p:style>
+      </p:cxnSp>
+      <p:sp>
+        <p:nvSpPr>
+          <p:cNvPr id="81" name="Oval 80"/>
+          <p:cNvSpPr/>
+          <p:nvPr/>
+        </p:nvSpPr>
+        <p:spPr>
+          <a:xfrm>
+            <a:off x="8997696" y="2414016"/>
+            <a:ext cx="118872" cy="118872"/>
+          </a:xfrm>
+          <a:prstGeom prst="ellipse">
+            <a:avLst/>
+          </a:prstGeom>
+          <a:solidFill>
+            <a:srgbClr val="52C41A"/>
+          </a:solidFill>
+          <a:ln>
+            <a:noFill/>
+          </a:ln>
+          <a:effectLst/>
+        </p:spPr>
+        <p:style>
+          <a:lnRef idx="1">
+            <a:schemeClr val="accent1"/>
+          </a:lnRef>
+          <a:fillRef idx="3">
+            <a:schemeClr val="accent1"/>
+          </a:fillRef>
+          <a:effectRef idx="2">
+            <a:schemeClr val="accent1"/>
+          </a:effectRef>
+          <a:fontRef idx="minor">
+            <a:schemeClr val="lt1"/>
+          </a:fontRef>
+        </p:style>
+        <p:txBody>
+          <a:bodyPr rtlCol="0" anchor="ctr"/>
+          <a:lstStyle/>
+          <a:p>
+            <a:pPr algn="ctr"/>
+          </a:p>
+        </p:txBody>
+      </p:sp>
+      <p:cxnSp>
+        <p:nvCxnSpPr>
+          <p:cNvPr id="82" name="Connector 81"/>
+          <p:cNvCxnSpPr/>
+          <p:nvPr/>
+        </p:nvCxnSpPr>
+        <p:spPr>
+          <a:xfrm>
+            <a:off x="7717535" y="2052828"/>
+            <a:ext cx="2724913" cy="0"/>
+          </a:xfrm>
+          <a:prstGeom prst="line">
+            <a:avLst/>
+          </a:prstGeom>
+          <a:ln w="12700">
+            <a:solidFill>
+              <a:srgbClr val="0067D1"/>
+            </a:solidFill>
+            <a:prstDash val="dash"/>
+          </a:ln>
+        </p:spPr>
+        <p:style>
+          <a:lnRef idx="2">
+            <a:schemeClr val="accent1"/>
+          </a:lnRef>
+          <a:fillRef idx="0">
+            <a:schemeClr val="accent1"/>
+          </a:fillRef>
+          <a:effectRef idx="1">
+            <a:schemeClr val="accent1"/>
+          </a:effectRef>
+          <a:fontRef idx="minor">
+            <a:schemeClr val="tx1"/>
+          </a:fontRef>
+        </p:style>
+      </p:cxnSp>
+      <p:cxnSp>
+        <p:nvCxnSpPr>
+          <p:cNvPr id="83" name="Connector 82"/>
+          <p:cNvCxnSpPr/>
+          <p:nvPr/>
+        </p:nvCxnSpPr>
+        <p:spPr>
+          <a:xfrm>
+            <a:off x="7379208" y="1995678"/>
+            <a:ext cx="3118104" cy="0"/>
+          </a:xfrm>
+          <a:prstGeom prst="line">
+            <a:avLst/>
+          </a:prstGeom>
+          <a:ln w="12700">
+            <a:solidFill>
+              <a:srgbClr val="0067D1"/>
+            </a:solidFill>
+            <a:prstDash val="dash"/>
+          </a:ln>
+        </p:spPr>
+        <p:style>
+          <a:lnRef idx="2">
+            <a:schemeClr val="accent1"/>
+          </a:lnRef>
+          <a:fillRef idx="0">
+            <a:schemeClr val="accent1"/>
+          </a:fillRef>
+          <a:effectRef idx="1">
+            <a:schemeClr val="accent1"/>
+          </a:effectRef>
+          <a:fontRef idx="minor">
+            <a:schemeClr val="tx1"/>
+          </a:fontRef>
+        </p:style>
+      </p:cxnSp>
+      <p:cxnSp>
+        <p:nvCxnSpPr>
+          <p:cNvPr id="84" name="Connector 83"/>
+          <p:cNvCxnSpPr/>
+          <p:nvPr/>
+        </p:nvCxnSpPr>
+        <p:spPr>
+          <a:xfrm>
+            <a:off x="7488936" y="2267712"/>
+            <a:ext cx="3072384" cy="0"/>
+          </a:xfrm>
+          <a:prstGeom prst="line">
+            <a:avLst/>
+          </a:prstGeom>
+          <a:ln w="12700">
+            <a:solidFill>
+              <a:srgbClr val="0067D1"/>
+            </a:solidFill>
+            <a:prstDash val="dash"/>
+          </a:ln>
+        </p:spPr>
+        <p:style>
+          <a:lnRef idx="2">
+            <a:schemeClr val="accent1"/>
+          </a:lnRef>
+          <a:fillRef idx="0">
+            <a:schemeClr val="accent1"/>
+          </a:fillRef>
+          <a:effectRef idx="1">
+            <a:schemeClr val="accent1"/>
+          </a:effectRef>
+          <a:fontRef idx="minor">
+            <a:schemeClr val="tx1"/>
+          </a:fontRef>
+        </p:style>
+      </p:cxnSp>
+      <p:cxnSp>
+        <p:nvCxnSpPr>
+          <p:cNvPr id="85" name="Connector 84"/>
+          <p:cNvCxnSpPr/>
+          <p:nvPr/>
+        </p:nvCxnSpPr>
+        <p:spPr>
+          <a:xfrm>
+            <a:off x="7488936" y="2377440"/>
+            <a:ext cx="3072384" cy="0"/>
+          </a:xfrm>
+          <a:prstGeom prst="line">
+            <a:avLst/>
+          </a:prstGeom>
+          <a:ln w="9525">
+            <a:solidFill>
+              <a:srgbClr val="777777"/>
+            </a:solidFill>
+            <a:prstDash val="dash"/>
+          </a:ln>
+        </p:spPr>
+        <p:style>
+          <a:lnRef idx="2">
+            <a:schemeClr val="accent1"/>
+          </a:lnRef>
+          <a:fillRef idx="0">
+            <a:schemeClr val="accent1"/>
+          </a:fillRef>
+          <a:effectRef idx="1">
+            <a:schemeClr val="accent1"/>
+          </a:effectRef>
+          <a:fontRef idx="minor">
+            <a:schemeClr val="tx1"/>
+          </a:fontRef>
+        </p:style>
+      </p:cxnSp>
+      <p:sp>
+        <p:nvSpPr>
+          <p:cNvPr id="86" name="TextBox 85"/>
+          <p:cNvSpPr txBox="1"/>
+          <p:nvPr/>
+        </p:nvSpPr>
+        <p:spPr>
+          <a:xfrm>
+            <a:off x="8933688" y="2286000"/>
+            <a:ext cx="182880" cy="182880"/>
+          </a:xfrm>
+          <a:prstGeom prst="rect">
+            <a:avLst/>
+          </a:prstGeom>
+          <a:noFill/>
+        </p:spPr>
+        <p:txBody>
+          <a:bodyPr wrap="square" anchor="ctr" lIns="25400" rIns="25400" tIns="12700" bIns="12700">
+            <a:spAutoFit/>
+          </a:bodyPr>
+          <a:lstStyle/>
+          <a:p>
+            <a:pPr algn="ctr">
               <a:lnSpc>
-                <a:spcPct val="125000"/>
+                <a:spcPct val="100000"/>
               </a:lnSpc>
               <a:spcAft>
                 <a:spcPts val="400"/>
               </a:spcAft>
             </a:pPr>
             <a:r>
-              <a:rPr sz="1250" b="1">
+              <a:rPr sz="1100" b="1">
                 <a:solidFill>
-                  <a:srgbClr val="191919"/>
+                  <a:srgbClr val="777777"/>
                 </a:solidFill>
                 <a:latin typeface="Microsoft YaHei"/>
                 <a:ea typeface="Microsoft YaHei"/>
                 <a:cs typeface="Microsoft YaHei"/>
               </a:rPr>
-              <a:t>整体匹配准确率断崖式下降</a:t>
-            </a:r>
-          </a:p>
-        </p:txBody>
-      </p:sp>
-      <p:sp>
-        <p:nvSpPr>
-          <p:cNvPr id="8" name="Right Arrow 7"/>
+              <a:t>×</a:t>
+            </a:r>
+          </a:p>
+        </p:txBody>
+      </p:sp>
+      <p:sp>
+        <p:nvSpPr>
+          <p:cNvPr id="87" name="TextBox 86"/>
+          <p:cNvSpPr txBox="1"/>
+          <p:nvPr/>
+        </p:nvSpPr>
+        <p:spPr>
+          <a:xfrm>
+            <a:off x="6793992" y="2633472"/>
+            <a:ext cx="4617720" cy="292608"/>
+          </a:xfrm>
+          <a:prstGeom prst="rect">
+            <a:avLst/>
+          </a:prstGeom>
+          <a:noFill/>
+        </p:spPr>
+        <p:txBody>
+          <a:bodyPr wrap="square" anchor="t" lIns="25400" rIns="25400" tIns="12700" bIns="12700">
+            <a:spAutoFit/>
+          </a:bodyPr>
+          <a:lstStyle/>
+          <a:p>
+            <a:pPr algn="ctr">
+              <a:lnSpc>
+                <a:spcPct val="110000"/>
+              </a:lnSpc>
+              <a:spcAft>
+                <a:spcPts val="400"/>
+              </a:spcAft>
+            </a:pPr>
+            <a:r>
+              <a:rPr sz="950" b="0">
+                <a:solidFill>
+                  <a:srgbClr val="777777"/>
+                </a:solidFill>
+                <a:latin typeface="Microsoft YaHei"/>
+                <a:ea typeface="Microsoft YaHei"/>
+                <a:cs typeface="Microsoft YaHei"/>
+              </a:rPr>
+              <a:t>绿实线=可信文本锚点先锁定，蓝虚线=周边节点按相对位置挂靠，灰 ×=失败不扩散</a:t>
+            </a:r>
+          </a:p>
+        </p:txBody>
+      </p:sp>
+      <p:sp>
+        <p:nvSpPr>
+          <p:cNvPr id="88" name="Rectangle 87"/>
           <p:cNvSpPr/>
           <p:nvPr/>
         </p:nvSpPr>
         <p:spPr>
           <a:xfrm>
-            <a:off x="5815584" y="2450592"/>
-            <a:ext cx="566928" cy="365760"/>
-          </a:xfrm>
-          <a:prstGeom prst="rightArrow">
-            <a:avLst>
-              <a:gd name="adj1" fmla="val 55000"/>
-              <a:gd name="adj2" fmla="val 55000"/>
-            </a:avLst>
+            <a:off x="548640" y="3246120"/>
+            <a:ext cx="82296" cy="274320"/>
+          </a:xfrm>
+          <a:prstGeom prst="rect">
+            <a:avLst/>
           </a:prstGeom>
           <a:solidFill>
             <a:srgbClr val="0067D1"/>
@@ -3435,62 +6923,14 @@
       </p:sp>
       <p:sp>
         <p:nvSpPr>
-          <p:cNvPr id="9" name="Rounded Rectangle 8"/>
-          <p:cNvSpPr/>
-          <p:nvPr/>
-        </p:nvSpPr>
-        <p:spPr>
-          <a:xfrm>
-            <a:off x="6565392" y="1645920"/>
-            <a:ext cx="5074920" cy="1965960"/>
-          </a:xfrm>
-          <a:prstGeom prst="roundRect">
-            <a:avLst>
-              <a:gd name="adj" fmla="val 6000"/>
-            </a:avLst>
-          </a:prstGeom>
-          <a:solidFill>
-            <a:srgbClr val="F6FFF6"/>
-          </a:solidFill>
-          <a:ln w="12700">
-            <a:solidFill>
-              <a:srgbClr val="52C41A"/>
-            </a:solidFill>
-          </a:ln>
-          <a:effectLst/>
-        </p:spPr>
-        <p:style>
-          <a:lnRef idx="1">
-            <a:schemeClr val="accent1"/>
-          </a:lnRef>
-          <a:fillRef idx="3">
-            <a:schemeClr val="accent1"/>
-          </a:fillRef>
-          <a:effectRef idx="2">
-            <a:schemeClr val="accent1"/>
-          </a:effectRef>
-          <a:fontRef idx="minor">
-            <a:schemeClr val="lt1"/>
-          </a:fontRef>
-        </p:style>
-        <p:txBody>
-          <a:bodyPr rtlCol="0" anchor="ctr"/>
-          <a:lstStyle/>
-          <a:p>
-            <a:pPr algn="ctr"/>
-          </a:p>
-        </p:txBody>
-      </p:sp>
-      <p:sp>
-        <p:nvSpPr>
-          <p:cNvPr id="10" name="TextBox 9"/>
+          <p:cNvPr id="89" name="TextBox 88"/>
           <p:cNvSpPr txBox="1"/>
           <p:nvPr/>
         </p:nvSpPr>
         <p:spPr>
           <a:xfrm>
-            <a:off x="6885432" y="1847088"/>
-            <a:ext cx="4480560" cy="365760"/>
+            <a:off x="749808" y="3200400"/>
+            <a:ext cx="8229600" cy="384048"/>
           </a:xfrm>
           <a:prstGeom prst="rect">
             <a:avLst/>
@@ -3514,101 +6954,40 @@
             <a:r>
               <a:rPr sz="1500" b="1">
                 <a:solidFill>
-                  <a:srgbClr val="52C41A"/>
-                </a:solidFill>
-                <a:latin typeface="Microsoft YaHei"/>
-                <a:ea typeface="Microsoft YaHei"/>
-                <a:cs typeface="Microsoft YaHei"/>
-              </a:rPr>
-              <a:t>After：可信文本相对位置 + 兜底匹配（当前）</a:t>
-            </a:r>
-          </a:p>
-        </p:txBody>
-      </p:sp>
-      <p:sp>
-        <p:nvSpPr>
-          <p:cNvPr id="11" name="TextBox 10"/>
-          <p:cNvSpPr txBox="1"/>
-          <p:nvPr/>
-        </p:nvSpPr>
-        <p:spPr>
-          <a:xfrm>
-            <a:off x="6885432" y="2359152"/>
-            <a:ext cx="4480560" cy="1097280"/>
-          </a:xfrm>
-          <a:prstGeom prst="rect">
-            <a:avLst/>
-          </a:prstGeom>
-          <a:noFill/>
-        </p:spPr>
-        <p:txBody>
-          <a:bodyPr wrap="square" anchor="t" lIns="25400" rIns="25400" tIns="12700" bIns="12700">
-            <a:spAutoFit/>
-          </a:bodyPr>
-          <a:lstStyle/>
-          <a:p>
-            <a:pPr algn="l">
-              <a:lnSpc>
-                <a:spcPct val="125000"/>
-              </a:lnSpc>
-              <a:spcAft>
-                <a:spcPts val="400"/>
-              </a:spcAft>
-            </a:pPr>
-            <a:r>
-              <a:rPr sz="1250" b="0">
-                <a:solidFill>
                   <a:srgbClr val="191919"/>
                 </a:solidFill>
                 <a:latin typeface="Microsoft YaHei"/>
                 <a:ea typeface="Microsoft YaHei"/>
                 <a:cs typeface="Microsoft YaHei"/>
               </a:rPr>
-              <a:t>由高置信文本锚点驱动匹配，准确率大大提高，</a:t>
-            </a:r>
-          </a:p>
-          <a:p>
-            <a:pPr algn="l">
-              <a:lnSpc>
-                <a:spcPct val="125000"/>
-              </a:lnSpc>
-              <a:spcAft>
-                <a:spcPts val="400"/>
-              </a:spcAft>
-            </a:pPr>
-            <a:r>
-              <a:rPr sz="1250" b="1">
-                <a:solidFill>
-                  <a:srgbClr val="191919"/>
-                </a:solidFill>
-                <a:latin typeface="Microsoft YaHei"/>
-                <a:ea typeface="Microsoft YaHei"/>
-                <a:cs typeface="Microsoft YaHei"/>
-              </a:rPr>
-              <a:t>局部失误不再连坐整体</a:t>
-            </a:r>
-          </a:p>
-        </p:txBody>
-      </p:sp>
-      <p:sp>
-        <p:nvSpPr>
-          <p:cNvPr id="12" name="Rectangle 11"/>
+              <a:t>前后案例对比</a:t>
+            </a:r>
+          </a:p>
+        </p:txBody>
+      </p:sp>
+      <p:sp>
+        <p:nvSpPr>
+          <p:cNvPr id="90" name="Rounded Rectangle 89"/>
           <p:cNvSpPr/>
           <p:nvPr/>
         </p:nvSpPr>
         <p:spPr>
           <a:xfrm>
-            <a:off x="548640" y="4032503"/>
-            <a:ext cx="82296" cy="292608"/>
-          </a:xfrm>
-          <a:prstGeom prst="rect">
-            <a:avLst/>
-          </a:prstGeom>
-          <a:solidFill>
-            <a:srgbClr val="0067D1"/>
-          </a:solidFill>
-          <a:ln>
-            <a:noFill/>
+            <a:off x="548640" y="3584448"/>
+            <a:ext cx="5074920" cy="2697480"/>
+          </a:xfrm>
+          <a:prstGeom prst="roundRect">
+            <a:avLst>
+              <a:gd name="adj" fmla="val 6000"/>
+            </a:avLst>
+          </a:prstGeom>
+          <a:solidFill>
+            <a:srgbClr val="FFF1F0"/>
+          </a:solidFill>
+          <a:ln w="12700">
+            <a:solidFill>
+              <a:srgbClr val="FF4D4F"/>
+            </a:solidFill>
           </a:ln>
           <a:effectLst/>
         </p:spPr>
@@ -3636,14 +7015,14 @@
       </p:sp>
       <p:sp>
         <p:nvSpPr>
-          <p:cNvPr id="13" name="TextBox 12"/>
+          <p:cNvPr id="91" name="TextBox 90"/>
           <p:cNvSpPr txBox="1"/>
           <p:nvPr/>
         </p:nvSpPr>
         <p:spPr>
           <a:xfrm>
-            <a:off x="749808" y="3977639"/>
-            <a:ext cx="8229600" cy="411480"/>
+            <a:off x="804672" y="3685032"/>
+            <a:ext cx="4572000" cy="310896"/>
           </a:xfrm>
           <a:prstGeom prst="rect">
             <a:avLst/>
@@ -3665,29 +7044,134 @@
               </a:spcAft>
             </a:pPr>
             <a:r>
-              <a:rPr sz="1700" b="1">
+              <a:rPr sz="1300" b="1">
                 <a:solidFill>
-                  <a:srgbClr val="191919"/>
+                  <a:srgbClr val="FF4D4F"/>
                 </a:solidFill>
                 <a:latin typeface="Microsoft YaHei"/>
                 <a:ea typeface="Microsoft YaHei"/>
                 <a:cs typeface="Microsoft YaHei"/>
               </a:rPr>
-              <a:t>提升二：节点取值准确性</a:t>
-            </a:r>
-          </a:p>
-        </p:txBody>
-      </p:sp>
-      <p:sp>
-        <p:nvSpPr>
-          <p:cNvPr id="14" name="Rounded Rectangle 13"/>
+              <a:t>提升前案例（分块匹配）</a:t>
+            </a:r>
+          </a:p>
+        </p:txBody>
+      </p:sp>
+      <p:sp>
+        <p:nvSpPr>
+          <p:cNvPr id="92" name="Rectangle 91"/>
           <p:cNvSpPr/>
           <p:nvPr/>
         </p:nvSpPr>
         <p:spPr>
           <a:xfrm>
-            <a:off x="548640" y="4480560"/>
-            <a:ext cx="5074920" cy="1965960"/>
+            <a:off x="777240" y="4087368"/>
+            <a:ext cx="4617720" cy="2057400"/>
+          </a:xfrm>
+          <a:prstGeom prst="rect">
+            <a:avLst/>
+          </a:prstGeom>
+          <a:solidFill>
+            <a:srgbClr val="F5F5F5"/>
+          </a:solidFill>
+          <a:ln w="12700">
+            <a:solidFill>
+              <a:srgbClr val="D1D5DC"/>
+            </a:solidFill>
+            <a:prstDash val="dash"/>
+          </a:ln>
+          <a:effectLst/>
+        </p:spPr>
+        <p:style>
+          <a:lnRef idx="1">
+            <a:schemeClr val="accent1"/>
+          </a:lnRef>
+          <a:fillRef idx="3">
+            <a:schemeClr val="accent1"/>
+          </a:fillRef>
+          <a:effectRef idx="2">
+            <a:schemeClr val="accent1"/>
+          </a:effectRef>
+          <a:fontRef idx="minor">
+            <a:schemeClr val="lt1"/>
+          </a:fontRef>
+        </p:style>
+        <p:txBody>
+          <a:bodyPr rtlCol="0" anchor="ctr" wrap="square"/>
+          <a:lstStyle/>
+          <a:p>
+            <a:pPr algn="ctr"/>
+            <a:r>
+              <a:rPr sz="1100" b="0">
+                <a:solidFill>
+                  <a:srgbClr val="777777"/>
+                </a:solidFill>
+                <a:latin typeface="Microsoft YaHei"/>
+                <a:ea typeface="Microsoft YaHei"/>
+                <a:cs typeface="Microsoft YaHei"/>
+              </a:rPr>
+              <a:t>提升前案例截图占位</a:t>
+            </a:r>
+          </a:p>
+        </p:txBody>
+      </p:sp>
+      <p:sp>
+        <p:nvSpPr>
+          <p:cNvPr id="93" name="Right Arrow 92"/>
+          <p:cNvSpPr/>
+          <p:nvPr/>
+        </p:nvSpPr>
+        <p:spPr>
+          <a:xfrm>
+            <a:off x="5815584" y="4754880"/>
+            <a:ext cx="566928" cy="365760"/>
+          </a:xfrm>
+          <a:prstGeom prst="rightArrow">
+            <a:avLst>
+              <a:gd name="adj1" fmla="val 55000"/>
+              <a:gd name="adj2" fmla="val 55000"/>
+            </a:avLst>
+          </a:prstGeom>
+          <a:solidFill>
+            <a:srgbClr val="0067D1"/>
+          </a:solidFill>
+          <a:ln>
+            <a:noFill/>
+          </a:ln>
+          <a:effectLst/>
+        </p:spPr>
+        <p:style>
+          <a:lnRef idx="1">
+            <a:schemeClr val="accent1"/>
+          </a:lnRef>
+          <a:fillRef idx="3">
+            <a:schemeClr val="accent1"/>
+          </a:fillRef>
+          <a:effectRef idx="2">
+            <a:schemeClr val="accent1"/>
+          </a:effectRef>
+          <a:fontRef idx="minor">
+            <a:schemeClr val="lt1"/>
+          </a:fontRef>
+        </p:style>
+        <p:txBody>
+          <a:bodyPr rtlCol="0" anchor="ctr"/>
+          <a:lstStyle/>
+          <a:p>
+            <a:pPr algn="ctr"/>
+          </a:p>
+        </p:txBody>
+      </p:sp>
+      <p:sp>
+        <p:nvSpPr>
+          <p:cNvPr id="94" name="Rounded Rectangle 93"/>
+          <p:cNvSpPr/>
+          <p:nvPr/>
+        </p:nvSpPr>
+        <p:spPr>
+          <a:xfrm>
+            <a:off x="6565392" y="3584448"/>
+            <a:ext cx="5074920" cy="2697480"/>
           </a:xfrm>
           <a:prstGeom prst="roundRect">
             <a:avLst>
@@ -3695,11 +7179,11 @@
             </a:avLst>
           </a:prstGeom>
           <a:solidFill>
-            <a:srgbClr val="FFF1F0"/>
+            <a:srgbClr val="F6FFF6"/>
           </a:solidFill>
           <a:ln w="12700">
             <a:solidFill>
-              <a:srgbClr val="FF4D4F"/>
+              <a:srgbClr val="52C41A"/>
             </a:solidFill>
           </a:ln>
           <a:effectLst/>
@@ -3728,14 +7212,14 @@
       </p:sp>
       <p:sp>
         <p:nvSpPr>
-          <p:cNvPr id="15" name="TextBox 14"/>
+          <p:cNvPr id="95" name="TextBox 94"/>
           <p:cNvSpPr txBox="1"/>
           <p:nvPr/>
         </p:nvSpPr>
         <p:spPr>
           <a:xfrm>
-            <a:off x="868680" y="4681728"/>
-            <a:ext cx="4480560" cy="365760"/>
+            <a:off x="6821424" y="3685032"/>
+            <a:ext cx="4572000" cy="310896"/>
           </a:xfrm>
           <a:prstGeom prst="rect">
             <a:avLst/>
@@ -3757,211 +7241,7 @@
               </a:spcAft>
             </a:pPr>
             <a:r>
-              <a:rPr sz="1500" b="1">
-                <a:solidFill>
-                  <a:srgbClr val="FF4D4F"/>
-                </a:solidFill>
-                <a:latin typeface="Microsoft YaHei"/>
-                <a:ea typeface="Microsoft YaHei"/>
-                <a:cs typeface="Microsoft YaHei"/>
-              </a:rPr>
-              <a:t>Before：多层节点直接取值</a:t>
-            </a:r>
-          </a:p>
-        </p:txBody>
-      </p:sp>
-      <p:sp>
-        <p:nvSpPr>
-          <p:cNvPr id="16" name="TextBox 15"/>
-          <p:cNvSpPr txBox="1"/>
-          <p:nvPr/>
-        </p:nvSpPr>
-        <p:spPr>
-          <a:xfrm>
-            <a:off x="868680" y="5193792"/>
-            <a:ext cx="4480560" cy="1097280"/>
-          </a:xfrm>
-          <a:prstGeom prst="rect">
-            <a:avLst/>
-          </a:prstGeom>
-          <a:noFill/>
-        </p:spPr>
-        <p:txBody>
-          <a:bodyPr wrap="square" anchor="t" lIns="25400" rIns="25400" tIns="12700" bIns="12700">
-            <a:spAutoFit/>
-          </a:bodyPr>
-          <a:lstStyle/>
-          <a:p>
-            <a:pPr algn="l">
-              <a:lnSpc>
-                <a:spcPct val="125000"/>
-              </a:lnSpc>
-              <a:spcAft>
-                <a:spcPts val="400"/>
-              </a:spcAft>
-            </a:pPr>
-            <a:r>
-              <a:rPr sz="1250" b="0">
-                <a:solidFill>
-                  <a:srgbClr val="191919"/>
-                </a:solidFill>
-                <a:latin typeface="Microsoft YaHei"/>
-                <a:ea typeface="Microsoft YaHei"/>
-                <a:cs typeface="Microsoft YaHei"/>
-              </a:rPr>
-              <a:t>同一位置存在很多节点、效果层层叠加，</a:t>
-            </a:r>
-          </a:p>
-          <a:p>
-            <a:pPr algn="l">
-              <a:lnSpc>
-                <a:spcPct val="125000"/>
-              </a:lnSpc>
-              <a:spcAft>
-                <a:spcPts val="400"/>
-              </a:spcAft>
-            </a:pPr>
-            <a:r>
-              <a:rPr sz="1250" b="1">
-                <a:solidFill>
-                  <a:srgbClr val="191919"/>
-                </a:solidFill>
-                <a:latin typeface="Microsoft YaHei"/>
-                <a:ea typeface="Microsoft YaHei"/>
-                <a:cs typeface="Microsoft YaHei"/>
-              </a:rPr>
-              <a:t>取值易失真，节点数据不准确</a:t>
-            </a:r>
-          </a:p>
-        </p:txBody>
-      </p:sp>
-      <p:sp>
-        <p:nvSpPr>
-          <p:cNvPr id="17" name="Right Arrow 16"/>
-          <p:cNvSpPr/>
-          <p:nvPr/>
-        </p:nvSpPr>
-        <p:spPr>
-          <a:xfrm>
-            <a:off x="5815584" y="5285232"/>
-            <a:ext cx="566928" cy="365760"/>
-          </a:xfrm>
-          <a:prstGeom prst="rightArrow">
-            <a:avLst>
-              <a:gd name="adj1" fmla="val 55000"/>
-              <a:gd name="adj2" fmla="val 55000"/>
-            </a:avLst>
-          </a:prstGeom>
-          <a:solidFill>
-            <a:srgbClr val="0067D1"/>
-          </a:solidFill>
-          <a:ln>
-            <a:noFill/>
-          </a:ln>
-          <a:effectLst/>
-        </p:spPr>
-        <p:style>
-          <a:lnRef idx="1">
-            <a:schemeClr val="accent1"/>
-          </a:lnRef>
-          <a:fillRef idx="3">
-            <a:schemeClr val="accent1"/>
-          </a:fillRef>
-          <a:effectRef idx="2">
-            <a:schemeClr val="accent1"/>
-          </a:effectRef>
-          <a:fontRef idx="minor">
-            <a:schemeClr val="lt1"/>
-          </a:fontRef>
-        </p:style>
-        <p:txBody>
-          <a:bodyPr rtlCol="0" anchor="ctr"/>
-          <a:lstStyle/>
-          <a:p>
-            <a:pPr algn="ctr"/>
-          </a:p>
-        </p:txBody>
-      </p:sp>
-      <p:sp>
-        <p:nvSpPr>
-          <p:cNvPr id="18" name="Rounded Rectangle 17"/>
-          <p:cNvSpPr/>
-          <p:nvPr/>
-        </p:nvSpPr>
-        <p:spPr>
-          <a:xfrm>
-            <a:off x="6565392" y="4480560"/>
-            <a:ext cx="5074920" cy="1965960"/>
-          </a:xfrm>
-          <a:prstGeom prst="roundRect">
-            <a:avLst>
-              <a:gd name="adj" fmla="val 6000"/>
-            </a:avLst>
-          </a:prstGeom>
-          <a:solidFill>
-            <a:srgbClr val="F6FFF6"/>
-          </a:solidFill>
-          <a:ln w="12700">
-            <a:solidFill>
-              <a:srgbClr val="52C41A"/>
-            </a:solidFill>
-          </a:ln>
-          <a:effectLst/>
-        </p:spPr>
-        <p:style>
-          <a:lnRef idx="1">
-            <a:schemeClr val="accent1"/>
-          </a:lnRef>
-          <a:fillRef idx="3">
-            <a:schemeClr val="accent1"/>
-          </a:fillRef>
-          <a:effectRef idx="2">
-            <a:schemeClr val="accent1"/>
-          </a:effectRef>
-          <a:fontRef idx="minor">
-            <a:schemeClr val="lt1"/>
-          </a:fontRef>
-        </p:style>
-        <p:txBody>
-          <a:bodyPr rtlCol="0" anchor="ctr"/>
-          <a:lstStyle/>
-          <a:p>
-            <a:pPr algn="ctr"/>
-          </a:p>
-        </p:txBody>
-      </p:sp>
-      <p:sp>
-        <p:nvSpPr>
-          <p:cNvPr id="19" name="TextBox 18"/>
-          <p:cNvSpPr txBox="1"/>
-          <p:nvPr/>
-        </p:nvSpPr>
-        <p:spPr>
-          <a:xfrm>
-            <a:off x="6885432" y="4681728"/>
-            <a:ext cx="4480560" cy="365760"/>
-          </a:xfrm>
-          <a:prstGeom prst="rect">
-            <a:avLst/>
-          </a:prstGeom>
-          <a:noFill/>
-        </p:spPr>
-        <p:txBody>
-          <a:bodyPr wrap="square" anchor="t" lIns="25400" rIns="25400" tIns="12700" bIns="12700">
-            <a:spAutoFit/>
-          </a:bodyPr>
-          <a:lstStyle/>
-          <a:p>
-            <a:pPr algn="l">
-              <a:lnSpc>
-                <a:spcPct val="100000"/>
-              </a:lnSpc>
-              <a:spcAft>
-                <a:spcPts val="400"/>
-              </a:spcAft>
-            </a:pPr>
-            <a:r>
-              <a:rPr sz="1500" b="1">
+              <a:rPr sz="1300" b="1">
                 <a:solidFill>
                   <a:srgbClr val="52C41A"/>
                 </a:solidFill>
@@ -3969,72 +7249,65 @@
                 <a:ea typeface="Microsoft YaHei"/>
                 <a:cs typeface="Microsoft YaHei"/>
               </a:rPr>
-              <a:t>After：智能合并（当前）</a:t>
-            </a:r>
-          </a:p>
-        </p:txBody>
-      </p:sp>
-      <p:sp>
-        <p:nvSpPr>
-          <p:cNvPr id="20" name="TextBox 19"/>
-          <p:cNvSpPr txBox="1"/>
-          <p:nvPr/>
-        </p:nvSpPr>
-        <p:spPr>
-          <a:xfrm>
-            <a:off x="6885432" y="5193792"/>
-            <a:ext cx="4480560" cy="1097280"/>
+              <a:t>提升后案例（当前算法）</a:t>
+            </a:r>
+          </a:p>
+        </p:txBody>
+      </p:sp>
+      <p:sp>
+        <p:nvSpPr>
+          <p:cNvPr id="96" name="Rectangle 95"/>
+          <p:cNvSpPr/>
+          <p:nvPr/>
+        </p:nvSpPr>
+        <p:spPr>
+          <a:xfrm>
+            <a:off x="6793992" y="4087368"/>
+            <a:ext cx="4617720" cy="2057400"/>
           </a:xfrm>
           <a:prstGeom prst="rect">
             <a:avLst/>
           </a:prstGeom>
-          <a:noFill/>
-        </p:spPr>
-        <p:txBody>
-          <a:bodyPr wrap="square" anchor="t" lIns="25400" rIns="25400" tIns="12700" bIns="12700">
-            <a:spAutoFit/>
-          </a:bodyPr>
-          <a:lstStyle/>
-          <a:p>
-            <a:pPr algn="l">
-              <a:lnSpc>
-                <a:spcPct val="125000"/>
-              </a:lnSpc>
-              <a:spcAft>
-                <a:spcPts val="400"/>
-              </a:spcAft>
-            </a:pPr>
-            <a:r>
-              <a:rPr sz="1250" b="0">
+          <a:solidFill>
+            <a:srgbClr val="F5F5F5"/>
+          </a:solidFill>
+          <a:ln w="12700">
+            <a:solidFill>
+              <a:srgbClr val="D1D5DC"/>
+            </a:solidFill>
+            <a:prstDash val="dash"/>
+          </a:ln>
+          <a:effectLst/>
+        </p:spPr>
+        <p:style>
+          <a:lnRef idx="1">
+            <a:schemeClr val="accent1"/>
+          </a:lnRef>
+          <a:fillRef idx="3">
+            <a:schemeClr val="accent1"/>
+          </a:fillRef>
+          <a:effectRef idx="2">
+            <a:schemeClr val="accent1"/>
+          </a:effectRef>
+          <a:fontRef idx="minor">
+            <a:schemeClr val="lt1"/>
+          </a:fontRef>
+        </p:style>
+        <p:txBody>
+          <a:bodyPr rtlCol="0" anchor="ctr" wrap="square"/>
+          <a:lstStyle/>
+          <a:p>
+            <a:pPr algn="ctr"/>
+            <a:r>
+              <a:rPr sz="1100" b="0">
                 <a:solidFill>
-                  <a:srgbClr val="191919"/>
+                  <a:srgbClr val="777777"/>
                 </a:solidFill>
                 <a:latin typeface="Microsoft YaHei"/>
                 <a:ea typeface="Microsoft YaHei"/>
                 <a:cs typeface="Microsoft YaHei"/>
               </a:rPr>
-              <a:t>算法对同位置叠加节点做智能合并，</a:t>
-            </a:r>
-          </a:p>
-          <a:p>
-            <a:pPr algn="l">
-              <a:lnSpc>
-                <a:spcPct val="125000"/>
-              </a:lnSpc>
-              <a:spcAft>
-                <a:spcPts val="400"/>
-              </a:spcAft>
-            </a:pPr>
-            <a:r>
-              <a:rPr sz="1250" b="1">
-                <a:solidFill>
-                  <a:srgbClr val="191919"/>
-                </a:solidFill>
-                <a:latin typeface="Microsoft YaHei"/>
-                <a:ea typeface="Microsoft YaHei"/>
-                <a:cs typeface="Microsoft YaHei"/>
-              </a:rPr>
-              <a:t>节点数据更准确，比对误报更少</a:t>
+              <a:t>提升后案例截图占位</a:t>
             </a:r>
           </a:p>
         </p:txBody>
@@ -4073,8 +7346,8 @@
         </p:nvSpPr>
         <p:spPr>
           <a:xfrm>
-            <a:off x="548640" y="292608"/>
-            <a:ext cx="11091672" cy="640080"/>
+            <a:off x="548640" y="146304"/>
+            <a:ext cx="11091672" cy="457200"/>
           </a:xfrm>
           <a:prstGeom prst="rect">
             <a:avLst/>
@@ -4096,7 +7369,7 @@
               </a:spcAft>
             </a:pPr>
             <a:r>
-              <a:rPr sz="3000" b="1">
+              <a:rPr sz="2400" b="1">
                 <a:solidFill>
                   <a:srgbClr val="0067D1"/>
                 </a:solidFill>
@@ -4104,30 +7377,34 @@
                 <a:ea typeface="Microsoft YaHei"/>
                 <a:cs typeface="Microsoft YaHei"/>
               </a:rPr>
-              <a:t>当前算法要点</a:t>
-            </a:r>
-          </a:p>
-        </p:txBody>
-      </p:sp>
-      <p:sp>
-        <p:nvSpPr>
-          <p:cNvPr id="3" name="Rectangle 2"/>
+              <a:t>技术提升二：容器节点</a:t>
+            </a:r>
+          </a:p>
+        </p:txBody>
+      </p:sp>
+      <p:sp>
+        <p:nvSpPr>
+          <p:cNvPr id="3" name="Rounded Rectangle 2"/>
           <p:cNvSpPr/>
           <p:nvPr/>
         </p:nvSpPr>
         <p:spPr>
           <a:xfrm>
-            <a:off x="548640" y="1197864"/>
-            <a:ext cx="82296" cy="292608"/>
-          </a:xfrm>
-          <a:prstGeom prst="rect">
-            <a:avLst/>
-          </a:prstGeom>
-          <a:solidFill>
-            <a:srgbClr val="0067D1"/>
-          </a:solidFill>
-          <a:ln>
-            <a:noFill/>
+            <a:off x="548640" y="658368"/>
+            <a:ext cx="5074920" cy="2377440"/>
+          </a:xfrm>
+          <a:prstGeom prst="roundRect">
+            <a:avLst>
+              <a:gd name="adj" fmla="val 6000"/>
+            </a:avLst>
+          </a:prstGeom>
+          <a:solidFill>
+            <a:srgbClr val="FFF1F0"/>
+          </a:solidFill>
+          <a:ln w="12700">
+            <a:solidFill>
+              <a:srgbClr val="FF4D4F"/>
+            </a:solidFill>
           </a:ln>
           <a:effectLst/>
         </p:spPr>
@@ -4161,8 +7438,8 @@
         </p:nvSpPr>
         <p:spPr>
           <a:xfrm>
-            <a:off x="749808" y="1143000"/>
-            <a:ext cx="8229600" cy="411480"/>
+            <a:off x="804672" y="758952"/>
+            <a:ext cx="4572000" cy="329184"/>
           </a:xfrm>
           <a:prstGeom prst="rect">
             <a:avLst/>
@@ -4184,7 +7461,51 @@
               </a:spcAft>
             </a:pPr>
             <a:r>
-              <a:rPr sz="1700" b="1">
+              <a:rPr sz="1400" b="1">
+                <a:solidFill>
+                  <a:srgbClr val="FF4D4F"/>
+                </a:solidFill>
+                <a:latin typeface="Microsoft YaHei"/>
+                <a:ea typeface="Microsoft YaHei"/>
+                <a:cs typeface="Microsoft YaHei"/>
+              </a:rPr>
+              <a:t>Before：多层节点直接取值</a:t>
+            </a:r>
+          </a:p>
+        </p:txBody>
+      </p:sp>
+      <p:sp>
+        <p:nvSpPr>
+          <p:cNvPr id="5" name="TextBox 4"/>
+          <p:cNvSpPr txBox="1"/>
+          <p:nvPr/>
+        </p:nvSpPr>
+        <p:spPr>
+          <a:xfrm>
+            <a:off x="804672" y="1097280"/>
+            <a:ext cx="4572000" cy="329184"/>
+          </a:xfrm>
+          <a:prstGeom prst="rect">
+            <a:avLst/>
+          </a:prstGeom>
+          <a:noFill/>
+        </p:spPr>
+        <p:txBody>
+          <a:bodyPr wrap="square" anchor="t" lIns="25400" rIns="25400" tIns="12700" bIns="12700">
+            <a:spAutoFit/>
+          </a:bodyPr>
+          <a:lstStyle/>
+          <a:p>
+            <a:pPr algn="l">
+              <a:lnSpc>
+                <a:spcPct val="110000"/>
+              </a:lnSpc>
+              <a:spcAft>
+                <a:spcPts val="400"/>
+              </a:spcAft>
+            </a:pPr>
+            <a:r>
+              <a:rPr sz="1100" b="0">
                 <a:solidFill>
                   <a:srgbClr val="191919"/>
                 </a:solidFill>
@@ -4192,21 +7513,21 @@
                 <a:ea typeface="Microsoft YaHei"/>
                 <a:cs typeface="Microsoft YaHei"/>
               </a:rPr>
-              <a:t>匹配：可信文本锚点 + 相对位置 + 兜底</a:t>
-            </a:r>
-          </a:p>
-        </p:txBody>
-      </p:sp>
-      <p:sp>
-        <p:nvSpPr>
-          <p:cNvPr id="5" name="Rounded Rectangle 4"/>
+              <a:t>同一位置多层节点，效果叠加、取值失真</a:t>
+            </a:r>
+          </a:p>
+        </p:txBody>
+      </p:sp>
+      <p:sp>
+        <p:nvSpPr>
+          <p:cNvPr id="6" name="Rounded Rectangle 5"/>
           <p:cNvSpPr/>
           <p:nvPr/>
         </p:nvSpPr>
         <p:spPr>
           <a:xfrm>
-            <a:off x="548640" y="1645920"/>
-            <a:ext cx="5486400" cy="1207008"/>
+            <a:off x="777240" y="1499616"/>
+            <a:ext cx="4617720" cy="1097280"/>
           </a:xfrm>
           <a:prstGeom prst="roundRect">
             <a:avLst>
@@ -4247,14 +7568,204 @@
       </p:sp>
       <p:sp>
         <p:nvSpPr>
-          <p:cNvPr id="6" name="TextBox 5"/>
+          <p:cNvPr id="7" name="Rounded Rectangle 6"/>
+          <p:cNvSpPr/>
+          <p:nvPr/>
+        </p:nvSpPr>
+        <p:spPr>
+          <a:xfrm>
+            <a:off x="1033272" y="1645920"/>
+            <a:ext cx="1600200" cy="566928"/>
+          </a:xfrm>
+          <a:prstGeom prst="roundRect">
+            <a:avLst>
+              <a:gd name="adj" fmla="val 8000"/>
+            </a:avLst>
+          </a:prstGeom>
+          <a:solidFill>
+            <a:srgbClr val="E6F1FB"/>
+          </a:solidFill>
+          <a:ln w="12700">
+            <a:solidFill>
+              <a:srgbClr val="D1D5DC"/>
+            </a:solidFill>
+          </a:ln>
+          <a:effectLst/>
+        </p:spPr>
+        <p:style>
+          <a:lnRef idx="1">
+            <a:schemeClr val="accent1"/>
+          </a:lnRef>
+          <a:fillRef idx="3">
+            <a:schemeClr val="accent1"/>
+          </a:fillRef>
+          <a:effectRef idx="2">
+            <a:schemeClr val="accent1"/>
+          </a:effectRef>
+          <a:fontRef idx="minor">
+            <a:schemeClr val="lt1"/>
+          </a:fontRef>
+        </p:style>
+        <p:txBody>
+          <a:bodyPr rtlCol="0" anchor="ctr"/>
+          <a:lstStyle/>
+          <a:p>
+            <a:pPr algn="ctr"/>
+          </a:p>
+        </p:txBody>
+      </p:sp>
+      <p:sp>
+        <p:nvSpPr>
+          <p:cNvPr id="8" name="Rounded Rectangle 7"/>
+          <p:cNvSpPr/>
+          <p:nvPr/>
+        </p:nvSpPr>
+        <p:spPr>
+          <a:xfrm>
+            <a:off x="1179576" y="1746504"/>
+            <a:ext cx="1600200" cy="566928"/>
+          </a:xfrm>
+          <a:prstGeom prst="roundRect">
+            <a:avLst>
+              <a:gd name="adj" fmla="val 8000"/>
+            </a:avLst>
+          </a:prstGeom>
+          <a:solidFill>
+            <a:srgbClr val="FFF7E6"/>
+          </a:solidFill>
+          <a:ln w="12700">
+            <a:solidFill>
+              <a:srgbClr val="D1D5DC"/>
+            </a:solidFill>
+          </a:ln>
+          <a:effectLst/>
+        </p:spPr>
+        <p:style>
+          <a:lnRef idx="1">
+            <a:schemeClr val="accent1"/>
+          </a:lnRef>
+          <a:fillRef idx="3">
+            <a:schemeClr val="accent1"/>
+          </a:fillRef>
+          <a:effectRef idx="2">
+            <a:schemeClr val="accent1"/>
+          </a:effectRef>
+          <a:fontRef idx="minor">
+            <a:schemeClr val="lt1"/>
+          </a:fontRef>
+        </p:style>
+        <p:txBody>
+          <a:bodyPr rtlCol="0" anchor="ctr"/>
+          <a:lstStyle/>
+          <a:p>
+            <a:pPr algn="ctr"/>
+          </a:p>
+        </p:txBody>
+      </p:sp>
+      <p:sp>
+        <p:nvSpPr>
+          <p:cNvPr id="9" name="Rounded Rectangle 8"/>
+          <p:cNvSpPr/>
+          <p:nvPr/>
+        </p:nvSpPr>
+        <p:spPr>
+          <a:xfrm>
+            <a:off x="1325880" y="1847088"/>
+            <a:ext cx="1600200" cy="566928"/>
+          </a:xfrm>
+          <a:prstGeom prst="roundRect">
+            <a:avLst>
+              <a:gd name="adj" fmla="val 8000"/>
+            </a:avLst>
+          </a:prstGeom>
+          <a:solidFill>
+            <a:srgbClr val="F6FFF6"/>
+          </a:solidFill>
+          <a:ln w="12700">
+            <a:solidFill>
+              <a:srgbClr val="D1D5DC"/>
+            </a:solidFill>
+          </a:ln>
+          <a:effectLst/>
+        </p:spPr>
+        <p:style>
+          <a:lnRef idx="1">
+            <a:schemeClr val="accent1"/>
+          </a:lnRef>
+          <a:fillRef idx="3">
+            <a:schemeClr val="accent1"/>
+          </a:fillRef>
+          <a:effectRef idx="2">
+            <a:schemeClr val="accent1"/>
+          </a:effectRef>
+          <a:fontRef idx="minor">
+            <a:schemeClr val="lt1"/>
+          </a:fontRef>
+        </p:style>
+        <p:txBody>
+          <a:bodyPr rtlCol="0" anchor="ctr"/>
+          <a:lstStyle/>
+          <a:p>
+            <a:pPr algn="ctr"/>
+          </a:p>
+        </p:txBody>
+      </p:sp>
+      <p:sp>
+        <p:nvSpPr>
+          <p:cNvPr id="10" name="Rectangle 9"/>
+          <p:cNvSpPr/>
+          <p:nvPr/>
+        </p:nvSpPr>
+        <p:spPr>
+          <a:xfrm>
+            <a:off x="3291840" y="1700784"/>
+            <a:ext cx="128016" cy="128016"/>
+          </a:xfrm>
+          <a:prstGeom prst="rect">
+            <a:avLst/>
+          </a:prstGeom>
+          <a:solidFill>
+            <a:srgbClr val="E6F1FB"/>
+          </a:solidFill>
+          <a:ln w="9525">
+            <a:solidFill>
+              <a:srgbClr val="D1D5DC"/>
+            </a:solidFill>
+          </a:ln>
+          <a:effectLst/>
+        </p:spPr>
+        <p:style>
+          <a:lnRef idx="1">
+            <a:schemeClr val="accent1"/>
+          </a:lnRef>
+          <a:fillRef idx="3">
+            <a:schemeClr val="accent1"/>
+          </a:fillRef>
+          <a:effectRef idx="2">
+            <a:schemeClr val="accent1"/>
+          </a:effectRef>
+          <a:fontRef idx="minor">
+            <a:schemeClr val="lt1"/>
+          </a:fontRef>
+        </p:style>
+        <p:txBody>
+          <a:bodyPr rtlCol="0" anchor="ctr"/>
+          <a:lstStyle/>
+          <a:p>
+            <a:pPr algn="ctr"/>
+          </a:p>
+        </p:txBody>
+      </p:sp>
+      <p:sp>
+        <p:nvSpPr>
+          <p:cNvPr id="11" name="TextBox 10"/>
           <p:cNvSpPr txBox="1"/>
           <p:nvPr/>
         </p:nvSpPr>
         <p:spPr>
           <a:xfrm>
-            <a:off x="841248" y="1792224"/>
-            <a:ext cx="4937760" cy="320040"/>
+            <a:off x="3502152" y="1636776"/>
+            <a:ext cx="1737360" cy="256032"/>
           </a:xfrm>
           <a:prstGeom prst="rect">
             <a:avLst/>
@@ -4276,6 +7787,3167 @@
               </a:spcAft>
             </a:pPr>
             <a:r>
+              <a:rPr sz="950" b="0">
+                <a:solidFill>
+                  <a:srgbClr val="191919"/>
+                </a:solidFill>
+                <a:latin typeface="Microsoft YaHei"/>
+                <a:ea typeface="Microsoft YaHei"/>
+                <a:cs typeface="Microsoft YaHei"/>
+              </a:rPr>
+              <a:t>背景色层</a:t>
+            </a:r>
+          </a:p>
+        </p:txBody>
+      </p:sp>
+      <p:sp>
+        <p:nvSpPr>
+          <p:cNvPr id="12" name="Rectangle 11"/>
+          <p:cNvSpPr/>
+          <p:nvPr/>
+        </p:nvSpPr>
+        <p:spPr>
+          <a:xfrm>
+            <a:off x="3291840" y="1947672"/>
+            <a:ext cx="128016" cy="128016"/>
+          </a:xfrm>
+          <a:prstGeom prst="rect">
+            <a:avLst/>
+          </a:prstGeom>
+          <a:solidFill>
+            <a:srgbClr val="FFF7E6"/>
+          </a:solidFill>
+          <a:ln w="9525">
+            <a:solidFill>
+              <a:srgbClr val="D1D5DC"/>
+            </a:solidFill>
+          </a:ln>
+          <a:effectLst/>
+        </p:spPr>
+        <p:style>
+          <a:lnRef idx="1">
+            <a:schemeClr val="accent1"/>
+          </a:lnRef>
+          <a:fillRef idx="3">
+            <a:schemeClr val="accent1"/>
+          </a:fillRef>
+          <a:effectRef idx="2">
+            <a:schemeClr val="accent1"/>
+          </a:effectRef>
+          <a:fontRef idx="minor">
+            <a:schemeClr val="lt1"/>
+          </a:fontRef>
+        </p:style>
+        <p:txBody>
+          <a:bodyPr rtlCol="0" anchor="ctr"/>
+          <a:lstStyle/>
+          <a:p>
+            <a:pPr algn="ctr"/>
+          </a:p>
+        </p:txBody>
+      </p:sp>
+      <p:sp>
+        <p:nvSpPr>
+          <p:cNvPr id="13" name="TextBox 12"/>
+          <p:cNvSpPr txBox="1"/>
+          <p:nvPr/>
+        </p:nvSpPr>
+        <p:spPr>
+          <a:xfrm>
+            <a:off x="3502152" y="1883664"/>
+            <a:ext cx="1737360" cy="256032"/>
+          </a:xfrm>
+          <a:prstGeom prst="rect">
+            <a:avLst/>
+          </a:prstGeom>
+          <a:noFill/>
+        </p:spPr>
+        <p:txBody>
+          <a:bodyPr wrap="square" anchor="t" lIns="25400" rIns="25400" tIns="12700" bIns="12700">
+            <a:spAutoFit/>
+          </a:bodyPr>
+          <a:lstStyle/>
+          <a:p>
+            <a:pPr algn="l">
+              <a:lnSpc>
+                <a:spcPct val="100000"/>
+              </a:lnSpc>
+              <a:spcAft>
+                <a:spcPts val="400"/>
+              </a:spcAft>
+            </a:pPr>
+            <a:r>
+              <a:rPr sz="950" b="0">
+                <a:solidFill>
+                  <a:srgbClr val="191919"/>
+                </a:solidFill>
+                <a:latin typeface="Microsoft YaHei"/>
+                <a:ea typeface="Microsoft YaHei"/>
+                <a:cs typeface="Microsoft YaHei"/>
+              </a:rPr>
+              <a:t>圆角层</a:t>
+            </a:r>
+          </a:p>
+        </p:txBody>
+      </p:sp>
+      <p:sp>
+        <p:nvSpPr>
+          <p:cNvPr id="14" name="Rectangle 13"/>
+          <p:cNvSpPr/>
+          <p:nvPr/>
+        </p:nvSpPr>
+        <p:spPr>
+          <a:xfrm>
+            <a:off x="3291840" y="2194560"/>
+            <a:ext cx="128016" cy="128016"/>
+          </a:xfrm>
+          <a:prstGeom prst="rect">
+            <a:avLst/>
+          </a:prstGeom>
+          <a:solidFill>
+            <a:srgbClr val="F6FFF6"/>
+          </a:solidFill>
+          <a:ln w="9525">
+            <a:solidFill>
+              <a:srgbClr val="D1D5DC"/>
+            </a:solidFill>
+          </a:ln>
+          <a:effectLst/>
+        </p:spPr>
+        <p:style>
+          <a:lnRef idx="1">
+            <a:schemeClr val="accent1"/>
+          </a:lnRef>
+          <a:fillRef idx="3">
+            <a:schemeClr val="accent1"/>
+          </a:fillRef>
+          <a:effectRef idx="2">
+            <a:schemeClr val="accent1"/>
+          </a:effectRef>
+          <a:fontRef idx="minor">
+            <a:schemeClr val="lt1"/>
+          </a:fontRef>
+        </p:style>
+        <p:txBody>
+          <a:bodyPr rtlCol="0" anchor="ctr"/>
+          <a:lstStyle/>
+          <a:p>
+            <a:pPr algn="ctr"/>
+          </a:p>
+        </p:txBody>
+      </p:sp>
+      <p:sp>
+        <p:nvSpPr>
+          <p:cNvPr id="15" name="TextBox 14"/>
+          <p:cNvSpPr txBox="1"/>
+          <p:nvPr/>
+        </p:nvSpPr>
+        <p:spPr>
+          <a:xfrm>
+            <a:off x="3502152" y="2130552"/>
+            <a:ext cx="1737360" cy="256032"/>
+          </a:xfrm>
+          <a:prstGeom prst="rect">
+            <a:avLst/>
+          </a:prstGeom>
+          <a:noFill/>
+        </p:spPr>
+        <p:txBody>
+          <a:bodyPr wrap="square" anchor="t" lIns="25400" rIns="25400" tIns="12700" bIns="12700">
+            <a:spAutoFit/>
+          </a:bodyPr>
+          <a:lstStyle/>
+          <a:p>
+            <a:pPr algn="l">
+              <a:lnSpc>
+                <a:spcPct val="100000"/>
+              </a:lnSpc>
+              <a:spcAft>
+                <a:spcPts val="400"/>
+              </a:spcAft>
+            </a:pPr>
+            <a:r>
+              <a:rPr sz="950" b="0">
+                <a:solidFill>
+                  <a:srgbClr val="191919"/>
+                </a:solidFill>
+                <a:latin typeface="Microsoft YaHei"/>
+                <a:ea typeface="Microsoft YaHei"/>
+                <a:cs typeface="Microsoft YaHei"/>
+              </a:rPr>
+              <a:t>边框层</a:t>
+            </a:r>
+          </a:p>
+        </p:txBody>
+      </p:sp>
+      <p:sp>
+        <p:nvSpPr>
+          <p:cNvPr id="16" name="TextBox 15"/>
+          <p:cNvSpPr txBox="1"/>
+          <p:nvPr/>
+        </p:nvSpPr>
+        <p:spPr>
+          <a:xfrm>
+            <a:off x="777240" y="2633472"/>
+            <a:ext cx="4617720" cy="292608"/>
+          </a:xfrm>
+          <a:prstGeom prst="rect">
+            <a:avLst/>
+          </a:prstGeom>
+          <a:noFill/>
+        </p:spPr>
+        <p:txBody>
+          <a:bodyPr wrap="square" anchor="t" lIns="25400" rIns="25400" tIns="12700" bIns="12700">
+            <a:spAutoFit/>
+          </a:bodyPr>
+          <a:lstStyle/>
+          <a:p>
+            <a:pPr algn="ctr">
+              <a:lnSpc>
+                <a:spcPct val="110000"/>
+              </a:lnSpc>
+              <a:spcAft>
+                <a:spcPts val="400"/>
+              </a:spcAft>
+            </a:pPr>
+            <a:r>
+              <a:rPr sz="950" b="0">
+                <a:solidFill>
+                  <a:srgbClr val="777777"/>
+                </a:solidFill>
+                <a:latin typeface="Microsoft YaHei"/>
+                <a:ea typeface="Microsoft YaHei"/>
+                <a:cs typeface="Microsoft YaHei"/>
+              </a:rPr>
+              <a:t>同一位置多层节点叠加，样式分散、取值易失真</a:t>
+            </a:r>
+          </a:p>
+        </p:txBody>
+      </p:sp>
+      <p:sp>
+        <p:nvSpPr>
+          <p:cNvPr id="17" name="Right Arrow 16"/>
+          <p:cNvSpPr/>
+          <p:nvPr/>
+        </p:nvSpPr>
+        <p:spPr>
+          <a:xfrm>
+            <a:off x="5815584" y="1664208"/>
+            <a:ext cx="566928" cy="365760"/>
+          </a:xfrm>
+          <a:prstGeom prst="rightArrow">
+            <a:avLst>
+              <a:gd name="adj1" fmla="val 55000"/>
+              <a:gd name="adj2" fmla="val 55000"/>
+            </a:avLst>
+          </a:prstGeom>
+          <a:solidFill>
+            <a:srgbClr val="0067D1"/>
+          </a:solidFill>
+          <a:ln>
+            <a:noFill/>
+          </a:ln>
+          <a:effectLst/>
+        </p:spPr>
+        <p:style>
+          <a:lnRef idx="1">
+            <a:schemeClr val="accent1"/>
+          </a:lnRef>
+          <a:fillRef idx="3">
+            <a:schemeClr val="accent1"/>
+          </a:fillRef>
+          <a:effectRef idx="2">
+            <a:schemeClr val="accent1"/>
+          </a:effectRef>
+          <a:fontRef idx="minor">
+            <a:schemeClr val="lt1"/>
+          </a:fontRef>
+        </p:style>
+        <p:txBody>
+          <a:bodyPr rtlCol="0" anchor="ctr"/>
+          <a:lstStyle/>
+          <a:p>
+            <a:pPr algn="ctr"/>
+          </a:p>
+        </p:txBody>
+      </p:sp>
+      <p:sp>
+        <p:nvSpPr>
+          <p:cNvPr id="18" name="Rounded Rectangle 17"/>
+          <p:cNvSpPr/>
+          <p:nvPr/>
+        </p:nvSpPr>
+        <p:spPr>
+          <a:xfrm>
+            <a:off x="6565392" y="658368"/>
+            <a:ext cx="5074920" cy="2377440"/>
+          </a:xfrm>
+          <a:prstGeom prst="roundRect">
+            <a:avLst>
+              <a:gd name="adj" fmla="val 6000"/>
+            </a:avLst>
+          </a:prstGeom>
+          <a:solidFill>
+            <a:srgbClr val="F6FFF6"/>
+          </a:solidFill>
+          <a:ln w="12700">
+            <a:solidFill>
+              <a:srgbClr val="52C41A"/>
+            </a:solidFill>
+          </a:ln>
+          <a:effectLst/>
+        </p:spPr>
+        <p:style>
+          <a:lnRef idx="1">
+            <a:schemeClr val="accent1"/>
+          </a:lnRef>
+          <a:fillRef idx="3">
+            <a:schemeClr val="accent1"/>
+          </a:fillRef>
+          <a:effectRef idx="2">
+            <a:schemeClr val="accent1"/>
+          </a:effectRef>
+          <a:fontRef idx="minor">
+            <a:schemeClr val="lt1"/>
+          </a:fontRef>
+        </p:style>
+        <p:txBody>
+          <a:bodyPr rtlCol="0" anchor="ctr"/>
+          <a:lstStyle/>
+          <a:p>
+            <a:pPr algn="ctr"/>
+          </a:p>
+        </p:txBody>
+      </p:sp>
+      <p:sp>
+        <p:nvSpPr>
+          <p:cNvPr id="19" name="TextBox 18"/>
+          <p:cNvSpPr txBox="1"/>
+          <p:nvPr/>
+        </p:nvSpPr>
+        <p:spPr>
+          <a:xfrm>
+            <a:off x="6821424" y="758952"/>
+            <a:ext cx="4572000" cy="329184"/>
+          </a:xfrm>
+          <a:prstGeom prst="rect">
+            <a:avLst/>
+          </a:prstGeom>
+          <a:noFill/>
+        </p:spPr>
+        <p:txBody>
+          <a:bodyPr wrap="square" anchor="t" lIns="25400" rIns="25400" tIns="12700" bIns="12700">
+            <a:spAutoFit/>
+          </a:bodyPr>
+          <a:lstStyle/>
+          <a:p>
+            <a:pPr algn="l">
+              <a:lnSpc>
+                <a:spcPct val="100000"/>
+              </a:lnSpc>
+              <a:spcAft>
+                <a:spcPts val="400"/>
+              </a:spcAft>
+            </a:pPr>
+            <a:r>
+              <a:rPr sz="1400" b="1">
+                <a:solidFill>
+                  <a:srgbClr val="52C41A"/>
+                </a:solidFill>
+                <a:latin typeface="Microsoft YaHei"/>
+                <a:ea typeface="Microsoft YaHei"/>
+                <a:cs typeface="Microsoft YaHei"/>
+              </a:rPr>
+              <a:t>After：智能合并（当前）</a:t>
+            </a:r>
+          </a:p>
+        </p:txBody>
+      </p:sp>
+      <p:sp>
+        <p:nvSpPr>
+          <p:cNvPr id="20" name="TextBox 19"/>
+          <p:cNvSpPr txBox="1"/>
+          <p:nvPr/>
+        </p:nvSpPr>
+        <p:spPr>
+          <a:xfrm>
+            <a:off x="6821424" y="1097280"/>
+            <a:ext cx="4572000" cy="329184"/>
+          </a:xfrm>
+          <a:prstGeom prst="rect">
+            <a:avLst/>
+          </a:prstGeom>
+          <a:noFill/>
+        </p:spPr>
+        <p:txBody>
+          <a:bodyPr wrap="square" anchor="t" lIns="25400" rIns="25400" tIns="12700" bIns="12700">
+            <a:spAutoFit/>
+          </a:bodyPr>
+          <a:lstStyle/>
+          <a:p>
+            <a:pPr algn="l">
+              <a:lnSpc>
+                <a:spcPct val="110000"/>
+              </a:lnSpc>
+              <a:spcAft>
+                <a:spcPts val="400"/>
+              </a:spcAft>
+            </a:pPr>
+            <a:r>
+              <a:rPr sz="1100" b="0">
+                <a:solidFill>
+                  <a:srgbClr val="191919"/>
+                </a:solidFill>
+                <a:latin typeface="Microsoft YaHei"/>
+                <a:ea typeface="Microsoft YaHei"/>
+                <a:cs typeface="Microsoft YaHei"/>
+              </a:rPr>
+              <a:t>同位置多层智能合并为 1 个节点，取值更准确</a:t>
+            </a:r>
+          </a:p>
+        </p:txBody>
+      </p:sp>
+      <p:sp>
+        <p:nvSpPr>
+          <p:cNvPr id="21" name="Rounded Rectangle 20"/>
+          <p:cNvSpPr/>
+          <p:nvPr/>
+        </p:nvSpPr>
+        <p:spPr>
+          <a:xfrm>
+            <a:off x="6793992" y="1499616"/>
+            <a:ext cx="4617720" cy="1097280"/>
+          </a:xfrm>
+          <a:prstGeom prst="roundRect">
+            <a:avLst>
+              <a:gd name="adj" fmla="val 6000"/>
+            </a:avLst>
+          </a:prstGeom>
+          <a:solidFill>
+            <a:srgbClr val="FFFFFF"/>
+          </a:solidFill>
+          <a:ln w="12700">
+            <a:solidFill>
+              <a:srgbClr val="D1D5DC"/>
+            </a:solidFill>
+          </a:ln>
+          <a:effectLst/>
+        </p:spPr>
+        <p:style>
+          <a:lnRef idx="1">
+            <a:schemeClr val="accent1"/>
+          </a:lnRef>
+          <a:fillRef idx="3">
+            <a:schemeClr val="accent1"/>
+          </a:fillRef>
+          <a:effectRef idx="2">
+            <a:schemeClr val="accent1"/>
+          </a:effectRef>
+          <a:fontRef idx="minor">
+            <a:schemeClr val="lt1"/>
+          </a:fontRef>
+        </p:style>
+        <p:txBody>
+          <a:bodyPr rtlCol="0" anchor="ctr"/>
+          <a:lstStyle/>
+          <a:p>
+            <a:pPr algn="ctr"/>
+          </a:p>
+        </p:txBody>
+      </p:sp>
+      <p:sp>
+        <p:nvSpPr>
+          <p:cNvPr id="22" name="Rounded Rectangle 21"/>
+          <p:cNvSpPr/>
+          <p:nvPr/>
+        </p:nvSpPr>
+        <p:spPr>
+          <a:xfrm>
+            <a:off x="6995160" y="1636776"/>
+            <a:ext cx="841248" cy="237744"/>
+          </a:xfrm>
+          <a:prstGeom prst="roundRect">
+            <a:avLst>
+              <a:gd name="adj" fmla="val 25000"/>
+            </a:avLst>
+          </a:prstGeom>
+          <a:solidFill>
+            <a:srgbClr val="FFFFFF"/>
+          </a:solidFill>
+          <a:ln w="12700">
+            <a:solidFill>
+              <a:srgbClr val="D1D5DC"/>
+            </a:solidFill>
+          </a:ln>
+          <a:effectLst/>
+        </p:spPr>
+        <p:style>
+          <a:lnRef idx="1">
+            <a:schemeClr val="accent1"/>
+          </a:lnRef>
+          <a:fillRef idx="3">
+            <a:schemeClr val="accent1"/>
+          </a:fillRef>
+          <a:effectRef idx="2">
+            <a:schemeClr val="accent1"/>
+          </a:effectRef>
+          <a:fontRef idx="minor">
+            <a:schemeClr val="lt1"/>
+          </a:fontRef>
+        </p:style>
+        <p:txBody>
+          <a:bodyPr rtlCol="0" anchor="ctr" wrap="square" lIns="0" rIns="0" tIns="0" bIns="0"/>
+          <a:lstStyle/>
+          <a:p>
+            <a:pPr algn="ctr"/>
+            <a:r>
+              <a:rPr sz="850" b="0">
+                <a:solidFill>
+                  <a:srgbClr val="191919"/>
+                </a:solidFill>
+                <a:latin typeface="Microsoft YaHei"/>
+                <a:ea typeface="Microsoft YaHei"/>
+                <a:cs typeface="Microsoft YaHei"/>
+              </a:rPr>
+              <a:t>背景色</a:t>
+            </a:r>
+          </a:p>
+        </p:txBody>
+      </p:sp>
+      <p:sp>
+        <p:nvSpPr>
+          <p:cNvPr id="23" name="Right Arrow 22"/>
+          <p:cNvSpPr/>
+          <p:nvPr/>
+        </p:nvSpPr>
+        <p:spPr>
+          <a:xfrm>
+            <a:off x="7909560" y="1677924"/>
+            <a:ext cx="329184" cy="155448"/>
+          </a:xfrm>
+          <a:prstGeom prst="rightArrow">
+            <a:avLst>
+              <a:gd name="adj1" fmla="val 55000"/>
+              <a:gd name="adj2" fmla="val 55000"/>
+            </a:avLst>
+          </a:prstGeom>
+          <a:solidFill>
+            <a:srgbClr val="0067D1"/>
+          </a:solidFill>
+          <a:ln>
+            <a:noFill/>
+          </a:ln>
+          <a:effectLst/>
+        </p:spPr>
+        <p:style>
+          <a:lnRef idx="1">
+            <a:schemeClr val="accent1"/>
+          </a:lnRef>
+          <a:fillRef idx="3">
+            <a:schemeClr val="accent1"/>
+          </a:fillRef>
+          <a:effectRef idx="2">
+            <a:schemeClr val="accent1"/>
+          </a:effectRef>
+          <a:fontRef idx="minor">
+            <a:schemeClr val="lt1"/>
+          </a:fontRef>
+        </p:style>
+        <p:txBody>
+          <a:bodyPr rtlCol="0" anchor="ctr"/>
+          <a:lstStyle/>
+          <a:p>
+            <a:pPr algn="ctr"/>
+          </a:p>
+        </p:txBody>
+      </p:sp>
+      <p:sp>
+        <p:nvSpPr>
+          <p:cNvPr id="24" name="Rounded Rectangle 23"/>
+          <p:cNvSpPr/>
+          <p:nvPr/>
+        </p:nvSpPr>
+        <p:spPr>
+          <a:xfrm>
+            <a:off x="6995160" y="1920239"/>
+            <a:ext cx="841248" cy="237744"/>
+          </a:xfrm>
+          <a:prstGeom prst="roundRect">
+            <a:avLst>
+              <a:gd name="adj" fmla="val 25000"/>
+            </a:avLst>
+          </a:prstGeom>
+          <a:solidFill>
+            <a:srgbClr val="FFFFFF"/>
+          </a:solidFill>
+          <a:ln w="12700">
+            <a:solidFill>
+              <a:srgbClr val="D1D5DC"/>
+            </a:solidFill>
+          </a:ln>
+          <a:effectLst/>
+        </p:spPr>
+        <p:style>
+          <a:lnRef idx="1">
+            <a:schemeClr val="accent1"/>
+          </a:lnRef>
+          <a:fillRef idx="3">
+            <a:schemeClr val="accent1"/>
+          </a:fillRef>
+          <a:effectRef idx="2">
+            <a:schemeClr val="accent1"/>
+          </a:effectRef>
+          <a:fontRef idx="minor">
+            <a:schemeClr val="lt1"/>
+          </a:fontRef>
+        </p:style>
+        <p:txBody>
+          <a:bodyPr rtlCol="0" anchor="ctr" wrap="square" lIns="0" rIns="0" tIns="0" bIns="0"/>
+          <a:lstStyle/>
+          <a:p>
+            <a:pPr algn="ctr"/>
+            <a:r>
+              <a:rPr sz="850" b="0">
+                <a:solidFill>
+                  <a:srgbClr val="191919"/>
+                </a:solidFill>
+                <a:latin typeface="Microsoft YaHei"/>
+                <a:ea typeface="Microsoft YaHei"/>
+                <a:cs typeface="Microsoft YaHei"/>
+              </a:rPr>
+              <a:t>圆角</a:t>
+            </a:r>
+          </a:p>
+        </p:txBody>
+      </p:sp>
+      <p:sp>
+        <p:nvSpPr>
+          <p:cNvPr id="25" name="Right Arrow 24"/>
+          <p:cNvSpPr/>
+          <p:nvPr/>
+        </p:nvSpPr>
+        <p:spPr>
+          <a:xfrm>
+            <a:off x="7909560" y="1961388"/>
+            <a:ext cx="329184" cy="155448"/>
+          </a:xfrm>
+          <a:prstGeom prst="rightArrow">
+            <a:avLst>
+              <a:gd name="adj1" fmla="val 55000"/>
+              <a:gd name="adj2" fmla="val 55000"/>
+            </a:avLst>
+          </a:prstGeom>
+          <a:solidFill>
+            <a:srgbClr val="0067D1"/>
+          </a:solidFill>
+          <a:ln>
+            <a:noFill/>
+          </a:ln>
+          <a:effectLst/>
+        </p:spPr>
+        <p:style>
+          <a:lnRef idx="1">
+            <a:schemeClr val="accent1"/>
+          </a:lnRef>
+          <a:fillRef idx="3">
+            <a:schemeClr val="accent1"/>
+          </a:fillRef>
+          <a:effectRef idx="2">
+            <a:schemeClr val="accent1"/>
+          </a:effectRef>
+          <a:fontRef idx="minor">
+            <a:schemeClr val="lt1"/>
+          </a:fontRef>
+        </p:style>
+        <p:txBody>
+          <a:bodyPr rtlCol="0" anchor="ctr"/>
+          <a:lstStyle/>
+          <a:p>
+            <a:pPr algn="ctr"/>
+          </a:p>
+        </p:txBody>
+      </p:sp>
+      <p:sp>
+        <p:nvSpPr>
+          <p:cNvPr id="26" name="Rounded Rectangle 25"/>
+          <p:cNvSpPr/>
+          <p:nvPr/>
+        </p:nvSpPr>
+        <p:spPr>
+          <a:xfrm>
+            <a:off x="6995160" y="2203704"/>
+            <a:ext cx="841248" cy="237744"/>
+          </a:xfrm>
+          <a:prstGeom prst="roundRect">
+            <a:avLst>
+              <a:gd name="adj" fmla="val 25000"/>
+            </a:avLst>
+          </a:prstGeom>
+          <a:solidFill>
+            <a:srgbClr val="FFFFFF"/>
+          </a:solidFill>
+          <a:ln w="12700">
+            <a:solidFill>
+              <a:srgbClr val="D1D5DC"/>
+            </a:solidFill>
+          </a:ln>
+          <a:effectLst/>
+        </p:spPr>
+        <p:style>
+          <a:lnRef idx="1">
+            <a:schemeClr val="accent1"/>
+          </a:lnRef>
+          <a:fillRef idx="3">
+            <a:schemeClr val="accent1"/>
+          </a:fillRef>
+          <a:effectRef idx="2">
+            <a:schemeClr val="accent1"/>
+          </a:effectRef>
+          <a:fontRef idx="minor">
+            <a:schemeClr val="lt1"/>
+          </a:fontRef>
+        </p:style>
+        <p:txBody>
+          <a:bodyPr rtlCol="0" anchor="ctr" wrap="square" lIns="0" rIns="0" tIns="0" bIns="0"/>
+          <a:lstStyle/>
+          <a:p>
+            <a:pPr algn="ctr"/>
+            <a:r>
+              <a:rPr sz="850" b="0">
+                <a:solidFill>
+                  <a:srgbClr val="191919"/>
+                </a:solidFill>
+                <a:latin typeface="Microsoft YaHei"/>
+                <a:ea typeface="Microsoft YaHei"/>
+                <a:cs typeface="Microsoft YaHei"/>
+              </a:rPr>
+              <a:t>边框</a:t>
+            </a:r>
+          </a:p>
+        </p:txBody>
+      </p:sp>
+      <p:sp>
+        <p:nvSpPr>
+          <p:cNvPr id="27" name="Right Arrow 26"/>
+          <p:cNvSpPr/>
+          <p:nvPr/>
+        </p:nvSpPr>
+        <p:spPr>
+          <a:xfrm>
+            <a:off x="7909560" y="2244852"/>
+            <a:ext cx="329184" cy="155448"/>
+          </a:xfrm>
+          <a:prstGeom prst="rightArrow">
+            <a:avLst>
+              <a:gd name="adj1" fmla="val 55000"/>
+              <a:gd name="adj2" fmla="val 55000"/>
+            </a:avLst>
+          </a:prstGeom>
+          <a:solidFill>
+            <a:srgbClr val="0067D1"/>
+          </a:solidFill>
+          <a:ln>
+            <a:noFill/>
+          </a:ln>
+          <a:effectLst/>
+        </p:spPr>
+        <p:style>
+          <a:lnRef idx="1">
+            <a:schemeClr val="accent1"/>
+          </a:lnRef>
+          <a:fillRef idx="3">
+            <a:schemeClr val="accent1"/>
+          </a:fillRef>
+          <a:effectRef idx="2">
+            <a:schemeClr val="accent1"/>
+          </a:effectRef>
+          <a:fontRef idx="minor">
+            <a:schemeClr val="lt1"/>
+          </a:fontRef>
+        </p:style>
+        <p:txBody>
+          <a:bodyPr rtlCol="0" anchor="ctr"/>
+          <a:lstStyle/>
+          <a:p>
+            <a:pPr algn="ctr"/>
+          </a:p>
+        </p:txBody>
+      </p:sp>
+      <p:sp>
+        <p:nvSpPr>
+          <p:cNvPr id="28" name="Rounded Rectangle 27"/>
+          <p:cNvSpPr/>
+          <p:nvPr/>
+        </p:nvSpPr>
+        <p:spPr>
+          <a:xfrm>
+            <a:off x="8366760" y="1719072"/>
+            <a:ext cx="1645920" cy="658368"/>
+          </a:xfrm>
+          <a:prstGeom prst="roundRect">
+            <a:avLst>
+              <a:gd name="adj" fmla="val 18000"/>
+            </a:avLst>
+          </a:prstGeom>
+          <a:solidFill>
+            <a:srgbClr val="E6F1FB"/>
+          </a:solidFill>
+          <a:ln w="12700">
+            <a:solidFill>
+              <a:srgbClr val="0067D1"/>
+            </a:solidFill>
+          </a:ln>
+          <a:effectLst/>
+        </p:spPr>
+        <p:style>
+          <a:lnRef idx="1">
+            <a:schemeClr val="accent1"/>
+          </a:lnRef>
+          <a:fillRef idx="3">
+            <a:schemeClr val="accent1"/>
+          </a:fillRef>
+          <a:effectRef idx="2">
+            <a:schemeClr val="accent1"/>
+          </a:effectRef>
+          <a:fontRef idx="minor">
+            <a:schemeClr val="lt1"/>
+          </a:fontRef>
+        </p:style>
+        <p:txBody>
+          <a:bodyPr rtlCol="0" anchor="ctr" wrap="square" lIns="0" rIns="0" tIns="0" bIns="0"/>
+          <a:lstStyle/>
+          <a:p>
+            <a:pPr algn="ctr"/>
+            <a:r>
+              <a:rPr sz="1050" b="1">
+                <a:solidFill>
+                  <a:srgbClr val="0067D1"/>
+                </a:solidFill>
+                <a:latin typeface="Microsoft YaHei"/>
+                <a:ea typeface="Microsoft YaHei"/>
+                <a:cs typeface="Microsoft YaHei"/>
+              </a:rPr>
+              <a:t>合并节点</a:t>
+            </a:r>
+          </a:p>
+        </p:txBody>
+      </p:sp>
+      <p:sp>
+        <p:nvSpPr>
+          <p:cNvPr id="29" name="TextBox 28"/>
+          <p:cNvSpPr txBox="1"/>
+          <p:nvPr/>
+        </p:nvSpPr>
+        <p:spPr>
+          <a:xfrm>
+            <a:off x="10268712" y="1655064"/>
+            <a:ext cx="1051560" cy="237744"/>
+          </a:xfrm>
+          <a:prstGeom prst="rect">
+            <a:avLst/>
+          </a:prstGeom>
+          <a:noFill/>
+        </p:spPr>
+        <p:txBody>
+          <a:bodyPr wrap="square" anchor="t" lIns="25400" rIns="25400" tIns="12700" bIns="12700">
+            <a:spAutoFit/>
+          </a:bodyPr>
+          <a:lstStyle/>
+          <a:p>
+            <a:pPr algn="l">
+              <a:lnSpc>
+                <a:spcPct val="100000"/>
+              </a:lnSpc>
+              <a:spcAft>
+                <a:spcPts val="400"/>
+              </a:spcAft>
+            </a:pPr>
+            <a:r>
+              <a:rPr sz="950" b="1">
+                <a:solidFill>
+                  <a:srgbClr val="52C41A"/>
+                </a:solidFill>
+                <a:latin typeface="Microsoft YaHei"/>
+                <a:ea typeface="Microsoft YaHei"/>
+                <a:cs typeface="Microsoft YaHei"/>
+              </a:rPr>
+              <a:t>背景色 ✓</a:t>
+            </a:r>
+          </a:p>
+        </p:txBody>
+      </p:sp>
+      <p:sp>
+        <p:nvSpPr>
+          <p:cNvPr id="30" name="TextBox 29"/>
+          <p:cNvSpPr txBox="1"/>
+          <p:nvPr/>
+        </p:nvSpPr>
+        <p:spPr>
+          <a:xfrm>
+            <a:off x="10268712" y="1901952"/>
+            <a:ext cx="1051560" cy="237744"/>
+          </a:xfrm>
+          <a:prstGeom prst="rect">
+            <a:avLst/>
+          </a:prstGeom>
+          <a:noFill/>
+        </p:spPr>
+        <p:txBody>
+          <a:bodyPr wrap="square" anchor="t" lIns="25400" rIns="25400" tIns="12700" bIns="12700">
+            <a:spAutoFit/>
+          </a:bodyPr>
+          <a:lstStyle/>
+          <a:p>
+            <a:pPr algn="l">
+              <a:lnSpc>
+                <a:spcPct val="100000"/>
+              </a:lnSpc>
+              <a:spcAft>
+                <a:spcPts val="400"/>
+              </a:spcAft>
+            </a:pPr>
+            <a:r>
+              <a:rPr sz="950" b="1">
+                <a:solidFill>
+                  <a:srgbClr val="52C41A"/>
+                </a:solidFill>
+                <a:latin typeface="Microsoft YaHei"/>
+                <a:ea typeface="Microsoft YaHei"/>
+                <a:cs typeface="Microsoft YaHei"/>
+              </a:rPr>
+              <a:t>圆角 ✓</a:t>
+            </a:r>
+          </a:p>
+        </p:txBody>
+      </p:sp>
+      <p:sp>
+        <p:nvSpPr>
+          <p:cNvPr id="31" name="TextBox 30"/>
+          <p:cNvSpPr txBox="1"/>
+          <p:nvPr/>
+        </p:nvSpPr>
+        <p:spPr>
+          <a:xfrm>
+            <a:off x="10268712" y="2148840"/>
+            <a:ext cx="1051560" cy="237744"/>
+          </a:xfrm>
+          <a:prstGeom prst="rect">
+            <a:avLst/>
+          </a:prstGeom>
+          <a:noFill/>
+        </p:spPr>
+        <p:txBody>
+          <a:bodyPr wrap="square" anchor="t" lIns="25400" rIns="25400" tIns="12700" bIns="12700">
+            <a:spAutoFit/>
+          </a:bodyPr>
+          <a:lstStyle/>
+          <a:p>
+            <a:pPr algn="l">
+              <a:lnSpc>
+                <a:spcPct val="100000"/>
+              </a:lnSpc>
+              <a:spcAft>
+                <a:spcPts val="400"/>
+              </a:spcAft>
+            </a:pPr>
+            <a:r>
+              <a:rPr sz="950" b="1">
+                <a:solidFill>
+                  <a:srgbClr val="52C41A"/>
+                </a:solidFill>
+                <a:latin typeface="Microsoft YaHei"/>
+                <a:ea typeface="Microsoft YaHei"/>
+                <a:cs typeface="Microsoft YaHei"/>
+              </a:rPr>
+              <a:t>边框 ✓</a:t>
+            </a:r>
+          </a:p>
+        </p:txBody>
+      </p:sp>
+      <p:sp>
+        <p:nvSpPr>
+          <p:cNvPr id="32" name="TextBox 31"/>
+          <p:cNvSpPr txBox="1"/>
+          <p:nvPr/>
+        </p:nvSpPr>
+        <p:spPr>
+          <a:xfrm>
+            <a:off x="6793992" y="2633472"/>
+            <a:ext cx="4617720" cy="292608"/>
+          </a:xfrm>
+          <a:prstGeom prst="rect">
+            <a:avLst/>
+          </a:prstGeom>
+          <a:noFill/>
+        </p:spPr>
+        <p:txBody>
+          <a:bodyPr wrap="square" anchor="t" lIns="25400" rIns="25400" tIns="12700" bIns="12700">
+            <a:spAutoFit/>
+          </a:bodyPr>
+          <a:lstStyle/>
+          <a:p>
+            <a:pPr algn="ctr">
+              <a:lnSpc>
+                <a:spcPct val="110000"/>
+              </a:lnSpc>
+              <a:spcAft>
+                <a:spcPts val="400"/>
+              </a:spcAft>
+            </a:pPr>
+            <a:r>
+              <a:rPr sz="950" b="0">
+                <a:solidFill>
+                  <a:srgbClr val="777777"/>
+                </a:solidFill>
+                <a:latin typeface="Microsoft YaHei"/>
+                <a:ea typeface="Microsoft YaHei"/>
+                <a:cs typeface="Microsoft YaHei"/>
+              </a:rPr>
+              <a:t>智能合并为 1 个节点，取值即最终视觉效果，比对误报更少</a:t>
+            </a:r>
+          </a:p>
+        </p:txBody>
+      </p:sp>
+      <p:sp>
+        <p:nvSpPr>
+          <p:cNvPr id="33" name="Rectangle 32"/>
+          <p:cNvSpPr/>
+          <p:nvPr/>
+        </p:nvSpPr>
+        <p:spPr>
+          <a:xfrm>
+            <a:off x="548640" y="3246120"/>
+            <a:ext cx="82296" cy="274320"/>
+          </a:xfrm>
+          <a:prstGeom prst="rect">
+            <a:avLst/>
+          </a:prstGeom>
+          <a:solidFill>
+            <a:srgbClr val="0067D1"/>
+          </a:solidFill>
+          <a:ln>
+            <a:noFill/>
+          </a:ln>
+          <a:effectLst/>
+        </p:spPr>
+        <p:style>
+          <a:lnRef idx="1">
+            <a:schemeClr val="accent1"/>
+          </a:lnRef>
+          <a:fillRef idx="3">
+            <a:schemeClr val="accent1"/>
+          </a:fillRef>
+          <a:effectRef idx="2">
+            <a:schemeClr val="accent1"/>
+          </a:effectRef>
+          <a:fontRef idx="minor">
+            <a:schemeClr val="lt1"/>
+          </a:fontRef>
+        </p:style>
+        <p:txBody>
+          <a:bodyPr rtlCol="0" anchor="ctr"/>
+          <a:lstStyle/>
+          <a:p>
+            <a:pPr algn="ctr"/>
+          </a:p>
+        </p:txBody>
+      </p:sp>
+      <p:sp>
+        <p:nvSpPr>
+          <p:cNvPr id="34" name="TextBox 33"/>
+          <p:cNvSpPr txBox="1"/>
+          <p:nvPr/>
+        </p:nvSpPr>
+        <p:spPr>
+          <a:xfrm>
+            <a:off x="749808" y="3200400"/>
+            <a:ext cx="8229600" cy="384048"/>
+          </a:xfrm>
+          <a:prstGeom prst="rect">
+            <a:avLst/>
+          </a:prstGeom>
+          <a:noFill/>
+        </p:spPr>
+        <p:txBody>
+          <a:bodyPr wrap="square" anchor="t" lIns="25400" rIns="25400" tIns="12700" bIns="12700">
+            <a:spAutoFit/>
+          </a:bodyPr>
+          <a:lstStyle/>
+          <a:p>
+            <a:pPr algn="l">
+              <a:lnSpc>
+                <a:spcPct val="100000"/>
+              </a:lnSpc>
+              <a:spcAft>
+                <a:spcPts val="400"/>
+              </a:spcAft>
+            </a:pPr>
+            <a:r>
+              <a:rPr sz="1500" b="1">
+                <a:solidFill>
+                  <a:srgbClr val="191919"/>
+                </a:solidFill>
+                <a:latin typeface="Microsoft YaHei"/>
+                <a:ea typeface="Microsoft YaHei"/>
+                <a:cs typeface="Microsoft YaHei"/>
+              </a:rPr>
+              <a:t>前后案例对比</a:t>
+            </a:r>
+          </a:p>
+        </p:txBody>
+      </p:sp>
+      <p:sp>
+        <p:nvSpPr>
+          <p:cNvPr id="35" name="Rounded Rectangle 34"/>
+          <p:cNvSpPr/>
+          <p:nvPr/>
+        </p:nvSpPr>
+        <p:spPr>
+          <a:xfrm>
+            <a:off x="548640" y="3584448"/>
+            <a:ext cx="5074920" cy="2697480"/>
+          </a:xfrm>
+          <a:prstGeom prst="roundRect">
+            <a:avLst>
+              <a:gd name="adj" fmla="val 6000"/>
+            </a:avLst>
+          </a:prstGeom>
+          <a:solidFill>
+            <a:srgbClr val="FFF1F0"/>
+          </a:solidFill>
+          <a:ln w="12700">
+            <a:solidFill>
+              <a:srgbClr val="FF4D4F"/>
+            </a:solidFill>
+          </a:ln>
+          <a:effectLst/>
+        </p:spPr>
+        <p:style>
+          <a:lnRef idx="1">
+            <a:schemeClr val="accent1"/>
+          </a:lnRef>
+          <a:fillRef idx="3">
+            <a:schemeClr val="accent1"/>
+          </a:fillRef>
+          <a:effectRef idx="2">
+            <a:schemeClr val="accent1"/>
+          </a:effectRef>
+          <a:fontRef idx="minor">
+            <a:schemeClr val="lt1"/>
+          </a:fontRef>
+        </p:style>
+        <p:txBody>
+          <a:bodyPr rtlCol="0" anchor="ctr"/>
+          <a:lstStyle/>
+          <a:p>
+            <a:pPr algn="ctr"/>
+          </a:p>
+        </p:txBody>
+      </p:sp>
+      <p:sp>
+        <p:nvSpPr>
+          <p:cNvPr id="36" name="TextBox 35"/>
+          <p:cNvSpPr txBox="1"/>
+          <p:nvPr/>
+        </p:nvSpPr>
+        <p:spPr>
+          <a:xfrm>
+            <a:off x="804672" y="3685032"/>
+            <a:ext cx="4572000" cy="310896"/>
+          </a:xfrm>
+          <a:prstGeom prst="rect">
+            <a:avLst/>
+          </a:prstGeom>
+          <a:noFill/>
+        </p:spPr>
+        <p:txBody>
+          <a:bodyPr wrap="square" anchor="t" lIns="25400" rIns="25400" tIns="12700" bIns="12700">
+            <a:spAutoFit/>
+          </a:bodyPr>
+          <a:lstStyle/>
+          <a:p>
+            <a:pPr algn="l">
+              <a:lnSpc>
+                <a:spcPct val="100000"/>
+              </a:lnSpc>
+              <a:spcAft>
+                <a:spcPts val="400"/>
+              </a:spcAft>
+            </a:pPr>
+            <a:r>
+              <a:rPr sz="1300" b="1">
+                <a:solidFill>
+                  <a:srgbClr val="FF4D4F"/>
+                </a:solidFill>
+                <a:latin typeface="Microsoft YaHei"/>
+                <a:ea typeface="Microsoft YaHei"/>
+                <a:cs typeface="Microsoft YaHei"/>
+              </a:rPr>
+              <a:t>提升前案例（多层取值）</a:t>
+            </a:r>
+          </a:p>
+        </p:txBody>
+      </p:sp>
+      <p:sp>
+        <p:nvSpPr>
+          <p:cNvPr id="37" name="Rectangle 36"/>
+          <p:cNvSpPr/>
+          <p:nvPr/>
+        </p:nvSpPr>
+        <p:spPr>
+          <a:xfrm>
+            <a:off x="777240" y="4087368"/>
+            <a:ext cx="4617720" cy="2057400"/>
+          </a:xfrm>
+          <a:prstGeom prst="rect">
+            <a:avLst/>
+          </a:prstGeom>
+          <a:solidFill>
+            <a:srgbClr val="F5F5F5"/>
+          </a:solidFill>
+          <a:ln w="12700">
+            <a:solidFill>
+              <a:srgbClr val="D1D5DC"/>
+            </a:solidFill>
+            <a:prstDash val="dash"/>
+          </a:ln>
+          <a:effectLst/>
+        </p:spPr>
+        <p:style>
+          <a:lnRef idx="1">
+            <a:schemeClr val="accent1"/>
+          </a:lnRef>
+          <a:fillRef idx="3">
+            <a:schemeClr val="accent1"/>
+          </a:fillRef>
+          <a:effectRef idx="2">
+            <a:schemeClr val="accent1"/>
+          </a:effectRef>
+          <a:fontRef idx="minor">
+            <a:schemeClr val="lt1"/>
+          </a:fontRef>
+        </p:style>
+        <p:txBody>
+          <a:bodyPr rtlCol="0" anchor="ctr" wrap="square"/>
+          <a:lstStyle/>
+          <a:p>
+            <a:pPr algn="ctr"/>
+            <a:r>
+              <a:rPr sz="1100" b="0">
+                <a:solidFill>
+                  <a:srgbClr val="777777"/>
+                </a:solidFill>
+                <a:latin typeface="Microsoft YaHei"/>
+                <a:ea typeface="Microsoft YaHei"/>
+                <a:cs typeface="Microsoft YaHei"/>
+              </a:rPr>
+              <a:t>提升前案例截图占位</a:t>
+            </a:r>
+          </a:p>
+        </p:txBody>
+      </p:sp>
+      <p:sp>
+        <p:nvSpPr>
+          <p:cNvPr id="38" name="Right Arrow 37"/>
+          <p:cNvSpPr/>
+          <p:nvPr/>
+        </p:nvSpPr>
+        <p:spPr>
+          <a:xfrm>
+            <a:off x="5815584" y="4754880"/>
+            <a:ext cx="566928" cy="365760"/>
+          </a:xfrm>
+          <a:prstGeom prst="rightArrow">
+            <a:avLst>
+              <a:gd name="adj1" fmla="val 55000"/>
+              <a:gd name="adj2" fmla="val 55000"/>
+            </a:avLst>
+          </a:prstGeom>
+          <a:solidFill>
+            <a:srgbClr val="0067D1"/>
+          </a:solidFill>
+          <a:ln>
+            <a:noFill/>
+          </a:ln>
+          <a:effectLst/>
+        </p:spPr>
+        <p:style>
+          <a:lnRef idx="1">
+            <a:schemeClr val="accent1"/>
+          </a:lnRef>
+          <a:fillRef idx="3">
+            <a:schemeClr val="accent1"/>
+          </a:fillRef>
+          <a:effectRef idx="2">
+            <a:schemeClr val="accent1"/>
+          </a:effectRef>
+          <a:fontRef idx="minor">
+            <a:schemeClr val="lt1"/>
+          </a:fontRef>
+        </p:style>
+        <p:txBody>
+          <a:bodyPr rtlCol="0" anchor="ctr"/>
+          <a:lstStyle/>
+          <a:p>
+            <a:pPr algn="ctr"/>
+          </a:p>
+        </p:txBody>
+      </p:sp>
+      <p:sp>
+        <p:nvSpPr>
+          <p:cNvPr id="39" name="Rounded Rectangle 38"/>
+          <p:cNvSpPr/>
+          <p:nvPr/>
+        </p:nvSpPr>
+        <p:spPr>
+          <a:xfrm>
+            <a:off x="6565392" y="3584448"/>
+            <a:ext cx="5074920" cy="2697480"/>
+          </a:xfrm>
+          <a:prstGeom prst="roundRect">
+            <a:avLst>
+              <a:gd name="adj" fmla="val 6000"/>
+            </a:avLst>
+          </a:prstGeom>
+          <a:solidFill>
+            <a:srgbClr val="F6FFF6"/>
+          </a:solidFill>
+          <a:ln w="12700">
+            <a:solidFill>
+              <a:srgbClr val="52C41A"/>
+            </a:solidFill>
+          </a:ln>
+          <a:effectLst/>
+        </p:spPr>
+        <p:style>
+          <a:lnRef idx="1">
+            <a:schemeClr val="accent1"/>
+          </a:lnRef>
+          <a:fillRef idx="3">
+            <a:schemeClr val="accent1"/>
+          </a:fillRef>
+          <a:effectRef idx="2">
+            <a:schemeClr val="accent1"/>
+          </a:effectRef>
+          <a:fontRef idx="minor">
+            <a:schemeClr val="lt1"/>
+          </a:fontRef>
+        </p:style>
+        <p:txBody>
+          <a:bodyPr rtlCol="0" anchor="ctr"/>
+          <a:lstStyle/>
+          <a:p>
+            <a:pPr algn="ctr"/>
+          </a:p>
+        </p:txBody>
+      </p:sp>
+      <p:sp>
+        <p:nvSpPr>
+          <p:cNvPr id="40" name="TextBox 39"/>
+          <p:cNvSpPr txBox="1"/>
+          <p:nvPr/>
+        </p:nvSpPr>
+        <p:spPr>
+          <a:xfrm>
+            <a:off x="6821424" y="3685032"/>
+            <a:ext cx="4572000" cy="310896"/>
+          </a:xfrm>
+          <a:prstGeom prst="rect">
+            <a:avLst/>
+          </a:prstGeom>
+          <a:noFill/>
+        </p:spPr>
+        <p:txBody>
+          <a:bodyPr wrap="square" anchor="t" lIns="25400" rIns="25400" tIns="12700" bIns="12700">
+            <a:spAutoFit/>
+          </a:bodyPr>
+          <a:lstStyle/>
+          <a:p>
+            <a:pPr algn="l">
+              <a:lnSpc>
+                <a:spcPct val="100000"/>
+              </a:lnSpc>
+              <a:spcAft>
+                <a:spcPts val="400"/>
+              </a:spcAft>
+            </a:pPr>
+            <a:r>
+              <a:rPr sz="1300" b="1">
+                <a:solidFill>
+                  <a:srgbClr val="52C41A"/>
+                </a:solidFill>
+                <a:latin typeface="Microsoft YaHei"/>
+                <a:ea typeface="Microsoft YaHei"/>
+                <a:cs typeface="Microsoft YaHei"/>
+              </a:rPr>
+              <a:t>提升后案例（智能合并）</a:t>
+            </a:r>
+          </a:p>
+        </p:txBody>
+      </p:sp>
+      <p:sp>
+        <p:nvSpPr>
+          <p:cNvPr id="41" name="Rectangle 40"/>
+          <p:cNvSpPr/>
+          <p:nvPr/>
+        </p:nvSpPr>
+        <p:spPr>
+          <a:xfrm>
+            <a:off x="6793992" y="4087368"/>
+            <a:ext cx="4617720" cy="2057400"/>
+          </a:xfrm>
+          <a:prstGeom prst="rect">
+            <a:avLst/>
+          </a:prstGeom>
+          <a:solidFill>
+            <a:srgbClr val="F5F5F5"/>
+          </a:solidFill>
+          <a:ln w="12700">
+            <a:solidFill>
+              <a:srgbClr val="D1D5DC"/>
+            </a:solidFill>
+            <a:prstDash val="dash"/>
+          </a:ln>
+          <a:effectLst/>
+        </p:spPr>
+        <p:style>
+          <a:lnRef idx="1">
+            <a:schemeClr val="accent1"/>
+          </a:lnRef>
+          <a:fillRef idx="3">
+            <a:schemeClr val="accent1"/>
+          </a:fillRef>
+          <a:effectRef idx="2">
+            <a:schemeClr val="accent1"/>
+          </a:effectRef>
+          <a:fontRef idx="minor">
+            <a:schemeClr val="lt1"/>
+          </a:fontRef>
+        </p:style>
+        <p:txBody>
+          <a:bodyPr rtlCol="0" anchor="ctr" wrap="square"/>
+          <a:lstStyle/>
+          <a:p>
+            <a:pPr algn="ctr"/>
+            <a:r>
+              <a:rPr sz="1100" b="0">
+                <a:solidFill>
+                  <a:srgbClr val="777777"/>
+                </a:solidFill>
+                <a:latin typeface="Microsoft YaHei"/>
+                <a:ea typeface="Microsoft YaHei"/>
+                <a:cs typeface="Microsoft YaHei"/>
+              </a:rPr>
+              <a:t>提升后案例截图占位</a:t>
+            </a:r>
+          </a:p>
+        </p:txBody>
+      </p:sp>
+    </p:spTree>
+  </p:cSld>
+  <p:clrMapOvr>
+    <a:masterClrMapping/>
+  </p:clrMapOvr>
+</p:sld>
+</file>
+
+<file path=ppt/slides/slide3.xml><?xml version="1.0" encoding="utf-8"?>
+<p:sld xmlns:a="http://schemas.openxmlformats.org/drawingml/2006/main" xmlns:p="http://schemas.openxmlformats.org/presentationml/2006/main" xmlns:r="http://schemas.openxmlformats.org/officeDocument/2006/relationships">
+  <p:cSld>
+    <p:bg>
+      <p:bgPr>
+        <a:solidFill>
+          <a:srgbClr val="F7F8FA"/>
+        </a:solidFill>
+        <a:effectLst/>
+      </p:bgPr>
+    </p:bg>
+    <p:spTree>
+      <p:nvGrpSpPr>
+        <p:cNvPr id="1" name=""/>
+        <p:cNvGrpSpPr/>
+        <p:nvPr/>
+      </p:nvGrpSpPr>
+      <p:grpSpPr/>
+      <p:sp>
+        <p:nvSpPr>
+          <p:cNvPr id="2" name="TextBox 1"/>
+          <p:cNvSpPr txBox="1"/>
+          <p:nvPr/>
+        </p:nvSpPr>
+        <p:spPr>
+          <a:xfrm>
+            <a:off x="548640" y="237744"/>
+            <a:ext cx="11091672" cy="548640"/>
+          </a:xfrm>
+          <a:prstGeom prst="rect">
+            <a:avLst/>
+          </a:prstGeom>
+          <a:noFill/>
+        </p:spPr>
+        <p:txBody>
+          <a:bodyPr wrap="square" anchor="t" lIns="25400" rIns="25400" tIns="12700" bIns="12700">
+            <a:spAutoFit/>
+          </a:bodyPr>
+          <a:lstStyle/>
+          <a:p>
+            <a:pPr algn="ctr">
+              <a:lnSpc>
+                <a:spcPct val="100000"/>
+              </a:lnSpc>
+              <a:spcAft>
+                <a:spcPts val="400"/>
+              </a:spcAft>
+            </a:pPr>
+            <a:r>
+              <a:rPr sz="2400" b="1">
+                <a:solidFill>
+                  <a:srgbClr val="0067D1"/>
+                </a:solidFill>
+                <a:latin typeface="Microsoft YaHei"/>
+                <a:ea typeface="Microsoft YaHei"/>
+                <a:cs typeface="Microsoft YaHei"/>
+              </a:rPr>
+              <a:t>Badcase 分析（准确率 &lt; 70%）</a:t>
+            </a:r>
+          </a:p>
+        </p:txBody>
+      </p:sp>
+      <p:sp>
+        <p:nvSpPr>
+          <p:cNvPr id="3" name="Rounded Rectangle 2"/>
+          <p:cNvSpPr/>
+          <p:nvPr/>
+        </p:nvSpPr>
+        <p:spPr>
+          <a:xfrm>
+            <a:off x="502920" y="868680"/>
+            <a:ext cx="2651760" cy="3246120"/>
+          </a:xfrm>
+          <a:prstGeom prst="roundRect">
+            <a:avLst>
+              <a:gd name="adj" fmla="val 6000"/>
+            </a:avLst>
+          </a:prstGeom>
+          <a:solidFill>
+            <a:srgbClr val="FFFFFF"/>
+          </a:solidFill>
+          <a:ln w="12700">
+            <a:solidFill>
+              <a:srgbClr val="D1D5DC"/>
+            </a:solidFill>
+          </a:ln>
+          <a:effectLst/>
+        </p:spPr>
+        <p:style>
+          <a:lnRef idx="1">
+            <a:schemeClr val="accent1"/>
+          </a:lnRef>
+          <a:fillRef idx="3">
+            <a:schemeClr val="accent1"/>
+          </a:fillRef>
+          <a:effectRef idx="2">
+            <a:schemeClr val="accent1"/>
+          </a:effectRef>
+          <a:fontRef idx="minor">
+            <a:schemeClr val="lt1"/>
+          </a:fontRef>
+        </p:style>
+        <p:txBody>
+          <a:bodyPr rtlCol="0" anchor="ctr"/>
+          <a:lstStyle/>
+          <a:p>
+            <a:pPr algn="ctr"/>
+          </a:p>
+        </p:txBody>
+      </p:sp>
+      <p:sp>
+        <p:nvSpPr>
+          <p:cNvPr id="4" name="TextBox 3"/>
+          <p:cNvSpPr txBox="1"/>
+          <p:nvPr/>
+        </p:nvSpPr>
+        <p:spPr>
+          <a:xfrm>
+            <a:off x="667512" y="978408"/>
+            <a:ext cx="2322576" cy="292608"/>
+          </a:xfrm>
+          <a:prstGeom prst="rect">
+            <a:avLst/>
+          </a:prstGeom>
+          <a:noFill/>
+        </p:spPr>
+        <p:txBody>
+          <a:bodyPr wrap="square" anchor="t" lIns="25400" rIns="25400" tIns="12700" bIns="12700">
+            <a:spAutoFit/>
+          </a:bodyPr>
+          <a:lstStyle/>
+          <a:p>
+            <a:pPr algn="l">
+              <a:lnSpc>
+                <a:spcPct val="100000"/>
+              </a:lnSpc>
+              <a:spcAft>
+                <a:spcPts val="400"/>
+              </a:spcAft>
+            </a:pPr>
+            <a:r>
+              <a:rPr sz="1200" b="1">
+                <a:solidFill>
+                  <a:srgbClr val="191919"/>
+                </a:solidFill>
+                <a:latin typeface="Microsoft YaHei"/>
+                <a:ea typeface="Microsoft YaHei"/>
+                <a:cs typeface="Microsoft YaHei"/>
+              </a:rPr>
+              <a:t>Badcase 1（准确率 ？%）</a:t>
+            </a:r>
+          </a:p>
+        </p:txBody>
+      </p:sp>
+      <p:sp>
+        <p:nvSpPr>
+          <p:cNvPr id="5" name="TextBox 4"/>
+          <p:cNvSpPr txBox="1"/>
+          <p:nvPr/>
+        </p:nvSpPr>
+        <p:spPr>
+          <a:xfrm>
+            <a:off x="667512" y="1289304"/>
+            <a:ext cx="1115568" cy="182880"/>
+          </a:xfrm>
+          <a:prstGeom prst="rect">
+            <a:avLst/>
+          </a:prstGeom>
+          <a:noFill/>
+        </p:spPr>
+        <p:txBody>
+          <a:bodyPr wrap="square" anchor="t" lIns="25400" rIns="25400" tIns="12700" bIns="12700">
+            <a:spAutoFit/>
+          </a:bodyPr>
+          <a:lstStyle/>
+          <a:p>
+            <a:pPr algn="ctr">
+              <a:lnSpc>
+                <a:spcPct val="100000"/>
+              </a:lnSpc>
+              <a:spcAft>
+                <a:spcPts val="400"/>
+              </a:spcAft>
+            </a:pPr>
+            <a:r>
+              <a:rPr sz="900" b="0">
+                <a:solidFill>
+                  <a:srgbClr val="777777"/>
+                </a:solidFill>
+                <a:latin typeface="Microsoft YaHei"/>
+                <a:ea typeface="Microsoft YaHei"/>
+                <a:cs typeface="Microsoft YaHei"/>
+              </a:rPr>
+              <a:t>开发侧</a:t>
+            </a:r>
+          </a:p>
+        </p:txBody>
+      </p:sp>
+      <p:sp>
+        <p:nvSpPr>
+          <p:cNvPr id="6" name="Rectangle 5"/>
+          <p:cNvSpPr/>
+          <p:nvPr/>
+        </p:nvSpPr>
+        <p:spPr>
+          <a:xfrm>
+            <a:off x="667512" y="1490472"/>
+            <a:ext cx="1115568" cy="1993392"/>
+          </a:xfrm>
+          <a:prstGeom prst="rect">
+            <a:avLst/>
+          </a:prstGeom>
+          <a:solidFill>
+            <a:srgbClr val="F5F5F5"/>
+          </a:solidFill>
+          <a:ln w="12700">
+            <a:solidFill>
+              <a:srgbClr val="D1D5DC"/>
+            </a:solidFill>
+            <a:prstDash val="dash"/>
+          </a:ln>
+          <a:effectLst/>
+        </p:spPr>
+        <p:style>
+          <a:lnRef idx="1">
+            <a:schemeClr val="accent1"/>
+          </a:lnRef>
+          <a:fillRef idx="3">
+            <a:schemeClr val="accent1"/>
+          </a:fillRef>
+          <a:effectRef idx="2">
+            <a:schemeClr val="accent1"/>
+          </a:effectRef>
+          <a:fontRef idx="minor">
+            <a:schemeClr val="lt1"/>
+          </a:fontRef>
+        </p:style>
+        <p:txBody>
+          <a:bodyPr rtlCol="0" anchor="ctr" wrap="square"/>
+          <a:lstStyle/>
+          <a:p>
+            <a:pPr algn="ctr"/>
+            <a:r>
+              <a:rPr sz="1100" b="0">
+                <a:solidFill>
+                  <a:srgbClr val="777777"/>
+                </a:solidFill>
+                <a:latin typeface="Microsoft YaHei"/>
+                <a:ea typeface="Microsoft YaHei"/>
+                <a:cs typeface="Microsoft YaHei"/>
+              </a:rPr>
+              <a:t>图片占位</a:t>
+            </a:r>
+          </a:p>
+        </p:txBody>
+      </p:sp>
+      <p:sp>
+        <p:nvSpPr>
+          <p:cNvPr id="7" name="TextBox 6"/>
+          <p:cNvSpPr txBox="1"/>
+          <p:nvPr/>
+        </p:nvSpPr>
+        <p:spPr>
+          <a:xfrm>
+            <a:off x="1874520" y="1289304"/>
+            <a:ext cx="1115568" cy="182880"/>
+          </a:xfrm>
+          <a:prstGeom prst="rect">
+            <a:avLst/>
+          </a:prstGeom>
+          <a:noFill/>
+        </p:spPr>
+        <p:txBody>
+          <a:bodyPr wrap="square" anchor="t" lIns="25400" rIns="25400" tIns="12700" bIns="12700">
+            <a:spAutoFit/>
+          </a:bodyPr>
+          <a:lstStyle/>
+          <a:p>
+            <a:pPr algn="ctr">
+              <a:lnSpc>
+                <a:spcPct val="100000"/>
+              </a:lnSpc>
+              <a:spcAft>
+                <a:spcPts val="400"/>
+              </a:spcAft>
+            </a:pPr>
+            <a:r>
+              <a:rPr sz="900" b="0">
+                <a:solidFill>
+                  <a:srgbClr val="777777"/>
+                </a:solidFill>
+                <a:latin typeface="Microsoft YaHei"/>
+                <a:ea typeface="Microsoft YaHei"/>
+                <a:cs typeface="Microsoft YaHei"/>
+              </a:rPr>
+              <a:t>设计侧</a:t>
+            </a:r>
+          </a:p>
+        </p:txBody>
+      </p:sp>
+      <p:sp>
+        <p:nvSpPr>
+          <p:cNvPr id="8" name="Rectangle 7"/>
+          <p:cNvSpPr/>
+          <p:nvPr/>
+        </p:nvSpPr>
+        <p:spPr>
+          <a:xfrm>
+            <a:off x="1874520" y="1490472"/>
+            <a:ext cx="1115568" cy="1993392"/>
+          </a:xfrm>
+          <a:prstGeom prst="rect">
+            <a:avLst/>
+          </a:prstGeom>
+          <a:solidFill>
+            <a:srgbClr val="F5F5F5"/>
+          </a:solidFill>
+          <a:ln w="12700">
+            <a:solidFill>
+              <a:srgbClr val="D1D5DC"/>
+            </a:solidFill>
+            <a:prstDash val="dash"/>
+          </a:ln>
+          <a:effectLst/>
+        </p:spPr>
+        <p:style>
+          <a:lnRef idx="1">
+            <a:schemeClr val="accent1"/>
+          </a:lnRef>
+          <a:fillRef idx="3">
+            <a:schemeClr val="accent1"/>
+          </a:fillRef>
+          <a:effectRef idx="2">
+            <a:schemeClr val="accent1"/>
+          </a:effectRef>
+          <a:fontRef idx="minor">
+            <a:schemeClr val="lt1"/>
+          </a:fontRef>
+        </p:style>
+        <p:txBody>
+          <a:bodyPr rtlCol="0" anchor="ctr" wrap="square"/>
+          <a:lstStyle/>
+          <a:p>
+            <a:pPr algn="ctr"/>
+            <a:r>
+              <a:rPr sz="1100" b="0">
+                <a:solidFill>
+                  <a:srgbClr val="777777"/>
+                </a:solidFill>
+                <a:latin typeface="Microsoft YaHei"/>
+                <a:ea typeface="Microsoft YaHei"/>
+                <a:cs typeface="Microsoft YaHei"/>
+              </a:rPr>
+              <a:t>图片占位</a:t>
+            </a:r>
+          </a:p>
+        </p:txBody>
+      </p:sp>
+      <p:sp>
+        <p:nvSpPr>
+          <p:cNvPr id="9" name="Rounded Rectangle 8"/>
+          <p:cNvSpPr/>
+          <p:nvPr/>
+        </p:nvSpPr>
+        <p:spPr>
+          <a:xfrm>
+            <a:off x="667512" y="3575304"/>
+            <a:ext cx="2322576" cy="384048"/>
+          </a:xfrm>
+          <a:prstGeom prst="roundRect">
+            <a:avLst>
+              <a:gd name="adj" fmla="val 50000"/>
+            </a:avLst>
+          </a:prstGeom>
+          <a:solidFill>
+            <a:srgbClr val="F5F5F5"/>
+          </a:solidFill>
+          <a:ln w="12700">
+            <a:solidFill>
+              <a:srgbClr val="D1D5DC"/>
+            </a:solidFill>
+          </a:ln>
+          <a:effectLst/>
+        </p:spPr>
+        <p:style>
+          <a:lnRef idx="1">
+            <a:schemeClr val="accent1"/>
+          </a:lnRef>
+          <a:fillRef idx="3">
+            <a:schemeClr val="accent1"/>
+          </a:fillRef>
+          <a:effectRef idx="2">
+            <a:schemeClr val="accent1"/>
+          </a:effectRef>
+          <a:fontRef idx="minor">
+            <a:schemeClr val="lt1"/>
+          </a:fontRef>
+        </p:style>
+        <p:txBody>
+          <a:bodyPr rtlCol="0" anchor="ctr" wrap="square" lIns="0" rIns="0" tIns="0" bIns="0"/>
+          <a:lstStyle/>
+          <a:p>
+            <a:pPr algn="ctr"/>
+            <a:r>
+              <a:rPr sz="950" b="0">
+                <a:solidFill>
+                  <a:srgbClr val="777777"/>
+                </a:solidFill>
+                <a:latin typeface="Microsoft YaHei"/>
+                <a:ea typeface="Microsoft YaHei"/>
+                <a:cs typeface="Microsoft YaHei"/>
+              </a:rPr>
+              <a:t>链接：（待填写）</a:t>
+            </a:r>
+          </a:p>
+        </p:txBody>
+      </p:sp>
+      <p:sp>
+        <p:nvSpPr>
+          <p:cNvPr id="10" name="Rounded Rectangle 9"/>
+          <p:cNvSpPr/>
+          <p:nvPr/>
+        </p:nvSpPr>
+        <p:spPr>
+          <a:xfrm>
+            <a:off x="3346704" y="868680"/>
+            <a:ext cx="2651760" cy="3246120"/>
+          </a:xfrm>
+          <a:prstGeom prst="roundRect">
+            <a:avLst>
+              <a:gd name="adj" fmla="val 6000"/>
+            </a:avLst>
+          </a:prstGeom>
+          <a:solidFill>
+            <a:srgbClr val="FFFFFF"/>
+          </a:solidFill>
+          <a:ln w="12700">
+            <a:solidFill>
+              <a:srgbClr val="D1D5DC"/>
+            </a:solidFill>
+          </a:ln>
+          <a:effectLst/>
+        </p:spPr>
+        <p:style>
+          <a:lnRef idx="1">
+            <a:schemeClr val="accent1"/>
+          </a:lnRef>
+          <a:fillRef idx="3">
+            <a:schemeClr val="accent1"/>
+          </a:fillRef>
+          <a:effectRef idx="2">
+            <a:schemeClr val="accent1"/>
+          </a:effectRef>
+          <a:fontRef idx="minor">
+            <a:schemeClr val="lt1"/>
+          </a:fontRef>
+        </p:style>
+        <p:txBody>
+          <a:bodyPr rtlCol="0" anchor="ctr"/>
+          <a:lstStyle/>
+          <a:p>
+            <a:pPr algn="ctr"/>
+          </a:p>
+        </p:txBody>
+      </p:sp>
+      <p:sp>
+        <p:nvSpPr>
+          <p:cNvPr id="11" name="TextBox 10"/>
+          <p:cNvSpPr txBox="1"/>
+          <p:nvPr/>
+        </p:nvSpPr>
+        <p:spPr>
+          <a:xfrm>
+            <a:off x="3511296" y="978408"/>
+            <a:ext cx="2322576" cy="292608"/>
+          </a:xfrm>
+          <a:prstGeom prst="rect">
+            <a:avLst/>
+          </a:prstGeom>
+          <a:noFill/>
+        </p:spPr>
+        <p:txBody>
+          <a:bodyPr wrap="square" anchor="t" lIns="25400" rIns="25400" tIns="12700" bIns="12700">
+            <a:spAutoFit/>
+          </a:bodyPr>
+          <a:lstStyle/>
+          <a:p>
+            <a:pPr algn="l">
+              <a:lnSpc>
+                <a:spcPct val="100000"/>
+              </a:lnSpc>
+              <a:spcAft>
+                <a:spcPts val="400"/>
+              </a:spcAft>
+            </a:pPr>
+            <a:r>
+              <a:rPr sz="1200" b="1">
+                <a:solidFill>
+                  <a:srgbClr val="191919"/>
+                </a:solidFill>
+                <a:latin typeface="Microsoft YaHei"/>
+                <a:ea typeface="Microsoft YaHei"/>
+                <a:cs typeface="Microsoft YaHei"/>
+              </a:rPr>
+              <a:t>Badcase 2（准确率 ？%）</a:t>
+            </a:r>
+          </a:p>
+        </p:txBody>
+      </p:sp>
+      <p:sp>
+        <p:nvSpPr>
+          <p:cNvPr id="12" name="TextBox 11"/>
+          <p:cNvSpPr txBox="1"/>
+          <p:nvPr/>
+        </p:nvSpPr>
+        <p:spPr>
+          <a:xfrm>
+            <a:off x="3511296" y="1289304"/>
+            <a:ext cx="1115568" cy="182880"/>
+          </a:xfrm>
+          <a:prstGeom prst="rect">
+            <a:avLst/>
+          </a:prstGeom>
+          <a:noFill/>
+        </p:spPr>
+        <p:txBody>
+          <a:bodyPr wrap="square" anchor="t" lIns="25400" rIns="25400" tIns="12700" bIns="12700">
+            <a:spAutoFit/>
+          </a:bodyPr>
+          <a:lstStyle/>
+          <a:p>
+            <a:pPr algn="ctr">
+              <a:lnSpc>
+                <a:spcPct val="100000"/>
+              </a:lnSpc>
+              <a:spcAft>
+                <a:spcPts val="400"/>
+              </a:spcAft>
+            </a:pPr>
+            <a:r>
+              <a:rPr sz="900" b="0">
+                <a:solidFill>
+                  <a:srgbClr val="777777"/>
+                </a:solidFill>
+                <a:latin typeface="Microsoft YaHei"/>
+                <a:ea typeface="Microsoft YaHei"/>
+                <a:cs typeface="Microsoft YaHei"/>
+              </a:rPr>
+              <a:t>开发侧</a:t>
+            </a:r>
+          </a:p>
+        </p:txBody>
+      </p:sp>
+      <p:sp>
+        <p:nvSpPr>
+          <p:cNvPr id="13" name="Rectangle 12"/>
+          <p:cNvSpPr/>
+          <p:nvPr/>
+        </p:nvSpPr>
+        <p:spPr>
+          <a:xfrm>
+            <a:off x="3511296" y="1490472"/>
+            <a:ext cx="1115568" cy="1993392"/>
+          </a:xfrm>
+          <a:prstGeom prst="rect">
+            <a:avLst/>
+          </a:prstGeom>
+          <a:solidFill>
+            <a:srgbClr val="F5F5F5"/>
+          </a:solidFill>
+          <a:ln w="12700">
+            <a:solidFill>
+              <a:srgbClr val="D1D5DC"/>
+            </a:solidFill>
+            <a:prstDash val="dash"/>
+          </a:ln>
+          <a:effectLst/>
+        </p:spPr>
+        <p:style>
+          <a:lnRef idx="1">
+            <a:schemeClr val="accent1"/>
+          </a:lnRef>
+          <a:fillRef idx="3">
+            <a:schemeClr val="accent1"/>
+          </a:fillRef>
+          <a:effectRef idx="2">
+            <a:schemeClr val="accent1"/>
+          </a:effectRef>
+          <a:fontRef idx="minor">
+            <a:schemeClr val="lt1"/>
+          </a:fontRef>
+        </p:style>
+        <p:txBody>
+          <a:bodyPr rtlCol="0" anchor="ctr" wrap="square"/>
+          <a:lstStyle/>
+          <a:p>
+            <a:pPr algn="ctr"/>
+            <a:r>
+              <a:rPr sz="1100" b="0">
+                <a:solidFill>
+                  <a:srgbClr val="777777"/>
+                </a:solidFill>
+                <a:latin typeface="Microsoft YaHei"/>
+                <a:ea typeface="Microsoft YaHei"/>
+                <a:cs typeface="Microsoft YaHei"/>
+              </a:rPr>
+              <a:t>图片占位</a:t>
+            </a:r>
+          </a:p>
+        </p:txBody>
+      </p:sp>
+      <p:sp>
+        <p:nvSpPr>
+          <p:cNvPr id="14" name="TextBox 13"/>
+          <p:cNvSpPr txBox="1"/>
+          <p:nvPr/>
+        </p:nvSpPr>
+        <p:spPr>
+          <a:xfrm>
+            <a:off x="4718304" y="1289304"/>
+            <a:ext cx="1115568" cy="182880"/>
+          </a:xfrm>
+          <a:prstGeom prst="rect">
+            <a:avLst/>
+          </a:prstGeom>
+          <a:noFill/>
+        </p:spPr>
+        <p:txBody>
+          <a:bodyPr wrap="square" anchor="t" lIns="25400" rIns="25400" tIns="12700" bIns="12700">
+            <a:spAutoFit/>
+          </a:bodyPr>
+          <a:lstStyle/>
+          <a:p>
+            <a:pPr algn="ctr">
+              <a:lnSpc>
+                <a:spcPct val="100000"/>
+              </a:lnSpc>
+              <a:spcAft>
+                <a:spcPts val="400"/>
+              </a:spcAft>
+            </a:pPr>
+            <a:r>
+              <a:rPr sz="900" b="0">
+                <a:solidFill>
+                  <a:srgbClr val="777777"/>
+                </a:solidFill>
+                <a:latin typeface="Microsoft YaHei"/>
+                <a:ea typeface="Microsoft YaHei"/>
+                <a:cs typeface="Microsoft YaHei"/>
+              </a:rPr>
+              <a:t>设计侧</a:t>
+            </a:r>
+          </a:p>
+        </p:txBody>
+      </p:sp>
+      <p:sp>
+        <p:nvSpPr>
+          <p:cNvPr id="15" name="Rectangle 14"/>
+          <p:cNvSpPr/>
+          <p:nvPr/>
+        </p:nvSpPr>
+        <p:spPr>
+          <a:xfrm>
+            <a:off x="4718304" y="1490472"/>
+            <a:ext cx="1115568" cy="1993392"/>
+          </a:xfrm>
+          <a:prstGeom prst="rect">
+            <a:avLst/>
+          </a:prstGeom>
+          <a:solidFill>
+            <a:srgbClr val="F5F5F5"/>
+          </a:solidFill>
+          <a:ln w="12700">
+            <a:solidFill>
+              <a:srgbClr val="D1D5DC"/>
+            </a:solidFill>
+            <a:prstDash val="dash"/>
+          </a:ln>
+          <a:effectLst/>
+        </p:spPr>
+        <p:style>
+          <a:lnRef idx="1">
+            <a:schemeClr val="accent1"/>
+          </a:lnRef>
+          <a:fillRef idx="3">
+            <a:schemeClr val="accent1"/>
+          </a:fillRef>
+          <a:effectRef idx="2">
+            <a:schemeClr val="accent1"/>
+          </a:effectRef>
+          <a:fontRef idx="minor">
+            <a:schemeClr val="lt1"/>
+          </a:fontRef>
+        </p:style>
+        <p:txBody>
+          <a:bodyPr rtlCol="0" anchor="ctr" wrap="square"/>
+          <a:lstStyle/>
+          <a:p>
+            <a:pPr algn="ctr"/>
+            <a:r>
+              <a:rPr sz="1100" b="0">
+                <a:solidFill>
+                  <a:srgbClr val="777777"/>
+                </a:solidFill>
+                <a:latin typeface="Microsoft YaHei"/>
+                <a:ea typeface="Microsoft YaHei"/>
+                <a:cs typeface="Microsoft YaHei"/>
+              </a:rPr>
+              <a:t>图片占位</a:t>
+            </a:r>
+          </a:p>
+        </p:txBody>
+      </p:sp>
+      <p:sp>
+        <p:nvSpPr>
+          <p:cNvPr id="16" name="Rounded Rectangle 15"/>
+          <p:cNvSpPr/>
+          <p:nvPr/>
+        </p:nvSpPr>
+        <p:spPr>
+          <a:xfrm>
+            <a:off x="3511296" y="3575304"/>
+            <a:ext cx="2322576" cy="384048"/>
+          </a:xfrm>
+          <a:prstGeom prst="roundRect">
+            <a:avLst>
+              <a:gd name="adj" fmla="val 50000"/>
+            </a:avLst>
+          </a:prstGeom>
+          <a:solidFill>
+            <a:srgbClr val="F5F5F5"/>
+          </a:solidFill>
+          <a:ln w="12700">
+            <a:solidFill>
+              <a:srgbClr val="D1D5DC"/>
+            </a:solidFill>
+          </a:ln>
+          <a:effectLst/>
+        </p:spPr>
+        <p:style>
+          <a:lnRef idx="1">
+            <a:schemeClr val="accent1"/>
+          </a:lnRef>
+          <a:fillRef idx="3">
+            <a:schemeClr val="accent1"/>
+          </a:fillRef>
+          <a:effectRef idx="2">
+            <a:schemeClr val="accent1"/>
+          </a:effectRef>
+          <a:fontRef idx="minor">
+            <a:schemeClr val="lt1"/>
+          </a:fontRef>
+        </p:style>
+        <p:txBody>
+          <a:bodyPr rtlCol="0" anchor="ctr" wrap="square" lIns="0" rIns="0" tIns="0" bIns="0"/>
+          <a:lstStyle/>
+          <a:p>
+            <a:pPr algn="ctr"/>
+            <a:r>
+              <a:rPr sz="950" b="0">
+                <a:solidFill>
+                  <a:srgbClr val="777777"/>
+                </a:solidFill>
+                <a:latin typeface="Microsoft YaHei"/>
+                <a:ea typeface="Microsoft YaHei"/>
+                <a:cs typeface="Microsoft YaHei"/>
+              </a:rPr>
+              <a:t>链接：（待填写）</a:t>
+            </a:r>
+          </a:p>
+        </p:txBody>
+      </p:sp>
+      <p:sp>
+        <p:nvSpPr>
+          <p:cNvPr id="17" name="Rounded Rectangle 16"/>
+          <p:cNvSpPr/>
+          <p:nvPr/>
+        </p:nvSpPr>
+        <p:spPr>
+          <a:xfrm>
+            <a:off x="6190488" y="868680"/>
+            <a:ext cx="2651760" cy="3246120"/>
+          </a:xfrm>
+          <a:prstGeom prst="roundRect">
+            <a:avLst>
+              <a:gd name="adj" fmla="val 6000"/>
+            </a:avLst>
+          </a:prstGeom>
+          <a:solidFill>
+            <a:srgbClr val="FFFFFF"/>
+          </a:solidFill>
+          <a:ln w="12700">
+            <a:solidFill>
+              <a:srgbClr val="D1D5DC"/>
+            </a:solidFill>
+          </a:ln>
+          <a:effectLst/>
+        </p:spPr>
+        <p:style>
+          <a:lnRef idx="1">
+            <a:schemeClr val="accent1"/>
+          </a:lnRef>
+          <a:fillRef idx="3">
+            <a:schemeClr val="accent1"/>
+          </a:fillRef>
+          <a:effectRef idx="2">
+            <a:schemeClr val="accent1"/>
+          </a:effectRef>
+          <a:fontRef idx="minor">
+            <a:schemeClr val="lt1"/>
+          </a:fontRef>
+        </p:style>
+        <p:txBody>
+          <a:bodyPr rtlCol="0" anchor="ctr"/>
+          <a:lstStyle/>
+          <a:p>
+            <a:pPr algn="ctr"/>
+          </a:p>
+        </p:txBody>
+      </p:sp>
+      <p:sp>
+        <p:nvSpPr>
+          <p:cNvPr id="18" name="TextBox 17"/>
+          <p:cNvSpPr txBox="1"/>
+          <p:nvPr/>
+        </p:nvSpPr>
+        <p:spPr>
+          <a:xfrm>
+            <a:off x="6355080" y="978408"/>
+            <a:ext cx="2322576" cy="292608"/>
+          </a:xfrm>
+          <a:prstGeom prst="rect">
+            <a:avLst/>
+          </a:prstGeom>
+          <a:noFill/>
+        </p:spPr>
+        <p:txBody>
+          <a:bodyPr wrap="square" anchor="t" lIns="25400" rIns="25400" tIns="12700" bIns="12700">
+            <a:spAutoFit/>
+          </a:bodyPr>
+          <a:lstStyle/>
+          <a:p>
+            <a:pPr algn="l">
+              <a:lnSpc>
+                <a:spcPct val="100000"/>
+              </a:lnSpc>
+              <a:spcAft>
+                <a:spcPts val="400"/>
+              </a:spcAft>
+            </a:pPr>
+            <a:r>
+              <a:rPr sz="1200" b="1">
+                <a:solidFill>
+                  <a:srgbClr val="191919"/>
+                </a:solidFill>
+                <a:latin typeface="Microsoft YaHei"/>
+                <a:ea typeface="Microsoft YaHei"/>
+                <a:cs typeface="Microsoft YaHei"/>
+              </a:rPr>
+              <a:t>Badcase 3（准确率 ？%）</a:t>
+            </a:r>
+          </a:p>
+        </p:txBody>
+      </p:sp>
+      <p:sp>
+        <p:nvSpPr>
+          <p:cNvPr id="19" name="TextBox 18"/>
+          <p:cNvSpPr txBox="1"/>
+          <p:nvPr/>
+        </p:nvSpPr>
+        <p:spPr>
+          <a:xfrm>
+            <a:off x="6355080" y="1289304"/>
+            <a:ext cx="1115568" cy="182880"/>
+          </a:xfrm>
+          <a:prstGeom prst="rect">
+            <a:avLst/>
+          </a:prstGeom>
+          <a:noFill/>
+        </p:spPr>
+        <p:txBody>
+          <a:bodyPr wrap="square" anchor="t" lIns="25400" rIns="25400" tIns="12700" bIns="12700">
+            <a:spAutoFit/>
+          </a:bodyPr>
+          <a:lstStyle/>
+          <a:p>
+            <a:pPr algn="ctr">
+              <a:lnSpc>
+                <a:spcPct val="100000"/>
+              </a:lnSpc>
+              <a:spcAft>
+                <a:spcPts val="400"/>
+              </a:spcAft>
+            </a:pPr>
+            <a:r>
+              <a:rPr sz="900" b="0">
+                <a:solidFill>
+                  <a:srgbClr val="777777"/>
+                </a:solidFill>
+                <a:latin typeface="Microsoft YaHei"/>
+                <a:ea typeface="Microsoft YaHei"/>
+                <a:cs typeface="Microsoft YaHei"/>
+              </a:rPr>
+              <a:t>开发侧</a:t>
+            </a:r>
+          </a:p>
+        </p:txBody>
+      </p:sp>
+      <p:sp>
+        <p:nvSpPr>
+          <p:cNvPr id="20" name="Rectangle 19"/>
+          <p:cNvSpPr/>
+          <p:nvPr/>
+        </p:nvSpPr>
+        <p:spPr>
+          <a:xfrm>
+            <a:off x="6355080" y="1490472"/>
+            <a:ext cx="1115568" cy="1993392"/>
+          </a:xfrm>
+          <a:prstGeom prst="rect">
+            <a:avLst/>
+          </a:prstGeom>
+          <a:solidFill>
+            <a:srgbClr val="F5F5F5"/>
+          </a:solidFill>
+          <a:ln w="12700">
+            <a:solidFill>
+              <a:srgbClr val="D1D5DC"/>
+            </a:solidFill>
+            <a:prstDash val="dash"/>
+          </a:ln>
+          <a:effectLst/>
+        </p:spPr>
+        <p:style>
+          <a:lnRef idx="1">
+            <a:schemeClr val="accent1"/>
+          </a:lnRef>
+          <a:fillRef idx="3">
+            <a:schemeClr val="accent1"/>
+          </a:fillRef>
+          <a:effectRef idx="2">
+            <a:schemeClr val="accent1"/>
+          </a:effectRef>
+          <a:fontRef idx="minor">
+            <a:schemeClr val="lt1"/>
+          </a:fontRef>
+        </p:style>
+        <p:txBody>
+          <a:bodyPr rtlCol="0" anchor="ctr" wrap="square"/>
+          <a:lstStyle/>
+          <a:p>
+            <a:pPr algn="ctr"/>
+            <a:r>
+              <a:rPr sz="1100" b="0">
+                <a:solidFill>
+                  <a:srgbClr val="777777"/>
+                </a:solidFill>
+                <a:latin typeface="Microsoft YaHei"/>
+                <a:ea typeface="Microsoft YaHei"/>
+                <a:cs typeface="Microsoft YaHei"/>
+              </a:rPr>
+              <a:t>图片占位</a:t>
+            </a:r>
+          </a:p>
+        </p:txBody>
+      </p:sp>
+      <p:sp>
+        <p:nvSpPr>
+          <p:cNvPr id="21" name="TextBox 20"/>
+          <p:cNvSpPr txBox="1"/>
+          <p:nvPr/>
+        </p:nvSpPr>
+        <p:spPr>
+          <a:xfrm>
+            <a:off x="7562088" y="1289304"/>
+            <a:ext cx="1115568" cy="182880"/>
+          </a:xfrm>
+          <a:prstGeom prst="rect">
+            <a:avLst/>
+          </a:prstGeom>
+          <a:noFill/>
+        </p:spPr>
+        <p:txBody>
+          <a:bodyPr wrap="square" anchor="t" lIns="25400" rIns="25400" tIns="12700" bIns="12700">
+            <a:spAutoFit/>
+          </a:bodyPr>
+          <a:lstStyle/>
+          <a:p>
+            <a:pPr algn="ctr">
+              <a:lnSpc>
+                <a:spcPct val="100000"/>
+              </a:lnSpc>
+              <a:spcAft>
+                <a:spcPts val="400"/>
+              </a:spcAft>
+            </a:pPr>
+            <a:r>
+              <a:rPr sz="900" b="0">
+                <a:solidFill>
+                  <a:srgbClr val="777777"/>
+                </a:solidFill>
+                <a:latin typeface="Microsoft YaHei"/>
+                <a:ea typeface="Microsoft YaHei"/>
+                <a:cs typeface="Microsoft YaHei"/>
+              </a:rPr>
+              <a:t>设计侧</a:t>
+            </a:r>
+          </a:p>
+        </p:txBody>
+      </p:sp>
+      <p:sp>
+        <p:nvSpPr>
+          <p:cNvPr id="22" name="Rectangle 21"/>
+          <p:cNvSpPr/>
+          <p:nvPr/>
+        </p:nvSpPr>
+        <p:spPr>
+          <a:xfrm>
+            <a:off x="7562088" y="1490472"/>
+            <a:ext cx="1115568" cy="1993392"/>
+          </a:xfrm>
+          <a:prstGeom prst="rect">
+            <a:avLst/>
+          </a:prstGeom>
+          <a:solidFill>
+            <a:srgbClr val="F5F5F5"/>
+          </a:solidFill>
+          <a:ln w="12700">
+            <a:solidFill>
+              <a:srgbClr val="D1D5DC"/>
+            </a:solidFill>
+            <a:prstDash val="dash"/>
+          </a:ln>
+          <a:effectLst/>
+        </p:spPr>
+        <p:style>
+          <a:lnRef idx="1">
+            <a:schemeClr val="accent1"/>
+          </a:lnRef>
+          <a:fillRef idx="3">
+            <a:schemeClr val="accent1"/>
+          </a:fillRef>
+          <a:effectRef idx="2">
+            <a:schemeClr val="accent1"/>
+          </a:effectRef>
+          <a:fontRef idx="minor">
+            <a:schemeClr val="lt1"/>
+          </a:fontRef>
+        </p:style>
+        <p:txBody>
+          <a:bodyPr rtlCol="0" anchor="ctr" wrap="square"/>
+          <a:lstStyle/>
+          <a:p>
+            <a:pPr algn="ctr"/>
+            <a:r>
+              <a:rPr sz="1100" b="0">
+                <a:solidFill>
+                  <a:srgbClr val="777777"/>
+                </a:solidFill>
+                <a:latin typeface="Microsoft YaHei"/>
+                <a:ea typeface="Microsoft YaHei"/>
+                <a:cs typeface="Microsoft YaHei"/>
+              </a:rPr>
+              <a:t>图片占位</a:t>
+            </a:r>
+          </a:p>
+        </p:txBody>
+      </p:sp>
+      <p:sp>
+        <p:nvSpPr>
+          <p:cNvPr id="23" name="Rounded Rectangle 22"/>
+          <p:cNvSpPr/>
+          <p:nvPr/>
+        </p:nvSpPr>
+        <p:spPr>
+          <a:xfrm>
+            <a:off x="6355080" y="3575304"/>
+            <a:ext cx="2322576" cy="384048"/>
+          </a:xfrm>
+          <a:prstGeom prst="roundRect">
+            <a:avLst>
+              <a:gd name="adj" fmla="val 50000"/>
+            </a:avLst>
+          </a:prstGeom>
+          <a:solidFill>
+            <a:srgbClr val="F5F5F5"/>
+          </a:solidFill>
+          <a:ln w="12700">
+            <a:solidFill>
+              <a:srgbClr val="D1D5DC"/>
+            </a:solidFill>
+          </a:ln>
+          <a:effectLst/>
+        </p:spPr>
+        <p:style>
+          <a:lnRef idx="1">
+            <a:schemeClr val="accent1"/>
+          </a:lnRef>
+          <a:fillRef idx="3">
+            <a:schemeClr val="accent1"/>
+          </a:fillRef>
+          <a:effectRef idx="2">
+            <a:schemeClr val="accent1"/>
+          </a:effectRef>
+          <a:fontRef idx="minor">
+            <a:schemeClr val="lt1"/>
+          </a:fontRef>
+        </p:style>
+        <p:txBody>
+          <a:bodyPr rtlCol="0" anchor="ctr" wrap="square" lIns="0" rIns="0" tIns="0" bIns="0"/>
+          <a:lstStyle/>
+          <a:p>
+            <a:pPr algn="ctr"/>
+            <a:r>
+              <a:rPr sz="950" b="0">
+                <a:solidFill>
+                  <a:srgbClr val="777777"/>
+                </a:solidFill>
+                <a:latin typeface="Microsoft YaHei"/>
+                <a:ea typeface="Microsoft YaHei"/>
+                <a:cs typeface="Microsoft YaHei"/>
+              </a:rPr>
+              <a:t>链接：（待填写）</a:t>
+            </a:r>
+          </a:p>
+        </p:txBody>
+      </p:sp>
+      <p:sp>
+        <p:nvSpPr>
+          <p:cNvPr id="24" name="Rounded Rectangle 23"/>
+          <p:cNvSpPr/>
+          <p:nvPr/>
+        </p:nvSpPr>
+        <p:spPr>
+          <a:xfrm>
+            <a:off x="9034272" y="868680"/>
+            <a:ext cx="2651760" cy="3246120"/>
+          </a:xfrm>
+          <a:prstGeom prst="roundRect">
+            <a:avLst>
+              <a:gd name="adj" fmla="val 6000"/>
+            </a:avLst>
+          </a:prstGeom>
+          <a:solidFill>
+            <a:srgbClr val="FFFFFF"/>
+          </a:solidFill>
+          <a:ln w="12700">
+            <a:solidFill>
+              <a:srgbClr val="D1D5DC"/>
+            </a:solidFill>
+          </a:ln>
+          <a:effectLst/>
+        </p:spPr>
+        <p:style>
+          <a:lnRef idx="1">
+            <a:schemeClr val="accent1"/>
+          </a:lnRef>
+          <a:fillRef idx="3">
+            <a:schemeClr val="accent1"/>
+          </a:fillRef>
+          <a:effectRef idx="2">
+            <a:schemeClr val="accent1"/>
+          </a:effectRef>
+          <a:fontRef idx="minor">
+            <a:schemeClr val="lt1"/>
+          </a:fontRef>
+        </p:style>
+        <p:txBody>
+          <a:bodyPr rtlCol="0" anchor="ctr"/>
+          <a:lstStyle/>
+          <a:p>
+            <a:pPr algn="ctr"/>
+          </a:p>
+        </p:txBody>
+      </p:sp>
+      <p:sp>
+        <p:nvSpPr>
+          <p:cNvPr id="25" name="TextBox 24"/>
+          <p:cNvSpPr txBox="1"/>
+          <p:nvPr/>
+        </p:nvSpPr>
+        <p:spPr>
+          <a:xfrm>
+            <a:off x="9198864" y="978408"/>
+            <a:ext cx="2322576" cy="292608"/>
+          </a:xfrm>
+          <a:prstGeom prst="rect">
+            <a:avLst/>
+          </a:prstGeom>
+          <a:noFill/>
+        </p:spPr>
+        <p:txBody>
+          <a:bodyPr wrap="square" anchor="t" lIns="25400" rIns="25400" tIns="12700" bIns="12700">
+            <a:spAutoFit/>
+          </a:bodyPr>
+          <a:lstStyle/>
+          <a:p>
+            <a:pPr algn="l">
+              <a:lnSpc>
+                <a:spcPct val="100000"/>
+              </a:lnSpc>
+              <a:spcAft>
+                <a:spcPts val="400"/>
+              </a:spcAft>
+            </a:pPr>
+            <a:r>
+              <a:rPr sz="1200" b="1">
+                <a:solidFill>
+                  <a:srgbClr val="191919"/>
+                </a:solidFill>
+                <a:latin typeface="Microsoft YaHei"/>
+                <a:ea typeface="Microsoft YaHei"/>
+                <a:cs typeface="Microsoft YaHei"/>
+              </a:rPr>
+              <a:t>Badcase 4（准确率 ？%）</a:t>
+            </a:r>
+          </a:p>
+        </p:txBody>
+      </p:sp>
+      <p:sp>
+        <p:nvSpPr>
+          <p:cNvPr id="26" name="TextBox 25"/>
+          <p:cNvSpPr txBox="1"/>
+          <p:nvPr/>
+        </p:nvSpPr>
+        <p:spPr>
+          <a:xfrm>
+            <a:off x="9198864" y="1289304"/>
+            <a:ext cx="1115568" cy="182880"/>
+          </a:xfrm>
+          <a:prstGeom prst="rect">
+            <a:avLst/>
+          </a:prstGeom>
+          <a:noFill/>
+        </p:spPr>
+        <p:txBody>
+          <a:bodyPr wrap="square" anchor="t" lIns="25400" rIns="25400" tIns="12700" bIns="12700">
+            <a:spAutoFit/>
+          </a:bodyPr>
+          <a:lstStyle/>
+          <a:p>
+            <a:pPr algn="ctr">
+              <a:lnSpc>
+                <a:spcPct val="100000"/>
+              </a:lnSpc>
+              <a:spcAft>
+                <a:spcPts val="400"/>
+              </a:spcAft>
+            </a:pPr>
+            <a:r>
+              <a:rPr sz="900" b="0">
+                <a:solidFill>
+                  <a:srgbClr val="777777"/>
+                </a:solidFill>
+                <a:latin typeface="Microsoft YaHei"/>
+                <a:ea typeface="Microsoft YaHei"/>
+                <a:cs typeface="Microsoft YaHei"/>
+              </a:rPr>
+              <a:t>开发侧</a:t>
+            </a:r>
+          </a:p>
+        </p:txBody>
+      </p:sp>
+      <p:sp>
+        <p:nvSpPr>
+          <p:cNvPr id="27" name="Rectangle 26"/>
+          <p:cNvSpPr/>
+          <p:nvPr/>
+        </p:nvSpPr>
+        <p:spPr>
+          <a:xfrm>
+            <a:off x="9198864" y="1490472"/>
+            <a:ext cx="1115568" cy="1993392"/>
+          </a:xfrm>
+          <a:prstGeom prst="rect">
+            <a:avLst/>
+          </a:prstGeom>
+          <a:solidFill>
+            <a:srgbClr val="F5F5F5"/>
+          </a:solidFill>
+          <a:ln w="12700">
+            <a:solidFill>
+              <a:srgbClr val="D1D5DC"/>
+            </a:solidFill>
+            <a:prstDash val="dash"/>
+          </a:ln>
+          <a:effectLst/>
+        </p:spPr>
+        <p:style>
+          <a:lnRef idx="1">
+            <a:schemeClr val="accent1"/>
+          </a:lnRef>
+          <a:fillRef idx="3">
+            <a:schemeClr val="accent1"/>
+          </a:fillRef>
+          <a:effectRef idx="2">
+            <a:schemeClr val="accent1"/>
+          </a:effectRef>
+          <a:fontRef idx="minor">
+            <a:schemeClr val="lt1"/>
+          </a:fontRef>
+        </p:style>
+        <p:txBody>
+          <a:bodyPr rtlCol="0" anchor="ctr" wrap="square"/>
+          <a:lstStyle/>
+          <a:p>
+            <a:pPr algn="ctr"/>
+            <a:r>
+              <a:rPr sz="1100" b="0">
+                <a:solidFill>
+                  <a:srgbClr val="777777"/>
+                </a:solidFill>
+                <a:latin typeface="Microsoft YaHei"/>
+                <a:ea typeface="Microsoft YaHei"/>
+                <a:cs typeface="Microsoft YaHei"/>
+              </a:rPr>
+              <a:t>图片占位</a:t>
+            </a:r>
+          </a:p>
+        </p:txBody>
+      </p:sp>
+      <p:sp>
+        <p:nvSpPr>
+          <p:cNvPr id="28" name="TextBox 27"/>
+          <p:cNvSpPr txBox="1"/>
+          <p:nvPr/>
+        </p:nvSpPr>
+        <p:spPr>
+          <a:xfrm>
+            <a:off x="10405872" y="1289304"/>
+            <a:ext cx="1115568" cy="182880"/>
+          </a:xfrm>
+          <a:prstGeom prst="rect">
+            <a:avLst/>
+          </a:prstGeom>
+          <a:noFill/>
+        </p:spPr>
+        <p:txBody>
+          <a:bodyPr wrap="square" anchor="t" lIns="25400" rIns="25400" tIns="12700" bIns="12700">
+            <a:spAutoFit/>
+          </a:bodyPr>
+          <a:lstStyle/>
+          <a:p>
+            <a:pPr algn="ctr">
+              <a:lnSpc>
+                <a:spcPct val="100000"/>
+              </a:lnSpc>
+              <a:spcAft>
+                <a:spcPts val="400"/>
+              </a:spcAft>
+            </a:pPr>
+            <a:r>
+              <a:rPr sz="900" b="0">
+                <a:solidFill>
+                  <a:srgbClr val="777777"/>
+                </a:solidFill>
+                <a:latin typeface="Microsoft YaHei"/>
+                <a:ea typeface="Microsoft YaHei"/>
+                <a:cs typeface="Microsoft YaHei"/>
+              </a:rPr>
+              <a:t>设计侧</a:t>
+            </a:r>
+          </a:p>
+        </p:txBody>
+      </p:sp>
+      <p:sp>
+        <p:nvSpPr>
+          <p:cNvPr id="29" name="Rectangle 28"/>
+          <p:cNvSpPr/>
+          <p:nvPr/>
+        </p:nvSpPr>
+        <p:spPr>
+          <a:xfrm>
+            <a:off x="10405872" y="1490472"/>
+            <a:ext cx="1115568" cy="1993392"/>
+          </a:xfrm>
+          <a:prstGeom prst="rect">
+            <a:avLst/>
+          </a:prstGeom>
+          <a:solidFill>
+            <a:srgbClr val="F5F5F5"/>
+          </a:solidFill>
+          <a:ln w="12700">
+            <a:solidFill>
+              <a:srgbClr val="D1D5DC"/>
+            </a:solidFill>
+            <a:prstDash val="dash"/>
+          </a:ln>
+          <a:effectLst/>
+        </p:spPr>
+        <p:style>
+          <a:lnRef idx="1">
+            <a:schemeClr val="accent1"/>
+          </a:lnRef>
+          <a:fillRef idx="3">
+            <a:schemeClr val="accent1"/>
+          </a:fillRef>
+          <a:effectRef idx="2">
+            <a:schemeClr val="accent1"/>
+          </a:effectRef>
+          <a:fontRef idx="minor">
+            <a:schemeClr val="lt1"/>
+          </a:fontRef>
+        </p:style>
+        <p:txBody>
+          <a:bodyPr rtlCol="0" anchor="ctr" wrap="square"/>
+          <a:lstStyle/>
+          <a:p>
+            <a:pPr algn="ctr"/>
+            <a:r>
+              <a:rPr sz="1100" b="0">
+                <a:solidFill>
+                  <a:srgbClr val="777777"/>
+                </a:solidFill>
+                <a:latin typeface="Microsoft YaHei"/>
+                <a:ea typeface="Microsoft YaHei"/>
+                <a:cs typeface="Microsoft YaHei"/>
+              </a:rPr>
+              <a:t>图片占位</a:t>
+            </a:r>
+          </a:p>
+        </p:txBody>
+      </p:sp>
+      <p:sp>
+        <p:nvSpPr>
+          <p:cNvPr id="30" name="Rounded Rectangle 29"/>
+          <p:cNvSpPr/>
+          <p:nvPr/>
+        </p:nvSpPr>
+        <p:spPr>
+          <a:xfrm>
+            <a:off x="9198864" y="3575304"/>
+            <a:ext cx="2322576" cy="384048"/>
+          </a:xfrm>
+          <a:prstGeom prst="roundRect">
+            <a:avLst>
+              <a:gd name="adj" fmla="val 50000"/>
+            </a:avLst>
+          </a:prstGeom>
+          <a:solidFill>
+            <a:srgbClr val="F5F5F5"/>
+          </a:solidFill>
+          <a:ln w="12700">
+            <a:solidFill>
+              <a:srgbClr val="D1D5DC"/>
+            </a:solidFill>
+          </a:ln>
+          <a:effectLst/>
+        </p:spPr>
+        <p:style>
+          <a:lnRef idx="1">
+            <a:schemeClr val="accent1"/>
+          </a:lnRef>
+          <a:fillRef idx="3">
+            <a:schemeClr val="accent1"/>
+          </a:fillRef>
+          <a:effectRef idx="2">
+            <a:schemeClr val="accent1"/>
+          </a:effectRef>
+          <a:fontRef idx="minor">
+            <a:schemeClr val="lt1"/>
+          </a:fontRef>
+        </p:style>
+        <p:txBody>
+          <a:bodyPr rtlCol="0" anchor="ctr" wrap="square" lIns="0" rIns="0" tIns="0" bIns="0"/>
+          <a:lstStyle/>
+          <a:p>
+            <a:pPr algn="ctr"/>
+            <a:r>
+              <a:rPr sz="950" b="0">
+                <a:solidFill>
+                  <a:srgbClr val="777777"/>
+                </a:solidFill>
+                <a:latin typeface="Microsoft YaHei"/>
+                <a:ea typeface="Microsoft YaHei"/>
+                <a:cs typeface="Microsoft YaHei"/>
+              </a:rPr>
+              <a:t>链接：（待填写）</a:t>
+            </a:r>
+          </a:p>
+        </p:txBody>
+      </p:sp>
+      <p:sp>
+        <p:nvSpPr>
+          <p:cNvPr id="31" name="Rounded Rectangle 30"/>
+          <p:cNvSpPr/>
+          <p:nvPr/>
+        </p:nvSpPr>
+        <p:spPr>
+          <a:xfrm>
+            <a:off x="502920" y="4315968"/>
+            <a:ext cx="5532120" cy="2084831"/>
+          </a:xfrm>
+          <a:prstGeom prst="roundRect">
+            <a:avLst>
+              <a:gd name="adj" fmla="val 6000"/>
+            </a:avLst>
+          </a:prstGeom>
+          <a:solidFill>
+            <a:srgbClr val="FFF1F0"/>
+          </a:solidFill>
+          <a:ln w="12700">
+            <a:solidFill>
+              <a:srgbClr val="FF4D4F"/>
+            </a:solidFill>
+          </a:ln>
+          <a:effectLst/>
+        </p:spPr>
+        <p:style>
+          <a:lnRef idx="1">
+            <a:schemeClr val="accent1"/>
+          </a:lnRef>
+          <a:fillRef idx="3">
+            <a:schemeClr val="accent1"/>
+          </a:fillRef>
+          <a:effectRef idx="2">
+            <a:schemeClr val="accent1"/>
+          </a:effectRef>
+          <a:fontRef idx="minor">
+            <a:schemeClr val="lt1"/>
+          </a:fontRef>
+        </p:style>
+        <p:txBody>
+          <a:bodyPr rtlCol="0" anchor="ctr"/>
+          <a:lstStyle/>
+          <a:p>
+            <a:pPr algn="ctr"/>
+          </a:p>
+        </p:txBody>
+      </p:sp>
+      <p:sp>
+        <p:nvSpPr>
+          <p:cNvPr id="32" name="TextBox 31"/>
+          <p:cNvSpPr txBox="1"/>
+          <p:nvPr/>
+        </p:nvSpPr>
+        <p:spPr>
+          <a:xfrm>
+            <a:off x="777240" y="4462272"/>
+            <a:ext cx="4983480" cy="365760"/>
+          </a:xfrm>
+          <a:prstGeom prst="rect">
+            <a:avLst/>
+          </a:prstGeom>
+          <a:noFill/>
+        </p:spPr>
+        <p:txBody>
+          <a:bodyPr wrap="square" anchor="t" lIns="25400" rIns="25400" tIns="12700" bIns="12700">
+            <a:spAutoFit/>
+          </a:bodyPr>
+          <a:lstStyle/>
+          <a:p>
+            <a:pPr algn="l">
+              <a:lnSpc>
+                <a:spcPct val="100000"/>
+              </a:lnSpc>
+              <a:spcAft>
+                <a:spcPts val="400"/>
+              </a:spcAft>
+            </a:pPr>
+            <a:r>
+              <a:rPr sz="1400" b="1">
+                <a:solidFill>
+                  <a:srgbClr val="FF4D4F"/>
+                </a:solidFill>
+                <a:latin typeface="Microsoft YaHei"/>
+                <a:ea typeface="Microsoft YaHei"/>
+                <a:cs typeface="Microsoft YaHei"/>
+              </a:rPr>
+              <a:t>整体 Bad 原因</a:t>
+            </a:r>
+          </a:p>
+        </p:txBody>
+      </p:sp>
+      <p:sp>
+        <p:nvSpPr>
+          <p:cNvPr id="33" name="TextBox 32"/>
+          <p:cNvSpPr txBox="1"/>
+          <p:nvPr/>
+        </p:nvSpPr>
+        <p:spPr>
+          <a:xfrm>
+            <a:off x="777240" y="4882896"/>
+            <a:ext cx="4983480" cy="1335023"/>
+          </a:xfrm>
+          <a:prstGeom prst="rect">
+            <a:avLst/>
+          </a:prstGeom>
+          <a:noFill/>
+        </p:spPr>
+        <p:txBody>
+          <a:bodyPr wrap="square" anchor="t" lIns="25400" rIns="25400" tIns="12700" bIns="12700">
+            <a:spAutoFit/>
+          </a:bodyPr>
+          <a:lstStyle/>
+          <a:p>
+            <a:pPr algn="l">
+              <a:lnSpc>
+                <a:spcPct val="130000"/>
+              </a:lnSpc>
+              <a:spcAft>
+                <a:spcPts val="400"/>
+              </a:spcAft>
+            </a:pPr>
+            <a:r>
+              <a:rPr sz="1150" b="0">
+                <a:solidFill>
+                  <a:srgbClr val="777777"/>
+                </a:solidFill>
+                <a:latin typeface="Microsoft YaHei"/>
+                <a:ea typeface="Microsoft YaHei"/>
+                <a:cs typeface="Microsoft YaHei"/>
+              </a:rPr>
+              <a:t>（待填写）</a:t>
+            </a:r>
+          </a:p>
+        </p:txBody>
+      </p:sp>
+      <p:sp>
+        <p:nvSpPr>
+          <p:cNvPr id="34" name="Rounded Rectangle 33"/>
+          <p:cNvSpPr/>
+          <p:nvPr/>
+        </p:nvSpPr>
+        <p:spPr>
+          <a:xfrm>
+            <a:off x="6199632" y="4315968"/>
+            <a:ext cx="5486400" cy="2084831"/>
+          </a:xfrm>
+          <a:prstGeom prst="roundRect">
+            <a:avLst>
+              <a:gd name="adj" fmla="val 6000"/>
+            </a:avLst>
+          </a:prstGeom>
+          <a:solidFill>
+            <a:srgbClr val="E6F1FB"/>
+          </a:solidFill>
+          <a:ln w="12700">
+            <a:solidFill>
+              <a:srgbClr val="0067D1"/>
+            </a:solidFill>
+          </a:ln>
+          <a:effectLst/>
+        </p:spPr>
+        <p:style>
+          <a:lnRef idx="1">
+            <a:schemeClr val="accent1"/>
+          </a:lnRef>
+          <a:fillRef idx="3">
+            <a:schemeClr val="accent1"/>
+          </a:fillRef>
+          <a:effectRef idx="2">
+            <a:schemeClr val="accent1"/>
+          </a:effectRef>
+          <a:fontRef idx="minor">
+            <a:schemeClr val="lt1"/>
+          </a:fontRef>
+        </p:style>
+        <p:txBody>
+          <a:bodyPr rtlCol="0" anchor="ctr"/>
+          <a:lstStyle/>
+          <a:p>
+            <a:pPr algn="ctr"/>
+          </a:p>
+        </p:txBody>
+      </p:sp>
+      <p:sp>
+        <p:nvSpPr>
+          <p:cNvPr id="35" name="TextBox 34"/>
+          <p:cNvSpPr txBox="1"/>
+          <p:nvPr/>
+        </p:nvSpPr>
+        <p:spPr>
+          <a:xfrm>
+            <a:off x="6473952" y="4462272"/>
+            <a:ext cx="4937760" cy="365760"/>
+          </a:xfrm>
+          <a:prstGeom prst="rect">
+            <a:avLst/>
+          </a:prstGeom>
+          <a:noFill/>
+        </p:spPr>
+        <p:txBody>
+          <a:bodyPr wrap="square" anchor="t" lIns="25400" rIns="25400" tIns="12700" bIns="12700">
+            <a:spAutoFit/>
+          </a:bodyPr>
+          <a:lstStyle/>
+          <a:p>
+            <a:pPr algn="l">
+              <a:lnSpc>
+                <a:spcPct val="100000"/>
+              </a:lnSpc>
+              <a:spcAft>
+                <a:spcPts val="400"/>
+              </a:spcAft>
+            </a:pPr>
+            <a:r>
               <a:rPr sz="1400" b="1">
                 <a:solidFill>
                   <a:srgbClr val="0067D1"/>
@@ -4284,609 +10956,21 @@
                 <a:ea typeface="Microsoft YaHei"/>
                 <a:cs typeface="Microsoft YaHei"/>
               </a:rPr>
-              <a:t>1  可信文本锚点</a:t>
-            </a:r>
-          </a:p>
-        </p:txBody>
-      </p:sp>
-      <p:sp>
-        <p:nvSpPr>
-          <p:cNvPr id="7" name="TextBox 6"/>
+              <a:t>整体改进方向</a:t>
+            </a:r>
+          </a:p>
+        </p:txBody>
+      </p:sp>
+      <p:sp>
+        <p:nvSpPr>
+          <p:cNvPr id="36" name="TextBox 35"/>
           <p:cNvSpPr txBox="1"/>
           <p:nvPr/>
         </p:nvSpPr>
         <p:spPr>
           <a:xfrm>
-            <a:off x="841248" y="2176272"/>
-            <a:ext cx="4937760" cy="640080"/>
-          </a:xfrm>
-          <a:prstGeom prst="rect">
-            <a:avLst/>
-          </a:prstGeom>
-          <a:noFill/>
-        </p:spPr>
-        <p:txBody>
-          <a:bodyPr wrap="square" anchor="t" lIns="25400" rIns="25400" tIns="12700" bIns="12700">
-            <a:spAutoFit/>
-          </a:bodyPr>
-          <a:lstStyle/>
-          <a:p>
-            <a:pPr algn="l">
-              <a:lnSpc>
-                <a:spcPct val="120000"/>
-              </a:lnSpc>
-              <a:spcAft>
-                <a:spcPts val="400"/>
-              </a:spcAft>
-            </a:pPr>
-            <a:r>
-              <a:rPr sz="1150" b="0">
-                <a:solidFill>
-                  <a:srgbClr val="191919"/>
-                </a:solidFill>
-                <a:latin typeface="Microsoft YaHei"/>
-                <a:ea typeface="Microsoft YaHei"/>
-                <a:cs typeface="Microsoft YaHei"/>
-              </a:rPr>
-              <a:t>全文本加权匹配（内容 / 位置 / 样式多维打分），高置信节点对升为强锚点</a:t>
-            </a:r>
-          </a:p>
-        </p:txBody>
-      </p:sp>
-      <p:sp>
-        <p:nvSpPr>
-          <p:cNvPr id="8" name="Rounded Rectangle 7"/>
-          <p:cNvSpPr/>
-          <p:nvPr/>
-        </p:nvSpPr>
-        <p:spPr>
-          <a:xfrm>
-            <a:off x="548640" y="3035808"/>
-            <a:ext cx="5486400" cy="1207008"/>
-          </a:xfrm>
-          <a:prstGeom prst="roundRect">
-            <a:avLst>
-              <a:gd name="adj" fmla="val 6000"/>
-            </a:avLst>
-          </a:prstGeom>
-          <a:solidFill>
-            <a:srgbClr val="FFFFFF"/>
-          </a:solidFill>
-          <a:ln w="12700">
-            <a:solidFill>
-              <a:srgbClr val="D1D5DC"/>
-            </a:solidFill>
-          </a:ln>
-          <a:effectLst/>
-        </p:spPr>
-        <p:style>
-          <a:lnRef idx="1">
-            <a:schemeClr val="accent1"/>
-          </a:lnRef>
-          <a:fillRef idx="3">
-            <a:schemeClr val="accent1"/>
-          </a:fillRef>
-          <a:effectRef idx="2">
-            <a:schemeClr val="accent1"/>
-          </a:effectRef>
-          <a:fontRef idx="minor">
-            <a:schemeClr val="lt1"/>
-          </a:fontRef>
-        </p:style>
-        <p:txBody>
-          <a:bodyPr rtlCol="0" anchor="ctr"/>
-          <a:lstStyle/>
-          <a:p>
-            <a:pPr algn="ctr"/>
-          </a:p>
-        </p:txBody>
-      </p:sp>
-      <p:sp>
-        <p:nvSpPr>
-          <p:cNvPr id="9" name="TextBox 8"/>
-          <p:cNvSpPr txBox="1"/>
-          <p:nvPr/>
-        </p:nvSpPr>
-        <p:spPr>
-          <a:xfrm>
-            <a:off x="841248" y="3182112"/>
-            <a:ext cx="4937760" cy="320040"/>
-          </a:xfrm>
-          <a:prstGeom prst="rect">
-            <a:avLst/>
-          </a:prstGeom>
-          <a:noFill/>
-        </p:spPr>
-        <p:txBody>
-          <a:bodyPr wrap="square" anchor="t" lIns="25400" rIns="25400" tIns="12700" bIns="12700">
-            <a:spAutoFit/>
-          </a:bodyPr>
-          <a:lstStyle/>
-          <a:p>
-            <a:pPr algn="l">
-              <a:lnSpc>
-                <a:spcPct val="100000"/>
-              </a:lnSpc>
-              <a:spcAft>
-                <a:spcPts val="400"/>
-              </a:spcAft>
-            </a:pPr>
-            <a:r>
-              <a:rPr sz="1400" b="1">
-                <a:solidFill>
-                  <a:srgbClr val="0067D1"/>
-                </a:solidFill>
-                <a:latin typeface="Microsoft YaHei"/>
-                <a:ea typeface="Microsoft YaHei"/>
-                <a:cs typeface="Microsoft YaHei"/>
-              </a:rPr>
-              <a:t>2  相对位置拓扑匹配</a:t>
-            </a:r>
-          </a:p>
-        </p:txBody>
-      </p:sp>
-      <p:sp>
-        <p:nvSpPr>
-          <p:cNvPr id="10" name="TextBox 9"/>
-          <p:cNvSpPr txBox="1"/>
-          <p:nvPr/>
-        </p:nvSpPr>
-        <p:spPr>
-          <a:xfrm>
-            <a:off x="841248" y="3566160"/>
-            <a:ext cx="4937760" cy="640080"/>
-          </a:xfrm>
-          <a:prstGeom prst="rect">
-            <a:avLst/>
-          </a:prstGeom>
-          <a:noFill/>
-        </p:spPr>
-        <p:txBody>
-          <a:bodyPr wrap="square" anchor="t" lIns="25400" rIns="25400" tIns="12700" bIns="12700">
-            <a:spAutoFit/>
-          </a:bodyPr>
-          <a:lstStyle/>
-          <a:p>
-            <a:pPr algn="l">
-              <a:lnSpc>
-                <a:spcPct val="120000"/>
-              </a:lnSpc>
-              <a:spcAft>
-                <a:spcPts val="400"/>
-              </a:spcAft>
-            </a:pPr>
-            <a:r>
-              <a:rPr sz="1150" b="0">
-                <a:solidFill>
-                  <a:srgbClr val="191919"/>
-                </a:solidFill>
-                <a:latin typeface="Microsoft YaHei"/>
-                <a:ea typeface="Microsoft YaHei"/>
-                <a:cs typeface="Microsoft YaHei"/>
-              </a:rPr>
-              <a:t>以强锚点为参照，按节点间相对位置关系匹配周边节点</a:t>
-            </a:r>
-          </a:p>
-        </p:txBody>
-      </p:sp>
-      <p:sp>
-        <p:nvSpPr>
-          <p:cNvPr id="11" name="Rounded Rectangle 10"/>
-          <p:cNvSpPr/>
-          <p:nvPr/>
-        </p:nvSpPr>
-        <p:spPr>
-          <a:xfrm>
-            <a:off x="548640" y="4425696"/>
-            <a:ext cx="5486400" cy="1207008"/>
-          </a:xfrm>
-          <a:prstGeom prst="roundRect">
-            <a:avLst>
-              <a:gd name="adj" fmla="val 6000"/>
-            </a:avLst>
-          </a:prstGeom>
-          <a:solidFill>
-            <a:srgbClr val="FFFFFF"/>
-          </a:solidFill>
-          <a:ln w="12700">
-            <a:solidFill>
-              <a:srgbClr val="D1D5DC"/>
-            </a:solidFill>
-          </a:ln>
-          <a:effectLst/>
-        </p:spPr>
-        <p:style>
-          <a:lnRef idx="1">
-            <a:schemeClr val="accent1"/>
-          </a:lnRef>
-          <a:fillRef idx="3">
-            <a:schemeClr val="accent1"/>
-          </a:fillRef>
-          <a:effectRef idx="2">
-            <a:schemeClr val="accent1"/>
-          </a:effectRef>
-          <a:fontRef idx="minor">
-            <a:schemeClr val="lt1"/>
-          </a:fontRef>
-        </p:style>
-        <p:txBody>
-          <a:bodyPr rtlCol="0" anchor="ctr"/>
-          <a:lstStyle/>
-          <a:p>
-            <a:pPr algn="ctr"/>
-          </a:p>
-        </p:txBody>
-      </p:sp>
-      <p:sp>
-        <p:nvSpPr>
-          <p:cNvPr id="12" name="TextBox 11"/>
-          <p:cNvSpPr txBox="1"/>
-          <p:nvPr/>
-        </p:nvSpPr>
-        <p:spPr>
-          <a:xfrm>
-            <a:off x="841248" y="4572000"/>
-            <a:ext cx="4937760" cy="320040"/>
-          </a:xfrm>
-          <a:prstGeom prst="rect">
-            <a:avLst/>
-          </a:prstGeom>
-          <a:noFill/>
-        </p:spPr>
-        <p:txBody>
-          <a:bodyPr wrap="square" anchor="t" lIns="25400" rIns="25400" tIns="12700" bIns="12700">
-            <a:spAutoFit/>
-          </a:bodyPr>
-          <a:lstStyle/>
-          <a:p>
-            <a:pPr algn="l">
-              <a:lnSpc>
-                <a:spcPct val="100000"/>
-              </a:lnSpc>
-              <a:spcAft>
-                <a:spcPts val="400"/>
-              </a:spcAft>
-            </a:pPr>
-            <a:r>
-              <a:rPr sz="1400" b="1">
-                <a:solidFill>
-                  <a:srgbClr val="0067D1"/>
-                </a:solidFill>
-                <a:latin typeface="Microsoft YaHei"/>
-                <a:ea typeface="Microsoft YaHei"/>
-                <a:cs typeface="Microsoft YaHei"/>
-              </a:rPr>
-              <a:t>3  兜底匹配</a:t>
-            </a:r>
-          </a:p>
-        </p:txBody>
-      </p:sp>
-      <p:sp>
-        <p:nvSpPr>
-          <p:cNvPr id="13" name="TextBox 12"/>
-          <p:cNvSpPr txBox="1"/>
-          <p:nvPr/>
-        </p:nvSpPr>
-        <p:spPr>
-          <a:xfrm>
-            <a:off x="841248" y="4956048"/>
-            <a:ext cx="4937760" cy="640080"/>
-          </a:xfrm>
-          <a:prstGeom prst="rect">
-            <a:avLst/>
-          </a:prstGeom>
-          <a:noFill/>
-        </p:spPr>
-        <p:txBody>
-          <a:bodyPr wrap="square" anchor="t" lIns="25400" rIns="25400" tIns="12700" bIns="12700">
-            <a:spAutoFit/>
-          </a:bodyPr>
-          <a:lstStyle/>
-          <a:p>
-            <a:pPr algn="l">
-              <a:lnSpc>
-                <a:spcPct val="120000"/>
-              </a:lnSpc>
-              <a:spcAft>
-                <a:spcPts val="400"/>
-              </a:spcAft>
-            </a:pPr>
-            <a:r>
-              <a:rPr sz="1150" b="0">
-                <a:solidFill>
-                  <a:srgbClr val="191919"/>
-                </a:solidFill>
-                <a:latin typeface="Microsoft YaHei"/>
-                <a:ea typeface="Microsoft YaHei"/>
-                <a:cs typeface="Microsoft YaHei"/>
-              </a:rPr>
-              <a:t>剩余节点在区域内做全局最优兜底配对</a:t>
-            </a:r>
-          </a:p>
-        </p:txBody>
-      </p:sp>
-      <p:sp>
-        <p:nvSpPr>
-          <p:cNvPr id="14" name="Rounded Rectangle 13"/>
-          <p:cNvSpPr/>
-          <p:nvPr/>
-        </p:nvSpPr>
-        <p:spPr>
-          <a:xfrm>
-            <a:off x="548640" y="5815583"/>
-            <a:ext cx="5486400" cy="713232"/>
-          </a:xfrm>
-          <a:prstGeom prst="roundRect">
-            <a:avLst>
-              <a:gd name="adj" fmla="val 6000"/>
-            </a:avLst>
-          </a:prstGeom>
-          <a:solidFill>
-            <a:srgbClr val="E6F1FB"/>
-          </a:solidFill>
-          <a:ln w="12700">
-            <a:solidFill>
-              <a:srgbClr val="0067D1"/>
-            </a:solidFill>
-          </a:ln>
-          <a:effectLst/>
-        </p:spPr>
-        <p:style>
-          <a:lnRef idx="1">
-            <a:schemeClr val="accent1"/>
-          </a:lnRef>
-          <a:fillRef idx="3">
-            <a:schemeClr val="accent1"/>
-          </a:fillRef>
-          <a:effectRef idx="2">
-            <a:schemeClr val="accent1"/>
-          </a:effectRef>
-          <a:fontRef idx="minor">
-            <a:schemeClr val="lt1"/>
-          </a:fontRef>
-        </p:style>
-        <p:txBody>
-          <a:bodyPr rtlCol="0" anchor="ctr"/>
-          <a:lstStyle/>
-          <a:p>
-            <a:pPr algn="ctr"/>
-          </a:p>
-        </p:txBody>
-      </p:sp>
-      <p:sp>
-        <p:nvSpPr>
-          <p:cNvPr id="15" name="TextBox 14"/>
-          <p:cNvSpPr txBox="1"/>
-          <p:nvPr/>
-        </p:nvSpPr>
-        <p:spPr>
-          <a:xfrm>
-            <a:off x="841248" y="5980175"/>
-            <a:ext cx="4937760" cy="457200"/>
-          </a:xfrm>
-          <a:prstGeom prst="rect">
-            <a:avLst/>
-          </a:prstGeom>
-          <a:noFill/>
-        </p:spPr>
-        <p:txBody>
-          <a:bodyPr wrap="square" anchor="ctr" lIns="25400" rIns="25400" tIns="12700" bIns="12700">
-            <a:spAutoFit/>
-          </a:bodyPr>
-          <a:lstStyle/>
-          <a:p>
-            <a:pPr algn="l">
-              <a:lnSpc>
-                <a:spcPct val="120000"/>
-              </a:lnSpc>
-              <a:spcAft>
-                <a:spcPts val="400"/>
-              </a:spcAft>
-            </a:pPr>
-            <a:r>
-              <a:rPr sz="1150" b="1">
-                <a:solidFill>
-                  <a:srgbClr val="0067D1"/>
-                </a:solidFill>
-                <a:latin typeface="Microsoft YaHei"/>
-                <a:ea typeface="Microsoft YaHei"/>
-                <a:cs typeface="Microsoft YaHei"/>
-              </a:rPr>
-              <a:t>分块匹配的成败是全局赌注；锚点方案局部失败不扩散，整体准确率稳定</a:t>
-            </a:r>
-          </a:p>
-        </p:txBody>
-      </p:sp>
-      <p:sp>
-        <p:nvSpPr>
-          <p:cNvPr id="16" name="Rectangle 15"/>
-          <p:cNvSpPr/>
-          <p:nvPr/>
-        </p:nvSpPr>
-        <p:spPr>
-          <a:xfrm>
-            <a:off x="6400800" y="1197864"/>
-            <a:ext cx="82296" cy="292608"/>
-          </a:xfrm>
-          <a:prstGeom prst="rect">
-            <a:avLst/>
-          </a:prstGeom>
-          <a:solidFill>
-            <a:srgbClr val="0067D1"/>
-          </a:solidFill>
-          <a:ln>
-            <a:noFill/>
-          </a:ln>
-          <a:effectLst/>
-        </p:spPr>
-        <p:style>
-          <a:lnRef idx="1">
-            <a:schemeClr val="accent1"/>
-          </a:lnRef>
-          <a:fillRef idx="3">
-            <a:schemeClr val="accent1"/>
-          </a:fillRef>
-          <a:effectRef idx="2">
-            <a:schemeClr val="accent1"/>
-          </a:effectRef>
-          <a:fontRef idx="minor">
-            <a:schemeClr val="lt1"/>
-          </a:fontRef>
-        </p:style>
-        <p:txBody>
-          <a:bodyPr rtlCol="0" anchor="ctr"/>
-          <a:lstStyle/>
-          <a:p>
-            <a:pPr algn="ctr"/>
-          </a:p>
-        </p:txBody>
-      </p:sp>
-      <p:sp>
-        <p:nvSpPr>
-          <p:cNvPr id="17" name="TextBox 16"/>
-          <p:cNvSpPr txBox="1"/>
-          <p:nvPr/>
-        </p:nvSpPr>
-        <p:spPr>
-          <a:xfrm>
-            <a:off x="6601968" y="1143000"/>
-            <a:ext cx="8229600" cy="411480"/>
-          </a:xfrm>
-          <a:prstGeom prst="rect">
-            <a:avLst/>
-          </a:prstGeom>
-          <a:noFill/>
-        </p:spPr>
-        <p:txBody>
-          <a:bodyPr wrap="square" anchor="t" lIns="25400" rIns="25400" tIns="12700" bIns="12700">
-            <a:spAutoFit/>
-          </a:bodyPr>
-          <a:lstStyle/>
-          <a:p>
-            <a:pPr algn="l">
-              <a:lnSpc>
-                <a:spcPct val="100000"/>
-              </a:lnSpc>
-              <a:spcAft>
-                <a:spcPts val="400"/>
-              </a:spcAft>
-            </a:pPr>
-            <a:r>
-              <a:rPr sz="1700" b="1">
-                <a:solidFill>
-                  <a:srgbClr val="191919"/>
-                </a:solidFill>
-                <a:latin typeface="Microsoft YaHei"/>
-                <a:ea typeface="Microsoft YaHei"/>
-                <a:cs typeface="Microsoft YaHei"/>
-              </a:rPr>
-              <a:t>取值：同位置叠加效果智能合并</a:t>
-            </a:r>
-          </a:p>
-        </p:txBody>
-      </p:sp>
-      <p:sp>
-        <p:nvSpPr>
-          <p:cNvPr id="18" name="Rounded Rectangle 17"/>
-          <p:cNvSpPr/>
-          <p:nvPr/>
-        </p:nvSpPr>
-        <p:spPr>
-          <a:xfrm>
-            <a:off x="6400800" y="1645920"/>
-            <a:ext cx="5239512" cy="4224528"/>
-          </a:xfrm>
-          <a:prstGeom prst="roundRect">
-            <a:avLst>
-              <a:gd name="adj" fmla="val 6000"/>
-            </a:avLst>
-          </a:prstGeom>
-          <a:solidFill>
-            <a:srgbClr val="FFFFFF"/>
-          </a:solidFill>
-          <a:ln w="12700">
-            <a:solidFill>
-              <a:srgbClr val="D1D5DC"/>
-            </a:solidFill>
-          </a:ln>
-          <a:effectLst/>
-        </p:spPr>
-        <p:style>
-          <a:lnRef idx="1">
-            <a:schemeClr val="accent1"/>
-          </a:lnRef>
-          <a:fillRef idx="3">
-            <a:schemeClr val="accent1"/>
-          </a:fillRef>
-          <a:effectRef idx="2">
-            <a:schemeClr val="accent1"/>
-          </a:effectRef>
-          <a:fontRef idx="minor">
-            <a:schemeClr val="lt1"/>
-          </a:fontRef>
-        </p:style>
-        <p:txBody>
-          <a:bodyPr rtlCol="0" anchor="ctr"/>
-          <a:lstStyle/>
-          <a:p>
-            <a:pPr algn="ctr"/>
-          </a:p>
-        </p:txBody>
-      </p:sp>
-      <p:sp>
-        <p:nvSpPr>
-          <p:cNvPr id="19" name="Rectangle 18"/>
-          <p:cNvSpPr/>
-          <p:nvPr/>
-        </p:nvSpPr>
-        <p:spPr>
-          <a:xfrm>
-            <a:off x="6693408" y="1984248"/>
-            <a:ext cx="109728" cy="109728"/>
-          </a:xfrm>
-          <a:prstGeom prst="rect">
-            <a:avLst/>
-          </a:prstGeom>
-          <a:solidFill>
-            <a:srgbClr val="52C41A"/>
-          </a:solidFill>
-          <a:ln>
-            <a:noFill/>
-          </a:ln>
-          <a:effectLst/>
-        </p:spPr>
-        <p:style>
-          <a:lnRef idx="1">
-            <a:schemeClr val="accent1"/>
-          </a:lnRef>
-          <a:fillRef idx="3">
-            <a:schemeClr val="accent1"/>
-          </a:fillRef>
-          <a:effectRef idx="2">
-            <a:schemeClr val="accent1"/>
-          </a:effectRef>
-          <a:fontRef idx="minor">
-            <a:schemeClr val="lt1"/>
-          </a:fontRef>
-        </p:style>
-        <p:txBody>
-          <a:bodyPr rtlCol="0" anchor="ctr"/>
-          <a:lstStyle/>
-          <a:p>
-            <a:pPr algn="ctr"/>
-          </a:p>
-        </p:txBody>
-      </p:sp>
-      <p:sp>
-        <p:nvSpPr>
-          <p:cNvPr id="20" name="TextBox 19"/>
-          <p:cNvSpPr txBox="1"/>
-          <p:nvPr/>
-        </p:nvSpPr>
-        <p:spPr>
-          <a:xfrm>
-            <a:off x="6967728" y="1865376"/>
-            <a:ext cx="4434840" cy="1005840"/>
+            <a:off x="6473952" y="4882896"/>
+            <a:ext cx="4937760" cy="1335023"/>
           </a:xfrm>
           <a:prstGeom prst="rect">
             <a:avLst/>
@@ -4908,191 +10992,15 @@
               </a:spcAft>
             </a:pPr>
             <a:r>
-              <a:rPr sz="1300" b="0">
+              <a:rPr sz="1150" b="0">
                 <a:solidFill>
-                  <a:srgbClr val="191919"/>
+                  <a:srgbClr val="777777"/>
                 </a:solidFill>
                 <a:latin typeface="Microsoft YaHei"/>
                 <a:ea typeface="Microsoft YaHei"/>
                 <a:cs typeface="Microsoft YaHei"/>
               </a:rPr>
-              <a:t>同一位置的多层节点（背景色、圆角、边框等视觉效果）自动合并为单一代表节点</a:t>
-            </a:r>
-          </a:p>
-        </p:txBody>
-      </p:sp>
-      <p:sp>
-        <p:nvSpPr>
-          <p:cNvPr id="21" name="Rectangle 20"/>
-          <p:cNvSpPr/>
-          <p:nvPr/>
-        </p:nvSpPr>
-        <p:spPr>
-          <a:xfrm>
-            <a:off x="6693408" y="3310127"/>
-            <a:ext cx="109728" cy="109728"/>
-          </a:xfrm>
-          <a:prstGeom prst="rect">
-            <a:avLst/>
-          </a:prstGeom>
-          <a:solidFill>
-            <a:srgbClr val="52C41A"/>
-          </a:solidFill>
-          <a:ln>
-            <a:noFill/>
-          </a:ln>
-          <a:effectLst/>
-        </p:spPr>
-        <p:style>
-          <a:lnRef idx="1">
-            <a:schemeClr val="accent1"/>
-          </a:lnRef>
-          <a:fillRef idx="3">
-            <a:schemeClr val="accent1"/>
-          </a:fillRef>
-          <a:effectRef idx="2">
-            <a:schemeClr val="accent1"/>
-          </a:effectRef>
-          <a:fontRef idx="minor">
-            <a:schemeClr val="lt1"/>
-          </a:fontRef>
-        </p:style>
-        <p:txBody>
-          <a:bodyPr rtlCol="0" anchor="ctr"/>
-          <a:lstStyle/>
-          <a:p>
-            <a:pPr algn="ctr"/>
-          </a:p>
-        </p:txBody>
-      </p:sp>
-      <p:sp>
-        <p:nvSpPr>
-          <p:cNvPr id="22" name="TextBox 21"/>
-          <p:cNvSpPr txBox="1"/>
-          <p:nvPr/>
-        </p:nvSpPr>
-        <p:spPr>
-          <a:xfrm>
-            <a:off x="6967728" y="3191256"/>
-            <a:ext cx="4434840" cy="1005840"/>
-          </a:xfrm>
-          <a:prstGeom prst="rect">
-            <a:avLst/>
-          </a:prstGeom>
-          <a:noFill/>
-        </p:spPr>
-        <p:txBody>
-          <a:bodyPr wrap="square" anchor="t" lIns="25400" rIns="25400" tIns="12700" bIns="12700">
-            <a:spAutoFit/>
-          </a:bodyPr>
-          <a:lstStyle/>
-          <a:p>
-            <a:pPr algn="l">
-              <a:lnSpc>
-                <a:spcPct val="130000"/>
-              </a:lnSpc>
-              <a:spcAft>
-                <a:spcPts val="400"/>
-              </a:spcAft>
-            </a:pPr>
-            <a:r>
-              <a:rPr sz="1300" b="0">
-                <a:solidFill>
-                  <a:srgbClr val="191919"/>
-                </a:solidFill>
-                <a:latin typeface="Microsoft YaHei"/>
-                <a:ea typeface="Microsoft YaHei"/>
-                <a:cs typeface="Microsoft YaHei"/>
-              </a:rPr>
-              <a:t>合并后的取值即最终视觉效果，消除多层叠加导致的取值失真</a:t>
-            </a:r>
-          </a:p>
-        </p:txBody>
-      </p:sp>
-      <p:sp>
-        <p:nvSpPr>
-          <p:cNvPr id="23" name="Rectangle 22"/>
-          <p:cNvSpPr/>
-          <p:nvPr/>
-        </p:nvSpPr>
-        <p:spPr>
-          <a:xfrm>
-            <a:off x="6693408" y="4636008"/>
-            <a:ext cx="109728" cy="109728"/>
-          </a:xfrm>
-          <a:prstGeom prst="rect">
-            <a:avLst/>
-          </a:prstGeom>
-          <a:solidFill>
-            <a:srgbClr val="52C41A"/>
-          </a:solidFill>
-          <a:ln>
-            <a:noFill/>
-          </a:ln>
-          <a:effectLst/>
-        </p:spPr>
-        <p:style>
-          <a:lnRef idx="1">
-            <a:schemeClr val="accent1"/>
-          </a:lnRef>
-          <a:fillRef idx="3">
-            <a:schemeClr val="accent1"/>
-          </a:fillRef>
-          <a:effectRef idx="2">
-            <a:schemeClr val="accent1"/>
-          </a:effectRef>
-          <a:fontRef idx="minor">
-            <a:schemeClr val="lt1"/>
-          </a:fontRef>
-        </p:style>
-        <p:txBody>
-          <a:bodyPr rtlCol="0" anchor="ctr"/>
-          <a:lstStyle/>
-          <a:p>
-            <a:pPr algn="ctr"/>
-          </a:p>
-        </p:txBody>
-      </p:sp>
-      <p:sp>
-        <p:nvSpPr>
-          <p:cNvPr id="24" name="TextBox 23"/>
-          <p:cNvSpPr txBox="1"/>
-          <p:nvPr/>
-        </p:nvSpPr>
-        <p:spPr>
-          <a:xfrm>
-            <a:off x="6967728" y="4517136"/>
-            <a:ext cx="4434840" cy="1005840"/>
-          </a:xfrm>
-          <a:prstGeom prst="rect">
-            <a:avLst/>
-          </a:prstGeom>
-          <a:noFill/>
-        </p:spPr>
-        <p:txBody>
-          <a:bodyPr wrap="square" anchor="t" lIns="25400" rIns="25400" tIns="12700" bIns="12700">
-            <a:spAutoFit/>
-          </a:bodyPr>
-          <a:lstStyle/>
-          <a:p>
-            <a:pPr algn="l">
-              <a:lnSpc>
-                <a:spcPct val="130000"/>
-              </a:lnSpc>
-              <a:spcAft>
-                <a:spcPts val="400"/>
-              </a:spcAft>
-            </a:pPr>
-            <a:r>
-              <a:rPr sz="1300" b="0">
-                <a:solidFill>
-                  <a:srgbClr val="191919"/>
-                </a:solidFill>
-                <a:latin typeface="Microsoft YaHei"/>
-                <a:ea typeface="Microsoft YaHei"/>
-                <a:cs typeface="Microsoft YaHei"/>
-              </a:rPr>
-              <a:t>比对基于合并后的真实视觉值，误报显著减少</a:t>
+              <a:t>（待填写）</a:t>
             </a:r>
           </a:p>
         </p:txBody>

--- a/docs/UI一致性技术提升.pptx
+++ b/docs/UI一致性技术提升.pptx
@@ -9321,8 +9321,8 @@
         </p:nvSpPr>
         <p:spPr>
           <a:xfrm>
-            <a:off x="502920" y="868680"/>
-            <a:ext cx="2651760" cy="3246120"/>
+            <a:off x="521207" y="868680"/>
+            <a:ext cx="3566160" cy="3246120"/>
           </a:xfrm>
           <a:prstGeom prst="roundRect">
             <a:avLst>
@@ -9369,8 +9369,8 @@
         </p:nvSpPr>
         <p:spPr>
           <a:xfrm>
-            <a:off x="667512" y="978408"/>
-            <a:ext cx="2322576" cy="292608"/>
+            <a:off x="685799" y="978408"/>
+            <a:ext cx="3236976" cy="292608"/>
           </a:xfrm>
           <a:prstGeom prst="rect">
             <a:avLst/>
@@ -9413,8 +9413,8 @@
         </p:nvSpPr>
         <p:spPr>
           <a:xfrm>
-            <a:off x="667512" y="1289304"/>
-            <a:ext cx="1115568" cy="182880"/>
+            <a:off x="685799" y="1289304"/>
+            <a:ext cx="1563624" cy="182880"/>
           </a:xfrm>
           <a:prstGeom prst="rect">
             <a:avLst/>
@@ -9457,8 +9457,8 @@
         </p:nvSpPr>
         <p:spPr>
           <a:xfrm>
-            <a:off x="667512" y="1490472"/>
-            <a:ext cx="1115568" cy="1993392"/>
+            <a:off x="685799" y="1490472"/>
+            <a:ext cx="1563624" cy="1993392"/>
           </a:xfrm>
           <a:prstGeom prst="rect">
             <a:avLst/>
@@ -9515,8 +9515,8 @@
         </p:nvSpPr>
         <p:spPr>
           <a:xfrm>
-            <a:off x="1874520" y="1289304"/>
-            <a:ext cx="1115568" cy="182880"/>
+            <a:off x="2359150" y="1289304"/>
+            <a:ext cx="1563624" cy="182880"/>
           </a:xfrm>
           <a:prstGeom prst="rect">
             <a:avLst/>
@@ -9559,8 +9559,8 @@
         </p:nvSpPr>
         <p:spPr>
           <a:xfrm>
-            <a:off x="1874520" y="1490472"/>
-            <a:ext cx="1115568" cy="1993392"/>
+            <a:off x="2359150" y="1490472"/>
+            <a:ext cx="1563624" cy="1993392"/>
           </a:xfrm>
           <a:prstGeom prst="rect">
             <a:avLst/>
@@ -9617,8 +9617,8 @@
         </p:nvSpPr>
         <p:spPr>
           <a:xfrm>
-            <a:off x="667512" y="3575304"/>
-            <a:ext cx="2322576" cy="384048"/>
+            <a:off x="685799" y="3575304"/>
+            <a:ext cx="3236976" cy="384048"/>
           </a:xfrm>
           <a:prstGeom prst="roundRect">
             <a:avLst>
@@ -9676,8 +9676,8 @@
         </p:nvSpPr>
         <p:spPr>
           <a:xfrm>
-            <a:off x="3346704" y="868680"/>
-            <a:ext cx="2651760" cy="3246120"/>
+            <a:off x="4315968" y="868680"/>
+            <a:ext cx="3566160" cy="3246120"/>
           </a:xfrm>
           <a:prstGeom prst="roundRect">
             <a:avLst>
@@ -9724,8 +9724,8 @@
         </p:nvSpPr>
         <p:spPr>
           <a:xfrm>
-            <a:off x="3511296" y="978408"/>
-            <a:ext cx="2322576" cy="292608"/>
+            <a:off x="4480560" y="978408"/>
+            <a:ext cx="3236976" cy="292608"/>
           </a:xfrm>
           <a:prstGeom prst="rect">
             <a:avLst/>
@@ -9768,8 +9768,8 @@
         </p:nvSpPr>
         <p:spPr>
           <a:xfrm>
-            <a:off x="3511296" y="1289304"/>
-            <a:ext cx="1115568" cy="182880"/>
+            <a:off x="4480560" y="1289304"/>
+            <a:ext cx="1563624" cy="182880"/>
           </a:xfrm>
           <a:prstGeom prst="rect">
             <a:avLst/>
@@ -9812,8 +9812,8 @@
         </p:nvSpPr>
         <p:spPr>
           <a:xfrm>
-            <a:off x="3511296" y="1490472"/>
-            <a:ext cx="1115568" cy="1993392"/>
+            <a:off x="4480560" y="1490472"/>
+            <a:ext cx="1563624" cy="1993392"/>
           </a:xfrm>
           <a:prstGeom prst="rect">
             <a:avLst/>
@@ -9870,8 +9870,8 @@
         </p:nvSpPr>
         <p:spPr>
           <a:xfrm>
-            <a:off x="4718304" y="1289304"/>
-            <a:ext cx="1115568" cy="182880"/>
+            <a:off x="6153911" y="1289304"/>
+            <a:ext cx="1563624" cy="182880"/>
           </a:xfrm>
           <a:prstGeom prst="rect">
             <a:avLst/>
@@ -9914,8 +9914,8 @@
         </p:nvSpPr>
         <p:spPr>
           <a:xfrm>
-            <a:off x="4718304" y="1490472"/>
-            <a:ext cx="1115568" cy="1993392"/>
+            <a:off x="6153911" y="1490472"/>
+            <a:ext cx="1563624" cy="1993392"/>
           </a:xfrm>
           <a:prstGeom prst="rect">
             <a:avLst/>
@@ -9972,8 +9972,8 @@
         </p:nvSpPr>
         <p:spPr>
           <a:xfrm>
-            <a:off x="3511296" y="3575304"/>
-            <a:ext cx="2322576" cy="384048"/>
+            <a:off x="4480560" y="3575304"/>
+            <a:ext cx="3236976" cy="384048"/>
           </a:xfrm>
           <a:prstGeom prst="roundRect">
             <a:avLst>
@@ -10031,8 +10031,8 @@
         </p:nvSpPr>
         <p:spPr>
           <a:xfrm>
-            <a:off x="6190488" y="868680"/>
-            <a:ext cx="2651760" cy="3246120"/>
+            <a:off x="8110727" y="868680"/>
+            <a:ext cx="3566160" cy="3246120"/>
           </a:xfrm>
           <a:prstGeom prst="roundRect">
             <a:avLst>
@@ -10079,8 +10079,8 @@
         </p:nvSpPr>
         <p:spPr>
           <a:xfrm>
-            <a:off x="6355080" y="978408"/>
-            <a:ext cx="2322576" cy="292608"/>
+            <a:off x="8275319" y="978408"/>
+            <a:ext cx="3236976" cy="292608"/>
           </a:xfrm>
           <a:prstGeom prst="rect">
             <a:avLst/>
@@ -10123,8 +10123,8 @@
         </p:nvSpPr>
         <p:spPr>
           <a:xfrm>
-            <a:off x="6355080" y="1289304"/>
-            <a:ext cx="1115568" cy="182880"/>
+            <a:off x="8275319" y="1289304"/>
+            <a:ext cx="1563624" cy="182880"/>
           </a:xfrm>
           <a:prstGeom prst="rect">
             <a:avLst/>
@@ -10167,8 +10167,8 @@
         </p:nvSpPr>
         <p:spPr>
           <a:xfrm>
-            <a:off x="6355080" y="1490472"/>
-            <a:ext cx="1115568" cy="1993392"/>
+            <a:off x="8275319" y="1490472"/>
+            <a:ext cx="1563624" cy="1993392"/>
           </a:xfrm>
           <a:prstGeom prst="rect">
             <a:avLst/>
@@ -10225,8 +10225,8 @@
         </p:nvSpPr>
         <p:spPr>
           <a:xfrm>
-            <a:off x="7562088" y="1289304"/>
-            <a:ext cx="1115568" cy="182880"/>
+            <a:off x="9948670" y="1289304"/>
+            <a:ext cx="1563624" cy="182880"/>
           </a:xfrm>
           <a:prstGeom prst="rect">
             <a:avLst/>
@@ -10269,8 +10269,8 @@
         </p:nvSpPr>
         <p:spPr>
           <a:xfrm>
-            <a:off x="7562088" y="1490472"/>
-            <a:ext cx="1115568" cy="1993392"/>
+            <a:off x="9948670" y="1490472"/>
+            <a:ext cx="1563624" cy="1993392"/>
           </a:xfrm>
           <a:prstGeom prst="rect">
             <a:avLst/>
@@ -10327,8 +10327,8 @@
         </p:nvSpPr>
         <p:spPr>
           <a:xfrm>
-            <a:off x="6355080" y="3575304"/>
-            <a:ext cx="2322576" cy="384048"/>
+            <a:off x="8275319" y="3575304"/>
+            <a:ext cx="3236976" cy="384048"/>
           </a:xfrm>
           <a:prstGeom prst="roundRect">
             <a:avLst>
@@ -10386,8 +10386,8 @@
         </p:nvSpPr>
         <p:spPr>
           <a:xfrm>
-            <a:off x="9034272" y="868680"/>
-            <a:ext cx="2651760" cy="3246120"/>
+            <a:off x="502920" y="4315968"/>
+            <a:ext cx="5532120" cy="2084831"/>
           </a:xfrm>
           <a:prstGeom prst="roundRect">
             <a:avLst>
@@ -10395,361 +10395,6 @@
             </a:avLst>
           </a:prstGeom>
           <a:solidFill>
-            <a:srgbClr val="FFFFFF"/>
-          </a:solidFill>
-          <a:ln w="12700">
-            <a:solidFill>
-              <a:srgbClr val="D1D5DC"/>
-            </a:solidFill>
-          </a:ln>
-          <a:effectLst/>
-        </p:spPr>
-        <p:style>
-          <a:lnRef idx="1">
-            <a:schemeClr val="accent1"/>
-          </a:lnRef>
-          <a:fillRef idx="3">
-            <a:schemeClr val="accent1"/>
-          </a:fillRef>
-          <a:effectRef idx="2">
-            <a:schemeClr val="accent1"/>
-          </a:effectRef>
-          <a:fontRef idx="minor">
-            <a:schemeClr val="lt1"/>
-          </a:fontRef>
-        </p:style>
-        <p:txBody>
-          <a:bodyPr rtlCol="0" anchor="ctr"/>
-          <a:lstStyle/>
-          <a:p>
-            <a:pPr algn="ctr"/>
-          </a:p>
-        </p:txBody>
-      </p:sp>
-      <p:sp>
-        <p:nvSpPr>
-          <p:cNvPr id="25" name="TextBox 24"/>
-          <p:cNvSpPr txBox="1"/>
-          <p:nvPr/>
-        </p:nvSpPr>
-        <p:spPr>
-          <a:xfrm>
-            <a:off x="9198864" y="978408"/>
-            <a:ext cx="2322576" cy="292608"/>
-          </a:xfrm>
-          <a:prstGeom prst="rect">
-            <a:avLst/>
-          </a:prstGeom>
-          <a:noFill/>
-        </p:spPr>
-        <p:txBody>
-          <a:bodyPr wrap="square" anchor="t" lIns="25400" rIns="25400" tIns="12700" bIns="12700">
-            <a:spAutoFit/>
-          </a:bodyPr>
-          <a:lstStyle/>
-          <a:p>
-            <a:pPr algn="l">
-              <a:lnSpc>
-                <a:spcPct val="100000"/>
-              </a:lnSpc>
-              <a:spcAft>
-                <a:spcPts val="400"/>
-              </a:spcAft>
-            </a:pPr>
-            <a:r>
-              <a:rPr sz="1200" b="1">
-                <a:solidFill>
-                  <a:srgbClr val="191919"/>
-                </a:solidFill>
-                <a:latin typeface="Microsoft YaHei"/>
-                <a:ea typeface="Microsoft YaHei"/>
-                <a:cs typeface="Microsoft YaHei"/>
-              </a:rPr>
-              <a:t>Badcase 4（准确率 ？%）</a:t>
-            </a:r>
-          </a:p>
-        </p:txBody>
-      </p:sp>
-      <p:sp>
-        <p:nvSpPr>
-          <p:cNvPr id="26" name="TextBox 25"/>
-          <p:cNvSpPr txBox="1"/>
-          <p:nvPr/>
-        </p:nvSpPr>
-        <p:spPr>
-          <a:xfrm>
-            <a:off x="9198864" y="1289304"/>
-            <a:ext cx="1115568" cy="182880"/>
-          </a:xfrm>
-          <a:prstGeom prst="rect">
-            <a:avLst/>
-          </a:prstGeom>
-          <a:noFill/>
-        </p:spPr>
-        <p:txBody>
-          <a:bodyPr wrap="square" anchor="t" lIns="25400" rIns="25400" tIns="12700" bIns="12700">
-            <a:spAutoFit/>
-          </a:bodyPr>
-          <a:lstStyle/>
-          <a:p>
-            <a:pPr algn="ctr">
-              <a:lnSpc>
-                <a:spcPct val="100000"/>
-              </a:lnSpc>
-              <a:spcAft>
-                <a:spcPts val="400"/>
-              </a:spcAft>
-            </a:pPr>
-            <a:r>
-              <a:rPr sz="900" b="0">
-                <a:solidFill>
-                  <a:srgbClr val="777777"/>
-                </a:solidFill>
-                <a:latin typeface="Microsoft YaHei"/>
-                <a:ea typeface="Microsoft YaHei"/>
-                <a:cs typeface="Microsoft YaHei"/>
-              </a:rPr>
-              <a:t>开发侧</a:t>
-            </a:r>
-          </a:p>
-        </p:txBody>
-      </p:sp>
-      <p:sp>
-        <p:nvSpPr>
-          <p:cNvPr id="27" name="Rectangle 26"/>
-          <p:cNvSpPr/>
-          <p:nvPr/>
-        </p:nvSpPr>
-        <p:spPr>
-          <a:xfrm>
-            <a:off x="9198864" y="1490472"/>
-            <a:ext cx="1115568" cy="1993392"/>
-          </a:xfrm>
-          <a:prstGeom prst="rect">
-            <a:avLst/>
-          </a:prstGeom>
-          <a:solidFill>
-            <a:srgbClr val="F5F5F5"/>
-          </a:solidFill>
-          <a:ln w="12700">
-            <a:solidFill>
-              <a:srgbClr val="D1D5DC"/>
-            </a:solidFill>
-            <a:prstDash val="dash"/>
-          </a:ln>
-          <a:effectLst/>
-        </p:spPr>
-        <p:style>
-          <a:lnRef idx="1">
-            <a:schemeClr val="accent1"/>
-          </a:lnRef>
-          <a:fillRef idx="3">
-            <a:schemeClr val="accent1"/>
-          </a:fillRef>
-          <a:effectRef idx="2">
-            <a:schemeClr val="accent1"/>
-          </a:effectRef>
-          <a:fontRef idx="minor">
-            <a:schemeClr val="lt1"/>
-          </a:fontRef>
-        </p:style>
-        <p:txBody>
-          <a:bodyPr rtlCol="0" anchor="ctr" wrap="square"/>
-          <a:lstStyle/>
-          <a:p>
-            <a:pPr algn="ctr"/>
-            <a:r>
-              <a:rPr sz="1100" b="0">
-                <a:solidFill>
-                  <a:srgbClr val="777777"/>
-                </a:solidFill>
-                <a:latin typeface="Microsoft YaHei"/>
-                <a:ea typeface="Microsoft YaHei"/>
-                <a:cs typeface="Microsoft YaHei"/>
-              </a:rPr>
-              <a:t>图片占位</a:t>
-            </a:r>
-          </a:p>
-        </p:txBody>
-      </p:sp>
-      <p:sp>
-        <p:nvSpPr>
-          <p:cNvPr id="28" name="TextBox 27"/>
-          <p:cNvSpPr txBox="1"/>
-          <p:nvPr/>
-        </p:nvSpPr>
-        <p:spPr>
-          <a:xfrm>
-            <a:off x="10405872" y="1289304"/>
-            <a:ext cx="1115568" cy="182880"/>
-          </a:xfrm>
-          <a:prstGeom prst="rect">
-            <a:avLst/>
-          </a:prstGeom>
-          <a:noFill/>
-        </p:spPr>
-        <p:txBody>
-          <a:bodyPr wrap="square" anchor="t" lIns="25400" rIns="25400" tIns="12700" bIns="12700">
-            <a:spAutoFit/>
-          </a:bodyPr>
-          <a:lstStyle/>
-          <a:p>
-            <a:pPr algn="ctr">
-              <a:lnSpc>
-                <a:spcPct val="100000"/>
-              </a:lnSpc>
-              <a:spcAft>
-                <a:spcPts val="400"/>
-              </a:spcAft>
-            </a:pPr>
-            <a:r>
-              <a:rPr sz="900" b="0">
-                <a:solidFill>
-                  <a:srgbClr val="777777"/>
-                </a:solidFill>
-                <a:latin typeface="Microsoft YaHei"/>
-                <a:ea typeface="Microsoft YaHei"/>
-                <a:cs typeface="Microsoft YaHei"/>
-              </a:rPr>
-              <a:t>设计侧</a:t>
-            </a:r>
-          </a:p>
-        </p:txBody>
-      </p:sp>
-      <p:sp>
-        <p:nvSpPr>
-          <p:cNvPr id="29" name="Rectangle 28"/>
-          <p:cNvSpPr/>
-          <p:nvPr/>
-        </p:nvSpPr>
-        <p:spPr>
-          <a:xfrm>
-            <a:off x="10405872" y="1490472"/>
-            <a:ext cx="1115568" cy="1993392"/>
-          </a:xfrm>
-          <a:prstGeom prst="rect">
-            <a:avLst/>
-          </a:prstGeom>
-          <a:solidFill>
-            <a:srgbClr val="F5F5F5"/>
-          </a:solidFill>
-          <a:ln w="12700">
-            <a:solidFill>
-              <a:srgbClr val="D1D5DC"/>
-            </a:solidFill>
-            <a:prstDash val="dash"/>
-          </a:ln>
-          <a:effectLst/>
-        </p:spPr>
-        <p:style>
-          <a:lnRef idx="1">
-            <a:schemeClr val="accent1"/>
-          </a:lnRef>
-          <a:fillRef idx="3">
-            <a:schemeClr val="accent1"/>
-          </a:fillRef>
-          <a:effectRef idx="2">
-            <a:schemeClr val="accent1"/>
-          </a:effectRef>
-          <a:fontRef idx="minor">
-            <a:schemeClr val="lt1"/>
-          </a:fontRef>
-        </p:style>
-        <p:txBody>
-          <a:bodyPr rtlCol="0" anchor="ctr" wrap="square"/>
-          <a:lstStyle/>
-          <a:p>
-            <a:pPr algn="ctr"/>
-            <a:r>
-              <a:rPr sz="1100" b="0">
-                <a:solidFill>
-                  <a:srgbClr val="777777"/>
-                </a:solidFill>
-                <a:latin typeface="Microsoft YaHei"/>
-                <a:ea typeface="Microsoft YaHei"/>
-                <a:cs typeface="Microsoft YaHei"/>
-              </a:rPr>
-              <a:t>图片占位</a:t>
-            </a:r>
-          </a:p>
-        </p:txBody>
-      </p:sp>
-      <p:sp>
-        <p:nvSpPr>
-          <p:cNvPr id="30" name="Rounded Rectangle 29"/>
-          <p:cNvSpPr/>
-          <p:nvPr/>
-        </p:nvSpPr>
-        <p:spPr>
-          <a:xfrm>
-            <a:off x="9198864" y="3575304"/>
-            <a:ext cx="2322576" cy="384048"/>
-          </a:xfrm>
-          <a:prstGeom prst="roundRect">
-            <a:avLst>
-              <a:gd name="adj" fmla="val 50000"/>
-            </a:avLst>
-          </a:prstGeom>
-          <a:solidFill>
-            <a:srgbClr val="F5F5F5"/>
-          </a:solidFill>
-          <a:ln w="12700">
-            <a:solidFill>
-              <a:srgbClr val="D1D5DC"/>
-            </a:solidFill>
-          </a:ln>
-          <a:effectLst/>
-        </p:spPr>
-        <p:style>
-          <a:lnRef idx="1">
-            <a:schemeClr val="accent1"/>
-          </a:lnRef>
-          <a:fillRef idx="3">
-            <a:schemeClr val="accent1"/>
-          </a:fillRef>
-          <a:effectRef idx="2">
-            <a:schemeClr val="accent1"/>
-          </a:effectRef>
-          <a:fontRef idx="minor">
-            <a:schemeClr val="lt1"/>
-          </a:fontRef>
-        </p:style>
-        <p:txBody>
-          <a:bodyPr rtlCol="0" anchor="ctr" wrap="square" lIns="0" rIns="0" tIns="0" bIns="0"/>
-          <a:lstStyle/>
-          <a:p>
-            <a:pPr algn="ctr"/>
-            <a:r>
-              <a:rPr sz="950" b="0">
-                <a:solidFill>
-                  <a:srgbClr val="777777"/>
-                </a:solidFill>
-                <a:latin typeface="Microsoft YaHei"/>
-                <a:ea typeface="Microsoft YaHei"/>
-                <a:cs typeface="Microsoft YaHei"/>
-              </a:rPr>
-              <a:t>链接：（待填写）</a:t>
-            </a:r>
-          </a:p>
-        </p:txBody>
-      </p:sp>
-      <p:sp>
-        <p:nvSpPr>
-          <p:cNvPr id="31" name="Rounded Rectangle 30"/>
-          <p:cNvSpPr/>
-          <p:nvPr/>
-        </p:nvSpPr>
-        <p:spPr>
-          <a:xfrm>
-            <a:off x="502920" y="4315968"/>
-            <a:ext cx="5532120" cy="2084831"/>
-          </a:xfrm>
-          <a:prstGeom prst="roundRect">
-            <a:avLst>
-              <a:gd name="adj" fmla="val 6000"/>
-            </a:avLst>
-          </a:prstGeom>
-          <a:solidFill>
             <a:srgbClr val="FFF1F0"/>
           </a:solidFill>
           <a:ln w="12700">
@@ -10783,7 +10428,7 @@
       </p:sp>
       <p:sp>
         <p:nvSpPr>
-          <p:cNvPr id="32" name="TextBox 31"/>
+          <p:cNvPr id="25" name="TextBox 24"/>
           <p:cNvSpPr txBox="1"/>
           <p:nvPr/>
         </p:nvSpPr>
@@ -10827,7 +10472,7 @@
       </p:sp>
       <p:sp>
         <p:nvSpPr>
-          <p:cNvPr id="33" name="TextBox 32"/>
+          <p:cNvPr id="26" name="TextBox 25"/>
           <p:cNvSpPr txBox="1"/>
           <p:nvPr/>
         </p:nvSpPr>
@@ -10871,7 +10516,7 @@
       </p:sp>
       <p:sp>
         <p:nvSpPr>
-          <p:cNvPr id="34" name="Rounded Rectangle 33"/>
+          <p:cNvPr id="27" name="Rounded Rectangle 26"/>
           <p:cNvSpPr/>
           <p:nvPr/>
         </p:nvSpPr>
@@ -10919,7 +10564,7 @@
       </p:sp>
       <p:sp>
         <p:nvSpPr>
-          <p:cNvPr id="35" name="TextBox 34"/>
+          <p:cNvPr id="28" name="TextBox 27"/>
           <p:cNvSpPr txBox="1"/>
           <p:nvPr/>
         </p:nvSpPr>
@@ -10963,7 +10608,7 @@
       </p:sp>
       <p:sp>
         <p:nvSpPr>
-          <p:cNvPr id="36" name="TextBox 35"/>
+          <p:cNvPr id="29" name="TextBox 28"/>
           <p:cNvSpPr txBox="1"/>
           <p:nvPr/>
         </p:nvSpPr>

--- a/docs/UI一致性技术提升.pptx
+++ b/docs/UI一致性技术提升.pptx
@@ -3106,8 +3106,8 @@
         </p:nvSpPr>
         <p:spPr>
           <a:xfrm>
-            <a:off x="548640" y="146304"/>
-            <a:ext cx="11091672" cy="457200"/>
+            <a:off x="548640" y="182880"/>
+            <a:ext cx="11091672" cy="548640"/>
           </a:xfrm>
           <a:prstGeom prst="rect">
             <a:avLst/>
@@ -3129,7 +3129,7 @@
               </a:spcAft>
             </a:pPr>
             <a:r>
-              <a:rPr sz="2400" b="1">
+              <a:rPr sz="2800" b="1">
                 <a:solidFill>
                   <a:srgbClr val="0067D1"/>
                 </a:solidFill>
@@ -3150,8 +3150,8 @@
         </p:nvSpPr>
         <p:spPr>
           <a:xfrm>
-            <a:off x="548640" y="658368"/>
-            <a:ext cx="5074920" cy="2377440"/>
+            <a:off x="548640" y="868680"/>
+            <a:ext cx="5074920" cy="5440680"/>
           </a:xfrm>
           <a:prstGeom prst="roundRect">
             <a:avLst>
@@ -3198,8 +3198,8 @@
         </p:nvSpPr>
         <p:spPr>
           <a:xfrm>
-            <a:off x="804672" y="758952"/>
-            <a:ext cx="4572000" cy="329184"/>
+            <a:off x="804672" y="1069848"/>
+            <a:ext cx="4572000" cy="402336"/>
           </a:xfrm>
           <a:prstGeom prst="rect">
             <a:avLst/>
@@ -3221,7 +3221,7 @@
               </a:spcAft>
             </a:pPr>
             <a:r>
-              <a:rPr sz="1400" b="1">
+              <a:rPr sz="1700" b="1">
                 <a:solidFill>
                   <a:srgbClr val="FF4D4F"/>
                 </a:solidFill>
@@ -3242,8 +3242,8 @@
         </p:nvSpPr>
         <p:spPr>
           <a:xfrm>
-            <a:off x="804672" y="1097280"/>
-            <a:ext cx="4572000" cy="329184"/>
+            <a:off x="804672" y="1618488"/>
+            <a:ext cx="4572000" cy="402336"/>
           </a:xfrm>
           <a:prstGeom prst="rect">
             <a:avLst/>
@@ -3265,7 +3265,7 @@
               </a:spcAft>
             </a:pPr>
             <a:r>
-              <a:rPr sz="1100" b="0">
+              <a:rPr sz="1300" b="0">
                 <a:solidFill>
                   <a:srgbClr val="191919"/>
                 </a:solidFill>
@@ -3286,8 +3286,8 @@
         </p:nvSpPr>
         <p:spPr>
           <a:xfrm>
-            <a:off x="777240" y="1499616"/>
-            <a:ext cx="4617720" cy="1097280"/>
+            <a:off x="777240" y="2167128"/>
+            <a:ext cx="4617720" cy="2194560"/>
           </a:xfrm>
           <a:prstGeom prst="roundRect">
             <a:avLst>
@@ -3334,8 +3334,8 @@
         </p:nvSpPr>
         <p:spPr>
           <a:xfrm>
-            <a:off x="859536" y="1540764"/>
-            <a:ext cx="923544" cy="996696"/>
+            <a:off x="832104" y="2249424"/>
+            <a:ext cx="1847088" cy="1993392"/>
           </a:xfrm>
           <a:prstGeom prst="roundRect">
             <a:avLst>
@@ -3382,8 +3382,8 @@
         </p:nvSpPr>
         <p:spPr>
           <a:xfrm>
-            <a:off x="941832" y="1604772"/>
-            <a:ext cx="502920" cy="45720"/>
+            <a:off x="996696" y="2377440"/>
+            <a:ext cx="1005840" cy="91440"/>
           </a:xfrm>
           <a:prstGeom prst="rect">
             <a:avLst/>
@@ -3426,8 +3426,8 @@
         </p:nvSpPr>
         <p:spPr>
           <a:xfrm>
-            <a:off x="941832" y="1696212"/>
-            <a:ext cx="457200" cy="82296"/>
+            <a:off x="996696" y="2560320"/>
+            <a:ext cx="914400" cy="164592"/>
           </a:xfrm>
           <a:prstGeom prst="roundRect">
             <a:avLst>
@@ -3472,8 +3472,8 @@
         </p:nvSpPr>
         <p:spPr>
           <a:xfrm>
-            <a:off x="941832" y="1805940"/>
-            <a:ext cx="320040" cy="54864"/>
+            <a:off x="996696" y="2779776"/>
+            <a:ext cx="640080" cy="109728"/>
           </a:xfrm>
           <a:prstGeom prst="roundRect">
             <a:avLst>
@@ -3518,8 +3518,8 @@
         </p:nvSpPr>
         <p:spPr>
           <a:xfrm>
-            <a:off x="941832" y="1915668"/>
-            <a:ext cx="758952" cy="274320"/>
+            <a:off x="996696" y="2999232"/>
+            <a:ext cx="1517904" cy="548640"/>
           </a:xfrm>
           <a:prstGeom prst="roundRect">
             <a:avLst>
@@ -3566,8 +3566,8 @@
         </p:nvSpPr>
         <p:spPr>
           <a:xfrm>
-            <a:off x="996696" y="1970532"/>
-            <a:ext cx="365760" cy="50292"/>
+            <a:off x="1106424" y="3108960"/>
+            <a:ext cx="731520" cy="100584"/>
           </a:xfrm>
           <a:prstGeom prst="roundRect">
             <a:avLst>
@@ -3612,8 +3612,8 @@
         </p:nvSpPr>
         <p:spPr>
           <a:xfrm>
-            <a:off x="996696" y="2052828"/>
-            <a:ext cx="548640" cy="45720"/>
+            <a:off x="1106424" y="3273552"/>
+            <a:ext cx="1097280" cy="91440"/>
           </a:xfrm>
           <a:prstGeom prst="roundRect">
             <a:avLst>
@@ -3658,8 +3658,8 @@
         </p:nvSpPr>
         <p:spPr>
           <a:xfrm>
-            <a:off x="996696" y="2125980"/>
-            <a:ext cx="502920" cy="45720"/>
+            <a:off x="1106424" y="3419856"/>
+            <a:ext cx="1005840" cy="91440"/>
           </a:xfrm>
           <a:prstGeom prst="roundRect">
             <a:avLst>
@@ -3704,8 +3704,8 @@
         </p:nvSpPr>
         <p:spPr>
           <a:xfrm>
-            <a:off x="941832" y="2226564"/>
-            <a:ext cx="82296" cy="82296"/>
+            <a:off x="996696" y="3621024"/>
+            <a:ext cx="164592" cy="164592"/>
           </a:xfrm>
           <a:prstGeom prst="ellipse">
             <a:avLst/>
@@ -3748,8 +3748,8 @@
         </p:nvSpPr>
         <p:spPr>
           <a:xfrm>
-            <a:off x="1060704" y="2240280"/>
-            <a:ext cx="411480" cy="54864"/>
+            <a:off x="1234440" y="3648456"/>
+            <a:ext cx="822960" cy="109728"/>
           </a:xfrm>
           <a:prstGeom prst="roundRect">
             <a:avLst>
@@ -3794,8 +3794,8 @@
         </p:nvSpPr>
         <p:spPr>
           <a:xfrm>
-            <a:off x="941832" y="2336292"/>
-            <a:ext cx="82296" cy="82296"/>
+            <a:off x="996696" y="3840480"/>
+            <a:ext cx="164592" cy="164592"/>
           </a:xfrm>
           <a:prstGeom prst="ellipse">
             <a:avLst/>
@@ -3838,8 +3838,8 @@
         </p:nvSpPr>
         <p:spPr>
           <a:xfrm>
-            <a:off x="1060704" y="2350008"/>
-            <a:ext cx="411480" cy="54864"/>
+            <a:off x="1234440" y="3867912"/>
+            <a:ext cx="822960" cy="109728"/>
           </a:xfrm>
           <a:prstGeom prst="roundRect">
             <a:avLst>
@@ -3884,8 +3884,8 @@
         </p:nvSpPr>
         <p:spPr>
           <a:xfrm>
-            <a:off x="1069848" y="2436876"/>
-            <a:ext cx="457200" cy="73152"/>
+            <a:off x="1252728" y="4041648"/>
+            <a:ext cx="914400" cy="146304"/>
           </a:xfrm>
           <a:prstGeom prst="roundRect">
             <a:avLst>
@@ -3932,8 +3932,8 @@
         </p:nvSpPr>
         <p:spPr>
           <a:xfrm>
-            <a:off x="4315968" y="1540764"/>
-            <a:ext cx="923544" cy="996696"/>
+            <a:off x="3493008" y="2249424"/>
+            <a:ext cx="1847088" cy="1993392"/>
           </a:xfrm>
           <a:prstGeom prst="roundRect">
             <a:avLst>
@@ -3980,8 +3980,8 @@
         </p:nvSpPr>
         <p:spPr>
           <a:xfrm>
-            <a:off x="4425696" y="1604772"/>
-            <a:ext cx="502920" cy="45720"/>
+            <a:off x="3712464" y="2377440"/>
+            <a:ext cx="1005840" cy="91440"/>
           </a:xfrm>
           <a:prstGeom prst="rect">
             <a:avLst/>
@@ -4024,8 +4024,8 @@
         </p:nvSpPr>
         <p:spPr>
           <a:xfrm>
-            <a:off x="4425696" y="1696212"/>
-            <a:ext cx="457200" cy="82296"/>
+            <a:off x="3712464" y="2560320"/>
+            <a:ext cx="914400" cy="164592"/>
           </a:xfrm>
           <a:prstGeom prst="roundRect">
             <a:avLst>
@@ -4070,8 +4070,8 @@
         </p:nvSpPr>
         <p:spPr>
           <a:xfrm>
-            <a:off x="4425696" y="1805940"/>
-            <a:ext cx="320040" cy="54864"/>
+            <a:off x="3712464" y="2779776"/>
+            <a:ext cx="640080" cy="109728"/>
           </a:xfrm>
           <a:prstGeom prst="roundRect">
             <a:avLst>
@@ -4116,8 +4116,8 @@
         </p:nvSpPr>
         <p:spPr>
           <a:xfrm>
-            <a:off x="4425696" y="1915668"/>
-            <a:ext cx="758952" cy="274320"/>
+            <a:off x="3712464" y="2999232"/>
+            <a:ext cx="1517904" cy="548640"/>
           </a:xfrm>
           <a:prstGeom prst="roundRect">
             <a:avLst>
@@ -4164,8 +4164,8 @@
         </p:nvSpPr>
         <p:spPr>
           <a:xfrm>
-            <a:off x="4480560" y="1970532"/>
-            <a:ext cx="365760" cy="50292"/>
+            <a:off x="3822192" y="3108960"/>
+            <a:ext cx="731520" cy="100584"/>
           </a:xfrm>
           <a:prstGeom prst="roundRect">
             <a:avLst>
@@ -4210,8 +4210,8 @@
         </p:nvSpPr>
         <p:spPr>
           <a:xfrm>
-            <a:off x="4480560" y="2052828"/>
-            <a:ext cx="548640" cy="45720"/>
+            <a:off x="3822192" y="3273552"/>
+            <a:ext cx="1097280" cy="91440"/>
           </a:xfrm>
           <a:prstGeom prst="roundRect">
             <a:avLst>
@@ -4256,8 +4256,8 @@
         </p:nvSpPr>
         <p:spPr>
           <a:xfrm>
-            <a:off x="4480560" y="2125980"/>
-            <a:ext cx="502920" cy="45720"/>
+            <a:off x="3822192" y="3419856"/>
+            <a:ext cx="1005840" cy="91440"/>
           </a:xfrm>
           <a:prstGeom prst="roundRect">
             <a:avLst>
@@ -4302,8 +4302,8 @@
         </p:nvSpPr>
         <p:spPr>
           <a:xfrm>
-            <a:off x="4425696" y="2226564"/>
-            <a:ext cx="82296" cy="82296"/>
+            <a:off x="3712464" y="3621024"/>
+            <a:ext cx="164592" cy="164592"/>
           </a:xfrm>
           <a:prstGeom prst="ellipse">
             <a:avLst/>
@@ -4346,8 +4346,8 @@
         </p:nvSpPr>
         <p:spPr>
           <a:xfrm>
-            <a:off x="4544568" y="2240280"/>
-            <a:ext cx="411480" cy="54864"/>
+            <a:off x="3950208" y="3648456"/>
+            <a:ext cx="822960" cy="109728"/>
           </a:xfrm>
           <a:prstGeom prst="roundRect">
             <a:avLst>
@@ -4392,8 +4392,8 @@
         </p:nvSpPr>
         <p:spPr>
           <a:xfrm>
-            <a:off x="4425696" y="2336292"/>
-            <a:ext cx="82296" cy="82296"/>
+            <a:off x="3712464" y="3840480"/>
+            <a:ext cx="164592" cy="164592"/>
           </a:xfrm>
           <a:prstGeom prst="ellipse">
             <a:avLst/>
@@ -4436,8 +4436,8 @@
         </p:nvSpPr>
         <p:spPr>
           <a:xfrm>
-            <a:off x="4544568" y="2350008"/>
-            <a:ext cx="411480" cy="54864"/>
+            <a:off x="3950208" y="3867912"/>
+            <a:ext cx="822960" cy="109728"/>
           </a:xfrm>
           <a:prstGeom prst="roundRect">
             <a:avLst>
@@ -4482,8 +4482,8 @@
         </p:nvSpPr>
         <p:spPr>
           <a:xfrm>
-            <a:off x="4553712" y="2436876"/>
-            <a:ext cx="457200" cy="73152"/>
+            <a:off x="3968496" y="4041648"/>
+            <a:ext cx="914400" cy="146304"/>
           </a:xfrm>
           <a:prstGeom prst="roundRect">
             <a:avLst>
@@ -4530,8 +4530,8 @@
         </p:nvCxnSpPr>
         <p:spPr>
           <a:xfrm>
-            <a:off x="905256" y="1888236"/>
-            <a:ext cx="832104" cy="0"/>
+            <a:off x="923544" y="2944368"/>
+            <a:ext cx="1664208" cy="0"/>
           </a:xfrm>
           <a:prstGeom prst="line">
             <a:avLst/>
@@ -4566,8 +4566,8 @@
         </p:nvCxnSpPr>
         <p:spPr>
           <a:xfrm>
-            <a:off x="905256" y="2208276"/>
-            <a:ext cx="832104" cy="0"/>
+            <a:off x="923544" y="3584448"/>
+            <a:ext cx="1664208" cy="0"/>
           </a:xfrm>
           <a:prstGeom prst="line">
             <a:avLst/>
@@ -4602,8 +4602,8 @@
         </p:nvCxnSpPr>
         <p:spPr>
           <a:xfrm>
-            <a:off x="4361688" y="1888236"/>
-            <a:ext cx="832104" cy="0"/>
+            <a:off x="3584448" y="2944368"/>
+            <a:ext cx="1664208" cy="0"/>
           </a:xfrm>
           <a:prstGeom prst="line">
             <a:avLst/>
@@ -4638,8 +4638,8 @@
         </p:nvCxnSpPr>
         <p:spPr>
           <a:xfrm>
-            <a:off x="4361688" y="2208276"/>
-            <a:ext cx="832104" cy="0"/>
+            <a:off x="3584448" y="3584448"/>
+            <a:ext cx="1664208" cy="0"/>
           </a:xfrm>
           <a:prstGeom prst="line">
             <a:avLst/>
@@ -4674,8 +4674,8 @@
         </p:nvCxnSpPr>
         <p:spPr>
           <a:xfrm>
-            <a:off x="1399032" y="1737360"/>
-            <a:ext cx="3026664" cy="0"/>
+            <a:off x="1911096" y="2642616"/>
+            <a:ext cx="1801368" cy="0"/>
           </a:xfrm>
           <a:prstGeom prst="line">
             <a:avLst/>
@@ -4710,8 +4710,8 @@
         </p:nvCxnSpPr>
         <p:spPr>
           <a:xfrm>
-            <a:off x="1261872" y="1833372"/>
-            <a:ext cx="3163824" cy="0"/>
+            <a:off x="1636776" y="2834640"/>
+            <a:ext cx="2075688" cy="0"/>
           </a:xfrm>
           <a:prstGeom prst="line">
             <a:avLst/>
@@ -4746,8 +4746,8 @@
         </p:nvCxnSpPr>
         <p:spPr>
           <a:xfrm>
-            <a:off x="1700783" y="2052828"/>
-            <a:ext cx="2843785" cy="214884"/>
+            <a:off x="2514599" y="3273552"/>
+            <a:ext cx="1435609" cy="429768"/>
           </a:xfrm>
           <a:prstGeom prst="line">
             <a:avLst/>
@@ -4782,8 +4782,8 @@
         </p:nvCxnSpPr>
         <p:spPr>
           <a:xfrm>
-            <a:off x="1362456" y="1995678"/>
-            <a:ext cx="3182112" cy="381762"/>
+            <a:off x="1837944" y="3159252"/>
+            <a:ext cx="2112264" cy="763524"/>
           </a:xfrm>
           <a:prstGeom prst="line">
             <a:avLst/>
@@ -4818,8 +4818,8 @@
         </p:nvCxnSpPr>
         <p:spPr>
           <a:xfrm flipV="1">
-            <a:off x="1472184" y="2052828"/>
-            <a:ext cx="2953512" cy="214884"/>
+            <a:off x="2057400" y="3273552"/>
+            <a:ext cx="1655064" cy="429768"/>
           </a:xfrm>
           <a:prstGeom prst="line">
             <a:avLst/>
@@ -4854,8 +4854,8 @@
         </p:nvCxnSpPr>
         <p:spPr>
           <a:xfrm flipV="1">
-            <a:off x="1472184" y="1995678"/>
-            <a:ext cx="3008376" cy="381762"/>
+            <a:off x="2057400" y="3159252"/>
+            <a:ext cx="1764792" cy="763524"/>
           </a:xfrm>
           <a:prstGeom prst="line">
             <a:avLst/>
@@ -4890,8 +4890,8 @@
         </p:nvCxnSpPr>
         <p:spPr>
           <a:xfrm flipV="1">
-            <a:off x="1527048" y="2148840"/>
-            <a:ext cx="2953512" cy="324612"/>
+            <a:off x="2167128" y="3465576"/>
+            <a:ext cx="1655064" cy="649224"/>
           </a:xfrm>
           <a:prstGeom prst="line">
             <a:avLst/>
@@ -4926,7 +4926,7 @@
         </p:nvSpPr>
         <p:spPr>
           <a:xfrm>
-            <a:off x="777240" y="2633472"/>
+            <a:off x="777240" y="4398264"/>
             <a:ext cx="4617720" cy="292608"/>
           </a:xfrm>
           <a:prstGeom prst="rect">
@@ -4964,109 +4964,14 @@
       </p:sp>
       <p:sp>
         <p:nvSpPr>
-          <p:cNvPr id="45" name="Right Arrow 44"/>
-          <p:cNvSpPr/>
-          <p:nvPr/>
-        </p:nvSpPr>
-        <p:spPr>
-          <a:xfrm>
-            <a:off x="5815584" y="1664208"/>
-            <a:ext cx="566928" cy="365760"/>
-          </a:xfrm>
-          <a:prstGeom prst="rightArrow">
-            <a:avLst>
-              <a:gd name="adj1" fmla="val 55000"/>
-              <a:gd name="adj2" fmla="val 55000"/>
-            </a:avLst>
-          </a:prstGeom>
-          <a:solidFill>
-            <a:srgbClr val="0067D1"/>
-          </a:solidFill>
-          <a:ln>
-            <a:noFill/>
-          </a:ln>
-          <a:effectLst/>
-        </p:spPr>
-        <p:style>
-          <a:lnRef idx="1">
-            <a:schemeClr val="accent1"/>
-          </a:lnRef>
-          <a:fillRef idx="3">
-            <a:schemeClr val="accent1"/>
-          </a:fillRef>
-          <a:effectRef idx="2">
-            <a:schemeClr val="accent1"/>
-          </a:effectRef>
-          <a:fontRef idx="minor">
-            <a:schemeClr val="lt1"/>
-          </a:fontRef>
-        </p:style>
-        <p:txBody>
-          <a:bodyPr rtlCol="0" anchor="ctr"/>
-          <a:lstStyle/>
-          <a:p>
-            <a:pPr algn="ctr"/>
-          </a:p>
-        </p:txBody>
-      </p:sp>
-      <p:sp>
-        <p:nvSpPr>
-          <p:cNvPr id="46" name="Rounded Rectangle 45"/>
-          <p:cNvSpPr/>
-          <p:nvPr/>
-        </p:nvSpPr>
-        <p:spPr>
-          <a:xfrm>
-            <a:off x="6565392" y="658368"/>
-            <a:ext cx="5074920" cy="2377440"/>
-          </a:xfrm>
-          <a:prstGeom prst="roundRect">
-            <a:avLst>
-              <a:gd name="adj" fmla="val 6000"/>
-            </a:avLst>
-          </a:prstGeom>
-          <a:solidFill>
-            <a:srgbClr val="F6FFF6"/>
-          </a:solidFill>
-          <a:ln w="12700">
-            <a:solidFill>
-              <a:srgbClr val="52C41A"/>
-            </a:solidFill>
-          </a:ln>
-          <a:effectLst/>
-        </p:spPr>
-        <p:style>
-          <a:lnRef idx="1">
-            <a:schemeClr val="accent1"/>
-          </a:lnRef>
-          <a:fillRef idx="3">
-            <a:schemeClr val="accent1"/>
-          </a:fillRef>
-          <a:effectRef idx="2">
-            <a:schemeClr val="accent1"/>
-          </a:effectRef>
-          <a:fontRef idx="minor">
-            <a:schemeClr val="lt1"/>
-          </a:fontRef>
-        </p:style>
-        <p:txBody>
-          <a:bodyPr rtlCol="0" anchor="ctr"/>
-          <a:lstStyle/>
-          <a:p>
-            <a:pPr algn="ctr"/>
-          </a:p>
-        </p:txBody>
-      </p:sp>
-      <p:sp>
-        <p:nvSpPr>
-          <p:cNvPr id="47" name="TextBox 46"/>
+          <p:cNvPr id="45" name="TextBox 44"/>
           <p:cNvSpPr txBox="1"/>
           <p:nvPr/>
         </p:nvSpPr>
         <p:spPr>
           <a:xfrm>
-            <a:off x="6821424" y="758952"/>
-            <a:ext cx="4572000" cy="329184"/>
+            <a:off x="868680" y="4818888"/>
+            <a:ext cx="274320" cy="347472"/>
           </a:xfrm>
           <a:prstGeom prst="rect">
             <a:avLst/>
@@ -5088,7 +4993,366 @@
               </a:spcAft>
             </a:pPr>
             <a:r>
-              <a:rPr sz="1400" b="1">
+              <a:rPr sz="1300" b="1">
+                <a:solidFill>
+                  <a:srgbClr val="FF4D4F"/>
+                </a:solidFill>
+                <a:latin typeface="Microsoft YaHei"/>
+                <a:ea typeface="Microsoft YaHei"/>
+                <a:cs typeface="Microsoft YaHei"/>
+              </a:rPr>
+              <a:t>×</a:t>
+            </a:r>
+          </a:p>
+        </p:txBody>
+      </p:sp>
+      <p:sp>
+        <p:nvSpPr>
+          <p:cNvPr id="46" name="TextBox 45"/>
+          <p:cNvSpPr txBox="1"/>
+          <p:nvPr/>
+        </p:nvSpPr>
+        <p:spPr>
+          <a:xfrm>
+            <a:off x="1161288" y="4837176"/>
+            <a:ext cx="4206240" cy="347472"/>
+          </a:xfrm>
+          <a:prstGeom prst="rect">
+            <a:avLst/>
+          </a:prstGeom>
+          <a:noFill/>
+        </p:spPr>
+        <p:txBody>
+          <a:bodyPr wrap="square" anchor="t" lIns="25400" rIns="25400" tIns="12700" bIns="12700">
+            <a:spAutoFit/>
+          </a:bodyPr>
+          <a:lstStyle/>
+          <a:p>
+            <a:pPr algn="l">
+              <a:lnSpc>
+                <a:spcPct val="100000"/>
+              </a:lnSpc>
+              <a:spcAft>
+                <a:spcPts val="400"/>
+              </a:spcAft>
+            </a:pPr>
+            <a:r>
+              <a:rPr sz="1250" b="0">
+                <a:solidFill>
+                  <a:srgbClr val="191919"/>
+                </a:solidFill>
+                <a:latin typeface="Microsoft YaHei"/>
+                <a:ea typeface="Microsoft YaHei"/>
+                <a:cs typeface="Microsoft YaHei"/>
+              </a:rPr>
+              <a:t>依赖分块结果，块配错则块内节点全部错配</a:t>
+            </a:r>
+          </a:p>
+        </p:txBody>
+      </p:sp>
+      <p:sp>
+        <p:nvSpPr>
+          <p:cNvPr id="47" name="TextBox 46"/>
+          <p:cNvSpPr txBox="1"/>
+          <p:nvPr/>
+        </p:nvSpPr>
+        <p:spPr>
+          <a:xfrm>
+            <a:off x="868680" y="5294376"/>
+            <a:ext cx="274320" cy="347472"/>
+          </a:xfrm>
+          <a:prstGeom prst="rect">
+            <a:avLst/>
+          </a:prstGeom>
+          <a:noFill/>
+        </p:spPr>
+        <p:txBody>
+          <a:bodyPr wrap="square" anchor="t" lIns="25400" rIns="25400" tIns="12700" bIns="12700">
+            <a:spAutoFit/>
+          </a:bodyPr>
+          <a:lstStyle/>
+          <a:p>
+            <a:pPr algn="l">
+              <a:lnSpc>
+                <a:spcPct val="100000"/>
+              </a:lnSpc>
+              <a:spcAft>
+                <a:spcPts val="400"/>
+              </a:spcAft>
+            </a:pPr>
+            <a:r>
+              <a:rPr sz="1300" b="1">
+                <a:solidFill>
+                  <a:srgbClr val="FF4D4F"/>
+                </a:solidFill>
+                <a:latin typeface="Microsoft YaHei"/>
+                <a:ea typeface="Microsoft YaHei"/>
+                <a:cs typeface="Microsoft YaHei"/>
+              </a:rPr>
+              <a:t>×</a:t>
+            </a:r>
+          </a:p>
+        </p:txBody>
+      </p:sp>
+      <p:sp>
+        <p:nvSpPr>
+          <p:cNvPr id="48" name="TextBox 47"/>
+          <p:cNvSpPr txBox="1"/>
+          <p:nvPr/>
+        </p:nvSpPr>
+        <p:spPr>
+          <a:xfrm>
+            <a:off x="1161288" y="5312664"/>
+            <a:ext cx="4206240" cy="347472"/>
+          </a:xfrm>
+          <a:prstGeom prst="rect">
+            <a:avLst/>
+          </a:prstGeom>
+          <a:noFill/>
+        </p:spPr>
+        <p:txBody>
+          <a:bodyPr wrap="square" anchor="t" lIns="25400" rIns="25400" tIns="12700" bIns="12700">
+            <a:spAutoFit/>
+          </a:bodyPr>
+          <a:lstStyle/>
+          <a:p>
+            <a:pPr algn="l">
+              <a:lnSpc>
+                <a:spcPct val="100000"/>
+              </a:lnSpc>
+              <a:spcAft>
+                <a:spcPts val="400"/>
+              </a:spcAft>
+            </a:pPr>
+            <a:r>
+              <a:rPr sz="1250" b="0">
+                <a:solidFill>
+                  <a:srgbClr val="191919"/>
+                </a:solidFill>
+                <a:latin typeface="Microsoft YaHei"/>
+                <a:ea typeface="Microsoft YaHei"/>
+                <a:cs typeface="Microsoft YaHei"/>
+              </a:rPr>
+              <a:t>错误沿块传播，局部失败连坐整体</a:t>
+            </a:r>
+          </a:p>
+        </p:txBody>
+      </p:sp>
+      <p:sp>
+        <p:nvSpPr>
+          <p:cNvPr id="49" name="TextBox 48"/>
+          <p:cNvSpPr txBox="1"/>
+          <p:nvPr/>
+        </p:nvSpPr>
+        <p:spPr>
+          <a:xfrm>
+            <a:off x="868680" y="5769864"/>
+            <a:ext cx="274320" cy="347472"/>
+          </a:xfrm>
+          <a:prstGeom prst="rect">
+            <a:avLst/>
+          </a:prstGeom>
+          <a:noFill/>
+        </p:spPr>
+        <p:txBody>
+          <a:bodyPr wrap="square" anchor="t" lIns="25400" rIns="25400" tIns="12700" bIns="12700">
+            <a:spAutoFit/>
+          </a:bodyPr>
+          <a:lstStyle/>
+          <a:p>
+            <a:pPr algn="l">
+              <a:lnSpc>
+                <a:spcPct val="100000"/>
+              </a:lnSpc>
+              <a:spcAft>
+                <a:spcPts val="400"/>
+              </a:spcAft>
+            </a:pPr>
+            <a:r>
+              <a:rPr sz="1300" b="1">
+                <a:solidFill>
+                  <a:srgbClr val="FF4D4F"/>
+                </a:solidFill>
+                <a:latin typeface="Microsoft YaHei"/>
+                <a:ea typeface="Microsoft YaHei"/>
+                <a:cs typeface="Microsoft YaHei"/>
+              </a:rPr>
+              <a:t>×</a:t>
+            </a:r>
+          </a:p>
+        </p:txBody>
+      </p:sp>
+      <p:sp>
+        <p:nvSpPr>
+          <p:cNvPr id="50" name="TextBox 49"/>
+          <p:cNvSpPr txBox="1"/>
+          <p:nvPr/>
+        </p:nvSpPr>
+        <p:spPr>
+          <a:xfrm>
+            <a:off x="1161288" y="5788152"/>
+            <a:ext cx="4206240" cy="347472"/>
+          </a:xfrm>
+          <a:prstGeom prst="rect">
+            <a:avLst/>
+          </a:prstGeom>
+          <a:noFill/>
+        </p:spPr>
+        <p:txBody>
+          <a:bodyPr wrap="square" anchor="t" lIns="25400" rIns="25400" tIns="12700" bIns="12700">
+            <a:spAutoFit/>
+          </a:bodyPr>
+          <a:lstStyle/>
+          <a:p>
+            <a:pPr algn="l">
+              <a:lnSpc>
+                <a:spcPct val="100000"/>
+              </a:lnSpc>
+              <a:spcAft>
+                <a:spcPts val="400"/>
+              </a:spcAft>
+            </a:pPr>
+            <a:r>
+              <a:rPr sz="1250" b="0">
+                <a:solidFill>
+                  <a:srgbClr val="191919"/>
+                </a:solidFill>
+                <a:latin typeface="Microsoft YaHei"/>
+                <a:ea typeface="Microsoft YaHei"/>
+                <a:cs typeface="Microsoft YaHei"/>
+              </a:rPr>
+              <a:t>整体准确率断崖式下降</a:t>
+            </a:r>
+          </a:p>
+        </p:txBody>
+      </p:sp>
+      <p:sp>
+        <p:nvSpPr>
+          <p:cNvPr id="51" name="Right Arrow 50"/>
+          <p:cNvSpPr/>
+          <p:nvPr/>
+        </p:nvSpPr>
+        <p:spPr>
+          <a:xfrm>
+            <a:off x="5788152" y="3337560"/>
+            <a:ext cx="621792" cy="457200"/>
+          </a:xfrm>
+          <a:prstGeom prst="rightArrow">
+            <a:avLst>
+              <a:gd name="adj1" fmla="val 55000"/>
+              <a:gd name="adj2" fmla="val 55000"/>
+            </a:avLst>
+          </a:prstGeom>
+          <a:solidFill>
+            <a:srgbClr val="0067D1"/>
+          </a:solidFill>
+          <a:ln>
+            <a:noFill/>
+          </a:ln>
+          <a:effectLst/>
+        </p:spPr>
+        <p:style>
+          <a:lnRef idx="1">
+            <a:schemeClr val="accent1"/>
+          </a:lnRef>
+          <a:fillRef idx="3">
+            <a:schemeClr val="accent1"/>
+          </a:fillRef>
+          <a:effectRef idx="2">
+            <a:schemeClr val="accent1"/>
+          </a:effectRef>
+          <a:fontRef idx="minor">
+            <a:schemeClr val="lt1"/>
+          </a:fontRef>
+        </p:style>
+        <p:txBody>
+          <a:bodyPr rtlCol="0" anchor="ctr"/>
+          <a:lstStyle/>
+          <a:p>
+            <a:pPr algn="ctr"/>
+          </a:p>
+        </p:txBody>
+      </p:sp>
+      <p:sp>
+        <p:nvSpPr>
+          <p:cNvPr id="52" name="Rounded Rectangle 51"/>
+          <p:cNvSpPr/>
+          <p:nvPr/>
+        </p:nvSpPr>
+        <p:spPr>
+          <a:xfrm>
+            <a:off x="6565392" y="868680"/>
+            <a:ext cx="5074920" cy="5440680"/>
+          </a:xfrm>
+          <a:prstGeom prst="roundRect">
+            <a:avLst>
+              <a:gd name="adj" fmla="val 6000"/>
+            </a:avLst>
+          </a:prstGeom>
+          <a:solidFill>
+            <a:srgbClr val="F6FFF6"/>
+          </a:solidFill>
+          <a:ln w="12700">
+            <a:solidFill>
+              <a:srgbClr val="52C41A"/>
+            </a:solidFill>
+          </a:ln>
+          <a:effectLst/>
+        </p:spPr>
+        <p:style>
+          <a:lnRef idx="1">
+            <a:schemeClr val="accent1"/>
+          </a:lnRef>
+          <a:fillRef idx="3">
+            <a:schemeClr val="accent1"/>
+          </a:fillRef>
+          <a:effectRef idx="2">
+            <a:schemeClr val="accent1"/>
+          </a:effectRef>
+          <a:fontRef idx="minor">
+            <a:schemeClr val="lt1"/>
+          </a:fontRef>
+        </p:style>
+        <p:txBody>
+          <a:bodyPr rtlCol="0" anchor="ctr"/>
+          <a:lstStyle/>
+          <a:p>
+            <a:pPr algn="ctr"/>
+          </a:p>
+        </p:txBody>
+      </p:sp>
+      <p:sp>
+        <p:nvSpPr>
+          <p:cNvPr id="53" name="TextBox 52"/>
+          <p:cNvSpPr txBox="1"/>
+          <p:nvPr/>
+        </p:nvSpPr>
+        <p:spPr>
+          <a:xfrm>
+            <a:off x="6821424" y="1069848"/>
+            <a:ext cx="4572000" cy="402336"/>
+          </a:xfrm>
+          <a:prstGeom prst="rect">
+            <a:avLst/>
+          </a:prstGeom>
+          <a:noFill/>
+        </p:spPr>
+        <p:txBody>
+          <a:bodyPr wrap="square" anchor="t" lIns="25400" rIns="25400" tIns="12700" bIns="12700">
+            <a:spAutoFit/>
+          </a:bodyPr>
+          <a:lstStyle/>
+          <a:p>
+            <a:pPr algn="l">
+              <a:lnSpc>
+                <a:spcPct val="100000"/>
+              </a:lnSpc>
+              <a:spcAft>
+                <a:spcPts val="400"/>
+              </a:spcAft>
+            </a:pPr>
+            <a:r>
+              <a:rPr sz="1700" b="1">
                 <a:solidFill>
                   <a:srgbClr val="52C41A"/>
                 </a:solidFill>
@@ -5103,14 +5367,14 @@
       </p:sp>
       <p:sp>
         <p:nvSpPr>
-          <p:cNvPr id="48" name="TextBox 47"/>
+          <p:cNvPr id="54" name="TextBox 53"/>
           <p:cNvSpPr txBox="1"/>
           <p:nvPr/>
         </p:nvSpPr>
         <p:spPr>
           <a:xfrm>
-            <a:off x="6821424" y="1097280"/>
-            <a:ext cx="4572000" cy="329184"/>
+            <a:off x="6821424" y="1618488"/>
+            <a:ext cx="4572000" cy="402336"/>
           </a:xfrm>
           <a:prstGeom prst="rect">
             <a:avLst/>
@@ -5132,7 +5396,7 @@
               </a:spcAft>
             </a:pPr>
             <a:r>
-              <a:rPr sz="1100" b="0">
+              <a:rPr sz="1300" b="0">
                 <a:solidFill>
                   <a:srgbClr val="191919"/>
                 </a:solidFill>
@@ -5147,14 +5411,14 @@
       </p:sp>
       <p:sp>
         <p:nvSpPr>
-          <p:cNvPr id="49" name="Rounded Rectangle 48"/>
+          <p:cNvPr id="55" name="Rounded Rectangle 54"/>
           <p:cNvSpPr/>
           <p:nvPr/>
         </p:nvSpPr>
         <p:spPr>
           <a:xfrm>
-            <a:off x="6793992" y="1499616"/>
-            <a:ext cx="4617720" cy="1097280"/>
+            <a:off x="6793992" y="2167128"/>
+            <a:ext cx="4617720" cy="2194560"/>
           </a:xfrm>
           <a:prstGeom prst="roundRect">
             <a:avLst>
@@ -5195,14 +5459,14 @@
       </p:sp>
       <p:sp>
         <p:nvSpPr>
-          <p:cNvPr id="50" name="Rounded Rectangle 49"/>
+          <p:cNvPr id="56" name="Rounded Rectangle 55"/>
           <p:cNvSpPr/>
           <p:nvPr/>
         </p:nvSpPr>
         <p:spPr>
           <a:xfrm>
-            <a:off x="6876288" y="1540764"/>
-            <a:ext cx="923544" cy="996696"/>
+            <a:off x="6848856" y="2249424"/>
+            <a:ext cx="1847088" cy="1993392"/>
           </a:xfrm>
           <a:prstGeom prst="roundRect">
             <a:avLst>
@@ -5243,14 +5507,14 @@
       </p:sp>
       <p:sp>
         <p:nvSpPr>
-          <p:cNvPr id="51" name="Rectangle 50"/>
+          <p:cNvPr id="57" name="Rectangle 56"/>
           <p:cNvSpPr/>
           <p:nvPr/>
         </p:nvSpPr>
         <p:spPr>
           <a:xfrm>
-            <a:off x="6958584" y="1604772"/>
-            <a:ext cx="502920" cy="45720"/>
+            <a:off x="7013448" y="2377440"/>
+            <a:ext cx="1005840" cy="91440"/>
           </a:xfrm>
           <a:prstGeom prst="rect">
             <a:avLst/>
@@ -5287,14 +5551,14 @@
       </p:sp>
       <p:sp>
         <p:nvSpPr>
-          <p:cNvPr id="52" name="Rounded Rectangle 51"/>
+          <p:cNvPr id="58" name="Rounded Rectangle 57"/>
           <p:cNvSpPr/>
           <p:nvPr/>
         </p:nvSpPr>
         <p:spPr>
           <a:xfrm>
-            <a:off x="6958584" y="1696212"/>
-            <a:ext cx="457200" cy="82296"/>
+            <a:off x="7013448" y="2560320"/>
+            <a:ext cx="914400" cy="164592"/>
           </a:xfrm>
           <a:prstGeom prst="roundRect">
             <a:avLst>
@@ -5335,14 +5599,14 @@
       </p:sp>
       <p:sp>
         <p:nvSpPr>
-          <p:cNvPr id="53" name="Rounded Rectangle 52"/>
+          <p:cNvPr id="59" name="Rounded Rectangle 58"/>
           <p:cNvSpPr/>
           <p:nvPr/>
         </p:nvSpPr>
         <p:spPr>
           <a:xfrm>
-            <a:off x="6958584" y="1805940"/>
-            <a:ext cx="320040" cy="54864"/>
+            <a:off x="7013448" y="2779776"/>
+            <a:ext cx="640080" cy="109728"/>
           </a:xfrm>
           <a:prstGeom prst="roundRect">
             <a:avLst>
@@ -5383,14 +5647,14 @@
       </p:sp>
       <p:sp>
         <p:nvSpPr>
-          <p:cNvPr id="54" name="Rounded Rectangle 53"/>
+          <p:cNvPr id="60" name="Rounded Rectangle 59"/>
           <p:cNvSpPr/>
           <p:nvPr/>
         </p:nvSpPr>
         <p:spPr>
           <a:xfrm>
-            <a:off x="6958584" y="1915668"/>
-            <a:ext cx="758952" cy="274320"/>
+            <a:off x="7013448" y="2999232"/>
+            <a:ext cx="1517904" cy="548640"/>
           </a:xfrm>
           <a:prstGeom prst="roundRect">
             <a:avLst>
@@ -5431,14 +5695,14 @@
       </p:sp>
       <p:sp>
         <p:nvSpPr>
-          <p:cNvPr id="55" name="Rounded Rectangle 54"/>
+          <p:cNvPr id="61" name="Rounded Rectangle 60"/>
           <p:cNvSpPr/>
           <p:nvPr/>
         </p:nvSpPr>
         <p:spPr>
           <a:xfrm>
-            <a:off x="7013448" y="1970532"/>
-            <a:ext cx="365760" cy="50292"/>
+            <a:off x="7123176" y="3108960"/>
+            <a:ext cx="731520" cy="100584"/>
           </a:xfrm>
           <a:prstGeom prst="roundRect">
             <a:avLst>
@@ -5477,14 +5741,14 @@
       </p:sp>
       <p:sp>
         <p:nvSpPr>
-          <p:cNvPr id="56" name="Rounded Rectangle 55"/>
+          <p:cNvPr id="62" name="Rounded Rectangle 61"/>
           <p:cNvSpPr/>
           <p:nvPr/>
         </p:nvSpPr>
         <p:spPr>
           <a:xfrm>
-            <a:off x="7013448" y="2052828"/>
-            <a:ext cx="548640" cy="45720"/>
+            <a:off x="7123176" y="3273552"/>
+            <a:ext cx="1097280" cy="91440"/>
           </a:xfrm>
           <a:prstGeom prst="roundRect">
             <a:avLst>
@@ -5523,14 +5787,14 @@
       </p:sp>
       <p:sp>
         <p:nvSpPr>
-          <p:cNvPr id="57" name="Rounded Rectangle 56"/>
+          <p:cNvPr id="63" name="Rounded Rectangle 62"/>
           <p:cNvSpPr/>
           <p:nvPr/>
         </p:nvSpPr>
         <p:spPr>
           <a:xfrm>
-            <a:off x="7013448" y="2125980"/>
-            <a:ext cx="502920" cy="45720"/>
+            <a:off x="7123176" y="3419856"/>
+            <a:ext cx="1005840" cy="91440"/>
           </a:xfrm>
           <a:prstGeom prst="roundRect">
             <a:avLst>
@@ -5569,14 +5833,14 @@
       </p:sp>
       <p:sp>
         <p:nvSpPr>
-          <p:cNvPr id="58" name="Oval 57"/>
+          <p:cNvPr id="64" name="Oval 63"/>
           <p:cNvSpPr/>
           <p:nvPr/>
         </p:nvSpPr>
         <p:spPr>
           <a:xfrm>
-            <a:off x="6958584" y="2226564"/>
-            <a:ext cx="82296" cy="82296"/>
+            <a:off x="7013448" y="3621024"/>
+            <a:ext cx="164592" cy="164592"/>
           </a:xfrm>
           <a:prstGeom prst="ellipse">
             <a:avLst/>
@@ -5613,14 +5877,14 @@
       </p:sp>
       <p:sp>
         <p:nvSpPr>
-          <p:cNvPr id="59" name="Rounded Rectangle 58"/>
+          <p:cNvPr id="65" name="Rounded Rectangle 64"/>
           <p:cNvSpPr/>
           <p:nvPr/>
         </p:nvSpPr>
         <p:spPr>
           <a:xfrm>
-            <a:off x="7077456" y="2240280"/>
-            <a:ext cx="411480" cy="54864"/>
+            <a:off x="7251192" y="3648456"/>
+            <a:ext cx="822960" cy="109728"/>
           </a:xfrm>
           <a:prstGeom prst="roundRect">
             <a:avLst>
@@ -5659,14 +5923,14 @@
       </p:sp>
       <p:sp>
         <p:nvSpPr>
-          <p:cNvPr id="60" name="Oval 59"/>
+          <p:cNvPr id="66" name="Oval 65"/>
           <p:cNvSpPr/>
           <p:nvPr/>
         </p:nvSpPr>
         <p:spPr>
           <a:xfrm>
-            <a:off x="6958584" y="2336292"/>
-            <a:ext cx="82296" cy="82296"/>
+            <a:off x="7013448" y="3840480"/>
+            <a:ext cx="164592" cy="164592"/>
           </a:xfrm>
           <a:prstGeom prst="ellipse">
             <a:avLst/>
@@ -5705,14 +5969,14 @@
       </p:sp>
       <p:sp>
         <p:nvSpPr>
-          <p:cNvPr id="61" name="Rounded Rectangle 60"/>
+          <p:cNvPr id="67" name="Rounded Rectangle 66"/>
           <p:cNvSpPr/>
           <p:nvPr/>
         </p:nvSpPr>
         <p:spPr>
           <a:xfrm>
-            <a:off x="7077456" y="2350008"/>
-            <a:ext cx="411480" cy="54864"/>
+            <a:off x="7251192" y="3867912"/>
+            <a:ext cx="822960" cy="109728"/>
           </a:xfrm>
           <a:prstGeom prst="roundRect">
             <a:avLst>
@@ -5753,14 +6017,14 @@
       </p:sp>
       <p:sp>
         <p:nvSpPr>
-          <p:cNvPr id="62" name="Rounded Rectangle 61"/>
+          <p:cNvPr id="68" name="Rounded Rectangle 67"/>
           <p:cNvSpPr/>
           <p:nvPr/>
         </p:nvSpPr>
         <p:spPr>
           <a:xfrm>
-            <a:off x="7086600" y="2436876"/>
-            <a:ext cx="457200" cy="73152"/>
+            <a:off x="7269480" y="4041648"/>
+            <a:ext cx="914400" cy="146304"/>
           </a:xfrm>
           <a:prstGeom prst="roundRect">
             <a:avLst>
@@ -5801,14 +6065,14 @@
       </p:sp>
       <p:sp>
         <p:nvSpPr>
-          <p:cNvPr id="63" name="Rounded Rectangle 62"/>
+          <p:cNvPr id="69" name="Rounded Rectangle 68"/>
           <p:cNvSpPr/>
           <p:nvPr/>
         </p:nvSpPr>
         <p:spPr>
           <a:xfrm>
-            <a:off x="10332720" y="1540764"/>
-            <a:ext cx="923544" cy="996696"/>
+            <a:off x="9509760" y="2249424"/>
+            <a:ext cx="1847088" cy="1993392"/>
           </a:xfrm>
           <a:prstGeom prst="roundRect">
             <a:avLst>
@@ -5849,14 +6113,14 @@
       </p:sp>
       <p:sp>
         <p:nvSpPr>
-          <p:cNvPr id="64" name="Rectangle 63"/>
+          <p:cNvPr id="70" name="Rectangle 69"/>
           <p:cNvSpPr/>
           <p:nvPr/>
         </p:nvSpPr>
         <p:spPr>
           <a:xfrm>
-            <a:off x="10442448" y="1604772"/>
-            <a:ext cx="502920" cy="45720"/>
+            <a:off x="9729216" y="2377440"/>
+            <a:ext cx="1005840" cy="91440"/>
           </a:xfrm>
           <a:prstGeom prst="rect">
             <a:avLst/>
@@ -5893,14 +6157,14 @@
       </p:sp>
       <p:sp>
         <p:nvSpPr>
-          <p:cNvPr id="65" name="Rounded Rectangle 64"/>
+          <p:cNvPr id="71" name="Rounded Rectangle 70"/>
           <p:cNvSpPr/>
           <p:nvPr/>
         </p:nvSpPr>
         <p:spPr>
           <a:xfrm>
-            <a:off x="10442448" y="1696212"/>
-            <a:ext cx="457200" cy="82296"/>
+            <a:off x="9729216" y="2560320"/>
+            <a:ext cx="914400" cy="164592"/>
           </a:xfrm>
           <a:prstGeom prst="roundRect">
             <a:avLst>
@@ -5941,14 +6205,14 @@
       </p:sp>
       <p:sp>
         <p:nvSpPr>
-          <p:cNvPr id="66" name="Rounded Rectangle 65"/>
+          <p:cNvPr id="72" name="Rounded Rectangle 71"/>
           <p:cNvSpPr/>
           <p:nvPr/>
         </p:nvSpPr>
         <p:spPr>
           <a:xfrm>
-            <a:off x="10442448" y="1805940"/>
-            <a:ext cx="320040" cy="54864"/>
+            <a:off x="9729216" y="2779776"/>
+            <a:ext cx="640080" cy="109728"/>
           </a:xfrm>
           <a:prstGeom prst="roundRect">
             <a:avLst>
@@ -5989,14 +6253,14 @@
       </p:sp>
       <p:sp>
         <p:nvSpPr>
-          <p:cNvPr id="67" name="Rounded Rectangle 66"/>
+          <p:cNvPr id="73" name="Rounded Rectangle 72"/>
           <p:cNvSpPr/>
           <p:nvPr/>
         </p:nvSpPr>
         <p:spPr>
           <a:xfrm>
-            <a:off x="10442448" y="1915668"/>
-            <a:ext cx="758952" cy="274320"/>
+            <a:off x="9729216" y="2999232"/>
+            <a:ext cx="1517904" cy="548640"/>
           </a:xfrm>
           <a:prstGeom prst="roundRect">
             <a:avLst>
@@ -6037,14 +6301,14 @@
       </p:sp>
       <p:sp>
         <p:nvSpPr>
-          <p:cNvPr id="68" name="Rounded Rectangle 67"/>
+          <p:cNvPr id="74" name="Rounded Rectangle 73"/>
           <p:cNvSpPr/>
           <p:nvPr/>
         </p:nvSpPr>
         <p:spPr>
           <a:xfrm>
-            <a:off x="10497312" y="1970532"/>
-            <a:ext cx="365760" cy="50292"/>
+            <a:off x="9838944" y="3108960"/>
+            <a:ext cx="731520" cy="100584"/>
           </a:xfrm>
           <a:prstGeom prst="roundRect">
             <a:avLst>
@@ -6083,14 +6347,14 @@
       </p:sp>
       <p:sp>
         <p:nvSpPr>
-          <p:cNvPr id="69" name="Rounded Rectangle 68"/>
+          <p:cNvPr id="75" name="Rounded Rectangle 74"/>
           <p:cNvSpPr/>
           <p:nvPr/>
         </p:nvSpPr>
         <p:spPr>
           <a:xfrm>
-            <a:off x="10497312" y="2052828"/>
-            <a:ext cx="548640" cy="45720"/>
+            <a:off x="9838944" y="3273552"/>
+            <a:ext cx="1097280" cy="91440"/>
           </a:xfrm>
           <a:prstGeom prst="roundRect">
             <a:avLst>
@@ -6129,14 +6393,14 @@
       </p:sp>
       <p:sp>
         <p:nvSpPr>
-          <p:cNvPr id="70" name="Rounded Rectangle 69"/>
+          <p:cNvPr id="76" name="Rounded Rectangle 75"/>
           <p:cNvSpPr/>
           <p:nvPr/>
         </p:nvSpPr>
         <p:spPr>
           <a:xfrm>
-            <a:off x="10497312" y="2125980"/>
-            <a:ext cx="502920" cy="45720"/>
+            <a:off x="9838944" y="3419856"/>
+            <a:ext cx="1005840" cy="91440"/>
           </a:xfrm>
           <a:prstGeom prst="roundRect">
             <a:avLst>
@@ -6175,14 +6439,14 @@
       </p:sp>
       <p:sp>
         <p:nvSpPr>
-          <p:cNvPr id="71" name="Oval 70"/>
+          <p:cNvPr id="77" name="Oval 76"/>
           <p:cNvSpPr/>
           <p:nvPr/>
         </p:nvSpPr>
         <p:spPr>
           <a:xfrm>
-            <a:off x="10442448" y="2226564"/>
-            <a:ext cx="82296" cy="82296"/>
+            <a:off x="9729216" y="3621024"/>
+            <a:ext cx="164592" cy="164592"/>
           </a:xfrm>
           <a:prstGeom prst="ellipse">
             <a:avLst/>
@@ -6219,14 +6483,14 @@
       </p:sp>
       <p:sp>
         <p:nvSpPr>
-          <p:cNvPr id="72" name="Rounded Rectangle 71"/>
+          <p:cNvPr id="78" name="Rounded Rectangle 77"/>
           <p:cNvSpPr/>
           <p:nvPr/>
         </p:nvSpPr>
         <p:spPr>
           <a:xfrm>
-            <a:off x="10561320" y="2240280"/>
-            <a:ext cx="411480" cy="54864"/>
+            <a:off x="9966960" y="3648456"/>
+            <a:ext cx="822960" cy="109728"/>
           </a:xfrm>
           <a:prstGeom prst="roundRect">
             <a:avLst>
@@ -6265,14 +6529,14 @@
       </p:sp>
       <p:sp>
         <p:nvSpPr>
-          <p:cNvPr id="73" name="Oval 72"/>
+          <p:cNvPr id="79" name="Oval 78"/>
           <p:cNvSpPr/>
           <p:nvPr/>
         </p:nvSpPr>
         <p:spPr>
           <a:xfrm>
-            <a:off x="10442448" y="2336292"/>
-            <a:ext cx="82296" cy="82296"/>
+            <a:off x="9729216" y="3840480"/>
+            <a:ext cx="164592" cy="164592"/>
           </a:xfrm>
           <a:prstGeom prst="ellipse">
             <a:avLst/>
@@ -6311,14 +6575,14 @@
       </p:sp>
       <p:sp>
         <p:nvSpPr>
-          <p:cNvPr id="74" name="Rounded Rectangle 73"/>
+          <p:cNvPr id="80" name="Rounded Rectangle 79"/>
           <p:cNvSpPr/>
           <p:nvPr/>
         </p:nvSpPr>
         <p:spPr>
           <a:xfrm>
-            <a:off x="10561320" y="2350008"/>
-            <a:ext cx="411480" cy="54864"/>
+            <a:off x="9966960" y="3867912"/>
+            <a:ext cx="822960" cy="109728"/>
           </a:xfrm>
           <a:prstGeom prst="roundRect">
             <a:avLst>
@@ -6359,14 +6623,14 @@
       </p:sp>
       <p:sp>
         <p:nvSpPr>
-          <p:cNvPr id="75" name="Rounded Rectangle 74"/>
+          <p:cNvPr id="81" name="Rounded Rectangle 80"/>
           <p:cNvSpPr/>
           <p:nvPr/>
         </p:nvSpPr>
         <p:spPr>
           <a:xfrm>
-            <a:off x="10570464" y="2436876"/>
-            <a:ext cx="457200" cy="73152"/>
+            <a:off x="9985248" y="4041648"/>
+            <a:ext cx="914400" cy="146304"/>
           </a:xfrm>
           <a:prstGeom prst="roundRect">
             <a:avLst>
@@ -6407,14 +6671,14 @@
       </p:sp>
       <p:cxnSp>
         <p:nvCxnSpPr>
-          <p:cNvPr id="76" name="Connector 75"/>
+          <p:cNvPr id="82" name="Connector 81"/>
           <p:cNvCxnSpPr/>
           <p:nvPr/>
         </p:nvCxnSpPr>
         <p:spPr>
           <a:xfrm>
-            <a:off x="7415784" y="1737360"/>
-            <a:ext cx="3026664" cy="0"/>
+            <a:off x="7927848" y="2642616"/>
+            <a:ext cx="1801368" cy="0"/>
           </a:xfrm>
           <a:prstGeom prst="line">
             <a:avLst/>
@@ -6443,14 +6707,14 @@
       </p:cxnSp>
       <p:sp>
         <p:nvSpPr>
-          <p:cNvPr id="77" name="Oval 76"/>
+          <p:cNvPr id="83" name="Oval 82"/>
           <p:cNvSpPr/>
           <p:nvPr/>
         </p:nvSpPr>
         <p:spPr>
           <a:xfrm>
-            <a:off x="8869680" y="1677924"/>
-            <a:ext cx="118872" cy="118872"/>
+            <a:off x="8709660" y="2523744"/>
+            <a:ext cx="237744" cy="237744"/>
           </a:xfrm>
           <a:prstGeom prst="ellipse">
             <a:avLst/>
@@ -6487,14 +6751,14 @@
       </p:sp>
       <p:cxnSp>
         <p:nvCxnSpPr>
-          <p:cNvPr id="78" name="Connector 77"/>
+          <p:cNvPr id="84" name="Connector 83"/>
           <p:cNvCxnSpPr/>
           <p:nvPr/>
         </p:nvCxnSpPr>
         <p:spPr>
           <a:xfrm>
-            <a:off x="7278624" y="1833372"/>
-            <a:ext cx="3163824" cy="0"/>
+            <a:off x="7653528" y="2834640"/>
+            <a:ext cx="2075688" cy="0"/>
           </a:xfrm>
           <a:prstGeom prst="line">
             <a:avLst/>
@@ -6523,14 +6787,14 @@
       </p:cxnSp>
       <p:sp>
         <p:nvSpPr>
-          <p:cNvPr id="79" name="Oval 78"/>
+          <p:cNvPr id="85" name="Oval 84"/>
           <p:cNvSpPr/>
           <p:nvPr/>
         </p:nvSpPr>
         <p:spPr>
           <a:xfrm>
-            <a:off x="8801100" y="1773936"/>
-            <a:ext cx="118872" cy="118872"/>
+            <a:off x="8572500" y="2715768"/>
+            <a:ext cx="237744" cy="237744"/>
           </a:xfrm>
           <a:prstGeom prst="ellipse">
             <a:avLst/>
@@ -6567,14 +6831,14 @@
       </p:sp>
       <p:cxnSp>
         <p:nvCxnSpPr>
-          <p:cNvPr id="80" name="Connector 79"/>
+          <p:cNvPr id="86" name="Connector 85"/>
           <p:cNvCxnSpPr/>
           <p:nvPr/>
         </p:nvCxnSpPr>
         <p:spPr>
           <a:xfrm>
-            <a:off x="7543800" y="2473452"/>
-            <a:ext cx="3026664" cy="0"/>
+            <a:off x="8183880" y="4114800"/>
+            <a:ext cx="1801368" cy="0"/>
           </a:xfrm>
           <a:prstGeom prst="line">
             <a:avLst/>
@@ -6603,14 +6867,14 @@
       </p:cxnSp>
       <p:sp>
         <p:nvSpPr>
-          <p:cNvPr id="81" name="Oval 80"/>
+          <p:cNvPr id="87" name="Oval 86"/>
           <p:cNvSpPr/>
           <p:nvPr/>
         </p:nvSpPr>
         <p:spPr>
           <a:xfrm>
-            <a:off x="8997696" y="2414016"/>
-            <a:ext cx="118872" cy="118872"/>
+            <a:off x="8965692" y="3995928"/>
+            <a:ext cx="237744" cy="237744"/>
           </a:xfrm>
           <a:prstGeom prst="ellipse">
             <a:avLst/>
@@ -6647,14 +6911,14 @@
       </p:sp>
       <p:cxnSp>
         <p:nvCxnSpPr>
-          <p:cNvPr id="82" name="Connector 81"/>
+          <p:cNvPr id="88" name="Connector 87"/>
           <p:cNvCxnSpPr/>
           <p:nvPr/>
         </p:nvCxnSpPr>
         <p:spPr>
           <a:xfrm>
-            <a:off x="7717535" y="2052828"/>
-            <a:ext cx="2724913" cy="0"/>
+            <a:off x="8531351" y="3273552"/>
+            <a:ext cx="1197865" cy="0"/>
           </a:xfrm>
           <a:prstGeom prst="line">
             <a:avLst/>
@@ -6683,14 +6947,14 @@
       </p:cxnSp>
       <p:cxnSp>
         <p:nvCxnSpPr>
-          <p:cNvPr id="83" name="Connector 82"/>
+          <p:cNvPr id="89" name="Connector 88"/>
           <p:cNvCxnSpPr/>
           <p:nvPr/>
         </p:nvCxnSpPr>
         <p:spPr>
           <a:xfrm>
-            <a:off x="7379208" y="1995678"/>
-            <a:ext cx="3118104" cy="0"/>
+            <a:off x="7854696" y="3159252"/>
+            <a:ext cx="1984248" cy="0"/>
           </a:xfrm>
           <a:prstGeom prst="line">
             <a:avLst/>
@@ -6719,14 +6983,14 @@
       </p:cxnSp>
       <p:cxnSp>
         <p:nvCxnSpPr>
-          <p:cNvPr id="84" name="Connector 83"/>
+          <p:cNvPr id="90" name="Connector 89"/>
           <p:cNvCxnSpPr/>
           <p:nvPr/>
         </p:nvCxnSpPr>
         <p:spPr>
           <a:xfrm>
-            <a:off x="7488936" y="2267712"/>
-            <a:ext cx="3072384" cy="0"/>
+            <a:off x="8074152" y="3703320"/>
+            <a:ext cx="1892808" cy="0"/>
           </a:xfrm>
           <a:prstGeom prst="line">
             <a:avLst/>
@@ -6755,14 +7019,14 @@
       </p:cxnSp>
       <p:cxnSp>
         <p:nvCxnSpPr>
-          <p:cNvPr id="85" name="Connector 84"/>
+          <p:cNvPr id="91" name="Connector 90"/>
           <p:cNvCxnSpPr/>
           <p:nvPr/>
         </p:nvCxnSpPr>
         <p:spPr>
           <a:xfrm>
-            <a:off x="7488936" y="2377440"/>
-            <a:ext cx="3072384" cy="0"/>
+            <a:off x="8074152" y="3922776"/>
+            <a:ext cx="1892808" cy="0"/>
           </a:xfrm>
           <a:prstGeom prst="line">
             <a:avLst/>
@@ -6791,14 +7055,14 @@
       </p:cxnSp>
       <p:sp>
         <p:nvSpPr>
-          <p:cNvPr id="86" name="TextBox 85"/>
+          <p:cNvPr id="92" name="TextBox 91"/>
           <p:cNvSpPr txBox="1"/>
           <p:nvPr/>
         </p:nvSpPr>
         <p:spPr>
           <a:xfrm>
-            <a:off x="8933688" y="2286000"/>
-            <a:ext cx="182880" cy="182880"/>
+            <a:off x="8837676" y="3739896"/>
+            <a:ext cx="365760" cy="365760"/>
           </a:xfrm>
           <a:prstGeom prst="rect">
             <a:avLst/>
@@ -6835,13 +7099,13 @@
       </p:sp>
       <p:sp>
         <p:nvSpPr>
-          <p:cNvPr id="87" name="TextBox 86"/>
+          <p:cNvPr id="93" name="TextBox 92"/>
           <p:cNvSpPr txBox="1"/>
           <p:nvPr/>
         </p:nvSpPr>
         <p:spPr>
           <a:xfrm>
-            <a:off x="6793992" y="2633472"/>
+            <a:off x="6793992" y="4398264"/>
             <a:ext cx="4617720" cy="292608"/>
           </a:xfrm>
           <a:prstGeom prst="rect">
@@ -6879,58 +7143,14 @@
       </p:sp>
       <p:sp>
         <p:nvSpPr>
-          <p:cNvPr id="88" name="Rectangle 87"/>
-          <p:cNvSpPr/>
-          <p:nvPr/>
-        </p:nvSpPr>
-        <p:spPr>
-          <a:xfrm>
-            <a:off x="548640" y="3246120"/>
-            <a:ext cx="82296" cy="274320"/>
-          </a:xfrm>
-          <a:prstGeom prst="rect">
-            <a:avLst/>
-          </a:prstGeom>
-          <a:solidFill>
-            <a:srgbClr val="0067D1"/>
-          </a:solidFill>
-          <a:ln>
-            <a:noFill/>
-          </a:ln>
-          <a:effectLst/>
-        </p:spPr>
-        <p:style>
-          <a:lnRef idx="1">
-            <a:schemeClr val="accent1"/>
-          </a:lnRef>
-          <a:fillRef idx="3">
-            <a:schemeClr val="accent1"/>
-          </a:fillRef>
-          <a:effectRef idx="2">
-            <a:schemeClr val="accent1"/>
-          </a:effectRef>
-          <a:fontRef idx="minor">
-            <a:schemeClr val="lt1"/>
-          </a:fontRef>
-        </p:style>
-        <p:txBody>
-          <a:bodyPr rtlCol="0" anchor="ctr"/>
-          <a:lstStyle/>
-          <a:p>
-            <a:pPr algn="ctr"/>
-          </a:p>
-        </p:txBody>
-      </p:sp>
-      <p:sp>
-        <p:nvSpPr>
-          <p:cNvPr id="89" name="TextBox 88"/>
+          <p:cNvPr id="94" name="TextBox 93"/>
           <p:cNvSpPr txBox="1"/>
           <p:nvPr/>
         </p:nvSpPr>
         <p:spPr>
           <a:xfrm>
-            <a:off x="749808" y="3200400"/>
-            <a:ext cx="8229600" cy="384048"/>
+            <a:off x="6885432" y="4818888"/>
+            <a:ext cx="274320" cy="347472"/>
           </a:xfrm>
           <a:prstGeom prst="rect">
             <a:avLst/>
@@ -6952,77 +7172,29 @@
               </a:spcAft>
             </a:pPr>
             <a:r>
-              <a:rPr sz="1500" b="1">
+              <a:rPr sz="1300" b="1">
                 <a:solidFill>
-                  <a:srgbClr val="191919"/>
+                  <a:srgbClr val="52C41A"/>
                 </a:solidFill>
                 <a:latin typeface="Microsoft YaHei"/>
                 <a:ea typeface="Microsoft YaHei"/>
                 <a:cs typeface="Microsoft YaHei"/>
               </a:rPr>
-              <a:t>前后案例对比</a:t>
-            </a:r>
-          </a:p>
-        </p:txBody>
-      </p:sp>
-      <p:sp>
-        <p:nvSpPr>
-          <p:cNvPr id="90" name="Rounded Rectangle 89"/>
-          <p:cNvSpPr/>
-          <p:nvPr/>
-        </p:nvSpPr>
-        <p:spPr>
-          <a:xfrm>
-            <a:off x="548640" y="3584448"/>
-            <a:ext cx="5074920" cy="2697480"/>
-          </a:xfrm>
-          <a:prstGeom prst="roundRect">
-            <a:avLst>
-              <a:gd name="adj" fmla="val 6000"/>
-            </a:avLst>
-          </a:prstGeom>
-          <a:solidFill>
-            <a:srgbClr val="FFF1F0"/>
-          </a:solidFill>
-          <a:ln w="12700">
-            <a:solidFill>
-              <a:srgbClr val="FF4D4F"/>
-            </a:solidFill>
-          </a:ln>
-          <a:effectLst/>
-        </p:spPr>
-        <p:style>
-          <a:lnRef idx="1">
-            <a:schemeClr val="accent1"/>
-          </a:lnRef>
-          <a:fillRef idx="3">
-            <a:schemeClr val="accent1"/>
-          </a:fillRef>
-          <a:effectRef idx="2">
-            <a:schemeClr val="accent1"/>
-          </a:effectRef>
-          <a:fontRef idx="minor">
-            <a:schemeClr val="lt1"/>
-          </a:fontRef>
-        </p:style>
-        <p:txBody>
-          <a:bodyPr rtlCol="0" anchor="ctr"/>
-          <a:lstStyle/>
-          <a:p>
-            <a:pPr algn="ctr"/>
-          </a:p>
-        </p:txBody>
-      </p:sp>
-      <p:sp>
-        <p:nvSpPr>
-          <p:cNvPr id="91" name="TextBox 90"/>
+              <a:t>✓</a:t>
+            </a:r>
+          </a:p>
+        </p:txBody>
+      </p:sp>
+      <p:sp>
+        <p:nvSpPr>
+          <p:cNvPr id="95" name="TextBox 94"/>
           <p:cNvSpPr txBox="1"/>
           <p:nvPr/>
         </p:nvSpPr>
         <p:spPr>
           <a:xfrm>
-            <a:off x="804672" y="3685032"/>
-            <a:ext cx="4572000" cy="310896"/>
+            <a:off x="7178040" y="4837176"/>
+            <a:ext cx="4206240" cy="347472"/>
           </a:xfrm>
           <a:prstGeom prst="rect">
             <a:avLst/>
@@ -7044,182 +7216,29 @@
               </a:spcAft>
             </a:pPr>
             <a:r>
-              <a:rPr sz="1300" b="1">
+              <a:rPr sz="1250" b="0">
                 <a:solidFill>
-                  <a:srgbClr val="FF4D4F"/>
+                  <a:srgbClr val="191919"/>
                 </a:solidFill>
                 <a:latin typeface="Microsoft YaHei"/>
                 <a:ea typeface="Microsoft YaHei"/>
                 <a:cs typeface="Microsoft YaHei"/>
               </a:rPr>
-              <a:t>提升前案例（分块匹配）</a:t>
-            </a:r>
-          </a:p>
-        </p:txBody>
-      </p:sp>
-      <p:sp>
-        <p:nvSpPr>
-          <p:cNvPr id="92" name="Rectangle 91"/>
-          <p:cNvSpPr/>
-          <p:nvPr/>
-        </p:nvSpPr>
-        <p:spPr>
-          <a:xfrm>
-            <a:off x="777240" y="4087368"/>
-            <a:ext cx="4617720" cy="2057400"/>
-          </a:xfrm>
-          <a:prstGeom prst="rect">
-            <a:avLst/>
-          </a:prstGeom>
-          <a:solidFill>
-            <a:srgbClr val="F5F5F5"/>
-          </a:solidFill>
-          <a:ln w="12700">
-            <a:solidFill>
-              <a:srgbClr val="D1D5DC"/>
-            </a:solidFill>
-            <a:prstDash val="dash"/>
-          </a:ln>
-          <a:effectLst/>
-        </p:spPr>
-        <p:style>
-          <a:lnRef idx="1">
-            <a:schemeClr val="accent1"/>
-          </a:lnRef>
-          <a:fillRef idx="3">
-            <a:schemeClr val="accent1"/>
-          </a:fillRef>
-          <a:effectRef idx="2">
-            <a:schemeClr val="accent1"/>
-          </a:effectRef>
-          <a:fontRef idx="minor">
-            <a:schemeClr val="lt1"/>
-          </a:fontRef>
-        </p:style>
-        <p:txBody>
-          <a:bodyPr rtlCol="0" anchor="ctr" wrap="square"/>
-          <a:lstStyle/>
-          <a:p>
-            <a:pPr algn="ctr"/>
-            <a:r>
-              <a:rPr sz="1100" b="0">
-                <a:solidFill>
-                  <a:srgbClr val="777777"/>
-                </a:solidFill>
-                <a:latin typeface="Microsoft YaHei"/>
-                <a:ea typeface="Microsoft YaHei"/>
-                <a:cs typeface="Microsoft YaHei"/>
-              </a:rPr>
-              <a:t>提升前案例截图占位</a:t>
-            </a:r>
-          </a:p>
-        </p:txBody>
-      </p:sp>
-      <p:sp>
-        <p:nvSpPr>
-          <p:cNvPr id="93" name="Right Arrow 92"/>
-          <p:cNvSpPr/>
-          <p:nvPr/>
-        </p:nvSpPr>
-        <p:spPr>
-          <a:xfrm>
-            <a:off x="5815584" y="4754880"/>
-            <a:ext cx="566928" cy="365760"/>
-          </a:xfrm>
-          <a:prstGeom prst="rightArrow">
-            <a:avLst>
-              <a:gd name="adj1" fmla="val 55000"/>
-              <a:gd name="adj2" fmla="val 55000"/>
-            </a:avLst>
-          </a:prstGeom>
-          <a:solidFill>
-            <a:srgbClr val="0067D1"/>
-          </a:solidFill>
-          <a:ln>
-            <a:noFill/>
-          </a:ln>
-          <a:effectLst/>
-        </p:spPr>
-        <p:style>
-          <a:lnRef idx="1">
-            <a:schemeClr val="accent1"/>
-          </a:lnRef>
-          <a:fillRef idx="3">
-            <a:schemeClr val="accent1"/>
-          </a:fillRef>
-          <a:effectRef idx="2">
-            <a:schemeClr val="accent1"/>
-          </a:effectRef>
-          <a:fontRef idx="minor">
-            <a:schemeClr val="lt1"/>
-          </a:fontRef>
-        </p:style>
-        <p:txBody>
-          <a:bodyPr rtlCol="0" anchor="ctr"/>
-          <a:lstStyle/>
-          <a:p>
-            <a:pPr algn="ctr"/>
-          </a:p>
-        </p:txBody>
-      </p:sp>
-      <p:sp>
-        <p:nvSpPr>
-          <p:cNvPr id="94" name="Rounded Rectangle 93"/>
-          <p:cNvSpPr/>
-          <p:nvPr/>
-        </p:nvSpPr>
-        <p:spPr>
-          <a:xfrm>
-            <a:off x="6565392" y="3584448"/>
-            <a:ext cx="5074920" cy="2697480"/>
-          </a:xfrm>
-          <a:prstGeom prst="roundRect">
-            <a:avLst>
-              <a:gd name="adj" fmla="val 6000"/>
-            </a:avLst>
-          </a:prstGeom>
-          <a:solidFill>
-            <a:srgbClr val="F6FFF6"/>
-          </a:solidFill>
-          <a:ln w="12700">
-            <a:solidFill>
-              <a:srgbClr val="52C41A"/>
-            </a:solidFill>
-          </a:ln>
-          <a:effectLst/>
-        </p:spPr>
-        <p:style>
-          <a:lnRef idx="1">
-            <a:schemeClr val="accent1"/>
-          </a:lnRef>
-          <a:fillRef idx="3">
-            <a:schemeClr val="accent1"/>
-          </a:fillRef>
-          <a:effectRef idx="2">
-            <a:schemeClr val="accent1"/>
-          </a:effectRef>
-          <a:fontRef idx="minor">
-            <a:schemeClr val="lt1"/>
-          </a:fontRef>
-        </p:style>
-        <p:txBody>
-          <a:bodyPr rtlCol="0" anchor="ctr"/>
-          <a:lstStyle/>
-          <a:p>
-            <a:pPr algn="ctr"/>
-          </a:p>
-        </p:txBody>
-      </p:sp>
-      <p:sp>
-        <p:nvSpPr>
-          <p:cNvPr id="95" name="TextBox 94"/>
+              <a:t>高置信文本锚点优先锁定（Pass 1）</a:t>
+            </a:r>
+          </a:p>
+        </p:txBody>
+      </p:sp>
+      <p:sp>
+        <p:nvSpPr>
+          <p:cNvPr id="96" name="TextBox 95"/>
           <p:cNvSpPr txBox="1"/>
           <p:nvPr/>
         </p:nvSpPr>
         <p:spPr>
           <a:xfrm>
-            <a:off x="6821424" y="3685032"/>
-            <a:ext cx="4572000" cy="310896"/>
+            <a:off x="6885432" y="5294376"/>
+            <a:ext cx="274320" cy="347472"/>
           </a:xfrm>
           <a:prstGeom prst="rect">
             <a:avLst/>
@@ -7249,65 +7268,139 @@
                 <a:ea typeface="Microsoft YaHei"/>
                 <a:cs typeface="Microsoft YaHei"/>
               </a:rPr>
-              <a:t>提升后案例（当前算法）</a:t>
-            </a:r>
-          </a:p>
-        </p:txBody>
-      </p:sp>
-      <p:sp>
-        <p:nvSpPr>
-          <p:cNvPr id="96" name="Rectangle 95"/>
-          <p:cNvSpPr/>
-          <p:nvPr/>
-        </p:nvSpPr>
-        <p:spPr>
-          <a:xfrm>
-            <a:off x="6793992" y="4087368"/>
-            <a:ext cx="4617720" cy="2057400"/>
+              <a:t>✓</a:t>
+            </a:r>
+          </a:p>
+        </p:txBody>
+      </p:sp>
+      <p:sp>
+        <p:nvSpPr>
+          <p:cNvPr id="97" name="TextBox 96"/>
+          <p:cNvSpPr txBox="1"/>
+          <p:nvPr/>
+        </p:nvSpPr>
+        <p:spPr>
+          <a:xfrm>
+            <a:off x="7178040" y="5312664"/>
+            <a:ext cx="4206240" cy="347472"/>
           </a:xfrm>
           <a:prstGeom prst="rect">
             <a:avLst/>
           </a:prstGeom>
-          <a:solidFill>
-            <a:srgbClr val="F5F5F5"/>
-          </a:solidFill>
-          <a:ln w="12700">
-            <a:solidFill>
-              <a:srgbClr val="D1D5DC"/>
-            </a:solidFill>
-            <a:prstDash val="dash"/>
-          </a:ln>
-          <a:effectLst/>
-        </p:spPr>
-        <p:style>
-          <a:lnRef idx="1">
-            <a:schemeClr val="accent1"/>
-          </a:lnRef>
-          <a:fillRef idx="3">
-            <a:schemeClr val="accent1"/>
-          </a:fillRef>
-          <a:effectRef idx="2">
-            <a:schemeClr val="accent1"/>
-          </a:effectRef>
-          <a:fontRef idx="minor">
-            <a:schemeClr val="lt1"/>
-          </a:fontRef>
-        </p:style>
-        <p:txBody>
-          <a:bodyPr rtlCol="0" anchor="ctr" wrap="square"/>
-          <a:lstStyle/>
-          <a:p>
-            <a:pPr algn="ctr"/>
-            <a:r>
-              <a:rPr sz="1100" b="0">
+          <a:noFill/>
+        </p:spPr>
+        <p:txBody>
+          <a:bodyPr wrap="square" anchor="t" lIns="25400" rIns="25400" tIns="12700" bIns="12700">
+            <a:spAutoFit/>
+          </a:bodyPr>
+          <a:lstStyle/>
+          <a:p>
+            <a:pPr algn="l">
+              <a:lnSpc>
+                <a:spcPct val="100000"/>
+              </a:lnSpc>
+              <a:spcAft>
+                <a:spcPts val="400"/>
+              </a:spcAft>
+            </a:pPr>
+            <a:r>
+              <a:rPr sz="1250" b="0">
                 <a:solidFill>
-                  <a:srgbClr val="777777"/>
+                  <a:srgbClr val="191919"/>
                 </a:solidFill>
                 <a:latin typeface="Microsoft YaHei"/>
                 <a:ea typeface="Microsoft YaHei"/>
                 <a:cs typeface="Microsoft YaHei"/>
               </a:rPr>
-              <a:t>提升后案例截图占位</a:t>
+              <a:t>周边节点按相对位置挂靠（Pass 3）</a:t>
+            </a:r>
+          </a:p>
+        </p:txBody>
+      </p:sp>
+      <p:sp>
+        <p:nvSpPr>
+          <p:cNvPr id="98" name="TextBox 97"/>
+          <p:cNvSpPr txBox="1"/>
+          <p:nvPr/>
+        </p:nvSpPr>
+        <p:spPr>
+          <a:xfrm>
+            <a:off x="6885432" y="5769864"/>
+            <a:ext cx="274320" cy="347472"/>
+          </a:xfrm>
+          <a:prstGeom prst="rect">
+            <a:avLst/>
+          </a:prstGeom>
+          <a:noFill/>
+        </p:spPr>
+        <p:txBody>
+          <a:bodyPr wrap="square" anchor="t" lIns="25400" rIns="25400" tIns="12700" bIns="12700">
+            <a:spAutoFit/>
+          </a:bodyPr>
+          <a:lstStyle/>
+          <a:p>
+            <a:pPr algn="l">
+              <a:lnSpc>
+                <a:spcPct val="100000"/>
+              </a:lnSpc>
+              <a:spcAft>
+                <a:spcPts val="400"/>
+              </a:spcAft>
+            </a:pPr>
+            <a:r>
+              <a:rPr sz="1300" b="1">
+                <a:solidFill>
+                  <a:srgbClr val="52C41A"/>
+                </a:solidFill>
+                <a:latin typeface="Microsoft YaHei"/>
+                <a:ea typeface="Microsoft YaHei"/>
+                <a:cs typeface="Microsoft YaHei"/>
+              </a:rPr>
+              <a:t>✓</a:t>
+            </a:r>
+          </a:p>
+        </p:txBody>
+      </p:sp>
+      <p:sp>
+        <p:nvSpPr>
+          <p:cNvPr id="99" name="TextBox 98"/>
+          <p:cNvSpPr txBox="1"/>
+          <p:nvPr/>
+        </p:nvSpPr>
+        <p:spPr>
+          <a:xfrm>
+            <a:off x="7178040" y="5788152"/>
+            <a:ext cx="4206240" cy="347472"/>
+          </a:xfrm>
+          <a:prstGeom prst="rect">
+            <a:avLst/>
+          </a:prstGeom>
+          <a:noFill/>
+        </p:spPr>
+        <p:txBody>
+          <a:bodyPr wrap="square" anchor="t" lIns="25400" rIns="25400" tIns="12700" bIns="12700">
+            <a:spAutoFit/>
+          </a:bodyPr>
+          <a:lstStyle/>
+          <a:p>
+            <a:pPr algn="l">
+              <a:lnSpc>
+                <a:spcPct val="100000"/>
+              </a:lnSpc>
+              <a:spcAft>
+                <a:spcPts val="400"/>
+              </a:spcAft>
+            </a:pPr>
+            <a:r>
+              <a:rPr sz="1250" b="0">
+                <a:solidFill>
+                  <a:srgbClr val="191919"/>
+                </a:solidFill>
+                <a:latin typeface="Microsoft YaHei"/>
+                <a:ea typeface="Microsoft YaHei"/>
+                <a:cs typeface="Microsoft YaHei"/>
+              </a:rPr>
+              <a:t>单点失败不扩散，区域兜底保底（Pass 4）</a:t>
             </a:r>
           </a:p>
         </p:txBody>
